--- a/modules/module-01-industrial-demand-generation/delivery-pack/slide-decks/exports/lesson-03-icp-segments-and-demand-focus.pptx
+++ b/modules/module-01-industrial-demand-generation/delivery-pack/slide-decks/exports/lesson-03-icp-segments-and-demand-focus.pptx
@@ -2,27 +2,27 @@
 <file path=ppt/presentation.xml><?xml version="1.0" encoding="utf-8"?>
 <p:presentation xmlns:p="http://schemas.openxmlformats.org/presentationml/2006/main">
   <p:sldMasterIdLst>
-    <p:sldMasterId xmlns:r="http://schemas.openxmlformats.org/officeDocument/2006/relationships" id="2147483648" r:id="R02a1524744f9454a"/>
+    <p:sldMasterId xmlns:r="http://schemas.openxmlformats.org/officeDocument/2006/relationships" id="2147483648" r:id="Rcb5cf7def62c4a1c"/>
   </p:sldMasterIdLst>
   <p:notesMasterIdLst>
-    <p:notesMasterId xmlns:r="http://schemas.openxmlformats.org/officeDocument/2006/relationships" r:id="R860f6c82424f45e0"/>
+    <p:notesMasterId xmlns:r="http://schemas.openxmlformats.org/officeDocument/2006/relationships" r:id="Ra13e2176f61641c0"/>
   </p:notesMasterIdLst>
   <p:sldIdLst>
-    <p:sldId xmlns:r="http://schemas.openxmlformats.org/officeDocument/2006/relationships" id="256" r:id="R9af0f3c4c6dd49b9"/>
-    <p:sldId xmlns:r="http://schemas.openxmlformats.org/officeDocument/2006/relationships" id="257" r:id="R4fa275a363c844e9"/>
-    <p:sldId xmlns:r="http://schemas.openxmlformats.org/officeDocument/2006/relationships" id="258" r:id="Re3a6d337947d4d7d"/>
-    <p:sldId xmlns:r="http://schemas.openxmlformats.org/officeDocument/2006/relationships" id="259" r:id="R089b77e17971408f"/>
-    <p:sldId xmlns:r="http://schemas.openxmlformats.org/officeDocument/2006/relationships" id="260" r:id="R532364e716c94127"/>
-    <p:sldId xmlns:r="http://schemas.openxmlformats.org/officeDocument/2006/relationships" id="261" r:id="Ree75b6c049714930"/>
-    <p:sldId xmlns:r="http://schemas.openxmlformats.org/officeDocument/2006/relationships" id="262" r:id="Rd90c7273f4d049d9"/>
-    <p:sldId xmlns:r="http://schemas.openxmlformats.org/officeDocument/2006/relationships" id="263" r:id="Ra193a93eeac34d74"/>
-    <p:sldId xmlns:r="http://schemas.openxmlformats.org/officeDocument/2006/relationships" id="264" r:id="R9609d870db4c4fdd"/>
-    <p:sldId xmlns:r="http://schemas.openxmlformats.org/officeDocument/2006/relationships" id="265" r:id="R80a8f551250a44b8"/>
-    <p:sldId xmlns:r="http://schemas.openxmlformats.org/officeDocument/2006/relationships" id="266" r:id="R3632e661945d4f4b"/>
-    <p:sldId xmlns:r="http://schemas.openxmlformats.org/officeDocument/2006/relationships" id="267" r:id="R3056e51b1e534625"/>
-    <p:sldId xmlns:r="http://schemas.openxmlformats.org/officeDocument/2006/relationships" id="268" r:id="R413ed27c428e46f0"/>
-    <p:sldId xmlns:r="http://schemas.openxmlformats.org/officeDocument/2006/relationships" id="269" r:id="Rf42f72972e7a47aa"/>
-    <p:sldId xmlns:r="http://schemas.openxmlformats.org/officeDocument/2006/relationships" id="270" r:id="R3383f5ee1e844e94"/>
+    <p:sldId xmlns:r="http://schemas.openxmlformats.org/officeDocument/2006/relationships" id="256" r:id="R896ea97ed06c4e2e"/>
+    <p:sldId xmlns:r="http://schemas.openxmlformats.org/officeDocument/2006/relationships" id="257" r:id="Re26ea215d3ce49a9"/>
+    <p:sldId xmlns:r="http://schemas.openxmlformats.org/officeDocument/2006/relationships" id="258" r:id="Rb2a6f834b4db4fbd"/>
+    <p:sldId xmlns:r="http://schemas.openxmlformats.org/officeDocument/2006/relationships" id="259" r:id="R0bbb37c65fd74915"/>
+    <p:sldId xmlns:r="http://schemas.openxmlformats.org/officeDocument/2006/relationships" id="260" r:id="R8395493d3c8346f0"/>
+    <p:sldId xmlns:r="http://schemas.openxmlformats.org/officeDocument/2006/relationships" id="261" r:id="Rc24ef06dfe824e8d"/>
+    <p:sldId xmlns:r="http://schemas.openxmlformats.org/officeDocument/2006/relationships" id="262" r:id="Rde56aa781ef342e8"/>
+    <p:sldId xmlns:r="http://schemas.openxmlformats.org/officeDocument/2006/relationships" id="263" r:id="R60874944978d4d71"/>
+    <p:sldId xmlns:r="http://schemas.openxmlformats.org/officeDocument/2006/relationships" id="264" r:id="R0c59d88fde4c450d"/>
+    <p:sldId xmlns:r="http://schemas.openxmlformats.org/officeDocument/2006/relationships" id="265" r:id="Rb57c4a2c280e419f"/>
+    <p:sldId xmlns:r="http://schemas.openxmlformats.org/officeDocument/2006/relationships" id="266" r:id="Rdcd3d3239d934f61"/>
+    <p:sldId xmlns:r="http://schemas.openxmlformats.org/officeDocument/2006/relationships" id="267" r:id="R369332adc97643a9"/>
+    <p:sldId xmlns:r="http://schemas.openxmlformats.org/officeDocument/2006/relationships" id="268" r:id="R90dd069c883d4f77"/>
+    <p:sldId xmlns:r="http://schemas.openxmlformats.org/officeDocument/2006/relationships" id="269" r:id="Rc19994161d0746a8"/>
+    <p:sldId xmlns:r="http://schemas.openxmlformats.org/officeDocument/2006/relationships" id="270" r:id="R44969393d8a04558"/>
   </p:sldIdLst>
   <p:sldSz cx="12192000" cy="6858000"/>
   <p:notesSz cx="6858000" cy="9144000"/>
@@ -1493,7 +1493,7 @@
   </p:cSld>
   <p:clrMap bg1="lt1" tx1="dk1" bg2="lt2" tx2="dk2" accent1="accent1" accent2="accent2" accent3="accent3" accent4="accent4" accent5="accent5" accent6="accent6" hlink="hlink" folHlink="folHlink"/>
   <p:sldLayoutIdLst>
-    <p:sldLayoutId xmlns:r="http://schemas.openxmlformats.org/officeDocument/2006/relationships" id="2147483649" r:id="R4f515447852043af"/>
+    <p:sldLayoutId xmlns:r="http://schemas.openxmlformats.org/officeDocument/2006/relationships" id="2147483649" r:id="R2a1047e8ee7f4c7b"/>
   </p:sldLayoutIdLst>
   <p:txStyles>
     <p:titleStyle>
@@ -1792,7 +1792,7 @@
           <p:cNvPr id="1" name="">
             <a:extLst xmlns:a="http://schemas.openxmlformats.org/drawingml/2006/main">
               <a:ext uri="{FF2B5EF4-FFF2-40B4-BE49-F238E27FC236}">
-                <a16:creationId xmlns:a16="http://schemas.microsoft.com/office/drawing/2014/main" id="{57F89456-7C94-448F-85D3-0E438C0B9FDF}"/>
+                <a16:creationId xmlns:a16="http://schemas.microsoft.com/office/drawing/2014/main" id="{DE597D50-16CE-43F8-B277-A69D7D543C28}"/>
               </a:ext>
             </a:extLst>
           </p:cNvPr>
@@ -1827,7 +1827,7 @@
           <p:cNvPr id="2" name="">
             <a:extLst xmlns:a="http://schemas.openxmlformats.org/drawingml/2006/main">
               <a:ext uri="{FF2B5EF4-FFF2-40B4-BE49-F238E27FC236}">
-                <a16:creationId xmlns:a16="http://schemas.microsoft.com/office/drawing/2014/main" id="{812671A2-0887-4964-B96C-425CA2C28B73}"/>
+                <a16:creationId xmlns:a16="http://schemas.microsoft.com/office/drawing/2014/main" id="{8F96AC91-1060-42D8-89C8-41ECACB416B5}"/>
               </a:ext>
             </a:extLst>
           </p:cNvPr>
@@ -1862,7 +1862,7 @@
           <p:cNvPr id="3" name="">
             <a:extLst xmlns:a="http://schemas.openxmlformats.org/drawingml/2006/main">
               <a:ext uri="{FF2B5EF4-FFF2-40B4-BE49-F238E27FC236}">
-                <a16:creationId xmlns:a16="http://schemas.microsoft.com/office/drawing/2014/main" id="{BA23F932-7C0E-4A5A-B764-79F0052B790D}"/>
+                <a16:creationId xmlns:a16="http://schemas.microsoft.com/office/drawing/2014/main" id="{44239023-6E40-44C0-B813-3B3050EEDB94}"/>
               </a:ext>
             </a:extLst>
           </p:cNvPr>
@@ -1897,7 +1897,7 @@
           <p:cNvPr id="4" name="kicker-03-marker">
             <a:extLst xmlns:a="http://schemas.openxmlformats.org/drawingml/2006/main">
               <a:ext uri="{FF2B5EF4-FFF2-40B4-BE49-F238E27FC236}">
-                <a16:creationId xmlns:a16="http://schemas.microsoft.com/office/drawing/2014/main" id="{A6894592-3A59-49D0-A1CA-179165887030}"/>
+                <a16:creationId xmlns:a16="http://schemas.microsoft.com/office/drawing/2014/main" id="{372CB2E0-6147-48DD-BA83-93E1F7885EDE}"/>
               </a:ext>
             </a:extLst>
           </p:cNvPr>
@@ -1932,7 +1932,7 @@
           <p:cNvPr id="5" name="kicker-03-label">
             <a:extLst xmlns:a="http://schemas.openxmlformats.org/drawingml/2006/main">
               <a:ext uri="{FF2B5EF4-FFF2-40B4-BE49-F238E27FC236}">
-                <a16:creationId xmlns:a16="http://schemas.microsoft.com/office/drawing/2014/main" id="{51B0547F-BCA4-49F1-A97D-5C4D3CE86A24}"/>
+                <a16:creationId xmlns:a16="http://schemas.microsoft.com/office/drawing/2014/main" id="{D8EC1486-1B57-4643-9939-DAE5DD97266A}"/>
               </a:ext>
             </a:extLst>
           </p:cNvPr>
@@ -1996,7 +1996,7 @@
           <p:cNvPr id="6" name="">
             <a:extLst xmlns:a="http://schemas.openxmlformats.org/drawingml/2006/main">
               <a:ext uri="{FF2B5EF4-FFF2-40B4-BE49-F238E27FC236}">
-                <a16:creationId xmlns:a16="http://schemas.microsoft.com/office/drawing/2014/main" id="{849BE411-2E9E-4C7B-8E3A-B74B3BC4BA57}"/>
+                <a16:creationId xmlns:a16="http://schemas.microsoft.com/office/drawing/2014/main" id="{053A5C5A-73C6-450C-A869-D53DCCD99AA9}"/>
               </a:ext>
             </a:extLst>
           </p:cNvPr>
@@ -2060,7 +2060,7 @@
           <p:cNvPr id="7" name="">
             <a:extLst xmlns:a="http://schemas.openxmlformats.org/drawingml/2006/main">
               <a:ext uri="{FF2B5EF4-FFF2-40B4-BE49-F238E27FC236}">
-                <a16:creationId xmlns:a16="http://schemas.microsoft.com/office/drawing/2014/main" id="{EC7DA9D9-6638-44D0-8D1D-85CF546F1226}"/>
+                <a16:creationId xmlns:a16="http://schemas.microsoft.com/office/drawing/2014/main" id="{1B59234C-3C02-4CBB-BB8B-6F379DC9BCE2}"/>
               </a:ext>
             </a:extLst>
           </p:cNvPr>
@@ -2124,7 +2124,7 @@
           <p:cNvPr id="8" name="">
             <a:extLst xmlns:a="http://schemas.openxmlformats.org/drawingml/2006/main">
               <a:ext uri="{FF2B5EF4-FFF2-40B4-BE49-F238E27FC236}">
-                <a16:creationId xmlns:a16="http://schemas.microsoft.com/office/drawing/2014/main" id="{2DA28CA8-3DF1-4813-9CBC-977D63B7B0E7}"/>
+                <a16:creationId xmlns:a16="http://schemas.microsoft.com/office/drawing/2014/main" id="{50F28BDD-DE6D-4E6F-AECA-2A35B464EFC4}"/>
               </a:ext>
             </a:extLst>
           </p:cNvPr>
@@ -2157,7 +2157,7 @@
           <p:cNvPr id="9" name="">
             <a:extLst xmlns:a="http://schemas.openxmlformats.org/drawingml/2006/main">
               <a:ext uri="{FF2B5EF4-FFF2-40B4-BE49-F238E27FC236}">
-                <a16:creationId xmlns:a16="http://schemas.microsoft.com/office/drawing/2014/main" id="{172A991B-8B74-4544-8B31-B6EC2B06E30C}"/>
+                <a16:creationId xmlns:a16="http://schemas.microsoft.com/office/drawing/2014/main" id="{3AFCA2E1-2998-4AD3-8DDE-2362C43150B1}"/>
               </a:ext>
             </a:extLst>
           </p:cNvPr>
@@ -2221,7 +2221,7 @@
           <p:cNvPr id="10" name="">
             <a:extLst xmlns:a="http://schemas.openxmlformats.org/drawingml/2006/main">
               <a:ext uri="{FF2B5EF4-FFF2-40B4-BE49-F238E27FC236}">
-                <a16:creationId xmlns:a16="http://schemas.microsoft.com/office/drawing/2014/main" id="{40ED3823-BBD0-4B96-BE6B-2E0CD9195BB0}"/>
+                <a16:creationId xmlns:a16="http://schemas.microsoft.com/office/drawing/2014/main" id="{A6544EC8-507F-43A9-8C1C-42DD63CF5E01}"/>
               </a:ext>
             </a:extLst>
           </p:cNvPr>
@@ -2254,7 +2254,7 @@
           <p:cNvPr id="11" name="">
             <a:extLst xmlns:a="http://schemas.openxmlformats.org/drawingml/2006/main">
               <a:ext uri="{FF2B5EF4-FFF2-40B4-BE49-F238E27FC236}">
-                <a16:creationId xmlns:a16="http://schemas.microsoft.com/office/drawing/2014/main" id="{87326CF4-8482-4E6B-B81E-01267BBCAF9F}"/>
+                <a16:creationId xmlns:a16="http://schemas.microsoft.com/office/drawing/2014/main" id="{60033E1A-0D21-4A79-80AD-4548440D46F7}"/>
               </a:ext>
             </a:extLst>
           </p:cNvPr>
@@ -2318,7 +2318,7 @@
           <p:cNvPr id="12" name="">
             <a:extLst xmlns:a="http://schemas.openxmlformats.org/drawingml/2006/main">
               <a:ext uri="{FF2B5EF4-FFF2-40B4-BE49-F238E27FC236}">
-                <a16:creationId xmlns:a16="http://schemas.microsoft.com/office/drawing/2014/main" id="{1D8BF22E-AE15-47BF-BC1F-404800AF93A6}"/>
+                <a16:creationId xmlns:a16="http://schemas.microsoft.com/office/drawing/2014/main" id="{524D999C-AF08-4AE7-93D5-33C2FD0FA5D6}"/>
               </a:ext>
             </a:extLst>
           </p:cNvPr>
@@ -2351,7 +2351,7 @@
           <p:cNvPr id="13" name="">
             <a:extLst xmlns:a="http://schemas.openxmlformats.org/drawingml/2006/main">
               <a:ext uri="{FF2B5EF4-FFF2-40B4-BE49-F238E27FC236}">
-                <a16:creationId xmlns:a16="http://schemas.microsoft.com/office/drawing/2014/main" id="{CA4DD330-74F7-4A76-A040-D0DBE3CC5587}"/>
+                <a16:creationId xmlns:a16="http://schemas.microsoft.com/office/drawing/2014/main" id="{30D1A649-47F3-4F8B-A049-2203EB6522E8}"/>
               </a:ext>
             </a:extLst>
           </p:cNvPr>
@@ -2415,7 +2415,7 @@
           <p:cNvPr id="14" name="">
             <a:extLst xmlns:a="http://schemas.openxmlformats.org/drawingml/2006/main">
               <a:ext uri="{FF2B5EF4-FFF2-40B4-BE49-F238E27FC236}">
-                <a16:creationId xmlns:a16="http://schemas.microsoft.com/office/drawing/2014/main" id="{3BC6A130-4F76-401C-B275-696DC32B9898}"/>
+                <a16:creationId xmlns:a16="http://schemas.microsoft.com/office/drawing/2014/main" id="{505D7D68-D405-4A37-A9D5-40E8C1337C65}"/>
               </a:ext>
             </a:extLst>
           </p:cNvPr>
@@ -2448,7 +2448,7 @@
           <p:cNvPr id="15" name="">
             <a:extLst xmlns:a="http://schemas.openxmlformats.org/drawingml/2006/main">
               <a:ext uri="{FF2B5EF4-FFF2-40B4-BE49-F238E27FC236}">
-                <a16:creationId xmlns:a16="http://schemas.microsoft.com/office/drawing/2014/main" id="{0AE32D80-4961-42FB-8AAE-BADE56CE506E}"/>
+                <a16:creationId xmlns:a16="http://schemas.microsoft.com/office/drawing/2014/main" id="{23670FF5-2B4D-4D2C-AA04-94D55D0E672C}"/>
               </a:ext>
             </a:extLst>
           </p:cNvPr>
@@ -2483,7 +2483,7 @@
           <p:cNvPr id="16" name="">
             <a:extLst xmlns:a="http://schemas.openxmlformats.org/drawingml/2006/main">
               <a:ext uri="{FF2B5EF4-FFF2-40B4-BE49-F238E27FC236}">
-                <a16:creationId xmlns:a16="http://schemas.microsoft.com/office/drawing/2014/main" id="{42E5FD18-469F-407E-A540-064CE8CAD681}"/>
+                <a16:creationId xmlns:a16="http://schemas.microsoft.com/office/drawing/2014/main" id="{FA6424FD-0794-4E10-BFE8-D0033003215F}"/>
               </a:ext>
             </a:extLst>
           </p:cNvPr>
@@ -2547,7 +2547,7 @@
           <p:cNvPr id="17" name="">
             <a:extLst xmlns:a="http://schemas.openxmlformats.org/drawingml/2006/main">
               <a:ext uri="{FF2B5EF4-FFF2-40B4-BE49-F238E27FC236}">
-                <a16:creationId xmlns:a16="http://schemas.microsoft.com/office/drawing/2014/main" id="{856CEC67-261C-4E33-8CC9-4B7F038D6ECF}"/>
+                <a16:creationId xmlns:a16="http://schemas.microsoft.com/office/drawing/2014/main" id="{4E09CB96-A982-44F8-AD04-85A8EF632277}"/>
               </a:ext>
             </a:extLst>
           </p:cNvPr>
@@ -2611,7 +2611,7 @@
           <p:cNvPr id="18" name="">
             <a:extLst xmlns:a="http://schemas.openxmlformats.org/drawingml/2006/main">
               <a:ext uri="{FF2B5EF4-FFF2-40B4-BE49-F238E27FC236}">
-                <a16:creationId xmlns:a16="http://schemas.microsoft.com/office/drawing/2014/main" id="{541689B8-87C0-41D0-B4FD-1C9907326D71}"/>
+                <a16:creationId xmlns:a16="http://schemas.microsoft.com/office/drawing/2014/main" id="{5F003658-C0FE-4AA3-83A9-0E536795D877}"/>
               </a:ext>
             </a:extLst>
           </p:cNvPr>
@@ -2646,7 +2646,7 @@
           <p:cNvPr id="19" name="">
             <a:extLst xmlns:a="http://schemas.openxmlformats.org/drawingml/2006/main">
               <a:ext uri="{FF2B5EF4-FFF2-40B4-BE49-F238E27FC236}">
-                <a16:creationId xmlns:a16="http://schemas.microsoft.com/office/drawing/2014/main" id="{51BFEF47-9C4E-45B1-8265-00D3432B6BB8}"/>
+                <a16:creationId xmlns:a16="http://schemas.microsoft.com/office/drawing/2014/main" id="{58F3BC2E-B1BB-4793-8108-69568C2C06A1}"/>
               </a:ext>
             </a:extLst>
           </p:cNvPr>
@@ -2710,7 +2710,7 @@
           <p:cNvPr id="20" name="">
             <a:extLst xmlns:a="http://schemas.openxmlformats.org/drawingml/2006/main">
               <a:ext uri="{FF2B5EF4-FFF2-40B4-BE49-F238E27FC236}">
-                <a16:creationId xmlns:a16="http://schemas.microsoft.com/office/drawing/2014/main" id="{4288DB7C-41C2-46FD-8A0A-530B5D8CF1AC}"/>
+                <a16:creationId xmlns:a16="http://schemas.microsoft.com/office/drawing/2014/main" id="{2A367F47-60C9-4B22-B5F9-4D422B7DFF88}"/>
               </a:ext>
             </a:extLst>
           </p:cNvPr>
@@ -2764,7 +2764,7 @@
                 <a:ea typeface="Aptos"/>
                 <a:cs typeface="Aptos"/>
               </a:rPr>
-              <a:t>Teach the operating decision, run the diagnostic, then force a usable artifact. The slide is a prompt, not the handout.</a:t>
+              <a:t>Teach the operating decision, run the diagnostic, then force a usable artifact. The slide is a teaching cue, not the handout.</a:t>
             </a:r>
           </a:p>
         </p:txBody>
@@ -2774,7 +2774,7 @@
           <p:cNvPr id="21" name="">
             <a:extLst xmlns:a="http://schemas.openxmlformats.org/drawingml/2006/main">
               <a:ext uri="{FF2B5EF4-FFF2-40B4-BE49-F238E27FC236}">
-                <a16:creationId xmlns:a16="http://schemas.microsoft.com/office/drawing/2014/main" id="{47C8A4B2-EBE7-4F7C-9B8E-C01355B6B7C5}"/>
+                <a16:creationId xmlns:a16="http://schemas.microsoft.com/office/drawing/2014/main" id="{E448130B-5C1F-4353-9A1E-22F5EF25A664}"/>
               </a:ext>
             </a:extLst>
           </p:cNvPr>
@@ -2809,7 +2809,7 @@
           <p:cNvPr id="22" name="">
             <a:extLst xmlns:a="http://schemas.openxmlformats.org/drawingml/2006/main">
               <a:ext uri="{FF2B5EF4-FFF2-40B4-BE49-F238E27FC236}">
-                <a16:creationId xmlns:a16="http://schemas.microsoft.com/office/drawing/2014/main" id="{4F464D31-AFDA-494D-B749-0F747566B546}"/>
+                <a16:creationId xmlns:a16="http://schemas.microsoft.com/office/drawing/2014/main" id="{8AC68DC5-D39C-460B-9F42-A509003543CF}"/>
               </a:ext>
             </a:extLst>
           </p:cNvPr>
@@ -2873,7 +2873,7 @@
           <p:cNvPr id="23" name="">
             <a:extLst xmlns:a="http://schemas.openxmlformats.org/drawingml/2006/main">
               <a:ext uri="{FF2B5EF4-FFF2-40B4-BE49-F238E27FC236}">
-                <a16:creationId xmlns:a16="http://schemas.microsoft.com/office/drawing/2014/main" id="{3A9CC095-25EF-474A-BF56-3AC8D372B5B1}"/>
+                <a16:creationId xmlns:a16="http://schemas.microsoft.com/office/drawing/2014/main" id="{55B19846-81D1-49AE-82C0-D55A93A558CA}"/>
               </a:ext>
             </a:extLst>
           </p:cNvPr>
@@ -2937,7 +2937,7 @@
           <p:cNvPr id="24" name="">
             <a:extLst xmlns:a="http://schemas.openxmlformats.org/drawingml/2006/main">
               <a:ext uri="{FF2B5EF4-FFF2-40B4-BE49-F238E27FC236}">
-                <a16:creationId xmlns:a16="http://schemas.microsoft.com/office/drawing/2014/main" id="{8B154008-DFB4-4BEE-A588-90E5C43F1059}"/>
+                <a16:creationId xmlns:a16="http://schemas.microsoft.com/office/drawing/2014/main" id="{B001BCEC-3D24-4BC4-8DAE-DE99102C6522}"/>
               </a:ext>
             </a:extLst>
           </p:cNvPr>
@@ -2972,7 +2972,7 @@
           <p:cNvPr id="25" name="">
             <a:extLst xmlns:a="http://schemas.openxmlformats.org/drawingml/2006/main">
               <a:ext uri="{FF2B5EF4-FFF2-40B4-BE49-F238E27FC236}">
-                <a16:creationId xmlns:a16="http://schemas.microsoft.com/office/drawing/2014/main" id="{DD839B63-9625-49D2-8B1B-D8B25655DCA1}"/>
+                <a16:creationId xmlns:a16="http://schemas.microsoft.com/office/drawing/2014/main" id="{658119B6-0034-4891-BC39-AE578C65A648}"/>
               </a:ext>
             </a:extLst>
           </p:cNvPr>
@@ -3036,7 +3036,7 @@
           <p:cNvPr id="26" name="">
             <a:extLst xmlns:a="http://schemas.openxmlformats.org/drawingml/2006/main">
               <a:ext uri="{FF2B5EF4-FFF2-40B4-BE49-F238E27FC236}">
-                <a16:creationId xmlns:a16="http://schemas.microsoft.com/office/drawing/2014/main" id="{B872C6CF-9458-46CB-A147-5D44B4230C86}"/>
+                <a16:creationId xmlns:a16="http://schemas.microsoft.com/office/drawing/2014/main" id="{2B259E1F-9721-4E88-B53F-3A1501023BDB}"/>
               </a:ext>
             </a:extLst>
           </p:cNvPr>
@@ -3100,7 +3100,7 @@
           <p:cNvPr id="27" name="">
             <a:extLst xmlns:a="http://schemas.openxmlformats.org/drawingml/2006/main">
               <a:ext uri="{FF2B5EF4-FFF2-40B4-BE49-F238E27FC236}">
-                <a16:creationId xmlns:a16="http://schemas.microsoft.com/office/drawing/2014/main" id="{B35F9556-B872-478E-B951-6278CC5F3ED3}"/>
+                <a16:creationId xmlns:a16="http://schemas.microsoft.com/office/drawing/2014/main" id="{BE46CA43-B4FE-4FC3-97E6-64A5E3B978FC}"/>
               </a:ext>
             </a:extLst>
           </p:cNvPr>
@@ -3162,7 +3162,7 @@
     </p:spTree>
     <p:extLst>
       <p:ext uri="{BB962C8B-B14F-4D97-AF65-F5344CB8AC3E}">
-        <p14:creationId xmlns:p14="http://schemas.microsoft.com/office/powerpoint/2010/main" val="254317347"/>
+        <p14:creationId xmlns:p14="http://schemas.microsoft.com/office/powerpoint/2010/main" val="1342206955"/>
       </p:ext>
     </p:extLst>
   </p:cSld>
@@ -3186,7 +3186,7 @@
           <p:cNvPr id="1" name="">
             <a:extLst xmlns:a="http://schemas.openxmlformats.org/drawingml/2006/main">
               <a:ext uri="{FF2B5EF4-FFF2-40B4-BE49-F238E27FC236}">
-                <a16:creationId xmlns:a16="http://schemas.microsoft.com/office/drawing/2014/main" id="{CC0336E5-4213-4FEA-B85C-1C866ED4AB96}"/>
+                <a16:creationId xmlns:a16="http://schemas.microsoft.com/office/drawing/2014/main" id="{59F5D4C9-4E4F-4C53-98AE-5E5C4072BD47}"/>
               </a:ext>
             </a:extLst>
           </p:cNvPr>
@@ -3221,7 +3221,7 @@
           <p:cNvPr id="2" name="">
             <a:extLst xmlns:a="http://schemas.openxmlformats.org/drawingml/2006/main">
               <a:ext uri="{FF2B5EF4-FFF2-40B4-BE49-F238E27FC236}">
-                <a16:creationId xmlns:a16="http://schemas.microsoft.com/office/drawing/2014/main" id="{D980E545-7095-4B6A-89BD-CFA625204251}"/>
+                <a16:creationId xmlns:a16="http://schemas.microsoft.com/office/drawing/2014/main" id="{002A4F98-F7BC-45B6-9E2B-48045CBDB9F4}"/>
               </a:ext>
             </a:extLst>
           </p:cNvPr>
@@ -3256,7 +3256,7 @@
           <p:cNvPr id="3" name="">
             <a:extLst xmlns:a="http://schemas.openxmlformats.org/drawingml/2006/main">
               <a:ext uri="{FF2B5EF4-FFF2-40B4-BE49-F238E27FC236}">
-                <a16:creationId xmlns:a16="http://schemas.microsoft.com/office/drawing/2014/main" id="{B69C71C3-C6C9-4BC7-B539-3B3B64E986E9}"/>
+                <a16:creationId xmlns:a16="http://schemas.microsoft.com/office/drawing/2014/main" id="{92A22037-F116-4041-9E17-519FE9E4CF3E}"/>
               </a:ext>
             </a:extLst>
           </p:cNvPr>
@@ -3291,7 +3291,7 @@
           <p:cNvPr id="4" name="kicker-03-marker">
             <a:extLst xmlns:a="http://schemas.openxmlformats.org/drawingml/2006/main">
               <a:ext uri="{FF2B5EF4-FFF2-40B4-BE49-F238E27FC236}">
-                <a16:creationId xmlns:a16="http://schemas.microsoft.com/office/drawing/2014/main" id="{9F51F775-B94B-49F3-BDF6-5F41B708050B}"/>
+                <a16:creationId xmlns:a16="http://schemas.microsoft.com/office/drawing/2014/main" id="{9F0E04AE-BAA8-48E5-A0FB-CFD12496DD0F}"/>
               </a:ext>
             </a:extLst>
           </p:cNvPr>
@@ -3326,7 +3326,7 @@
           <p:cNvPr id="5" name="kicker-03-label">
             <a:extLst xmlns:a="http://schemas.openxmlformats.org/drawingml/2006/main">
               <a:ext uri="{FF2B5EF4-FFF2-40B4-BE49-F238E27FC236}">
-                <a16:creationId xmlns:a16="http://schemas.microsoft.com/office/drawing/2014/main" id="{6BEFC443-DC53-4F67-8940-CEE3009433F7}"/>
+                <a16:creationId xmlns:a16="http://schemas.microsoft.com/office/drawing/2014/main" id="{44880FA1-4372-4EE1-96F1-A5045031767A}"/>
               </a:ext>
             </a:extLst>
           </p:cNvPr>
@@ -3380,7 +3380,7 @@
                 <a:ea typeface="Aptos"/>
                 <a:cs typeface="Aptos"/>
               </a:rPr>
-              <a:t>MODULE 1 / LESSON 03 / AI-ASSISTED EXERCISE</a:t>
+              <a:t>MODULE 1 / LESSON 03 / STRUCTURED DRAFTING DRILL</a:t>
             </a:r>
           </a:p>
         </p:txBody>
@@ -3390,7 +3390,7 @@
           <p:cNvPr id="6" name="">
             <a:extLst xmlns:a="http://schemas.openxmlformats.org/drawingml/2006/main">
               <a:ext uri="{FF2B5EF4-FFF2-40B4-BE49-F238E27FC236}">
-                <a16:creationId xmlns:a16="http://schemas.microsoft.com/office/drawing/2014/main" id="{A27D2077-846C-48C2-BFCF-FF112CFBFBD7}"/>
+                <a16:creationId xmlns:a16="http://schemas.microsoft.com/office/drawing/2014/main" id="{98E0D0AF-28B7-4F8F-ACE0-A5F70967A91F}"/>
               </a:ext>
             </a:extLst>
           </p:cNvPr>
@@ -3444,7 +3444,7 @@
                 <a:ea typeface="Aptos Display"/>
                 <a:cs typeface="Aptos Display"/>
               </a:rPr>
-              <a:t>Use AI to structure the attempt, then make humans responsible for judgment.</a:t>
+              <a:t>Structure the first draft before the room critiques it.</a:t>
             </a:r>
           </a:p>
         </p:txBody>
@@ -3454,7 +3454,7 @@
           <p:cNvPr id="7" name="">
             <a:extLst xmlns:a="http://schemas.openxmlformats.org/drawingml/2006/main">
               <a:ext uri="{FF2B5EF4-FFF2-40B4-BE49-F238E27FC236}">
-                <a16:creationId xmlns:a16="http://schemas.microsoft.com/office/drawing/2014/main" id="{F8A25E98-97AA-4B31-A139-00169F08AB5D}"/>
+                <a16:creationId xmlns:a16="http://schemas.microsoft.com/office/drawing/2014/main" id="{1E1F33EC-301A-42AD-A6C2-4250F09F1901}"/>
               </a:ext>
             </a:extLst>
           </p:cNvPr>
@@ -3508,7 +3508,7 @@
                 <a:ea typeface="Aptos"/>
                 <a:cs typeface="Aptos"/>
               </a:rPr>
-              <a:t>The prompt is constrained by source, assumptions, output standard, and human validation.</a:t>
+              <a:t>The brief is constrained by source evidence, assumptions, output standard, and validation.</a:t>
             </a:r>
           </a:p>
         </p:txBody>
@@ -3518,7 +3518,7 @@
           <p:cNvPr id="8" name="">
             <a:extLst xmlns:a="http://schemas.openxmlformats.org/drawingml/2006/main">
               <a:ext uri="{FF2B5EF4-FFF2-40B4-BE49-F238E27FC236}">
-                <a16:creationId xmlns:a16="http://schemas.microsoft.com/office/drawing/2014/main" id="{3454403B-CB85-45CD-A489-AE802BFFE247}"/>
+                <a16:creationId xmlns:a16="http://schemas.microsoft.com/office/drawing/2014/main" id="{37A8A473-EBDD-476F-869A-9730E3B2BF88}"/>
               </a:ext>
             </a:extLst>
           </p:cNvPr>
@@ -3553,7 +3553,7 @@
           <p:cNvPr id="9" name="">
             <a:extLst xmlns:a="http://schemas.openxmlformats.org/drawingml/2006/main">
               <a:ext uri="{FF2B5EF4-FFF2-40B4-BE49-F238E27FC236}">
-                <a16:creationId xmlns:a16="http://schemas.microsoft.com/office/drawing/2014/main" id="{8C5C9AEF-704F-4C88-9485-DB50DF4CCF73}"/>
+                <a16:creationId xmlns:a16="http://schemas.microsoft.com/office/drawing/2014/main" id="{B30DE48E-FD25-4F82-A645-15A7C0BB9E43}"/>
               </a:ext>
             </a:extLst>
           </p:cNvPr>
@@ -3617,7 +3617,7 @@
           <p:cNvPr id="10" name="">
             <a:extLst xmlns:a="http://schemas.openxmlformats.org/drawingml/2006/main">
               <a:ext uri="{FF2B5EF4-FFF2-40B4-BE49-F238E27FC236}">
-                <a16:creationId xmlns:a16="http://schemas.microsoft.com/office/drawing/2014/main" id="{50CE408C-79E8-4BB9-A0B4-0E14B00EBCFE}"/>
+                <a16:creationId xmlns:a16="http://schemas.microsoft.com/office/drawing/2014/main" id="{9FCD6C67-70D6-4EBF-AEFA-ECC6150F1FAF}"/>
               </a:ext>
             </a:extLst>
           </p:cNvPr>
@@ -3681,7 +3681,7 @@
           <p:cNvPr id="11" name="">
             <a:extLst xmlns:a="http://schemas.openxmlformats.org/drawingml/2006/main">
               <a:ext uri="{FF2B5EF4-FFF2-40B4-BE49-F238E27FC236}">
-                <a16:creationId xmlns:a16="http://schemas.microsoft.com/office/drawing/2014/main" id="{4E96F217-A5F2-47CF-B1BD-EBACE70FC9BB}"/>
+                <a16:creationId xmlns:a16="http://schemas.microsoft.com/office/drawing/2014/main" id="{D61D4574-D0E9-492E-BEA3-01153CBD3BBE}"/>
               </a:ext>
             </a:extLst>
           </p:cNvPr>
@@ -3745,19 +3745,19 @@
           <p:cNvPr id="12" name="">
             <a:extLst xmlns:a="http://schemas.openxmlformats.org/drawingml/2006/main">
               <a:ext uri="{FF2B5EF4-FFF2-40B4-BE49-F238E27FC236}">
-                <a16:creationId xmlns:a16="http://schemas.microsoft.com/office/drawing/2014/main" id="{3858D2D3-8137-4E7E-85C2-4B2A12665B50}"/>
-              </a:ext>
-            </a:extLst>
-          </p:cNvPr>
-          <p:cNvSpPr>
-            <a:spLocks xmlns:a="http://schemas.openxmlformats.org/drawingml/2006/main" noGrp="1"/>
-          </p:cNvSpPr>
-          <p:nvPr/>
-        </p:nvSpPr>
-        <p:spPr>
-          <a:xfrm xmlns:a="http://schemas.openxmlformats.org/drawingml/2006/main">
-            <a:off x="228600" y="1809750"/>
-            <a:ext cx="11963400" cy="4591050"/>
+                <a16:creationId xmlns:a16="http://schemas.microsoft.com/office/drawing/2014/main" id="{971C8E96-7716-4AE6-8C93-9162F92F8F8D}"/>
+              </a:ext>
+            </a:extLst>
+          </p:cNvPr>
+          <p:cNvSpPr>
+            <a:spLocks xmlns:a="http://schemas.openxmlformats.org/drawingml/2006/main" noGrp="1"/>
+          </p:cNvSpPr>
+          <p:nvPr/>
+        </p:nvSpPr>
+        <p:spPr>
+          <a:xfrm xmlns:a="http://schemas.openxmlformats.org/drawingml/2006/main">
+            <a:off x="0" y="1809750"/>
+            <a:ext cx="12192000" cy="4591050"/>
           </a:xfrm>
           <a:prstGeom xmlns:a="http://schemas.openxmlformats.org/drawingml/2006/main" prst="rect">
             <a:avLst/>
@@ -3765,11 +3765,9 @@
           <a:solidFill xmlns:a="http://schemas.openxmlformats.org/drawingml/2006/main">
             <a:srgbClr val="F5F6F2"/>
           </a:solidFill>
-          <a:ln xmlns:a="http://schemas.openxmlformats.org/drawingml/2006/main" w="0">
-            <a:solidFill>
-              <a:srgbClr val="000000">
-                <a:alpha val="0"/>
-              </a:srgbClr>
+          <a:ln xmlns:a="http://schemas.openxmlformats.org/drawingml/2006/main" w="9525">
+            <a:solidFill>
+              <a:srgbClr val="F5F6F2"/>
             </a:solidFill>
             <a:prstDash val="solid"/>
           </a:ln>
@@ -3780,29 +3778,29 @@
           <p:cNvPr id="13" name="">
             <a:extLst xmlns:a="http://schemas.openxmlformats.org/drawingml/2006/main">
               <a:ext uri="{FF2B5EF4-FFF2-40B4-BE49-F238E27FC236}">
-                <a16:creationId xmlns:a16="http://schemas.microsoft.com/office/drawing/2014/main" id="{B6BAB346-FA3D-42F3-B29F-F9844EE55EF8}"/>
-              </a:ext>
-            </a:extLst>
-          </p:cNvPr>
-          <p:cNvSpPr>
-            <a:spLocks xmlns:a="http://schemas.openxmlformats.org/drawingml/2006/main" noGrp="1"/>
-          </p:cNvSpPr>
-          <p:nvPr/>
-        </p:nvSpPr>
-        <p:spPr>
-          <a:xfrm xmlns:a="http://schemas.openxmlformats.org/drawingml/2006/main">
-            <a:off x="228600" y="1809750"/>
-            <a:ext cx="6096000" cy="4591050"/>
-          </a:xfrm>
-          <a:prstGeom xmlns:a="http://schemas.openxmlformats.org/drawingml/2006/main" prst="rect">
-            <a:avLst/>
-          </a:prstGeom>
-          <a:solidFill xmlns:a="http://schemas.openxmlformats.org/drawingml/2006/main">
-            <a:srgbClr val="12232B"/>
+                <a16:creationId xmlns:a16="http://schemas.microsoft.com/office/drawing/2014/main" id="{7BAFA4A7-343E-4593-A6ED-63EF3E8EC67E}"/>
+              </a:ext>
+            </a:extLst>
+          </p:cNvPr>
+          <p:cNvSpPr>
+            <a:spLocks xmlns:a="http://schemas.openxmlformats.org/drawingml/2006/main" noGrp="1"/>
+          </p:cNvSpPr>
+          <p:nvPr/>
+        </p:nvSpPr>
+        <p:spPr>
+          <a:xfrm xmlns:a="http://schemas.openxmlformats.org/drawingml/2006/main">
+            <a:off x="514350" y="2038350"/>
+            <a:ext cx="5619750" cy="3181350"/>
+          </a:xfrm>
+          <a:prstGeom xmlns:a="http://schemas.openxmlformats.org/drawingml/2006/main" prst="rect">
+            <a:avLst/>
+          </a:prstGeom>
+          <a:solidFill xmlns:a="http://schemas.openxmlformats.org/drawingml/2006/main">
+            <a:srgbClr val="FFFFFF"/>
           </a:solidFill>
           <a:ln xmlns:a="http://schemas.openxmlformats.org/drawingml/2006/main" w="9525">
             <a:solidFill>
-              <a:srgbClr val="12232B"/>
+              <a:srgbClr val="D9DDD6"/>
             </a:solidFill>
             <a:prstDash val="solid"/>
           </a:ln>
@@ -3813,25 +3811,25 @@
           <p:cNvPr id="14" name="">
             <a:extLst xmlns:a="http://schemas.openxmlformats.org/drawingml/2006/main">
               <a:ext uri="{FF2B5EF4-FFF2-40B4-BE49-F238E27FC236}">
-                <a16:creationId xmlns:a16="http://schemas.microsoft.com/office/drawing/2014/main" id="{64E04F06-FFC3-43A4-8D10-58139E32652F}"/>
-              </a:ext>
-            </a:extLst>
-          </p:cNvPr>
-          <p:cNvSpPr>
-            <a:spLocks xmlns:a="http://schemas.openxmlformats.org/drawingml/2006/main" noGrp="1"/>
-          </p:cNvSpPr>
-          <p:nvPr/>
-        </p:nvSpPr>
-        <p:spPr>
-          <a:xfrm xmlns:a="http://schemas.openxmlformats.org/drawingml/2006/main">
-            <a:off x="609600" y="2266950"/>
+                <a16:creationId xmlns:a16="http://schemas.microsoft.com/office/drawing/2014/main" id="{F6012237-8B62-4AE4-97E5-DDC49A7A6F51}"/>
+              </a:ext>
+            </a:extLst>
+          </p:cNvPr>
+          <p:cNvSpPr>
+            <a:spLocks xmlns:a="http://schemas.openxmlformats.org/drawingml/2006/main" noGrp="1"/>
+          </p:cNvSpPr>
+          <p:nvPr/>
+        </p:nvSpPr>
+        <p:spPr>
+          <a:xfrm xmlns:a="http://schemas.openxmlformats.org/drawingml/2006/main">
+            <a:off x="819150" y="2419350"/>
             <a:ext cx="266700" cy="19050"/>
           </a:xfrm>
           <a:prstGeom xmlns:a="http://schemas.openxmlformats.org/drawingml/2006/main" prst="rect">
             <a:avLst/>
           </a:prstGeom>
           <a:solidFill xmlns:a="http://schemas.openxmlformats.org/drawingml/2006/main">
-            <a:srgbClr val="B7953B"/>
+            <a:srgbClr val="A85D2A"/>
           </a:solidFill>
           <a:ln xmlns:a="http://schemas.openxmlformats.org/drawingml/2006/main" w="0">
             <a:solidFill>
@@ -3848,18 +3846,18 @@
           <p:cNvPr id="15" name="">
             <a:extLst xmlns:a="http://schemas.openxmlformats.org/drawingml/2006/main">
               <a:ext uri="{FF2B5EF4-FFF2-40B4-BE49-F238E27FC236}">
-                <a16:creationId xmlns:a16="http://schemas.microsoft.com/office/drawing/2014/main" id="{16EF7F45-7530-4B03-896F-2EE968247236}"/>
-              </a:ext>
-            </a:extLst>
-          </p:cNvPr>
-          <p:cNvSpPr>
-            <a:spLocks xmlns:a="http://schemas.openxmlformats.org/drawingml/2006/main" noGrp="1"/>
-          </p:cNvSpPr>
-          <p:nvPr/>
-        </p:nvSpPr>
-        <p:spPr>
-          <a:xfrm xmlns:a="http://schemas.openxmlformats.org/drawingml/2006/main">
-            <a:off x="971550" y="2190750"/>
+                <a16:creationId xmlns:a16="http://schemas.microsoft.com/office/drawing/2014/main" id="{1AA681DA-6B86-47FF-AFF2-AACD8C1AD5C9}"/>
+              </a:ext>
+            </a:extLst>
+          </p:cNvPr>
+          <p:cNvSpPr>
+            <a:spLocks xmlns:a="http://schemas.openxmlformats.org/drawingml/2006/main" noGrp="1"/>
+          </p:cNvSpPr>
+          <p:nvPr/>
+        </p:nvSpPr>
+        <p:spPr>
+          <a:xfrm xmlns:a="http://schemas.openxmlformats.org/drawingml/2006/main">
+            <a:off x="1181100" y="2343150"/>
             <a:ext cx="2476500" cy="171450"/>
           </a:xfrm>
           <a:prstGeom xmlns:a="http://schemas.openxmlformats.org/drawingml/2006/main" prst="rect">
@@ -3902,7 +3900,7 @@
                 <a:ea typeface="Aptos"/>
                 <a:cs typeface="Aptos"/>
               </a:rPr>
-              <a:t>PROMPT TO GIVE AI</a:t>
+              <a:t>DRAFTING BRIEF</a:t>
             </a:r>
           </a:p>
         </p:txBody>
@@ -3912,19 +3910,19 @@
           <p:cNvPr id="16" name="">
             <a:extLst xmlns:a="http://schemas.openxmlformats.org/drawingml/2006/main">
               <a:ext uri="{FF2B5EF4-FFF2-40B4-BE49-F238E27FC236}">
-                <a16:creationId xmlns:a16="http://schemas.microsoft.com/office/drawing/2014/main" id="{B6B409ED-34CE-40D1-AE74-BB51240676FE}"/>
-              </a:ext>
-            </a:extLst>
-          </p:cNvPr>
-          <p:cNvSpPr>
-            <a:spLocks xmlns:a="http://schemas.openxmlformats.org/drawingml/2006/main" noGrp="1"/>
-          </p:cNvSpPr>
-          <p:nvPr/>
-        </p:nvSpPr>
-        <p:spPr>
-          <a:xfrm xmlns:a="http://schemas.openxmlformats.org/drawingml/2006/main">
-            <a:off x="609600" y="2647950"/>
-            <a:ext cx="5048250" cy="2190750"/>
+                <a16:creationId xmlns:a16="http://schemas.microsoft.com/office/drawing/2014/main" id="{717759A0-0C0B-4B83-B2D4-4854A3432BED}"/>
+              </a:ext>
+            </a:extLst>
+          </p:cNvPr>
+          <p:cNvSpPr>
+            <a:spLocks xmlns:a="http://schemas.openxmlformats.org/drawingml/2006/main" noGrp="1"/>
+          </p:cNvSpPr>
+          <p:nvPr/>
+        </p:nvSpPr>
+        <p:spPr>
+          <a:xfrm xmlns:a="http://schemas.openxmlformats.org/drawingml/2006/main">
+            <a:off x="819150" y="2762250"/>
+            <a:ext cx="4610100" cy="1752600"/>
           </a:xfrm>
           <a:prstGeom xmlns:a="http://schemas.openxmlformats.org/drawingml/2006/main" prst="rect">
             <a:avLst/>
@@ -3948,9 +3946,240 @@
           <a:lstStyle xmlns:a="http://schemas.openxmlformats.org/drawingml/2006/main"/>
           <a:p xmlns:a="http://schemas.openxmlformats.org/drawingml/2006/main">
             <a:pPr algn="l">
+              <a:defRPr sz="1200" b="0">
+                <a:solidFill>
+                  <a:srgbClr val="172026"/>
+                </a:solidFill>
+                <a:latin typeface="Aptos"/>
+                <a:ea typeface="Aptos"/>
+                <a:cs typeface="Aptos"/>
+              </a:defRPr>
+            </a:pPr>
+            <a:r>
+              <a:rPr sz="1200" b="0">
+                <a:solidFill>
+                  <a:srgbClr val="172026"/>
+                </a:solidFill>
+                <a:latin typeface="Aptos"/>
+                <a:ea typeface="Aptos"/>
+                <a:cs typeface="Aptos"/>
+              </a:rPr>
+              <a:t>Compare three candidate industrial segments by fit, trigger, access, commercial value, committee feasibility, proof availability, and pilot feasibility. Recommend one 90-day ICP, explain why it is narrow enough, define explicit disqualification rules, and list risks or assumptions the team must validate.</a:t>
+            </a:r>
+          </a:p>
+        </p:txBody>
+      </p:sp>
+      <p:sp>
+        <p:nvSpPr>
+          <p:cNvPr id="17" name="">
+            <a:extLst xmlns:a="http://schemas.openxmlformats.org/drawingml/2006/main">
+              <a:ext uri="{FF2B5EF4-FFF2-40B4-BE49-F238E27FC236}">
+                <a16:creationId xmlns:a16="http://schemas.microsoft.com/office/drawing/2014/main" id="{95647AEE-EBC0-4723-BF57-76D0E09FBE7A}"/>
+              </a:ext>
+            </a:extLst>
+          </p:cNvPr>
+          <p:cNvSpPr>
+            <a:spLocks xmlns:a="http://schemas.openxmlformats.org/drawingml/2006/main" noGrp="1"/>
+          </p:cNvSpPr>
+          <p:nvPr/>
+        </p:nvSpPr>
+        <p:spPr>
+          <a:xfrm xmlns:a="http://schemas.openxmlformats.org/drawingml/2006/main">
+            <a:off x="6496050" y="2038350"/>
+            <a:ext cx="4933950" cy="3181350"/>
+          </a:xfrm>
+          <a:prstGeom xmlns:a="http://schemas.openxmlformats.org/drawingml/2006/main" prst="rect">
+            <a:avLst/>
+          </a:prstGeom>
+          <a:solidFill xmlns:a="http://schemas.openxmlformats.org/drawingml/2006/main">
+            <a:srgbClr val="F9FAF7"/>
+          </a:solidFill>
+          <a:ln xmlns:a="http://schemas.openxmlformats.org/drawingml/2006/main" w="9525">
+            <a:solidFill>
+              <a:srgbClr val="D9DDD6"/>
+            </a:solidFill>
+            <a:prstDash val="solid"/>
+          </a:ln>
+        </p:spPr>
+      </p:sp>
+      <p:sp>
+        <p:nvSpPr>
+          <p:cNvPr id="18" name="">
+            <a:extLst xmlns:a="http://schemas.openxmlformats.org/drawingml/2006/main">
+              <a:ext uri="{FF2B5EF4-FFF2-40B4-BE49-F238E27FC236}">
+                <a16:creationId xmlns:a16="http://schemas.microsoft.com/office/drawing/2014/main" id="{033AD04B-F541-4C55-9D44-C7A28EE6281B}"/>
+              </a:ext>
+            </a:extLst>
+          </p:cNvPr>
+          <p:cNvSpPr>
+            <a:spLocks xmlns:a="http://schemas.openxmlformats.org/drawingml/2006/main" noGrp="1"/>
+          </p:cNvSpPr>
+          <p:nvPr/>
+        </p:nvSpPr>
+        <p:spPr>
+          <a:xfrm xmlns:a="http://schemas.openxmlformats.org/drawingml/2006/main">
+            <a:off x="6819900" y="2419350"/>
+            <a:ext cx="266700" cy="19050"/>
+          </a:xfrm>
+          <a:prstGeom xmlns:a="http://schemas.openxmlformats.org/drawingml/2006/main" prst="rect">
+            <a:avLst/>
+          </a:prstGeom>
+          <a:solidFill xmlns:a="http://schemas.openxmlformats.org/drawingml/2006/main">
+            <a:srgbClr val="1D6072"/>
+          </a:solidFill>
+          <a:ln xmlns:a="http://schemas.openxmlformats.org/drawingml/2006/main" w="0">
+            <a:solidFill>
+              <a:srgbClr val="000000">
+                <a:alpha val="0"/>
+              </a:srgbClr>
+            </a:solidFill>
+            <a:prstDash val="solid"/>
+          </a:ln>
+        </p:spPr>
+      </p:sp>
+      <p:sp>
+        <p:nvSpPr>
+          <p:cNvPr id="19" name="">
+            <a:extLst xmlns:a="http://schemas.openxmlformats.org/drawingml/2006/main">
+              <a:ext uri="{FF2B5EF4-FFF2-40B4-BE49-F238E27FC236}">
+                <a16:creationId xmlns:a16="http://schemas.microsoft.com/office/drawing/2014/main" id="{61EB06A3-E5F6-48C3-B6AF-0F0C5558B0A4}"/>
+              </a:ext>
+            </a:extLst>
+          </p:cNvPr>
+          <p:cNvSpPr>
+            <a:spLocks xmlns:a="http://schemas.openxmlformats.org/drawingml/2006/main" noGrp="1"/>
+          </p:cNvSpPr>
+          <p:nvPr/>
+        </p:nvSpPr>
+        <p:spPr>
+          <a:xfrm xmlns:a="http://schemas.openxmlformats.org/drawingml/2006/main">
+            <a:off x="7181850" y="2343150"/>
+            <a:ext cx="2476500" cy="171450"/>
+          </a:xfrm>
+          <a:prstGeom xmlns:a="http://schemas.openxmlformats.org/drawingml/2006/main" prst="rect">
+            <a:avLst/>
+          </a:prstGeom>
+          <a:solidFill xmlns:a="http://schemas.openxmlformats.org/drawingml/2006/main">
+            <a:srgbClr val="000000">
+              <a:alpha val="0"/>
+            </a:srgbClr>
+          </a:solidFill>
+          <a:ln xmlns:a="http://schemas.openxmlformats.org/drawingml/2006/main" w="0">
+            <a:solidFill>
+              <a:srgbClr val="000000">
+                <a:alpha val="0"/>
+              </a:srgbClr>
+            </a:solidFill>
+            <a:prstDash val="solid"/>
+          </a:ln>
+        </p:spPr>
+        <p:txBody>
+          <a:bodyPr xmlns:a="http://schemas.openxmlformats.org/drawingml/2006/main" lIns="0" tIns="0" rIns="0" bIns="0" anchor="t"/>
+          <a:lstStyle xmlns:a="http://schemas.openxmlformats.org/drawingml/2006/main"/>
+          <a:p xmlns:a="http://schemas.openxmlformats.org/drawingml/2006/main">
+            <a:pPr algn="l">
+              <a:defRPr sz="750" b="1">
+                <a:solidFill>
+                  <a:srgbClr val="59646A"/>
+                </a:solidFill>
+                <a:latin typeface="Aptos"/>
+                <a:ea typeface="Aptos"/>
+                <a:cs typeface="Aptos"/>
+              </a:defRPr>
+            </a:pPr>
+            <a:r>
+              <a:rPr sz="750" b="1">
+                <a:solidFill>
+                  <a:srgbClr val="59646A"/>
+                </a:solidFill>
+                <a:latin typeface="Aptos"/>
+                <a:ea typeface="Aptos"/>
+                <a:cs typeface="Aptos"/>
+              </a:rPr>
+              <a:t>REQUIRED OUTPUT STANDARD</a:t>
+            </a:r>
+          </a:p>
+        </p:txBody>
+      </p:sp>
+      <p:sp>
+        <p:nvSpPr>
+          <p:cNvPr id="20" name="">
+            <a:extLst xmlns:a="http://schemas.openxmlformats.org/drawingml/2006/main">
+              <a:ext uri="{FF2B5EF4-FFF2-40B4-BE49-F238E27FC236}">
+                <a16:creationId xmlns:a16="http://schemas.microsoft.com/office/drawing/2014/main" id="{79748E09-0A05-49B6-929B-B07A6C8A5E24}"/>
+              </a:ext>
+            </a:extLst>
+          </p:cNvPr>
+          <p:cNvSpPr>
+            <a:spLocks xmlns:a="http://schemas.openxmlformats.org/drawingml/2006/main" noGrp="1"/>
+          </p:cNvSpPr>
+          <p:nvPr/>
+        </p:nvSpPr>
+        <p:spPr>
+          <a:xfrm xmlns:a="http://schemas.openxmlformats.org/drawingml/2006/main">
+            <a:off x="6819900" y="2847975"/>
+            <a:ext cx="57150" cy="57150"/>
+          </a:xfrm>
+          <a:prstGeom xmlns:a="http://schemas.openxmlformats.org/drawingml/2006/main" prst="rect">
+            <a:avLst/>
+          </a:prstGeom>
+          <a:solidFill xmlns:a="http://schemas.openxmlformats.org/drawingml/2006/main">
+            <a:srgbClr val="1D6072"/>
+          </a:solidFill>
+          <a:ln xmlns:a="http://schemas.openxmlformats.org/drawingml/2006/main" w="0">
+            <a:solidFill>
+              <a:srgbClr val="000000">
+                <a:alpha val="0"/>
+              </a:srgbClr>
+            </a:solidFill>
+            <a:prstDash val="solid"/>
+          </a:ln>
+        </p:spPr>
+      </p:sp>
+      <p:sp>
+        <p:nvSpPr>
+          <p:cNvPr id="21" name="">
+            <a:extLst xmlns:a="http://schemas.openxmlformats.org/drawingml/2006/main">
+              <a:ext uri="{FF2B5EF4-FFF2-40B4-BE49-F238E27FC236}">
+                <a16:creationId xmlns:a16="http://schemas.microsoft.com/office/drawing/2014/main" id="{1894E210-5B42-4574-8840-1D2B00270655}"/>
+              </a:ext>
+            </a:extLst>
+          </p:cNvPr>
+          <p:cNvSpPr>
+            <a:spLocks xmlns:a="http://schemas.openxmlformats.org/drawingml/2006/main" noGrp="1"/>
+          </p:cNvSpPr>
+          <p:nvPr/>
+        </p:nvSpPr>
+        <p:spPr>
+          <a:xfrm xmlns:a="http://schemas.openxmlformats.org/drawingml/2006/main">
+            <a:off x="6991350" y="2781300"/>
+            <a:ext cx="3619500" cy="438150"/>
+          </a:xfrm>
+          <a:prstGeom xmlns:a="http://schemas.openxmlformats.org/drawingml/2006/main" prst="rect">
+            <a:avLst/>
+          </a:prstGeom>
+          <a:solidFill xmlns:a="http://schemas.openxmlformats.org/drawingml/2006/main">
+            <a:srgbClr val="000000">
+              <a:alpha val="0"/>
+            </a:srgbClr>
+          </a:solidFill>
+          <a:ln xmlns:a="http://schemas.openxmlformats.org/drawingml/2006/main" w="0">
+            <a:solidFill>
+              <a:srgbClr val="000000">
+                <a:alpha val="0"/>
+              </a:srgbClr>
+            </a:solidFill>
+            <a:prstDash val="solid"/>
+          </a:ln>
+        </p:spPr>
+        <p:txBody>
+          <a:bodyPr xmlns:a="http://schemas.openxmlformats.org/drawingml/2006/main" lIns="0" tIns="0" rIns="0" bIns="0" anchor="t"/>
+          <a:lstStyle xmlns:a="http://schemas.openxmlformats.org/drawingml/2006/main"/>
+          <a:p xmlns:a="http://schemas.openxmlformats.org/drawingml/2006/main">
+            <a:pPr algn="l">
               <a:defRPr sz="1125" b="0">
                 <a:solidFill>
-                  <a:srgbClr val="FFFFFF"/>
+                  <a:srgbClr val="172026"/>
                 </a:solidFill>
                 <a:latin typeface="Aptos"/>
                 <a:ea typeface="Aptos"/>
@@ -3960,68 +4189,35 @@
             <a:r>
               <a:rPr sz="1125" b="0">
                 <a:solidFill>
-                  <a:srgbClr val="FFFFFF"/>
+                  <a:srgbClr val="172026"/>
                 </a:solidFill>
                 <a:latin typeface="Aptos"/>
                 <a:ea typeface="Aptos"/>
                 <a:cs typeface="Aptos"/>
               </a:rPr>
-              <a:t>Score three candidate industrial segments by fit, trigger, access, commercial value, committee feasibility, proof availability, and pilot feasibility. Recommend one 90-day ICP, explain why it is narrow enough, define explicit disqualification rules, and list risks or assumptions humans must validate.</a:t>
+              <a:t>Ranks by fit, trigger, access, value, and feasibility</a:t>
             </a:r>
           </a:p>
         </p:txBody>
       </p:sp>
       <p:sp>
         <p:nvSpPr>
-          <p:cNvPr id="17" name="">
-            <a:extLst xmlns:a="http://schemas.openxmlformats.org/drawingml/2006/main">
-              <a:ext uri="{FF2B5EF4-FFF2-40B4-BE49-F238E27FC236}">
-                <a16:creationId xmlns:a16="http://schemas.microsoft.com/office/drawing/2014/main" id="{D048669A-689E-4265-B8C4-A1581F52192B}"/>
-              </a:ext>
-            </a:extLst>
-          </p:cNvPr>
-          <p:cNvSpPr>
-            <a:spLocks xmlns:a="http://schemas.openxmlformats.org/drawingml/2006/main" noGrp="1"/>
-          </p:cNvSpPr>
-          <p:nvPr/>
-        </p:nvSpPr>
-        <p:spPr>
-          <a:xfrm xmlns:a="http://schemas.openxmlformats.org/drawingml/2006/main">
-            <a:off x="6324600" y="1809750"/>
-            <a:ext cx="5867400" cy="4591050"/>
-          </a:xfrm>
-          <a:prstGeom xmlns:a="http://schemas.openxmlformats.org/drawingml/2006/main" prst="rect">
-            <a:avLst/>
-          </a:prstGeom>
-          <a:solidFill xmlns:a="http://schemas.openxmlformats.org/drawingml/2006/main">
-            <a:srgbClr val="FFFFFF"/>
-          </a:solidFill>
-          <a:ln xmlns:a="http://schemas.openxmlformats.org/drawingml/2006/main" w="9525">
-            <a:solidFill>
-              <a:srgbClr val="D9DDD6"/>
-            </a:solidFill>
-            <a:prstDash val="solid"/>
-          </a:ln>
-        </p:spPr>
-      </p:sp>
-      <p:sp>
-        <p:nvSpPr>
-          <p:cNvPr id="18" name="">
-            <a:extLst xmlns:a="http://schemas.openxmlformats.org/drawingml/2006/main">
-              <a:ext uri="{FF2B5EF4-FFF2-40B4-BE49-F238E27FC236}">
-                <a16:creationId xmlns:a16="http://schemas.microsoft.com/office/drawing/2014/main" id="{78AF0AEB-9454-4729-BED8-43358A4CC6CE}"/>
-              </a:ext>
-            </a:extLst>
-          </p:cNvPr>
-          <p:cNvSpPr>
-            <a:spLocks xmlns:a="http://schemas.openxmlformats.org/drawingml/2006/main" noGrp="1"/>
-          </p:cNvSpPr>
-          <p:nvPr/>
-        </p:nvSpPr>
-        <p:spPr>
-          <a:xfrm xmlns:a="http://schemas.openxmlformats.org/drawingml/2006/main">
-            <a:off x="6705600" y="2266950"/>
-            <a:ext cx="266700" cy="19050"/>
+          <p:cNvPr id="22" name="">
+            <a:extLst xmlns:a="http://schemas.openxmlformats.org/drawingml/2006/main">
+              <a:ext uri="{FF2B5EF4-FFF2-40B4-BE49-F238E27FC236}">
+                <a16:creationId xmlns:a16="http://schemas.microsoft.com/office/drawing/2014/main" id="{A1199BD3-CE5D-4FDA-9099-042068A9F47F}"/>
+              </a:ext>
+            </a:extLst>
+          </p:cNvPr>
+          <p:cNvSpPr>
+            <a:spLocks xmlns:a="http://schemas.openxmlformats.org/drawingml/2006/main" noGrp="1"/>
+          </p:cNvSpPr>
+          <p:nvPr/>
+        </p:nvSpPr>
+        <p:spPr>
+          <a:xfrm xmlns:a="http://schemas.openxmlformats.org/drawingml/2006/main">
+            <a:off x="6819900" y="3324225"/>
+            <a:ext cx="57150" cy="57150"/>
           </a:xfrm>
           <a:prstGeom xmlns:a="http://schemas.openxmlformats.org/drawingml/2006/main" prst="rect">
             <a:avLst/>
@@ -4041,22 +4237,22 @@
       </p:sp>
       <p:sp>
         <p:nvSpPr>
-          <p:cNvPr id="19" name="">
-            <a:extLst xmlns:a="http://schemas.openxmlformats.org/drawingml/2006/main">
-              <a:ext uri="{FF2B5EF4-FFF2-40B4-BE49-F238E27FC236}">
-                <a16:creationId xmlns:a16="http://schemas.microsoft.com/office/drawing/2014/main" id="{E396DFB4-F04C-4ACF-BA80-9D76861A75FE}"/>
-              </a:ext>
-            </a:extLst>
-          </p:cNvPr>
-          <p:cNvSpPr>
-            <a:spLocks xmlns:a="http://schemas.openxmlformats.org/drawingml/2006/main" noGrp="1"/>
-          </p:cNvSpPr>
-          <p:nvPr/>
-        </p:nvSpPr>
-        <p:spPr>
-          <a:xfrm xmlns:a="http://schemas.openxmlformats.org/drawingml/2006/main">
-            <a:off x="7067550" y="2190750"/>
-            <a:ext cx="2476500" cy="171450"/>
+          <p:cNvPr id="23" name="">
+            <a:extLst xmlns:a="http://schemas.openxmlformats.org/drawingml/2006/main">
+              <a:ext uri="{FF2B5EF4-FFF2-40B4-BE49-F238E27FC236}">
+                <a16:creationId xmlns:a16="http://schemas.microsoft.com/office/drawing/2014/main" id="{821626B0-DA48-4018-A452-F6499BA3F6DD}"/>
+              </a:ext>
+            </a:extLst>
+          </p:cNvPr>
+          <p:cNvSpPr>
+            <a:spLocks xmlns:a="http://schemas.openxmlformats.org/drawingml/2006/main" noGrp="1"/>
+          </p:cNvSpPr>
+          <p:nvPr/>
+        </p:nvSpPr>
+        <p:spPr>
+          <a:xfrm xmlns:a="http://schemas.openxmlformats.org/drawingml/2006/main">
+            <a:off x="6991350" y="3257550"/>
+            <a:ext cx="3619500" cy="438150"/>
           </a:xfrm>
           <a:prstGeom xmlns:a="http://schemas.openxmlformats.org/drawingml/2006/main" prst="rect">
             <a:avLst/>
@@ -4077,6 +4273,635 @@
         </p:spPr>
         <p:txBody>
           <a:bodyPr xmlns:a="http://schemas.openxmlformats.org/drawingml/2006/main" lIns="0" tIns="0" rIns="0" bIns="0" anchor="t"/>
+          <a:lstStyle xmlns:a="http://schemas.openxmlformats.org/drawingml/2006/main"/>
+          <a:p xmlns:a="http://schemas.openxmlformats.org/drawingml/2006/main">
+            <a:pPr algn="l">
+              <a:defRPr sz="1125" b="0">
+                <a:solidFill>
+                  <a:srgbClr val="172026"/>
+                </a:solidFill>
+                <a:latin typeface="Aptos"/>
+                <a:ea typeface="Aptos"/>
+                <a:cs typeface="Aptos"/>
+              </a:defRPr>
+            </a:pPr>
+            <a:r>
+              <a:rPr sz="1125" b="0">
+                <a:solidFill>
+                  <a:srgbClr val="172026"/>
+                </a:solidFill>
+                <a:latin typeface="Aptos"/>
+                <a:ea typeface="Aptos"/>
+                <a:cs typeface="Aptos"/>
+              </a:rPr>
+              <a:t>Explains why the chosen segment is narrow enough</a:t>
+            </a:r>
+          </a:p>
+        </p:txBody>
+      </p:sp>
+      <p:sp>
+        <p:nvSpPr>
+          <p:cNvPr id="24" name="">
+            <a:extLst xmlns:a="http://schemas.openxmlformats.org/drawingml/2006/main">
+              <a:ext uri="{FF2B5EF4-FFF2-40B4-BE49-F238E27FC236}">
+                <a16:creationId xmlns:a16="http://schemas.microsoft.com/office/drawing/2014/main" id="{E48BFDEA-18E3-4A17-8498-BB67C2D386DE}"/>
+              </a:ext>
+            </a:extLst>
+          </p:cNvPr>
+          <p:cNvSpPr>
+            <a:spLocks xmlns:a="http://schemas.openxmlformats.org/drawingml/2006/main" noGrp="1"/>
+          </p:cNvSpPr>
+          <p:nvPr/>
+        </p:nvSpPr>
+        <p:spPr>
+          <a:xfrm xmlns:a="http://schemas.openxmlformats.org/drawingml/2006/main">
+            <a:off x="6819900" y="3800475"/>
+            <a:ext cx="57150" cy="57150"/>
+          </a:xfrm>
+          <a:prstGeom xmlns:a="http://schemas.openxmlformats.org/drawingml/2006/main" prst="rect">
+            <a:avLst/>
+          </a:prstGeom>
+          <a:solidFill xmlns:a="http://schemas.openxmlformats.org/drawingml/2006/main">
+            <a:srgbClr val="1D6072"/>
+          </a:solidFill>
+          <a:ln xmlns:a="http://schemas.openxmlformats.org/drawingml/2006/main" w="0">
+            <a:solidFill>
+              <a:srgbClr val="000000">
+                <a:alpha val="0"/>
+              </a:srgbClr>
+            </a:solidFill>
+            <a:prstDash val="solid"/>
+          </a:ln>
+        </p:spPr>
+      </p:sp>
+      <p:sp>
+        <p:nvSpPr>
+          <p:cNvPr id="25" name="">
+            <a:extLst xmlns:a="http://schemas.openxmlformats.org/drawingml/2006/main">
+              <a:ext uri="{FF2B5EF4-FFF2-40B4-BE49-F238E27FC236}">
+                <a16:creationId xmlns:a16="http://schemas.microsoft.com/office/drawing/2014/main" id="{330DDE15-3F3A-4D48-8503-DFFF6A4BDD21}"/>
+              </a:ext>
+            </a:extLst>
+          </p:cNvPr>
+          <p:cNvSpPr>
+            <a:spLocks xmlns:a="http://schemas.openxmlformats.org/drawingml/2006/main" noGrp="1"/>
+          </p:cNvSpPr>
+          <p:nvPr/>
+        </p:nvSpPr>
+        <p:spPr>
+          <a:xfrm xmlns:a="http://schemas.openxmlformats.org/drawingml/2006/main">
+            <a:off x="6991350" y="3733800"/>
+            <a:ext cx="3619500" cy="438150"/>
+          </a:xfrm>
+          <a:prstGeom xmlns:a="http://schemas.openxmlformats.org/drawingml/2006/main" prst="rect">
+            <a:avLst/>
+          </a:prstGeom>
+          <a:solidFill xmlns:a="http://schemas.openxmlformats.org/drawingml/2006/main">
+            <a:srgbClr val="000000">
+              <a:alpha val="0"/>
+            </a:srgbClr>
+          </a:solidFill>
+          <a:ln xmlns:a="http://schemas.openxmlformats.org/drawingml/2006/main" w="0">
+            <a:solidFill>
+              <a:srgbClr val="000000">
+                <a:alpha val="0"/>
+              </a:srgbClr>
+            </a:solidFill>
+            <a:prstDash val="solid"/>
+          </a:ln>
+        </p:spPr>
+        <p:txBody>
+          <a:bodyPr xmlns:a="http://schemas.openxmlformats.org/drawingml/2006/main" lIns="0" tIns="0" rIns="0" bIns="0" anchor="t"/>
+          <a:lstStyle xmlns:a="http://schemas.openxmlformats.org/drawingml/2006/main"/>
+          <a:p xmlns:a="http://schemas.openxmlformats.org/drawingml/2006/main">
+            <a:pPr algn="l">
+              <a:defRPr sz="1125" b="0">
+                <a:solidFill>
+                  <a:srgbClr val="172026"/>
+                </a:solidFill>
+                <a:latin typeface="Aptos"/>
+                <a:ea typeface="Aptos"/>
+                <a:cs typeface="Aptos"/>
+              </a:defRPr>
+            </a:pPr>
+            <a:r>
+              <a:rPr sz="1125" b="0">
+                <a:solidFill>
+                  <a:srgbClr val="172026"/>
+                </a:solidFill>
+                <a:latin typeface="Aptos"/>
+                <a:ea typeface="Aptos"/>
+                <a:cs typeface="Aptos"/>
+              </a:rPr>
+              <a:t>Includes explicit rejection rules</a:t>
+            </a:r>
+          </a:p>
+        </p:txBody>
+      </p:sp>
+      <p:sp>
+        <p:nvSpPr>
+          <p:cNvPr id="26" name="">
+            <a:extLst xmlns:a="http://schemas.openxmlformats.org/drawingml/2006/main">
+              <a:ext uri="{FF2B5EF4-FFF2-40B4-BE49-F238E27FC236}">
+                <a16:creationId xmlns:a16="http://schemas.microsoft.com/office/drawing/2014/main" id="{B9502E6D-16F8-4B77-8412-76ED491CB0A3}"/>
+              </a:ext>
+            </a:extLst>
+          </p:cNvPr>
+          <p:cNvSpPr>
+            <a:spLocks xmlns:a="http://schemas.openxmlformats.org/drawingml/2006/main" noGrp="1"/>
+          </p:cNvSpPr>
+          <p:nvPr/>
+        </p:nvSpPr>
+        <p:spPr>
+          <a:xfrm xmlns:a="http://schemas.openxmlformats.org/drawingml/2006/main">
+            <a:off x="6819900" y="4276725"/>
+            <a:ext cx="57150" cy="57150"/>
+          </a:xfrm>
+          <a:prstGeom xmlns:a="http://schemas.openxmlformats.org/drawingml/2006/main" prst="rect">
+            <a:avLst/>
+          </a:prstGeom>
+          <a:solidFill xmlns:a="http://schemas.openxmlformats.org/drawingml/2006/main">
+            <a:srgbClr val="1D6072"/>
+          </a:solidFill>
+          <a:ln xmlns:a="http://schemas.openxmlformats.org/drawingml/2006/main" w="0">
+            <a:solidFill>
+              <a:srgbClr val="000000">
+                <a:alpha val="0"/>
+              </a:srgbClr>
+            </a:solidFill>
+            <a:prstDash val="solid"/>
+          </a:ln>
+        </p:spPr>
+      </p:sp>
+      <p:sp>
+        <p:nvSpPr>
+          <p:cNvPr id="27" name="">
+            <a:extLst xmlns:a="http://schemas.openxmlformats.org/drawingml/2006/main">
+              <a:ext uri="{FF2B5EF4-FFF2-40B4-BE49-F238E27FC236}">
+                <a16:creationId xmlns:a16="http://schemas.microsoft.com/office/drawing/2014/main" id="{700DF785-C61E-410A-95D3-947574EA7229}"/>
+              </a:ext>
+            </a:extLst>
+          </p:cNvPr>
+          <p:cNvSpPr>
+            <a:spLocks xmlns:a="http://schemas.openxmlformats.org/drawingml/2006/main" noGrp="1"/>
+          </p:cNvSpPr>
+          <p:nvPr/>
+        </p:nvSpPr>
+        <p:spPr>
+          <a:xfrm xmlns:a="http://schemas.openxmlformats.org/drawingml/2006/main">
+            <a:off x="6991350" y="4210050"/>
+            <a:ext cx="3619500" cy="438150"/>
+          </a:xfrm>
+          <a:prstGeom xmlns:a="http://schemas.openxmlformats.org/drawingml/2006/main" prst="rect">
+            <a:avLst/>
+          </a:prstGeom>
+          <a:solidFill xmlns:a="http://schemas.openxmlformats.org/drawingml/2006/main">
+            <a:srgbClr val="000000">
+              <a:alpha val="0"/>
+            </a:srgbClr>
+          </a:solidFill>
+          <a:ln xmlns:a="http://schemas.openxmlformats.org/drawingml/2006/main" w="0">
+            <a:solidFill>
+              <a:srgbClr val="000000">
+                <a:alpha val="0"/>
+              </a:srgbClr>
+            </a:solidFill>
+            <a:prstDash val="solid"/>
+          </a:ln>
+        </p:spPr>
+        <p:txBody>
+          <a:bodyPr xmlns:a="http://schemas.openxmlformats.org/drawingml/2006/main" lIns="0" tIns="0" rIns="0" bIns="0" anchor="t"/>
+          <a:lstStyle xmlns:a="http://schemas.openxmlformats.org/drawingml/2006/main"/>
+          <a:p xmlns:a="http://schemas.openxmlformats.org/drawingml/2006/main">
+            <a:pPr algn="l">
+              <a:defRPr sz="1125" b="0">
+                <a:solidFill>
+                  <a:srgbClr val="172026"/>
+                </a:solidFill>
+                <a:latin typeface="Aptos"/>
+                <a:ea typeface="Aptos"/>
+                <a:cs typeface="Aptos"/>
+              </a:defRPr>
+            </a:pPr>
+            <a:r>
+              <a:rPr sz="1125" b="0">
+                <a:solidFill>
+                  <a:srgbClr val="172026"/>
+                </a:solidFill>
+                <a:latin typeface="Aptos"/>
+                <a:ea typeface="Aptos"/>
+                <a:cs typeface="Aptos"/>
+              </a:rPr>
+              <a:t>Names likely committee roles and demand signals</a:t>
+            </a:r>
+          </a:p>
+        </p:txBody>
+      </p:sp>
+      <p:sp>
+        <p:nvSpPr>
+          <p:cNvPr id="28" name="">
+            <a:extLst xmlns:a="http://schemas.openxmlformats.org/drawingml/2006/main">
+              <a:ext uri="{FF2B5EF4-FFF2-40B4-BE49-F238E27FC236}">
+                <a16:creationId xmlns:a16="http://schemas.microsoft.com/office/drawing/2014/main" id="{DD4BBF77-5C33-45EE-B3F2-B5705148CB61}"/>
+              </a:ext>
+            </a:extLst>
+          </p:cNvPr>
+          <p:cNvSpPr>
+            <a:spLocks xmlns:a="http://schemas.openxmlformats.org/drawingml/2006/main" noGrp="1"/>
+          </p:cNvSpPr>
+          <p:nvPr/>
+        </p:nvSpPr>
+        <p:spPr>
+          <a:xfrm xmlns:a="http://schemas.openxmlformats.org/drawingml/2006/main">
+            <a:off x="514350" y="6438900"/>
+            <a:ext cx="10915650" cy="9525"/>
+          </a:xfrm>
+          <a:prstGeom xmlns:a="http://schemas.openxmlformats.org/drawingml/2006/main" prst="rect">
+            <a:avLst/>
+          </a:prstGeom>
+          <a:solidFill xmlns:a="http://schemas.openxmlformats.org/drawingml/2006/main">
+            <a:srgbClr val="D9DDD6"/>
+          </a:solidFill>
+          <a:ln xmlns:a="http://schemas.openxmlformats.org/drawingml/2006/main" w="0">
+            <a:solidFill>
+              <a:srgbClr val="000000">
+                <a:alpha val="0"/>
+              </a:srgbClr>
+            </a:solidFill>
+            <a:prstDash val="solid"/>
+          </a:ln>
+        </p:spPr>
+      </p:sp>
+      <p:sp>
+        <p:nvSpPr>
+          <p:cNvPr id="29" name="">
+            <a:extLst xmlns:a="http://schemas.openxmlformats.org/drawingml/2006/main">
+              <a:ext uri="{FF2B5EF4-FFF2-40B4-BE49-F238E27FC236}">
+                <a16:creationId xmlns:a16="http://schemas.microsoft.com/office/drawing/2014/main" id="{443CCF7F-722A-4C7C-A87B-1C119B30A2E6}"/>
+              </a:ext>
+            </a:extLst>
+          </p:cNvPr>
+          <p:cNvSpPr>
+            <a:spLocks xmlns:a="http://schemas.openxmlformats.org/drawingml/2006/main" noGrp="1"/>
+          </p:cNvSpPr>
+          <p:nvPr/>
+        </p:nvSpPr>
+        <p:spPr>
+          <a:xfrm xmlns:a="http://schemas.openxmlformats.org/drawingml/2006/main">
+            <a:off x="514350" y="6553200"/>
+            <a:ext cx="5905500" cy="171450"/>
+          </a:xfrm>
+          <a:prstGeom xmlns:a="http://schemas.openxmlformats.org/drawingml/2006/main" prst="rect">
+            <a:avLst/>
+          </a:prstGeom>
+          <a:solidFill xmlns:a="http://schemas.openxmlformats.org/drawingml/2006/main">
+            <a:srgbClr val="000000">
+              <a:alpha val="0"/>
+            </a:srgbClr>
+          </a:solidFill>
+          <a:ln xmlns:a="http://schemas.openxmlformats.org/drawingml/2006/main" w="0">
+            <a:solidFill>
+              <a:srgbClr val="000000">
+                <a:alpha val="0"/>
+              </a:srgbClr>
+            </a:solidFill>
+            <a:prstDash val="solid"/>
+          </a:ln>
+        </p:spPr>
+        <p:txBody>
+          <a:bodyPr xmlns:a="http://schemas.openxmlformats.org/drawingml/2006/main" lIns="0" tIns="0" rIns="0" bIns="0" anchor="t"/>
+          <a:lstStyle xmlns:a="http://schemas.openxmlformats.org/drawingml/2006/main"/>
+          <a:p xmlns:a="http://schemas.openxmlformats.org/drawingml/2006/main">
+            <a:pPr algn="l">
+              <a:defRPr sz="675" b="0">
+                <a:solidFill>
+                  <a:srgbClr val="59646A"/>
+                </a:solidFill>
+                <a:latin typeface="Aptos"/>
+                <a:ea typeface="Aptos"/>
+                <a:cs typeface="Aptos"/>
+              </a:defRPr>
+            </a:pPr>
+            <a:r>
+              <a:rPr sz="675" b="0">
+                <a:solidFill>
+                  <a:srgbClr val="59646A"/>
+                </a:solidFill>
+                <a:latin typeface="Aptos"/>
+                <a:ea typeface="Aptos"/>
+                <a:cs typeface="Aptos"/>
+              </a:rPr>
+              <a:t>Lesson 03 - ICP, Segments, And Demand Focus</a:t>
+            </a:r>
+          </a:p>
+        </p:txBody>
+      </p:sp>
+      <p:sp>
+        <p:nvSpPr>
+          <p:cNvPr id="30" name="">
+            <a:extLst xmlns:a="http://schemas.openxmlformats.org/drawingml/2006/main">
+              <a:ext uri="{FF2B5EF4-FFF2-40B4-BE49-F238E27FC236}">
+                <a16:creationId xmlns:a16="http://schemas.microsoft.com/office/drawing/2014/main" id="{C68202C2-45EC-4F40-8CEF-DB23DE103B68}"/>
+              </a:ext>
+            </a:extLst>
+          </p:cNvPr>
+          <p:cNvSpPr>
+            <a:spLocks xmlns:a="http://schemas.openxmlformats.org/drawingml/2006/main" noGrp="1"/>
+          </p:cNvSpPr>
+          <p:nvPr/>
+        </p:nvSpPr>
+        <p:spPr>
+          <a:xfrm xmlns:a="http://schemas.openxmlformats.org/drawingml/2006/main">
+            <a:off x="5334000" y="6553200"/>
+            <a:ext cx="4095750" cy="171450"/>
+          </a:xfrm>
+          <a:prstGeom xmlns:a="http://schemas.openxmlformats.org/drawingml/2006/main" prst="rect">
+            <a:avLst/>
+          </a:prstGeom>
+          <a:solidFill xmlns:a="http://schemas.openxmlformats.org/drawingml/2006/main">
+            <a:srgbClr val="000000">
+              <a:alpha val="0"/>
+            </a:srgbClr>
+          </a:solidFill>
+          <a:ln xmlns:a="http://schemas.openxmlformats.org/drawingml/2006/main" w="0">
+            <a:solidFill>
+              <a:srgbClr val="000000">
+                <a:alpha val="0"/>
+              </a:srgbClr>
+            </a:solidFill>
+            <a:prstDash val="solid"/>
+          </a:ln>
+        </p:spPr>
+        <p:txBody>
+          <a:bodyPr xmlns:a="http://schemas.openxmlformats.org/drawingml/2006/main" lIns="0" tIns="0" rIns="0" bIns="0" anchor="t"/>
+          <a:lstStyle xmlns:a="http://schemas.openxmlformats.org/drawingml/2006/main"/>
+          <a:p xmlns:a="http://schemas.openxmlformats.org/drawingml/2006/main">
+            <a:pPr algn="r">
+              <a:defRPr sz="600" b="0">
+                <a:solidFill>
+                  <a:srgbClr val="59646A"/>
+                </a:solidFill>
+                <a:latin typeface="Aptos"/>
+                <a:ea typeface="Aptos"/>
+                <a:cs typeface="Aptos"/>
+              </a:defRPr>
+            </a:pPr>
+            <a:r>
+              <a:rPr sz="600" b="0">
+                <a:solidFill>
+                  <a:srgbClr val="59646A"/>
+                </a:solidFill>
+                <a:latin typeface="Aptos"/>
+                <a:ea typeface="Aptos"/>
+                <a:cs typeface="Aptos"/>
+              </a:rPr>
+              <a:t>Source: modules/module-01-industrial-demand-generation/lessons/03-icp-segments-and-demand-focus.md @ 9e28222</a:t>
+            </a:r>
+          </a:p>
+        </p:txBody>
+      </p:sp>
+      <p:sp>
+        <p:nvSpPr>
+          <p:cNvPr id="31" name="">
+            <a:extLst xmlns:a="http://schemas.openxmlformats.org/drawingml/2006/main">
+              <a:ext uri="{FF2B5EF4-FFF2-40B4-BE49-F238E27FC236}">
+                <a16:creationId xmlns:a16="http://schemas.microsoft.com/office/drawing/2014/main" id="{088F5DEA-264B-4804-A5F2-26E4107B58B9}"/>
+              </a:ext>
+            </a:extLst>
+          </p:cNvPr>
+          <p:cNvSpPr>
+            <a:spLocks xmlns:a="http://schemas.openxmlformats.org/drawingml/2006/main" noGrp="1"/>
+          </p:cNvSpPr>
+          <p:nvPr/>
+        </p:nvSpPr>
+        <p:spPr>
+          <a:xfrm xmlns:a="http://schemas.openxmlformats.org/drawingml/2006/main">
+            <a:off x="10668000" y="6553200"/>
+            <a:ext cx="762000" cy="171450"/>
+          </a:xfrm>
+          <a:prstGeom xmlns:a="http://schemas.openxmlformats.org/drawingml/2006/main" prst="rect">
+            <a:avLst/>
+          </a:prstGeom>
+          <a:solidFill xmlns:a="http://schemas.openxmlformats.org/drawingml/2006/main">
+            <a:srgbClr val="000000">
+              <a:alpha val="0"/>
+            </a:srgbClr>
+          </a:solidFill>
+          <a:ln xmlns:a="http://schemas.openxmlformats.org/drawingml/2006/main" w="0">
+            <a:solidFill>
+              <a:srgbClr val="000000">
+                <a:alpha val="0"/>
+              </a:srgbClr>
+            </a:solidFill>
+            <a:prstDash val="solid"/>
+          </a:ln>
+        </p:spPr>
+        <p:txBody>
+          <a:bodyPr xmlns:a="http://schemas.openxmlformats.org/drawingml/2006/main" lIns="0" tIns="0" rIns="0" bIns="0" anchor="t"/>
+          <a:lstStyle xmlns:a="http://schemas.openxmlformats.org/drawingml/2006/main"/>
+          <a:p xmlns:a="http://schemas.openxmlformats.org/drawingml/2006/main">
+            <a:pPr algn="r">
+              <a:defRPr sz="675" b="0">
+                <a:solidFill>
+                  <a:srgbClr val="59646A"/>
+                </a:solidFill>
+                <a:latin typeface="Aptos"/>
+                <a:ea typeface="Aptos"/>
+                <a:cs typeface="Aptos"/>
+              </a:defRPr>
+            </a:pPr>
+            <a:r>
+              <a:rPr sz="675" b="0">
+                <a:solidFill>
+                  <a:srgbClr val="59646A"/>
+                </a:solidFill>
+                <a:latin typeface="Aptos"/>
+                <a:ea typeface="Aptos"/>
+                <a:cs typeface="Aptos"/>
+              </a:rPr>
+              <a:t>10/15</a:t>
+            </a:r>
+          </a:p>
+        </p:txBody>
+      </p:sp>
+      <p:sp>
+        <p:nvSpPr>
+          <p:cNvPr id="32" name="">
+            <a:extLst xmlns:a="http://schemas.openxmlformats.org/drawingml/2006/main">
+              <a:ext uri="{FF2B5EF4-FFF2-40B4-BE49-F238E27FC236}">
+                <a16:creationId xmlns:a16="http://schemas.microsoft.com/office/drawing/2014/main" id="{880F1731-CDF8-4B28-BF2B-270C31190F30}"/>
+              </a:ext>
+            </a:extLst>
+          </p:cNvPr>
+          <p:cNvSpPr>
+            <a:spLocks xmlns:a="http://schemas.openxmlformats.org/drawingml/2006/main" noGrp="1"/>
+          </p:cNvSpPr>
+          <p:nvPr/>
+        </p:nvSpPr>
+        <p:spPr>
+          <a:xfrm xmlns:a="http://schemas.openxmlformats.org/drawingml/2006/main">
+            <a:off x="0" y="0"/>
+            <a:ext cx="12192000" cy="1809750"/>
+          </a:xfrm>
+          <a:prstGeom xmlns:a="http://schemas.openxmlformats.org/drawingml/2006/main" prst="rect">
+            <a:avLst/>
+          </a:prstGeom>
+          <a:solidFill xmlns:a="http://schemas.openxmlformats.org/drawingml/2006/main">
+            <a:srgbClr val="F5F6F2"/>
+          </a:solidFill>
+          <a:ln xmlns:a="http://schemas.openxmlformats.org/drawingml/2006/main" w="0">
+            <a:solidFill>
+              <a:srgbClr val="000000">
+                <a:alpha val="0"/>
+              </a:srgbClr>
+            </a:solidFill>
+            <a:prstDash val="solid"/>
+          </a:ln>
+        </p:spPr>
+      </p:sp>
+      <p:sp>
+        <p:nvSpPr>
+          <p:cNvPr id="33" name="">
+            <a:extLst xmlns:a="http://schemas.openxmlformats.org/drawingml/2006/main">
+              <a:ext uri="{FF2B5EF4-FFF2-40B4-BE49-F238E27FC236}">
+                <a16:creationId xmlns:a16="http://schemas.microsoft.com/office/drawing/2014/main" id="{D88ECB50-8B2D-4A5C-A75D-AB91E7E5AA5F}"/>
+              </a:ext>
+            </a:extLst>
+          </p:cNvPr>
+          <p:cNvSpPr>
+            <a:spLocks xmlns:a="http://schemas.openxmlformats.org/drawingml/2006/main" noGrp="1"/>
+          </p:cNvSpPr>
+          <p:nvPr/>
+        </p:nvSpPr>
+        <p:spPr>
+          <a:xfrm xmlns:a="http://schemas.openxmlformats.org/drawingml/2006/main">
+            <a:off x="0" y="0"/>
+            <a:ext cx="171450" cy="1809750"/>
+          </a:xfrm>
+          <a:prstGeom xmlns:a="http://schemas.openxmlformats.org/drawingml/2006/main" prst="rect">
+            <a:avLst/>
+          </a:prstGeom>
+          <a:solidFill xmlns:a="http://schemas.openxmlformats.org/drawingml/2006/main">
+            <a:srgbClr val="12232B"/>
+          </a:solidFill>
+          <a:ln xmlns:a="http://schemas.openxmlformats.org/drawingml/2006/main" w="0">
+            <a:solidFill>
+              <a:srgbClr val="000000">
+                <a:alpha val="0"/>
+              </a:srgbClr>
+            </a:solidFill>
+            <a:prstDash val="solid"/>
+          </a:ln>
+        </p:spPr>
+      </p:sp>
+      <p:sp>
+        <p:nvSpPr>
+          <p:cNvPr id="34" name="">
+            <a:extLst xmlns:a="http://schemas.openxmlformats.org/drawingml/2006/main">
+              <a:ext uri="{FF2B5EF4-FFF2-40B4-BE49-F238E27FC236}">
+                <a16:creationId xmlns:a16="http://schemas.microsoft.com/office/drawing/2014/main" id="{2CEBAAA9-A5F2-4E5B-B8D7-959D6226C828}"/>
+              </a:ext>
+            </a:extLst>
+          </p:cNvPr>
+          <p:cNvSpPr>
+            <a:spLocks xmlns:a="http://schemas.openxmlformats.org/drawingml/2006/main" noGrp="1"/>
+          </p:cNvSpPr>
+          <p:nvPr/>
+        </p:nvSpPr>
+        <p:spPr>
+          <a:xfrm xmlns:a="http://schemas.openxmlformats.org/drawingml/2006/main">
+            <a:off x="171450" y="0"/>
+            <a:ext cx="57150" cy="1809750"/>
+          </a:xfrm>
+          <a:prstGeom xmlns:a="http://schemas.openxmlformats.org/drawingml/2006/main" prst="rect">
+            <a:avLst/>
+          </a:prstGeom>
+          <a:solidFill xmlns:a="http://schemas.openxmlformats.org/drawingml/2006/main">
+            <a:srgbClr val="A85D2A"/>
+          </a:solidFill>
+          <a:ln xmlns:a="http://schemas.openxmlformats.org/drawingml/2006/main" w="0">
+            <a:solidFill>
+              <a:srgbClr val="000000">
+                <a:alpha val="0"/>
+              </a:srgbClr>
+            </a:solidFill>
+            <a:prstDash val="solid"/>
+          </a:ln>
+        </p:spPr>
+      </p:sp>
+      <p:sp>
+        <p:nvSpPr>
+          <p:cNvPr id="35" name="kicker-03-marker">
+            <a:extLst xmlns:a="http://schemas.openxmlformats.org/drawingml/2006/main">
+              <a:ext uri="{FF2B5EF4-FFF2-40B4-BE49-F238E27FC236}">
+                <a16:creationId xmlns:a16="http://schemas.microsoft.com/office/drawing/2014/main" id="{2A5EBF6F-547D-492F-A342-76F41F823BC1}"/>
+              </a:ext>
+            </a:extLst>
+          </p:cNvPr>
+          <p:cNvSpPr>
+            <a:spLocks xmlns:a="http://schemas.openxmlformats.org/drawingml/2006/main" noGrp="1"/>
+          </p:cNvSpPr>
+          <p:nvPr/>
+        </p:nvSpPr>
+        <p:spPr>
+          <a:xfrm xmlns:a="http://schemas.openxmlformats.org/drawingml/2006/main">
+            <a:off x="514350" y="390525"/>
+            <a:ext cx="76200" cy="76200"/>
+          </a:xfrm>
+          <a:prstGeom xmlns:a="http://schemas.openxmlformats.org/drawingml/2006/main" prst="rect">
+            <a:avLst/>
+          </a:prstGeom>
+          <a:solidFill xmlns:a="http://schemas.openxmlformats.org/drawingml/2006/main">
+            <a:srgbClr val="A85D2A"/>
+          </a:solidFill>
+          <a:ln xmlns:a="http://schemas.openxmlformats.org/drawingml/2006/main" w="0">
+            <a:solidFill>
+              <a:srgbClr val="000000">
+                <a:alpha val="0"/>
+              </a:srgbClr>
+            </a:solidFill>
+            <a:prstDash val="solid"/>
+          </a:ln>
+        </p:spPr>
+      </p:sp>
+      <p:sp>
+        <p:nvSpPr>
+          <p:cNvPr id="36" name="kicker-03-label">
+            <a:extLst xmlns:a="http://schemas.openxmlformats.org/drawingml/2006/main">
+              <a:ext uri="{FF2B5EF4-FFF2-40B4-BE49-F238E27FC236}">
+                <a16:creationId xmlns:a16="http://schemas.microsoft.com/office/drawing/2014/main" id="{24272E9A-2DCB-43F8-92AE-43D95592B324}"/>
+              </a:ext>
+            </a:extLst>
+          </p:cNvPr>
+          <p:cNvSpPr>
+            <a:spLocks xmlns:a="http://schemas.openxmlformats.org/drawingml/2006/main" noGrp="1"/>
+          </p:cNvSpPr>
+          <p:nvPr/>
+        </p:nvSpPr>
+        <p:spPr>
+          <a:xfrm xmlns:a="http://schemas.openxmlformats.org/drawingml/2006/main">
+            <a:off x="685800" y="323850"/>
+            <a:ext cx="7524750" cy="228600"/>
+          </a:xfrm>
+          <a:prstGeom xmlns:a="http://schemas.openxmlformats.org/drawingml/2006/main" prst="rect">
+            <a:avLst/>
+          </a:prstGeom>
+          <a:solidFill xmlns:a="http://schemas.openxmlformats.org/drawingml/2006/main">
+            <a:srgbClr val="000000">
+              <a:alpha val="0"/>
+            </a:srgbClr>
+          </a:solidFill>
+          <a:ln xmlns:a="http://schemas.openxmlformats.org/drawingml/2006/main" w="0">
+            <a:solidFill>
+              <a:srgbClr val="000000">
+                <a:alpha val="0"/>
+              </a:srgbClr>
+            </a:solidFill>
+            <a:prstDash val="solid"/>
+          </a:ln>
+        </p:spPr>
+        <p:txBody>
+          <a:bodyPr xmlns:a="http://schemas.openxmlformats.org/drawingml/2006/main" lIns="0" tIns="0" rIns="0" bIns="0" anchor="ctr"/>
           <a:lstStyle xmlns:a="http://schemas.openxmlformats.org/drawingml/2006/main"/>
           <a:p xmlns:a="http://schemas.openxmlformats.org/drawingml/2006/main">
             <a:pPr algn="l">
@@ -4098,844 +4923,17 @@
                 <a:ea typeface="Aptos"/>
                 <a:cs typeface="Aptos"/>
               </a:rPr>
-              <a:t>REQUIRED OUTPUT STANDARD</a:t>
+              <a:t>MODULE 1 / LESSON 03 / STRUCTURED DRAFTING DRILL</a:t>
             </a:r>
           </a:p>
         </p:txBody>
       </p:sp>
       <p:sp>
         <p:nvSpPr>
-          <p:cNvPr id="20" name="">
-            <a:extLst xmlns:a="http://schemas.openxmlformats.org/drawingml/2006/main">
-              <a:ext uri="{FF2B5EF4-FFF2-40B4-BE49-F238E27FC236}">
-                <a16:creationId xmlns:a16="http://schemas.microsoft.com/office/drawing/2014/main" id="{0BBCD4B1-D27C-4E97-87C7-7651B38362AB}"/>
-              </a:ext>
-            </a:extLst>
-          </p:cNvPr>
-          <p:cNvSpPr>
-            <a:spLocks xmlns:a="http://schemas.openxmlformats.org/drawingml/2006/main" noGrp="1"/>
-          </p:cNvSpPr>
-          <p:nvPr/>
-        </p:nvSpPr>
-        <p:spPr>
-          <a:xfrm xmlns:a="http://schemas.openxmlformats.org/drawingml/2006/main">
-            <a:off x="6705600" y="2714625"/>
-            <a:ext cx="57150" cy="57150"/>
-          </a:xfrm>
-          <a:prstGeom xmlns:a="http://schemas.openxmlformats.org/drawingml/2006/main" prst="rect">
-            <a:avLst/>
-          </a:prstGeom>
-          <a:solidFill xmlns:a="http://schemas.openxmlformats.org/drawingml/2006/main">
-            <a:srgbClr val="1D6072"/>
-          </a:solidFill>
-          <a:ln xmlns:a="http://schemas.openxmlformats.org/drawingml/2006/main" w="0">
-            <a:solidFill>
-              <a:srgbClr val="000000">
-                <a:alpha val="0"/>
-              </a:srgbClr>
-            </a:solidFill>
-            <a:prstDash val="solid"/>
-          </a:ln>
-        </p:spPr>
-      </p:sp>
-      <p:sp>
-        <p:nvSpPr>
-          <p:cNvPr id="21" name="">
-            <a:extLst xmlns:a="http://schemas.openxmlformats.org/drawingml/2006/main">
-              <a:ext uri="{FF2B5EF4-FFF2-40B4-BE49-F238E27FC236}">
-                <a16:creationId xmlns:a16="http://schemas.microsoft.com/office/drawing/2014/main" id="{DDC6603A-1728-4D0E-8813-6D7FBED0EC47}"/>
-              </a:ext>
-            </a:extLst>
-          </p:cNvPr>
-          <p:cNvSpPr>
-            <a:spLocks xmlns:a="http://schemas.openxmlformats.org/drawingml/2006/main" noGrp="1"/>
-          </p:cNvSpPr>
-          <p:nvPr/>
-        </p:nvSpPr>
-        <p:spPr>
-          <a:xfrm xmlns:a="http://schemas.openxmlformats.org/drawingml/2006/main">
-            <a:off x="6877050" y="2647950"/>
-            <a:ext cx="4210050" cy="438150"/>
-          </a:xfrm>
-          <a:prstGeom xmlns:a="http://schemas.openxmlformats.org/drawingml/2006/main" prst="rect">
-            <a:avLst/>
-          </a:prstGeom>
-          <a:solidFill xmlns:a="http://schemas.openxmlformats.org/drawingml/2006/main">
-            <a:srgbClr val="000000">
-              <a:alpha val="0"/>
-            </a:srgbClr>
-          </a:solidFill>
-          <a:ln xmlns:a="http://schemas.openxmlformats.org/drawingml/2006/main" w="0">
-            <a:solidFill>
-              <a:srgbClr val="000000">
-                <a:alpha val="0"/>
-              </a:srgbClr>
-            </a:solidFill>
-            <a:prstDash val="solid"/>
-          </a:ln>
-        </p:spPr>
-        <p:txBody>
-          <a:bodyPr xmlns:a="http://schemas.openxmlformats.org/drawingml/2006/main" lIns="0" tIns="0" rIns="0" bIns="0" anchor="t"/>
-          <a:lstStyle xmlns:a="http://schemas.openxmlformats.org/drawingml/2006/main"/>
-          <a:p xmlns:a="http://schemas.openxmlformats.org/drawingml/2006/main">
-            <a:pPr algn="l">
-              <a:defRPr sz="1125" b="0">
-                <a:solidFill>
-                  <a:srgbClr val="172026"/>
-                </a:solidFill>
-                <a:latin typeface="Aptos"/>
-                <a:ea typeface="Aptos"/>
-                <a:cs typeface="Aptos"/>
-              </a:defRPr>
-            </a:pPr>
-            <a:r>
-              <a:rPr sz="1125" b="0">
-                <a:solidFill>
-                  <a:srgbClr val="172026"/>
-                </a:solidFill>
-                <a:latin typeface="Aptos"/>
-                <a:ea typeface="Aptos"/>
-                <a:cs typeface="Aptos"/>
-              </a:rPr>
-              <a:t>Ranks by fit, trigger, access, value, and feasibility</a:t>
-            </a:r>
-          </a:p>
-        </p:txBody>
-      </p:sp>
-      <p:sp>
-        <p:nvSpPr>
-          <p:cNvPr id="22" name="">
-            <a:extLst xmlns:a="http://schemas.openxmlformats.org/drawingml/2006/main">
-              <a:ext uri="{FF2B5EF4-FFF2-40B4-BE49-F238E27FC236}">
-                <a16:creationId xmlns:a16="http://schemas.microsoft.com/office/drawing/2014/main" id="{B44A3F33-AB18-48E2-8042-03542A8173D3}"/>
-              </a:ext>
-            </a:extLst>
-          </p:cNvPr>
-          <p:cNvSpPr>
-            <a:spLocks xmlns:a="http://schemas.openxmlformats.org/drawingml/2006/main" noGrp="1"/>
-          </p:cNvSpPr>
-          <p:nvPr/>
-        </p:nvSpPr>
-        <p:spPr>
-          <a:xfrm xmlns:a="http://schemas.openxmlformats.org/drawingml/2006/main">
-            <a:off x="6705600" y="3190875"/>
-            <a:ext cx="57150" cy="57150"/>
-          </a:xfrm>
-          <a:prstGeom xmlns:a="http://schemas.openxmlformats.org/drawingml/2006/main" prst="rect">
-            <a:avLst/>
-          </a:prstGeom>
-          <a:solidFill xmlns:a="http://schemas.openxmlformats.org/drawingml/2006/main">
-            <a:srgbClr val="1D6072"/>
-          </a:solidFill>
-          <a:ln xmlns:a="http://schemas.openxmlformats.org/drawingml/2006/main" w="0">
-            <a:solidFill>
-              <a:srgbClr val="000000">
-                <a:alpha val="0"/>
-              </a:srgbClr>
-            </a:solidFill>
-            <a:prstDash val="solid"/>
-          </a:ln>
-        </p:spPr>
-      </p:sp>
-      <p:sp>
-        <p:nvSpPr>
-          <p:cNvPr id="23" name="">
-            <a:extLst xmlns:a="http://schemas.openxmlformats.org/drawingml/2006/main">
-              <a:ext uri="{FF2B5EF4-FFF2-40B4-BE49-F238E27FC236}">
-                <a16:creationId xmlns:a16="http://schemas.microsoft.com/office/drawing/2014/main" id="{5168F3AB-A8E9-4840-8D1A-FE83E58629A2}"/>
-              </a:ext>
-            </a:extLst>
-          </p:cNvPr>
-          <p:cNvSpPr>
-            <a:spLocks xmlns:a="http://schemas.openxmlformats.org/drawingml/2006/main" noGrp="1"/>
-          </p:cNvSpPr>
-          <p:nvPr/>
-        </p:nvSpPr>
-        <p:spPr>
-          <a:xfrm xmlns:a="http://schemas.openxmlformats.org/drawingml/2006/main">
-            <a:off x="6877050" y="3124200"/>
-            <a:ext cx="4210050" cy="438150"/>
-          </a:xfrm>
-          <a:prstGeom xmlns:a="http://schemas.openxmlformats.org/drawingml/2006/main" prst="rect">
-            <a:avLst/>
-          </a:prstGeom>
-          <a:solidFill xmlns:a="http://schemas.openxmlformats.org/drawingml/2006/main">
-            <a:srgbClr val="000000">
-              <a:alpha val="0"/>
-            </a:srgbClr>
-          </a:solidFill>
-          <a:ln xmlns:a="http://schemas.openxmlformats.org/drawingml/2006/main" w="0">
-            <a:solidFill>
-              <a:srgbClr val="000000">
-                <a:alpha val="0"/>
-              </a:srgbClr>
-            </a:solidFill>
-            <a:prstDash val="solid"/>
-          </a:ln>
-        </p:spPr>
-        <p:txBody>
-          <a:bodyPr xmlns:a="http://schemas.openxmlformats.org/drawingml/2006/main" lIns="0" tIns="0" rIns="0" bIns="0" anchor="t"/>
-          <a:lstStyle xmlns:a="http://schemas.openxmlformats.org/drawingml/2006/main"/>
-          <a:p xmlns:a="http://schemas.openxmlformats.org/drawingml/2006/main">
-            <a:pPr algn="l">
-              <a:defRPr sz="1125" b="0">
-                <a:solidFill>
-                  <a:srgbClr val="172026"/>
-                </a:solidFill>
-                <a:latin typeface="Aptos"/>
-                <a:ea typeface="Aptos"/>
-                <a:cs typeface="Aptos"/>
-              </a:defRPr>
-            </a:pPr>
-            <a:r>
-              <a:rPr sz="1125" b="0">
-                <a:solidFill>
-                  <a:srgbClr val="172026"/>
-                </a:solidFill>
-                <a:latin typeface="Aptos"/>
-                <a:ea typeface="Aptos"/>
-                <a:cs typeface="Aptos"/>
-              </a:rPr>
-              <a:t>Explains why the chosen segment is narrow enough</a:t>
-            </a:r>
-          </a:p>
-        </p:txBody>
-      </p:sp>
-      <p:sp>
-        <p:nvSpPr>
-          <p:cNvPr id="24" name="">
-            <a:extLst xmlns:a="http://schemas.openxmlformats.org/drawingml/2006/main">
-              <a:ext uri="{FF2B5EF4-FFF2-40B4-BE49-F238E27FC236}">
-                <a16:creationId xmlns:a16="http://schemas.microsoft.com/office/drawing/2014/main" id="{0046F1FA-33A2-435A-8032-DA693201BEF5}"/>
-              </a:ext>
-            </a:extLst>
-          </p:cNvPr>
-          <p:cNvSpPr>
-            <a:spLocks xmlns:a="http://schemas.openxmlformats.org/drawingml/2006/main" noGrp="1"/>
-          </p:cNvSpPr>
-          <p:nvPr/>
-        </p:nvSpPr>
-        <p:spPr>
-          <a:xfrm xmlns:a="http://schemas.openxmlformats.org/drawingml/2006/main">
-            <a:off x="6705600" y="3667125"/>
-            <a:ext cx="57150" cy="57150"/>
-          </a:xfrm>
-          <a:prstGeom xmlns:a="http://schemas.openxmlformats.org/drawingml/2006/main" prst="rect">
-            <a:avLst/>
-          </a:prstGeom>
-          <a:solidFill xmlns:a="http://schemas.openxmlformats.org/drawingml/2006/main">
-            <a:srgbClr val="1D6072"/>
-          </a:solidFill>
-          <a:ln xmlns:a="http://schemas.openxmlformats.org/drawingml/2006/main" w="0">
-            <a:solidFill>
-              <a:srgbClr val="000000">
-                <a:alpha val="0"/>
-              </a:srgbClr>
-            </a:solidFill>
-            <a:prstDash val="solid"/>
-          </a:ln>
-        </p:spPr>
-      </p:sp>
-      <p:sp>
-        <p:nvSpPr>
-          <p:cNvPr id="25" name="">
-            <a:extLst xmlns:a="http://schemas.openxmlformats.org/drawingml/2006/main">
-              <a:ext uri="{FF2B5EF4-FFF2-40B4-BE49-F238E27FC236}">
-                <a16:creationId xmlns:a16="http://schemas.microsoft.com/office/drawing/2014/main" id="{FAD7A491-2D59-4AAE-97C6-F0F9F5ACEBF9}"/>
-              </a:ext>
-            </a:extLst>
-          </p:cNvPr>
-          <p:cNvSpPr>
-            <a:spLocks xmlns:a="http://schemas.openxmlformats.org/drawingml/2006/main" noGrp="1"/>
-          </p:cNvSpPr>
-          <p:nvPr/>
-        </p:nvSpPr>
-        <p:spPr>
-          <a:xfrm xmlns:a="http://schemas.openxmlformats.org/drawingml/2006/main">
-            <a:off x="6877050" y="3600450"/>
-            <a:ext cx="4210050" cy="438150"/>
-          </a:xfrm>
-          <a:prstGeom xmlns:a="http://schemas.openxmlformats.org/drawingml/2006/main" prst="rect">
-            <a:avLst/>
-          </a:prstGeom>
-          <a:solidFill xmlns:a="http://schemas.openxmlformats.org/drawingml/2006/main">
-            <a:srgbClr val="000000">
-              <a:alpha val="0"/>
-            </a:srgbClr>
-          </a:solidFill>
-          <a:ln xmlns:a="http://schemas.openxmlformats.org/drawingml/2006/main" w="0">
-            <a:solidFill>
-              <a:srgbClr val="000000">
-                <a:alpha val="0"/>
-              </a:srgbClr>
-            </a:solidFill>
-            <a:prstDash val="solid"/>
-          </a:ln>
-        </p:spPr>
-        <p:txBody>
-          <a:bodyPr xmlns:a="http://schemas.openxmlformats.org/drawingml/2006/main" lIns="0" tIns="0" rIns="0" bIns="0" anchor="t"/>
-          <a:lstStyle xmlns:a="http://schemas.openxmlformats.org/drawingml/2006/main"/>
-          <a:p xmlns:a="http://schemas.openxmlformats.org/drawingml/2006/main">
-            <a:pPr algn="l">
-              <a:defRPr sz="1125" b="0">
-                <a:solidFill>
-                  <a:srgbClr val="172026"/>
-                </a:solidFill>
-                <a:latin typeface="Aptos"/>
-                <a:ea typeface="Aptos"/>
-                <a:cs typeface="Aptos"/>
-              </a:defRPr>
-            </a:pPr>
-            <a:r>
-              <a:rPr sz="1125" b="0">
-                <a:solidFill>
-                  <a:srgbClr val="172026"/>
-                </a:solidFill>
-                <a:latin typeface="Aptos"/>
-                <a:ea typeface="Aptos"/>
-                <a:cs typeface="Aptos"/>
-              </a:rPr>
-              <a:t>Includes explicit rejection rules</a:t>
-            </a:r>
-          </a:p>
-        </p:txBody>
-      </p:sp>
-      <p:sp>
-        <p:nvSpPr>
-          <p:cNvPr id="26" name="">
-            <a:extLst xmlns:a="http://schemas.openxmlformats.org/drawingml/2006/main">
-              <a:ext uri="{FF2B5EF4-FFF2-40B4-BE49-F238E27FC236}">
-                <a16:creationId xmlns:a16="http://schemas.microsoft.com/office/drawing/2014/main" id="{C6355853-E309-4969-B06B-4959B9E6CD7D}"/>
-              </a:ext>
-            </a:extLst>
-          </p:cNvPr>
-          <p:cNvSpPr>
-            <a:spLocks xmlns:a="http://schemas.openxmlformats.org/drawingml/2006/main" noGrp="1"/>
-          </p:cNvSpPr>
-          <p:nvPr/>
-        </p:nvSpPr>
-        <p:spPr>
-          <a:xfrm xmlns:a="http://schemas.openxmlformats.org/drawingml/2006/main">
-            <a:off x="6705600" y="4143375"/>
-            <a:ext cx="57150" cy="57150"/>
-          </a:xfrm>
-          <a:prstGeom xmlns:a="http://schemas.openxmlformats.org/drawingml/2006/main" prst="rect">
-            <a:avLst/>
-          </a:prstGeom>
-          <a:solidFill xmlns:a="http://schemas.openxmlformats.org/drawingml/2006/main">
-            <a:srgbClr val="1D6072"/>
-          </a:solidFill>
-          <a:ln xmlns:a="http://schemas.openxmlformats.org/drawingml/2006/main" w="0">
-            <a:solidFill>
-              <a:srgbClr val="000000">
-                <a:alpha val="0"/>
-              </a:srgbClr>
-            </a:solidFill>
-            <a:prstDash val="solid"/>
-          </a:ln>
-        </p:spPr>
-      </p:sp>
-      <p:sp>
-        <p:nvSpPr>
-          <p:cNvPr id="27" name="">
-            <a:extLst xmlns:a="http://schemas.openxmlformats.org/drawingml/2006/main">
-              <a:ext uri="{FF2B5EF4-FFF2-40B4-BE49-F238E27FC236}">
-                <a16:creationId xmlns:a16="http://schemas.microsoft.com/office/drawing/2014/main" id="{BF04B85C-E03D-4D3D-B6D3-DFD10B778165}"/>
-              </a:ext>
-            </a:extLst>
-          </p:cNvPr>
-          <p:cNvSpPr>
-            <a:spLocks xmlns:a="http://schemas.openxmlformats.org/drawingml/2006/main" noGrp="1"/>
-          </p:cNvSpPr>
-          <p:nvPr/>
-        </p:nvSpPr>
-        <p:spPr>
-          <a:xfrm xmlns:a="http://schemas.openxmlformats.org/drawingml/2006/main">
-            <a:off x="6877050" y="4076700"/>
-            <a:ext cx="4210050" cy="438150"/>
-          </a:xfrm>
-          <a:prstGeom xmlns:a="http://schemas.openxmlformats.org/drawingml/2006/main" prst="rect">
-            <a:avLst/>
-          </a:prstGeom>
-          <a:solidFill xmlns:a="http://schemas.openxmlformats.org/drawingml/2006/main">
-            <a:srgbClr val="000000">
-              <a:alpha val="0"/>
-            </a:srgbClr>
-          </a:solidFill>
-          <a:ln xmlns:a="http://schemas.openxmlformats.org/drawingml/2006/main" w="0">
-            <a:solidFill>
-              <a:srgbClr val="000000">
-                <a:alpha val="0"/>
-              </a:srgbClr>
-            </a:solidFill>
-            <a:prstDash val="solid"/>
-          </a:ln>
-        </p:spPr>
-        <p:txBody>
-          <a:bodyPr xmlns:a="http://schemas.openxmlformats.org/drawingml/2006/main" lIns="0" tIns="0" rIns="0" bIns="0" anchor="t"/>
-          <a:lstStyle xmlns:a="http://schemas.openxmlformats.org/drawingml/2006/main"/>
-          <a:p xmlns:a="http://schemas.openxmlformats.org/drawingml/2006/main">
-            <a:pPr algn="l">
-              <a:defRPr sz="1125" b="0">
-                <a:solidFill>
-                  <a:srgbClr val="172026"/>
-                </a:solidFill>
-                <a:latin typeface="Aptos"/>
-                <a:ea typeface="Aptos"/>
-                <a:cs typeface="Aptos"/>
-              </a:defRPr>
-            </a:pPr>
-            <a:r>
-              <a:rPr sz="1125" b="0">
-                <a:solidFill>
-                  <a:srgbClr val="172026"/>
-                </a:solidFill>
-                <a:latin typeface="Aptos"/>
-                <a:ea typeface="Aptos"/>
-                <a:cs typeface="Aptos"/>
-              </a:rPr>
-              <a:t>Names likely committee roles and demand signals</a:t>
-            </a:r>
-          </a:p>
-        </p:txBody>
-      </p:sp>
-      <p:sp>
-        <p:nvSpPr>
-          <p:cNvPr id="28" name="">
-            <a:extLst xmlns:a="http://schemas.openxmlformats.org/drawingml/2006/main">
-              <a:ext uri="{FF2B5EF4-FFF2-40B4-BE49-F238E27FC236}">
-                <a16:creationId xmlns:a16="http://schemas.microsoft.com/office/drawing/2014/main" id="{BE9E5CD4-2A28-4CF5-8A47-30FF3F1E3505}"/>
-              </a:ext>
-            </a:extLst>
-          </p:cNvPr>
-          <p:cNvSpPr>
-            <a:spLocks xmlns:a="http://schemas.openxmlformats.org/drawingml/2006/main" noGrp="1"/>
-          </p:cNvSpPr>
-          <p:nvPr/>
-        </p:nvSpPr>
-        <p:spPr>
-          <a:xfrm xmlns:a="http://schemas.openxmlformats.org/drawingml/2006/main">
-            <a:off x="514350" y="6438900"/>
-            <a:ext cx="10915650" cy="9525"/>
-          </a:xfrm>
-          <a:prstGeom xmlns:a="http://schemas.openxmlformats.org/drawingml/2006/main" prst="rect">
-            <a:avLst/>
-          </a:prstGeom>
-          <a:solidFill xmlns:a="http://schemas.openxmlformats.org/drawingml/2006/main">
-            <a:srgbClr val="D9DDD6"/>
-          </a:solidFill>
-          <a:ln xmlns:a="http://schemas.openxmlformats.org/drawingml/2006/main" w="0">
-            <a:solidFill>
-              <a:srgbClr val="000000">
-                <a:alpha val="0"/>
-              </a:srgbClr>
-            </a:solidFill>
-            <a:prstDash val="solid"/>
-          </a:ln>
-        </p:spPr>
-      </p:sp>
-      <p:sp>
-        <p:nvSpPr>
-          <p:cNvPr id="29" name="">
-            <a:extLst xmlns:a="http://schemas.openxmlformats.org/drawingml/2006/main">
-              <a:ext uri="{FF2B5EF4-FFF2-40B4-BE49-F238E27FC236}">
-                <a16:creationId xmlns:a16="http://schemas.microsoft.com/office/drawing/2014/main" id="{01E8BD77-B0D5-4866-B2D2-9F67153C6514}"/>
-              </a:ext>
-            </a:extLst>
-          </p:cNvPr>
-          <p:cNvSpPr>
-            <a:spLocks xmlns:a="http://schemas.openxmlformats.org/drawingml/2006/main" noGrp="1"/>
-          </p:cNvSpPr>
-          <p:nvPr/>
-        </p:nvSpPr>
-        <p:spPr>
-          <a:xfrm xmlns:a="http://schemas.openxmlformats.org/drawingml/2006/main">
-            <a:off x="514350" y="6553200"/>
-            <a:ext cx="5905500" cy="171450"/>
-          </a:xfrm>
-          <a:prstGeom xmlns:a="http://schemas.openxmlformats.org/drawingml/2006/main" prst="rect">
-            <a:avLst/>
-          </a:prstGeom>
-          <a:solidFill xmlns:a="http://schemas.openxmlformats.org/drawingml/2006/main">
-            <a:srgbClr val="000000">
-              <a:alpha val="0"/>
-            </a:srgbClr>
-          </a:solidFill>
-          <a:ln xmlns:a="http://schemas.openxmlformats.org/drawingml/2006/main" w="0">
-            <a:solidFill>
-              <a:srgbClr val="000000">
-                <a:alpha val="0"/>
-              </a:srgbClr>
-            </a:solidFill>
-            <a:prstDash val="solid"/>
-          </a:ln>
-        </p:spPr>
-        <p:txBody>
-          <a:bodyPr xmlns:a="http://schemas.openxmlformats.org/drawingml/2006/main" lIns="0" tIns="0" rIns="0" bIns="0" anchor="t"/>
-          <a:lstStyle xmlns:a="http://schemas.openxmlformats.org/drawingml/2006/main"/>
-          <a:p xmlns:a="http://schemas.openxmlformats.org/drawingml/2006/main">
-            <a:pPr algn="l">
-              <a:defRPr sz="675" b="0">
-                <a:solidFill>
-                  <a:srgbClr val="59646A"/>
-                </a:solidFill>
-                <a:latin typeface="Aptos"/>
-                <a:ea typeface="Aptos"/>
-                <a:cs typeface="Aptos"/>
-              </a:defRPr>
-            </a:pPr>
-            <a:r>
-              <a:rPr sz="675" b="0">
-                <a:solidFill>
-                  <a:srgbClr val="59646A"/>
-                </a:solidFill>
-                <a:latin typeface="Aptos"/>
-                <a:ea typeface="Aptos"/>
-                <a:cs typeface="Aptos"/>
-              </a:rPr>
-              <a:t>Lesson 03 - ICP, Segments, And Demand Focus</a:t>
-            </a:r>
-          </a:p>
-        </p:txBody>
-      </p:sp>
-      <p:sp>
-        <p:nvSpPr>
-          <p:cNvPr id="30" name="">
-            <a:extLst xmlns:a="http://schemas.openxmlformats.org/drawingml/2006/main">
-              <a:ext uri="{FF2B5EF4-FFF2-40B4-BE49-F238E27FC236}">
-                <a16:creationId xmlns:a16="http://schemas.microsoft.com/office/drawing/2014/main" id="{4EA06573-A89D-45FF-B9C0-D7755E4F39B6}"/>
-              </a:ext>
-            </a:extLst>
-          </p:cNvPr>
-          <p:cNvSpPr>
-            <a:spLocks xmlns:a="http://schemas.openxmlformats.org/drawingml/2006/main" noGrp="1"/>
-          </p:cNvSpPr>
-          <p:nvPr/>
-        </p:nvSpPr>
-        <p:spPr>
-          <a:xfrm xmlns:a="http://schemas.openxmlformats.org/drawingml/2006/main">
-            <a:off x="5334000" y="6553200"/>
-            <a:ext cx="4095750" cy="171450"/>
-          </a:xfrm>
-          <a:prstGeom xmlns:a="http://schemas.openxmlformats.org/drawingml/2006/main" prst="rect">
-            <a:avLst/>
-          </a:prstGeom>
-          <a:solidFill xmlns:a="http://schemas.openxmlformats.org/drawingml/2006/main">
-            <a:srgbClr val="000000">
-              <a:alpha val="0"/>
-            </a:srgbClr>
-          </a:solidFill>
-          <a:ln xmlns:a="http://schemas.openxmlformats.org/drawingml/2006/main" w="0">
-            <a:solidFill>
-              <a:srgbClr val="000000">
-                <a:alpha val="0"/>
-              </a:srgbClr>
-            </a:solidFill>
-            <a:prstDash val="solid"/>
-          </a:ln>
-        </p:spPr>
-        <p:txBody>
-          <a:bodyPr xmlns:a="http://schemas.openxmlformats.org/drawingml/2006/main" lIns="0" tIns="0" rIns="0" bIns="0" anchor="t"/>
-          <a:lstStyle xmlns:a="http://schemas.openxmlformats.org/drawingml/2006/main"/>
-          <a:p xmlns:a="http://schemas.openxmlformats.org/drawingml/2006/main">
-            <a:pPr algn="r">
-              <a:defRPr sz="600" b="0">
-                <a:solidFill>
-                  <a:srgbClr val="59646A"/>
-                </a:solidFill>
-                <a:latin typeface="Aptos"/>
-                <a:ea typeface="Aptos"/>
-                <a:cs typeface="Aptos"/>
-              </a:defRPr>
-            </a:pPr>
-            <a:r>
-              <a:rPr sz="600" b="0">
-                <a:solidFill>
-                  <a:srgbClr val="59646A"/>
-                </a:solidFill>
-                <a:latin typeface="Aptos"/>
-                <a:ea typeface="Aptos"/>
-                <a:cs typeface="Aptos"/>
-              </a:rPr>
-              <a:t>Source: modules/module-01-industrial-demand-generation/lessons/03-icp-segments-and-demand-focus.md @ 9e28222</a:t>
-            </a:r>
-          </a:p>
-        </p:txBody>
-      </p:sp>
-      <p:sp>
-        <p:nvSpPr>
-          <p:cNvPr id="31" name="">
-            <a:extLst xmlns:a="http://schemas.openxmlformats.org/drawingml/2006/main">
-              <a:ext uri="{FF2B5EF4-FFF2-40B4-BE49-F238E27FC236}">
-                <a16:creationId xmlns:a16="http://schemas.microsoft.com/office/drawing/2014/main" id="{40939CA0-E493-4D52-9338-E234A41DFEAB}"/>
-              </a:ext>
-            </a:extLst>
-          </p:cNvPr>
-          <p:cNvSpPr>
-            <a:spLocks xmlns:a="http://schemas.openxmlformats.org/drawingml/2006/main" noGrp="1"/>
-          </p:cNvSpPr>
-          <p:nvPr/>
-        </p:nvSpPr>
-        <p:spPr>
-          <a:xfrm xmlns:a="http://schemas.openxmlformats.org/drawingml/2006/main">
-            <a:off x="10668000" y="6553200"/>
-            <a:ext cx="762000" cy="171450"/>
-          </a:xfrm>
-          <a:prstGeom xmlns:a="http://schemas.openxmlformats.org/drawingml/2006/main" prst="rect">
-            <a:avLst/>
-          </a:prstGeom>
-          <a:solidFill xmlns:a="http://schemas.openxmlformats.org/drawingml/2006/main">
-            <a:srgbClr val="000000">
-              <a:alpha val="0"/>
-            </a:srgbClr>
-          </a:solidFill>
-          <a:ln xmlns:a="http://schemas.openxmlformats.org/drawingml/2006/main" w="0">
-            <a:solidFill>
-              <a:srgbClr val="000000">
-                <a:alpha val="0"/>
-              </a:srgbClr>
-            </a:solidFill>
-            <a:prstDash val="solid"/>
-          </a:ln>
-        </p:spPr>
-        <p:txBody>
-          <a:bodyPr xmlns:a="http://schemas.openxmlformats.org/drawingml/2006/main" lIns="0" tIns="0" rIns="0" bIns="0" anchor="t"/>
-          <a:lstStyle xmlns:a="http://schemas.openxmlformats.org/drawingml/2006/main"/>
-          <a:p xmlns:a="http://schemas.openxmlformats.org/drawingml/2006/main">
-            <a:pPr algn="r">
-              <a:defRPr sz="675" b="0">
-                <a:solidFill>
-                  <a:srgbClr val="59646A"/>
-                </a:solidFill>
-                <a:latin typeface="Aptos"/>
-                <a:ea typeface="Aptos"/>
-                <a:cs typeface="Aptos"/>
-              </a:defRPr>
-            </a:pPr>
-            <a:r>
-              <a:rPr sz="675" b="0">
-                <a:solidFill>
-                  <a:srgbClr val="59646A"/>
-                </a:solidFill>
-                <a:latin typeface="Aptos"/>
-                <a:ea typeface="Aptos"/>
-                <a:cs typeface="Aptos"/>
-              </a:rPr>
-              <a:t>10/15</a:t>
-            </a:r>
-          </a:p>
-        </p:txBody>
-      </p:sp>
-      <p:sp>
-        <p:nvSpPr>
-          <p:cNvPr id="32" name="">
-            <a:extLst xmlns:a="http://schemas.openxmlformats.org/drawingml/2006/main">
-              <a:ext uri="{FF2B5EF4-FFF2-40B4-BE49-F238E27FC236}">
-                <a16:creationId xmlns:a16="http://schemas.microsoft.com/office/drawing/2014/main" id="{8F3F7F63-4971-4ACB-A8D9-8EC630E1B363}"/>
-              </a:ext>
-            </a:extLst>
-          </p:cNvPr>
-          <p:cNvSpPr>
-            <a:spLocks xmlns:a="http://schemas.openxmlformats.org/drawingml/2006/main" noGrp="1"/>
-          </p:cNvSpPr>
-          <p:nvPr/>
-        </p:nvSpPr>
-        <p:spPr>
-          <a:xfrm xmlns:a="http://schemas.openxmlformats.org/drawingml/2006/main">
-            <a:off x="0" y="0"/>
-            <a:ext cx="12192000" cy="1809750"/>
-          </a:xfrm>
-          <a:prstGeom xmlns:a="http://schemas.openxmlformats.org/drawingml/2006/main" prst="rect">
-            <a:avLst/>
-          </a:prstGeom>
-          <a:solidFill xmlns:a="http://schemas.openxmlformats.org/drawingml/2006/main">
-            <a:srgbClr val="F5F6F2"/>
-          </a:solidFill>
-          <a:ln xmlns:a="http://schemas.openxmlformats.org/drawingml/2006/main" w="0">
-            <a:solidFill>
-              <a:srgbClr val="000000">
-                <a:alpha val="0"/>
-              </a:srgbClr>
-            </a:solidFill>
-            <a:prstDash val="solid"/>
-          </a:ln>
-        </p:spPr>
-      </p:sp>
-      <p:sp>
-        <p:nvSpPr>
-          <p:cNvPr id="33" name="">
-            <a:extLst xmlns:a="http://schemas.openxmlformats.org/drawingml/2006/main">
-              <a:ext uri="{FF2B5EF4-FFF2-40B4-BE49-F238E27FC236}">
-                <a16:creationId xmlns:a16="http://schemas.microsoft.com/office/drawing/2014/main" id="{279C54FF-8F2E-477D-857C-29F4CF682778}"/>
-              </a:ext>
-            </a:extLst>
-          </p:cNvPr>
-          <p:cNvSpPr>
-            <a:spLocks xmlns:a="http://schemas.openxmlformats.org/drawingml/2006/main" noGrp="1"/>
-          </p:cNvSpPr>
-          <p:nvPr/>
-        </p:nvSpPr>
-        <p:spPr>
-          <a:xfrm xmlns:a="http://schemas.openxmlformats.org/drawingml/2006/main">
-            <a:off x="0" y="0"/>
-            <a:ext cx="171450" cy="1809750"/>
-          </a:xfrm>
-          <a:prstGeom xmlns:a="http://schemas.openxmlformats.org/drawingml/2006/main" prst="rect">
-            <a:avLst/>
-          </a:prstGeom>
-          <a:solidFill xmlns:a="http://schemas.openxmlformats.org/drawingml/2006/main">
-            <a:srgbClr val="12232B"/>
-          </a:solidFill>
-          <a:ln xmlns:a="http://schemas.openxmlformats.org/drawingml/2006/main" w="0">
-            <a:solidFill>
-              <a:srgbClr val="000000">
-                <a:alpha val="0"/>
-              </a:srgbClr>
-            </a:solidFill>
-            <a:prstDash val="solid"/>
-          </a:ln>
-        </p:spPr>
-      </p:sp>
-      <p:sp>
-        <p:nvSpPr>
-          <p:cNvPr id="34" name="">
-            <a:extLst xmlns:a="http://schemas.openxmlformats.org/drawingml/2006/main">
-              <a:ext uri="{FF2B5EF4-FFF2-40B4-BE49-F238E27FC236}">
-                <a16:creationId xmlns:a16="http://schemas.microsoft.com/office/drawing/2014/main" id="{FFDF5BA5-4BFC-4D65-85AD-D02E060C77F9}"/>
-              </a:ext>
-            </a:extLst>
-          </p:cNvPr>
-          <p:cNvSpPr>
-            <a:spLocks xmlns:a="http://schemas.openxmlformats.org/drawingml/2006/main" noGrp="1"/>
-          </p:cNvSpPr>
-          <p:nvPr/>
-        </p:nvSpPr>
-        <p:spPr>
-          <a:xfrm xmlns:a="http://schemas.openxmlformats.org/drawingml/2006/main">
-            <a:off x="171450" y="0"/>
-            <a:ext cx="57150" cy="1809750"/>
-          </a:xfrm>
-          <a:prstGeom xmlns:a="http://schemas.openxmlformats.org/drawingml/2006/main" prst="rect">
-            <a:avLst/>
-          </a:prstGeom>
-          <a:solidFill xmlns:a="http://schemas.openxmlformats.org/drawingml/2006/main">
-            <a:srgbClr val="A85D2A"/>
-          </a:solidFill>
-          <a:ln xmlns:a="http://schemas.openxmlformats.org/drawingml/2006/main" w="0">
-            <a:solidFill>
-              <a:srgbClr val="000000">
-                <a:alpha val="0"/>
-              </a:srgbClr>
-            </a:solidFill>
-            <a:prstDash val="solid"/>
-          </a:ln>
-        </p:spPr>
-      </p:sp>
-      <p:sp>
-        <p:nvSpPr>
-          <p:cNvPr id="35" name="kicker-03-marker">
-            <a:extLst xmlns:a="http://schemas.openxmlformats.org/drawingml/2006/main">
-              <a:ext uri="{FF2B5EF4-FFF2-40B4-BE49-F238E27FC236}">
-                <a16:creationId xmlns:a16="http://schemas.microsoft.com/office/drawing/2014/main" id="{D289C6C0-361D-4630-94C3-82E6B3904DC3}"/>
-              </a:ext>
-            </a:extLst>
-          </p:cNvPr>
-          <p:cNvSpPr>
-            <a:spLocks xmlns:a="http://schemas.openxmlformats.org/drawingml/2006/main" noGrp="1"/>
-          </p:cNvSpPr>
-          <p:nvPr/>
-        </p:nvSpPr>
-        <p:spPr>
-          <a:xfrm xmlns:a="http://schemas.openxmlformats.org/drawingml/2006/main">
-            <a:off x="514350" y="390525"/>
-            <a:ext cx="76200" cy="76200"/>
-          </a:xfrm>
-          <a:prstGeom xmlns:a="http://schemas.openxmlformats.org/drawingml/2006/main" prst="rect">
-            <a:avLst/>
-          </a:prstGeom>
-          <a:solidFill xmlns:a="http://schemas.openxmlformats.org/drawingml/2006/main">
-            <a:srgbClr val="A85D2A"/>
-          </a:solidFill>
-          <a:ln xmlns:a="http://schemas.openxmlformats.org/drawingml/2006/main" w="0">
-            <a:solidFill>
-              <a:srgbClr val="000000">
-                <a:alpha val="0"/>
-              </a:srgbClr>
-            </a:solidFill>
-            <a:prstDash val="solid"/>
-          </a:ln>
-        </p:spPr>
-      </p:sp>
-      <p:sp>
-        <p:nvSpPr>
-          <p:cNvPr id="36" name="kicker-03-label">
-            <a:extLst xmlns:a="http://schemas.openxmlformats.org/drawingml/2006/main">
-              <a:ext uri="{FF2B5EF4-FFF2-40B4-BE49-F238E27FC236}">
-                <a16:creationId xmlns:a16="http://schemas.microsoft.com/office/drawing/2014/main" id="{CEBC8625-FA69-4E68-ACE9-07577FB4597E}"/>
-              </a:ext>
-            </a:extLst>
-          </p:cNvPr>
-          <p:cNvSpPr>
-            <a:spLocks xmlns:a="http://schemas.openxmlformats.org/drawingml/2006/main" noGrp="1"/>
-          </p:cNvSpPr>
-          <p:nvPr/>
-        </p:nvSpPr>
-        <p:spPr>
-          <a:xfrm xmlns:a="http://schemas.openxmlformats.org/drawingml/2006/main">
-            <a:off x="685800" y="323850"/>
-            <a:ext cx="7524750" cy="228600"/>
-          </a:xfrm>
-          <a:prstGeom xmlns:a="http://schemas.openxmlformats.org/drawingml/2006/main" prst="rect">
-            <a:avLst/>
-          </a:prstGeom>
-          <a:solidFill xmlns:a="http://schemas.openxmlformats.org/drawingml/2006/main">
-            <a:srgbClr val="000000">
-              <a:alpha val="0"/>
-            </a:srgbClr>
-          </a:solidFill>
-          <a:ln xmlns:a="http://schemas.openxmlformats.org/drawingml/2006/main" w="0">
-            <a:solidFill>
-              <a:srgbClr val="000000">
-                <a:alpha val="0"/>
-              </a:srgbClr>
-            </a:solidFill>
-            <a:prstDash val="solid"/>
-          </a:ln>
-        </p:spPr>
-        <p:txBody>
-          <a:bodyPr xmlns:a="http://schemas.openxmlformats.org/drawingml/2006/main" lIns="0" tIns="0" rIns="0" bIns="0" anchor="ctr"/>
-          <a:lstStyle xmlns:a="http://schemas.openxmlformats.org/drawingml/2006/main"/>
-          <a:p xmlns:a="http://schemas.openxmlformats.org/drawingml/2006/main">
-            <a:pPr algn="l">
-              <a:defRPr sz="750" b="1">
-                <a:solidFill>
-                  <a:srgbClr val="59646A"/>
-                </a:solidFill>
-                <a:latin typeface="Aptos"/>
-                <a:ea typeface="Aptos"/>
-                <a:cs typeface="Aptos"/>
-              </a:defRPr>
-            </a:pPr>
-            <a:r>
-              <a:rPr sz="750" b="1">
-                <a:solidFill>
-                  <a:srgbClr val="59646A"/>
-                </a:solidFill>
-                <a:latin typeface="Aptos"/>
-                <a:ea typeface="Aptos"/>
-                <a:cs typeface="Aptos"/>
-              </a:rPr>
-              <a:t>MODULE 1 / LESSON 03 / AI-ASSISTED EXERCISE</a:t>
-            </a:r>
-          </a:p>
-        </p:txBody>
-      </p:sp>
-      <p:sp>
-        <p:nvSpPr>
           <p:cNvPr id="37" name="">
             <a:extLst xmlns:a="http://schemas.openxmlformats.org/drawingml/2006/main">
               <a:ext uri="{FF2B5EF4-FFF2-40B4-BE49-F238E27FC236}">
-                <a16:creationId xmlns:a16="http://schemas.microsoft.com/office/drawing/2014/main" id="{2F8F3C12-AC7A-4E9C-9B61-AC86BB810F2B}"/>
+                <a16:creationId xmlns:a16="http://schemas.microsoft.com/office/drawing/2014/main" id="{EB9957AE-541E-4496-8C08-060F06E25074}"/>
               </a:ext>
             </a:extLst>
           </p:cNvPr>
@@ -4989,7 +4987,7 @@
                 <a:ea typeface="Aptos Display"/>
                 <a:cs typeface="Aptos Display"/>
               </a:rPr>
-              <a:t>Use AI to structure the attempt, then make humans responsible for judgment.</a:t>
+              <a:t>Structure the first draft before the room critiques it.</a:t>
             </a:r>
           </a:p>
         </p:txBody>
@@ -4999,7 +4997,7 @@
           <p:cNvPr id="38" name="">
             <a:extLst xmlns:a="http://schemas.openxmlformats.org/drawingml/2006/main">
               <a:ext uri="{FF2B5EF4-FFF2-40B4-BE49-F238E27FC236}">
-                <a16:creationId xmlns:a16="http://schemas.microsoft.com/office/drawing/2014/main" id="{29AB67BA-F688-47FA-B1D2-E92060ED1131}"/>
+                <a16:creationId xmlns:a16="http://schemas.microsoft.com/office/drawing/2014/main" id="{94B9E034-EDEF-43A2-8BF1-9281D942C901}"/>
               </a:ext>
             </a:extLst>
           </p:cNvPr>
@@ -5053,7 +5051,7 @@
                 <a:ea typeface="Aptos"/>
                 <a:cs typeface="Aptos"/>
               </a:rPr>
-              <a:t>The prompt is constrained by source, assumptions, output standard, and human validation.</a:t>
+              <a:t>The brief is constrained by source evidence, assumptions, output standard, and validation.</a:t>
             </a:r>
           </a:p>
         </p:txBody>
@@ -5063,7 +5061,7 @@
           <p:cNvPr id="39" name="">
             <a:extLst xmlns:a="http://schemas.openxmlformats.org/drawingml/2006/main">
               <a:ext uri="{FF2B5EF4-FFF2-40B4-BE49-F238E27FC236}">
-                <a16:creationId xmlns:a16="http://schemas.microsoft.com/office/drawing/2014/main" id="{D7337C35-1B35-4E51-B1B8-7ACA9DF730B4}"/>
+                <a16:creationId xmlns:a16="http://schemas.microsoft.com/office/drawing/2014/main" id="{4CDB8632-45AA-453E-AD18-6BCA37D3C7B3}"/>
               </a:ext>
             </a:extLst>
           </p:cNvPr>
@@ -5098,7 +5096,7 @@
           <p:cNvPr id="40" name="">
             <a:extLst xmlns:a="http://schemas.openxmlformats.org/drawingml/2006/main">
               <a:ext uri="{FF2B5EF4-FFF2-40B4-BE49-F238E27FC236}">
-                <a16:creationId xmlns:a16="http://schemas.microsoft.com/office/drawing/2014/main" id="{41646B3F-3D0C-43CD-8022-8EC4FFBE30AB}"/>
+                <a16:creationId xmlns:a16="http://schemas.microsoft.com/office/drawing/2014/main" id="{20F0FD11-E99A-402B-BC13-25CBDC186A10}"/>
               </a:ext>
             </a:extLst>
           </p:cNvPr>
@@ -5133,7 +5131,7 @@
           <p:cNvPr id="41" name="">
             <a:extLst xmlns:a="http://schemas.openxmlformats.org/drawingml/2006/main">
               <a:ext uri="{FF2B5EF4-FFF2-40B4-BE49-F238E27FC236}">
-                <a16:creationId xmlns:a16="http://schemas.microsoft.com/office/drawing/2014/main" id="{2C12C973-2CF0-4F55-90E1-A8DE5974A02A}"/>
+                <a16:creationId xmlns:a16="http://schemas.microsoft.com/office/drawing/2014/main" id="{4C6930C8-354F-4D56-BF4C-BA10527C3DA4}"/>
               </a:ext>
             </a:extLst>
           </p:cNvPr>
@@ -5168,7 +5166,7 @@
           <p:cNvPr id="42" name="">
             <a:extLst xmlns:a="http://schemas.openxmlformats.org/drawingml/2006/main">
               <a:ext uri="{FF2B5EF4-FFF2-40B4-BE49-F238E27FC236}">
-                <a16:creationId xmlns:a16="http://schemas.microsoft.com/office/drawing/2014/main" id="{56979654-3B7B-482A-A981-554F4B3707FF}"/>
+                <a16:creationId xmlns:a16="http://schemas.microsoft.com/office/drawing/2014/main" id="{3C7EBA73-6D6A-49BF-90F3-1B63C0755014}"/>
               </a:ext>
             </a:extLst>
           </p:cNvPr>
@@ -5203,7 +5201,7 @@
           <p:cNvPr id="43" name="">
             <a:extLst xmlns:a="http://schemas.openxmlformats.org/drawingml/2006/main">
               <a:ext uri="{FF2B5EF4-FFF2-40B4-BE49-F238E27FC236}">
-                <a16:creationId xmlns:a16="http://schemas.microsoft.com/office/drawing/2014/main" id="{FBFAE03B-4B2C-4EF6-842A-0BC8DE597404}"/>
+                <a16:creationId xmlns:a16="http://schemas.microsoft.com/office/drawing/2014/main" id="{AFD4F0D5-DD15-4108-8639-72F1D3B5CCE3}"/>
               </a:ext>
             </a:extLst>
           </p:cNvPr>
@@ -5267,7 +5265,7 @@
           <p:cNvPr id="44" name="">
             <a:extLst xmlns:a="http://schemas.openxmlformats.org/drawingml/2006/main">
               <a:ext uri="{FF2B5EF4-FFF2-40B4-BE49-F238E27FC236}">
-                <a16:creationId xmlns:a16="http://schemas.microsoft.com/office/drawing/2014/main" id="{4AC0B4FA-B214-473B-A6F8-CC9D89307361}"/>
+                <a16:creationId xmlns:a16="http://schemas.microsoft.com/office/drawing/2014/main" id="{485BC85A-BE00-4EF6-9C4E-5DFF010C403F}"/>
               </a:ext>
             </a:extLst>
           </p:cNvPr>
@@ -5331,7 +5329,7 @@
           <p:cNvPr id="45" name="">
             <a:extLst xmlns:a="http://schemas.openxmlformats.org/drawingml/2006/main">
               <a:ext uri="{FF2B5EF4-FFF2-40B4-BE49-F238E27FC236}">
-                <a16:creationId xmlns:a16="http://schemas.microsoft.com/office/drawing/2014/main" id="{58650F9C-A6EA-48E9-A567-C2F61DD29D23}"/>
+                <a16:creationId xmlns:a16="http://schemas.microsoft.com/office/drawing/2014/main" id="{D971552E-F7BC-4AEB-A195-85D5FEE2A576}"/>
               </a:ext>
             </a:extLst>
           </p:cNvPr>
@@ -5393,7 +5391,7 @@
     </p:spTree>
     <p:extLst>
       <p:ext uri="{BB962C8B-B14F-4D97-AF65-F5344CB8AC3E}">
-        <p14:creationId xmlns:p14="http://schemas.microsoft.com/office/powerpoint/2010/main" val="1793730515"/>
+        <p14:creationId xmlns:p14="http://schemas.microsoft.com/office/powerpoint/2010/main" val="889863069"/>
       </p:ext>
     </p:extLst>
   </p:cSld>
@@ -5417,7 +5415,7 @@
           <p:cNvPr id="1" name="">
             <a:extLst xmlns:a="http://schemas.openxmlformats.org/drawingml/2006/main">
               <a:ext uri="{FF2B5EF4-FFF2-40B4-BE49-F238E27FC236}">
-                <a16:creationId xmlns:a16="http://schemas.microsoft.com/office/drawing/2014/main" id="{1036E1AD-DB05-4398-A567-6BB8B431A27F}"/>
+                <a16:creationId xmlns:a16="http://schemas.microsoft.com/office/drawing/2014/main" id="{B5049AB1-3A52-41FE-9F7B-6A26A5E15647}"/>
               </a:ext>
             </a:extLst>
           </p:cNvPr>
@@ -5452,7 +5450,7 @@
           <p:cNvPr id="2" name="">
             <a:extLst xmlns:a="http://schemas.openxmlformats.org/drawingml/2006/main">
               <a:ext uri="{FF2B5EF4-FFF2-40B4-BE49-F238E27FC236}">
-                <a16:creationId xmlns:a16="http://schemas.microsoft.com/office/drawing/2014/main" id="{441B62D4-A8C2-4F48-993D-9ADF7236B555}"/>
+                <a16:creationId xmlns:a16="http://schemas.microsoft.com/office/drawing/2014/main" id="{78F63DC0-43AD-4D04-AF5B-D7AC20972F68}"/>
               </a:ext>
             </a:extLst>
           </p:cNvPr>
@@ -5487,7 +5485,7 @@
           <p:cNvPr id="3" name="">
             <a:extLst xmlns:a="http://schemas.openxmlformats.org/drawingml/2006/main">
               <a:ext uri="{FF2B5EF4-FFF2-40B4-BE49-F238E27FC236}">
-                <a16:creationId xmlns:a16="http://schemas.microsoft.com/office/drawing/2014/main" id="{CDD07BCD-7F1B-4CFC-9693-E531B28FA7B7}"/>
+                <a16:creationId xmlns:a16="http://schemas.microsoft.com/office/drawing/2014/main" id="{C21CBD89-B2BC-404D-A42F-977211F04588}"/>
               </a:ext>
             </a:extLst>
           </p:cNvPr>
@@ -5522,7 +5520,7 @@
           <p:cNvPr id="4" name="kicker-03-marker">
             <a:extLst xmlns:a="http://schemas.openxmlformats.org/drawingml/2006/main">
               <a:ext uri="{FF2B5EF4-FFF2-40B4-BE49-F238E27FC236}">
-                <a16:creationId xmlns:a16="http://schemas.microsoft.com/office/drawing/2014/main" id="{2401A92C-6C7F-4D09-90DB-0BB1DAAD437C}"/>
+                <a16:creationId xmlns:a16="http://schemas.microsoft.com/office/drawing/2014/main" id="{53D30A30-53AC-41CC-8A3E-9F359BA8F7A8}"/>
               </a:ext>
             </a:extLst>
           </p:cNvPr>
@@ -5557,7 +5555,7 @@
           <p:cNvPr id="5" name="kicker-03-label">
             <a:extLst xmlns:a="http://schemas.openxmlformats.org/drawingml/2006/main">
               <a:ext uri="{FF2B5EF4-FFF2-40B4-BE49-F238E27FC236}">
-                <a16:creationId xmlns:a16="http://schemas.microsoft.com/office/drawing/2014/main" id="{65B7875E-5806-4EB9-9D24-2B0552968E7D}"/>
+                <a16:creationId xmlns:a16="http://schemas.microsoft.com/office/drawing/2014/main" id="{8E087599-9022-45E5-ADBB-F5692B57510A}"/>
               </a:ext>
             </a:extLst>
           </p:cNvPr>
@@ -5611,7 +5609,7 @@
                 <a:ea typeface="Aptos"/>
                 <a:cs typeface="Aptos"/>
               </a:rPr>
-              <a:t>MODULE 1 / LESSON 03 / HUMAN CORRECTION</a:t>
+              <a:t>MODULE 1 / LESSON 03 / QUALITY CONTROL</a:t>
             </a:r>
           </a:p>
         </p:txBody>
@@ -5621,7 +5619,7 @@
           <p:cNvPr id="6" name="">
             <a:extLst xmlns:a="http://schemas.openxmlformats.org/drawingml/2006/main">
               <a:ext uri="{FF2B5EF4-FFF2-40B4-BE49-F238E27FC236}">
-                <a16:creationId xmlns:a16="http://schemas.microsoft.com/office/drawing/2014/main" id="{45A55AC4-7B49-420B-9628-E188E1E0AB8A}"/>
+                <a16:creationId xmlns:a16="http://schemas.microsoft.com/office/drawing/2014/main" id="{B7AAAF68-9A4A-403B-93FC-1DC98E8BC69A}"/>
               </a:ext>
             </a:extLst>
           </p:cNvPr>
@@ -5675,7 +5673,7 @@
                 <a:ea typeface="Aptos Display"/>
                 <a:cs typeface="Aptos Display"/>
               </a:rPr>
-              <a:t>AI can draft structure. Humans must repair industrial reality.</a:t>
+              <a:t>Reject weak artifacts before they become operating practice.</a:t>
             </a:r>
           </a:p>
         </p:txBody>
@@ -5685,7 +5683,7 @@
           <p:cNvPr id="7" name="">
             <a:extLst xmlns:a="http://schemas.openxmlformats.org/drawingml/2006/main">
               <a:ext uri="{FF2B5EF4-FFF2-40B4-BE49-F238E27FC236}">
-                <a16:creationId xmlns:a16="http://schemas.microsoft.com/office/drawing/2014/main" id="{9568E52F-DCEF-4607-A4AB-6FC1BB7D0BFA}"/>
+                <a16:creationId xmlns:a16="http://schemas.microsoft.com/office/drawing/2014/main" id="{F4FC2194-2BB7-480A-B547-B9E05A2F5955}"/>
               </a:ext>
             </a:extLst>
           </p:cNvPr>
@@ -5749,7 +5747,7 @@
           <p:cNvPr id="8" name="">
             <a:extLst xmlns:a="http://schemas.openxmlformats.org/drawingml/2006/main">
               <a:ext uri="{FF2B5EF4-FFF2-40B4-BE49-F238E27FC236}">
-                <a16:creationId xmlns:a16="http://schemas.microsoft.com/office/drawing/2014/main" id="{310A09C4-9BD0-4DC9-B9DF-A71427D82197}"/>
+                <a16:creationId xmlns:a16="http://schemas.microsoft.com/office/drawing/2014/main" id="{09ED1EED-6909-4EC4-AE8F-0FCE3766473B}"/>
               </a:ext>
             </a:extLst>
           </p:cNvPr>
@@ -5784,7 +5782,7 @@
           <p:cNvPr id="9" name="">
             <a:extLst xmlns:a="http://schemas.openxmlformats.org/drawingml/2006/main">
               <a:ext uri="{FF2B5EF4-FFF2-40B4-BE49-F238E27FC236}">
-                <a16:creationId xmlns:a16="http://schemas.microsoft.com/office/drawing/2014/main" id="{7DA3A15A-E542-48EC-A4A3-24D54D89A8E9}"/>
+                <a16:creationId xmlns:a16="http://schemas.microsoft.com/office/drawing/2014/main" id="{68B102B7-B9CA-4577-8411-2D99ADE0C797}"/>
               </a:ext>
             </a:extLst>
           </p:cNvPr>
@@ -5848,7 +5846,7 @@
           <p:cNvPr id="10" name="">
             <a:extLst xmlns:a="http://schemas.openxmlformats.org/drawingml/2006/main">
               <a:ext uri="{FF2B5EF4-FFF2-40B4-BE49-F238E27FC236}">
-                <a16:creationId xmlns:a16="http://schemas.microsoft.com/office/drawing/2014/main" id="{F30E4F02-50B6-4C51-A24C-DE769527D4C4}"/>
+                <a16:creationId xmlns:a16="http://schemas.microsoft.com/office/drawing/2014/main" id="{142B4FC1-FF10-4195-ABBE-D13AA51A1719}"/>
               </a:ext>
             </a:extLst>
           </p:cNvPr>
@@ -5912,7 +5910,7 @@
           <p:cNvPr id="11" name="">
             <a:extLst xmlns:a="http://schemas.openxmlformats.org/drawingml/2006/main">
               <a:ext uri="{FF2B5EF4-FFF2-40B4-BE49-F238E27FC236}">
-                <a16:creationId xmlns:a16="http://schemas.microsoft.com/office/drawing/2014/main" id="{6836B8BF-D38D-4346-8A9F-0830A85DDD00}"/>
+                <a16:creationId xmlns:a16="http://schemas.microsoft.com/office/drawing/2014/main" id="{50C62E2E-0754-4044-B5CB-F4DDF28871D7}"/>
               </a:ext>
             </a:extLst>
           </p:cNvPr>
@@ -5976,7 +5974,7 @@
           <p:cNvPr id="12" name="">
             <a:extLst xmlns:a="http://schemas.openxmlformats.org/drawingml/2006/main">
               <a:ext uri="{FF2B5EF4-FFF2-40B4-BE49-F238E27FC236}">
-                <a16:creationId xmlns:a16="http://schemas.microsoft.com/office/drawing/2014/main" id="{E49A6617-8D02-4DEC-976B-3D0D27549910}"/>
+                <a16:creationId xmlns:a16="http://schemas.microsoft.com/office/drawing/2014/main" id="{6301A94D-71DA-4991-B646-DF5FDB82C706}"/>
               </a:ext>
             </a:extLst>
           </p:cNvPr>
@@ -6011,7 +6009,7 @@
           <p:cNvPr id="13" name="">
             <a:extLst xmlns:a="http://schemas.openxmlformats.org/drawingml/2006/main">
               <a:ext uri="{FF2B5EF4-FFF2-40B4-BE49-F238E27FC236}">
-                <a16:creationId xmlns:a16="http://schemas.microsoft.com/office/drawing/2014/main" id="{B6CAE1EE-235D-440B-9249-0BFAA6797ABD}"/>
+                <a16:creationId xmlns:a16="http://schemas.microsoft.com/office/drawing/2014/main" id="{ED9A235D-4E45-48A0-A418-8A41F77B3A27}"/>
               </a:ext>
             </a:extLst>
           </p:cNvPr>
@@ -6044,7 +6042,7 @@
           <p:cNvPr id="14" name="">
             <a:extLst xmlns:a="http://schemas.openxmlformats.org/drawingml/2006/main">
               <a:ext uri="{FF2B5EF4-FFF2-40B4-BE49-F238E27FC236}">
-                <a16:creationId xmlns:a16="http://schemas.microsoft.com/office/drawing/2014/main" id="{A5302B9B-59A2-436A-9E1B-A470C5BE9CB1}"/>
+                <a16:creationId xmlns:a16="http://schemas.microsoft.com/office/drawing/2014/main" id="{EC152C73-320F-4F8A-A299-B43BE8BE84AF}"/>
               </a:ext>
             </a:extLst>
           </p:cNvPr>
@@ -6079,7 +6077,7 @@
           <p:cNvPr id="15" name="">
             <a:extLst xmlns:a="http://schemas.openxmlformats.org/drawingml/2006/main">
               <a:ext uri="{FF2B5EF4-FFF2-40B4-BE49-F238E27FC236}">
-                <a16:creationId xmlns:a16="http://schemas.microsoft.com/office/drawing/2014/main" id="{F3F88C60-2766-4E4D-8761-DEB7D3D76ED8}"/>
+                <a16:creationId xmlns:a16="http://schemas.microsoft.com/office/drawing/2014/main" id="{15053237-093B-4294-B7AC-8A2F1346D05E}"/>
               </a:ext>
             </a:extLst>
           </p:cNvPr>
@@ -6133,7 +6131,7 @@
                 <a:ea typeface="Aptos"/>
                 <a:cs typeface="Aptos"/>
               </a:rPr>
-              <a:t>REJECT OR REPAIR WHEN AI OUTPUT...</a:t>
+              <a:t>REJECT OR REPAIR WHEN THE ARTIFACT...</a:t>
             </a:r>
           </a:p>
         </p:txBody>
@@ -6143,7 +6141,7 @@
           <p:cNvPr id="16" name="">
             <a:extLst xmlns:a="http://schemas.openxmlformats.org/drawingml/2006/main">
               <a:ext uri="{FF2B5EF4-FFF2-40B4-BE49-F238E27FC236}">
-                <a16:creationId xmlns:a16="http://schemas.microsoft.com/office/drawing/2014/main" id="{0BF4FACA-123E-462B-BD64-A619095432A4}"/>
+                <a16:creationId xmlns:a16="http://schemas.microsoft.com/office/drawing/2014/main" id="{124B469D-0EE3-4379-ABE8-0DBC886BFE37}"/>
               </a:ext>
             </a:extLst>
           </p:cNvPr>
@@ -6178,7 +6176,7 @@
           <p:cNvPr id="17" name="">
             <a:extLst xmlns:a="http://schemas.openxmlformats.org/drawingml/2006/main">
               <a:ext uri="{FF2B5EF4-FFF2-40B4-BE49-F238E27FC236}">
-                <a16:creationId xmlns:a16="http://schemas.microsoft.com/office/drawing/2014/main" id="{61A8D4FC-7457-45DB-957A-B962EDD51D6E}"/>
+                <a16:creationId xmlns:a16="http://schemas.microsoft.com/office/drawing/2014/main" id="{AC37CBE8-B120-49B6-93FE-74B06001898C}"/>
               </a:ext>
             </a:extLst>
           </p:cNvPr>
@@ -6242,7 +6240,7 @@
           <p:cNvPr id="18" name="">
             <a:extLst xmlns:a="http://schemas.openxmlformats.org/drawingml/2006/main">
               <a:ext uri="{FF2B5EF4-FFF2-40B4-BE49-F238E27FC236}">
-                <a16:creationId xmlns:a16="http://schemas.microsoft.com/office/drawing/2014/main" id="{C4A6880C-70C2-464D-8862-BF97855C3774}"/>
+                <a16:creationId xmlns:a16="http://schemas.microsoft.com/office/drawing/2014/main" id="{B5C03FDC-8B05-48A4-82E7-81EEF18610A3}"/>
               </a:ext>
             </a:extLst>
           </p:cNvPr>
@@ -6277,7 +6275,7 @@
           <p:cNvPr id="19" name="">
             <a:extLst xmlns:a="http://schemas.openxmlformats.org/drawingml/2006/main">
               <a:ext uri="{FF2B5EF4-FFF2-40B4-BE49-F238E27FC236}">
-                <a16:creationId xmlns:a16="http://schemas.microsoft.com/office/drawing/2014/main" id="{41C1D9D0-7350-416B-A912-F3079EEF18B7}"/>
+                <a16:creationId xmlns:a16="http://schemas.microsoft.com/office/drawing/2014/main" id="{B9D017E5-9375-4619-A146-F66E3D8C12E2}"/>
               </a:ext>
             </a:extLst>
           </p:cNvPr>
@@ -6341,7 +6339,7 @@
           <p:cNvPr id="20" name="">
             <a:extLst xmlns:a="http://schemas.openxmlformats.org/drawingml/2006/main">
               <a:ext uri="{FF2B5EF4-FFF2-40B4-BE49-F238E27FC236}">
-                <a16:creationId xmlns:a16="http://schemas.microsoft.com/office/drawing/2014/main" id="{F4E14D95-97A5-42B1-AC67-755BE3C110D8}"/>
+                <a16:creationId xmlns:a16="http://schemas.microsoft.com/office/drawing/2014/main" id="{024A2375-B005-4953-B2DD-46EFC93DD389}"/>
               </a:ext>
             </a:extLst>
           </p:cNvPr>
@@ -6376,7 +6374,7 @@
           <p:cNvPr id="21" name="">
             <a:extLst xmlns:a="http://schemas.openxmlformats.org/drawingml/2006/main">
               <a:ext uri="{FF2B5EF4-FFF2-40B4-BE49-F238E27FC236}">
-                <a16:creationId xmlns:a16="http://schemas.microsoft.com/office/drawing/2014/main" id="{B277C4B7-548A-4FF0-A4CC-7B5E09D3CEF1}"/>
+                <a16:creationId xmlns:a16="http://schemas.microsoft.com/office/drawing/2014/main" id="{761D840F-4BCA-40E0-8743-0C181F7D2D52}"/>
               </a:ext>
             </a:extLst>
           </p:cNvPr>
@@ -6440,7 +6438,7 @@
           <p:cNvPr id="22" name="">
             <a:extLst xmlns:a="http://schemas.openxmlformats.org/drawingml/2006/main">
               <a:ext uri="{FF2B5EF4-FFF2-40B4-BE49-F238E27FC236}">
-                <a16:creationId xmlns:a16="http://schemas.microsoft.com/office/drawing/2014/main" id="{415F1DA0-046E-4828-8DEB-C1C3A5A30ED0}"/>
+                <a16:creationId xmlns:a16="http://schemas.microsoft.com/office/drawing/2014/main" id="{A528E073-788C-4D94-9B81-EA31AB99E5D3}"/>
               </a:ext>
             </a:extLst>
           </p:cNvPr>
@@ -6475,7 +6473,7 @@
           <p:cNvPr id="23" name="">
             <a:extLst xmlns:a="http://schemas.openxmlformats.org/drawingml/2006/main">
               <a:ext uri="{FF2B5EF4-FFF2-40B4-BE49-F238E27FC236}">
-                <a16:creationId xmlns:a16="http://schemas.microsoft.com/office/drawing/2014/main" id="{B2929EB1-92DB-4736-9D53-8120F56F0354}"/>
+                <a16:creationId xmlns:a16="http://schemas.microsoft.com/office/drawing/2014/main" id="{C44B6D27-172D-4564-B543-3E25638753E4}"/>
               </a:ext>
             </a:extLst>
           </p:cNvPr>
@@ -6539,7 +6537,7 @@
           <p:cNvPr id="24" name="">
             <a:extLst xmlns:a="http://schemas.openxmlformats.org/drawingml/2006/main">
               <a:ext uri="{FF2B5EF4-FFF2-40B4-BE49-F238E27FC236}">
-                <a16:creationId xmlns:a16="http://schemas.microsoft.com/office/drawing/2014/main" id="{26AA5260-7E15-46FB-B94C-A2C0BF6D7187}"/>
+                <a16:creationId xmlns:a16="http://schemas.microsoft.com/office/drawing/2014/main" id="{39E61F9D-4F9B-41F3-9B15-8C99E82B6A57}"/>
               </a:ext>
             </a:extLst>
           </p:cNvPr>
@@ -6574,7 +6572,7 @@
           <p:cNvPr id="25" name="">
             <a:extLst xmlns:a="http://schemas.openxmlformats.org/drawingml/2006/main">
               <a:ext uri="{FF2B5EF4-FFF2-40B4-BE49-F238E27FC236}">
-                <a16:creationId xmlns:a16="http://schemas.microsoft.com/office/drawing/2014/main" id="{A9E80C06-D923-4532-A118-9C0E7D630EFB}"/>
+                <a16:creationId xmlns:a16="http://schemas.microsoft.com/office/drawing/2014/main" id="{4CEE4BE5-2758-4A05-BBCB-41BF5E8E5DD7}"/>
               </a:ext>
             </a:extLst>
           </p:cNvPr>
@@ -6638,7 +6636,7 @@
           <p:cNvPr id="26" name="">
             <a:extLst xmlns:a="http://schemas.openxmlformats.org/drawingml/2006/main">
               <a:ext uri="{FF2B5EF4-FFF2-40B4-BE49-F238E27FC236}">
-                <a16:creationId xmlns:a16="http://schemas.microsoft.com/office/drawing/2014/main" id="{1762A486-DD2E-4776-AE99-25D8AFF50D8A}"/>
+                <a16:creationId xmlns:a16="http://schemas.microsoft.com/office/drawing/2014/main" id="{D716E817-61BF-4539-95FA-A0FC09C85F7B}"/>
               </a:ext>
             </a:extLst>
           </p:cNvPr>
@@ -6671,7 +6669,7 @@
           <p:cNvPr id="27" name="">
             <a:extLst xmlns:a="http://schemas.openxmlformats.org/drawingml/2006/main">
               <a:ext uri="{FF2B5EF4-FFF2-40B4-BE49-F238E27FC236}">
-                <a16:creationId xmlns:a16="http://schemas.microsoft.com/office/drawing/2014/main" id="{08E80883-AE04-4BA2-B76C-91316E51A754}"/>
+                <a16:creationId xmlns:a16="http://schemas.microsoft.com/office/drawing/2014/main" id="{ABB2DC33-C99C-4FFF-AC64-C26250D00D05}"/>
               </a:ext>
             </a:extLst>
           </p:cNvPr>
@@ -6706,7 +6704,7 @@
           <p:cNvPr id="28" name="">
             <a:extLst xmlns:a="http://schemas.openxmlformats.org/drawingml/2006/main">
               <a:ext uri="{FF2B5EF4-FFF2-40B4-BE49-F238E27FC236}">
-                <a16:creationId xmlns:a16="http://schemas.microsoft.com/office/drawing/2014/main" id="{FC18524D-46CF-4E59-A2CB-805B71690828}"/>
+                <a16:creationId xmlns:a16="http://schemas.microsoft.com/office/drawing/2014/main" id="{F80EC159-25E2-4DF2-8FAF-177D01116989}"/>
               </a:ext>
             </a:extLst>
           </p:cNvPr>
@@ -6770,7 +6768,7 @@
           <p:cNvPr id="29" name="">
             <a:extLst xmlns:a="http://schemas.openxmlformats.org/drawingml/2006/main">
               <a:ext uri="{FF2B5EF4-FFF2-40B4-BE49-F238E27FC236}">
-                <a16:creationId xmlns:a16="http://schemas.microsoft.com/office/drawing/2014/main" id="{D33E021A-84C0-45B1-B6CC-73774F65B62C}"/>
+                <a16:creationId xmlns:a16="http://schemas.microsoft.com/office/drawing/2014/main" id="{344F9A8C-3931-4B7C-A86E-52AF54632FCB}"/>
               </a:ext>
             </a:extLst>
           </p:cNvPr>
@@ -6834,7 +6832,7 @@
           <p:cNvPr id="30" name="">
             <a:extLst xmlns:a="http://schemas.openxmlformats.org/drawingml/2006/main">
               <a:ext uri="{FF2B5EF4-FFF2-40B4-BE49-F238E27FC236}">
-                <a16:creationId xmlns:a16="http://schemas.microsoft.com/office/drawing/2014/main" id="{A44A45B4-DE3C-4615-ABCB-89BF8BACD1B8}"/>
+                <a16:creationId xmlns:a16="http://schemas.microsoft.com/office/drawing/2014/main" id="{526E4D2E-B4CC-43C4-B953-109FB1E6D953}"/>
               </a:ext>
             </a:extLst>
           </p:cNvPr>
@@ -6867,7 +6865,7 @@
           <p:cNvPr id="31" name="">
             <a:extLst xmlns:a="http://schemas.openxmlformats.org/drawingml/2006/main">
               <a:ext uri="{FF2B5EF4-FFF2-40B4-BE49-F238E27FC236}">
-                <a16:creationId xmlns:a16="http://schemas.microsoft.com/office/drawing/2014/main" id="{77C2C5BF-B476-44B1-B00A-0752D84155FC}"/>
+                <a16:creationId xmlns:a16="http://schemas.microsoft.com/office/drawing/2014/main" id="{D65A4C79-0ABF-43A6-A402-3225899C24E3}"/>
               </a:ext>
             </a:extLst>
           </p:cNvPr>
@@ -6931,7 +6929,7 @@
           <p:cNvPr id="32" name="">
             <a:extLst xmlns:a="http://schemas.openxmlformats.org/drawingml/2006/main">
               <a:ext uri="{FF2B5EF4-FFF2-40B4-BE49-F238E27FC236}">
-                <a16:creationId xmlns:a16="http://schemas.microsoft.com/office/drawing/2014/main" id="{7923B296-6D08-4E28-B787-C183A11CD5B8}"/>
+                <a16:creationId xmlns:a16="http://schemas.microsoft.com/office/drawing/2014/main" id="{E5DC7E5E-3D67-436D-BC6F-7BF9E1BD1637}"/>
               </a:ext>
             </a:extLst>
           </p:cNvPr>
@@ -6985,7 +6983,7 @@
                 <a:ea typeface="Aptos"/>
                 <a:cs typeface="Aptos"/>
               </a:rPr>
-              <a:t>Ask what the AI is guessing.</a:t>
+              <a:t>Ask what the artifact assumes.</a:t>
             </a:r>
           </a:p>
         </p:txBody>
@@ -6995,7 +6993,7 @@
           <p:cNvPr id="33" name="">
             <a:extLst xmlns:a="http://schemas.openxmlformats.org/drawingml/2006/main">
               <a:ext uri="{FF2B5EF4-FFF2-40B4-BE49-F238E27FC236}">
-                <a16:creationId xmlns:a16="http://schemas.microsoft.com/office/drawing/2014/main" id="{A7E658B8-C9B1-4038-A0F2-AB6DF3E89484}"/>
+                <a16:creationId xmlns:a16="http://schemas.microsoft.com/office/drawing/2014/main" id="{85F2C313-E6F1-47A4-8176-AC315BFB7C29}"/>
               </a:ext>
             </a:extLst>
           </p:cNvPr>
@@ -7030,7 +7028,7 @@
           <p:cNvPr id="34" name="">
             <a:extLst xmlns:a="http://schemas.openxmlformats.org/drawingml/2006/main">
               <a:ext uri="{FF2B5EF4-FFF2-40B4-BE49-F238E27FC236}">
-                <a16:creationId xmlns:a16="http://schemas.microsoft.com/office/drawing/2014/main" id="{131064CD-74C5-4CCD-9911-4AB770758443}"/>
+                <a16:creationId xmlns:a16="http://schemas.microsoft.com/office/drawing/2014/main" id="{F17A9F00-9F0B-474D-8D7E-440C2EEF4B4D}"/>
               </a:ext>
             </a:extLst>
           </p:cNvPr>
@@ -7094,7 +7092,7 @@
           <p:cNvPr id="35" name="">
             <a:extLst xmlns:a="http://schemas.openxmlformats.org/drawingml/2006/main">
               <a:ext uri="{FF2B5EF4-FFF2-40B4-BE49-F238E27FC236}">
-                <a16:creationId xmlns:a16="http://schemas.microsoft.com/office/drawing/2014/main" id="{642268C6-82DE-41CC-BAD7-9A12992E24C7}"/>
+                <a16:creationId xmlns:a16="http://schemas.microsoft.com/office/drawing/2014/main" id="{99CE7753-1AEB-4821-B5D1-D941C8E78220}"/>
               </a:ext>
             </a:extLst>
           </p:cNvPr>
@@ -7158,7 +7156,7 @@
           <p:cNvPr id="36" name="">
             <a:extLst xmlns:a="http://schemas.openxmlformats.org/drawingml/2006/main">
               <a:ext uri="{FF2B5EF4-FFF2-40B4-BE49-F238E27FC236}">
-                <a16:creationId xmlns:a16="http://schemas.microsoft.com/office/drawing/2014/main" id="{9E4E4F35-AA57-4741-BED8-C2DE41DE64D8}"/>
+                <a16:creationId xmlns:a16="http://schemas.microsoft.com/office/drawing/2014/main" id="{2812006F-BCCA-49B9-B1C3-03E64CA7B7AA}"/>
               </a:ext>
             </a:extLst>
           </p:cNvPr>
@@ -7222,7 +7220,7 @@
           <p:cNvPr id="37" name="">
             <a:extLst xmlns:a="http://schemas.openxmlformats.org/drawingml/2006/main">
               <a:ext uri="{FF2B5EF4-FFF2-40B4-BE49-F238E27FC236}">
-                <a16:creationId xmlns:a16="http://schemas.microsoft.com/office/drawing/2014/main" id="{042C07CB-D5E6-4CAA-8739-4B4AB6EFDA19}"/>
+                <a16:creationId xmlns:a16="http://schemas.microsoft.com/office/drawing/2014/main" id="{1E97A720-9C63-48E9-8CC0-57C69846005B}"/>
               </a:ext>
             </a:extLst>
           </p:cNvPr>
@@ -7257,7 +7255,7 @@
           <p:cNvPr id="38" name="">
             <a:extLst xmlns:a="http://schemas.openxmlformats.org/drawingml/2006/main">
               <a:ext uri="{FF2B5EF4-FFF2-40B4-BE49-F238E27FC236}">
-                <a16:creationId xmlns:a16="http://schemas.microsoft.com/office/drawing/2014/main" id="{98463EB1-318F-4167-953E-FD22792AD49E}"/>
+                <a16:creationId xmlns:a16="http://schemas.microsoft.com/office/drawing/2014/main" id="{B0B2F02F-DBA0-46E4-8835-A916FD474112}"/>
               </a:ext>
             </a:extLst>
           </p:cNvPr>
@@ -7292,7 +7290,7 @@
           <p:cNvPr id="39" name="">
             <a:extLst xmlns:a="http://schemas.openxmlformats.org/drawingml/2006/main">
               <a:ext uri="{FF2B5EF4-FFF2-40B4-BE49-F238E27FC236}">
-                <a16:creationId xmlns:a16="http://schemas.microsoft.com/office/drawing/2014/main" id="{AA398795-12C3-4D37-9667-4A0B1C7648E5}"/>
+                <a16:creationId xmlns:a16="http://schemas.microsoft.com/office/drawing/2014/main" id="{B01AD4FE-B355-420E-B93E-138367AD800A}"/>
               </a:ext>
             </a:extLst>
           </p:cNvPr>
@@ -7327,7 +7325,7 @@
           <p:cNvPr id="40" name="kicker-03-marker">
             <a:extLst xmlns:a="http://schemas.openxmlformats.org/drawingml/2006/main">
               <a:ext uri="{FF2B5EF4-FFF2-40B4-BE49-F238E27FC236}">
-                <a16:creationId xmlns:a16="http://schemas.microsoft.com/office/drawing/2014/main" id="{24CA4B20-7055-4378-BC60-018B0509CAB8}"/>
+                <a16:creationId xmlns:a16="http://schemas.microsoft.com/office/drawing/2014/main" id="{1FAC0EF2-E555-4E0A-8B7B-56CF610BEE59}"/>
               </a:ext>
             </a:extLst>
           </p:cNvPr>
@@ -7362,7 +7360,7 @@
           <p:cNvPr id="41" name="kicker-03-label">
             <a:extLst xmlns:a="http://schemas.openxmlformats.org/drawingml/2006/main">
               <a:ext uri="{FF2B5EF4-FFF2-40B4-BE49-F238E27FC236}">
-                <a16:creationId xmlns:a16="http://schemas.microsoft.com/office/drawing/2014/main" id="{3C3D1076-2501-4F6E-BBD6-C605451413EF}"/>
+                <a16:creationId xmlns:a16="http://schemas.microsoft.com/office/drawing/2014/main" id="{6CF3232C-0CF0-45D7-9550-75ABE454EA67}"/>
               </a:ext>
             </a:extLst>
           </p:cNvPr>
@@ -7416,7 +7414,7 @@
                 <a:ea typeface="Aptos"/>
                 <a:cs typeface="Aptos"/>
               </a:rPr>
-              <a:t>MODULE 1 / LESSON 03 / HUMAN CORRECTION</a:t>
+              <a:t>MODULE 1 / LESSON 03 / QUALITY CONTROL</a:t>
             </a:r>
           </a:p>
         </p:txBody>
@@ -7426,7 +7424,7 @@
           <p:cNvPr id="42" name="">
             <a:extLst xmlns:a="http://schemas.openxmlformats.org/drawingml/2006/main">
               <a:ext uri="{FF2B5EF4-FFF2-40B4-BE49-F238E27FC236}">
-                <a16:creationId xmlns:a16="http://schemas.microsoft.com/office/drawing/2014/main" id="{EE2495B4-7740-4296-9089-EF1334A2A4FD}"/>
+                <a16:creationId xmlns:a16="http://schemas.microsoft.com/office/drawing/2014/main" id="{50BDB7C0-1040-4438-ABA6-2E9B0F6933D5}"/>
               </a:ext>
             </a:extLst>
           </p:cNvPr>
@@ -7480,7 +7478,7 @@
                 <a:ea typeface="Aptos Display"/>
                 <a:cs typeface="Aptos Display"/>
               </a:rPr>
-              <a:t>AI can draft structure. Humans must repair industrial reality.</a:t>
+              <a:t>Reject weak artifacts before they become operating practice.</a:t>
             </a:r>
           </a:p>
         </p:txBody>
@@ -7490,7 +7488,7 @@
           <p:cNvPr id="43" name="">
             <a:extLst xmlns:a="http://schemas.openxmlformats.org/drawingml/2006/main">
               <a:ext uri="{FF2B5EF4-FFF2-40B4-BE49-F238E27FC236}">
-                <a16:creationId xmlns:a16="http://schemas.microsoft.com/office/drawing/2014/main" id="{FF3E24C2-F1C1-4D04-A87D-8EEF471D87C5}"/>
+                <a16:creationId xmlns:a16="http://schemas.microsoft.com/office/drawing/2014/main" id="{45AE47F9-75F7-44C3-883F-52ED631743C6}"/>
               </a:ext>
             </a:extLst>
           </p:cNvPr>
@@ -7554,7 +7552,7 @@
           <p:cNvPr id="44" name="">
             <a:extLst xmlns:a="http://schemas.openxmlformats.org/drawingml/2006/main">
               <a:ext uri="{FF2B5EF4-FFF2-40B4-BE49-F238E27FC236}">
-                <a16:creationId xmlns:a16="http://schemas.microsoft.com/office/drawing/2014/main" id="{98A941F8-546F-40A8-BF55-D736B13374EC}"/>
+                <a16:creationId xmlns:a16="http://schemas.microsoft.com/office/drawing/2014/main" id="{2B2430CB-1714-4854-9CCB-FDD71DE85C14}"/>
               </a:ext>
             </a:extLst>
           </p:cNvPr>
@@ -7589,7 +7587,7 @@
           <p:cNvPr id="45" name="">
             <a:extLst xmlns:a="http://schemas.openxmlformats.org/drawingml/2006/main">
               <a:ext uri="{FF2B5EF4-FFF2-40B4-BE49-F238E27FC236}">
-                <a16:creationId xmlns:a16="http://schemas.microsoft.com/office/drawing/2014/main" id="{36C62725-BC94-4DD0-B864-DDFA652E864E}"/>
+                <a16:creationId xmlns:a16="http://schemas.microsoft.com/office/drawing/2014/main" id="{EAE142CD-2849-424D-93FC-1020A94303CD}"/>
               </a:ext>
             </a:extLst>
           </p:cNvPr>
@@ -7624,7 +7622,7 @@
           <p:cNvPr id="46" name="">
             <a:extLst xmlns:a="http://schemas.openxmlformats.org/drawingml/2006/main">
               <a:ext uri="{FF2B5EF4-FFF2-40B4-BE49-F238E27FC236}">
-                <a16:creationId xmlns:a16="http://schemas.microsoft.com/office/drawing/2014/main" id="{03B153B2-9745-469B-8289-5AFE809205CF}"/>
+                <a16:creationId xmlns:a16="http://schemas.microsoft.com/office/drawing/2014/main" id="{B341A14C-09F0-44E4-9FAD-A02E365B5CD2}"/>
               </a:ext>
             </a:extLst>
           </p:cNvPr>
@@ -7659,7 +7657,7 @@
           <p:cNvPr id="47" name="">
             <a:extLst xmlns:a="http://schemas.openxmlformats.org/drawingml/2006/main">
               <a:ext uri="{FF2B5EF4-FFF2-40B4-BE49-F238E27FC236}">
-                <a16:creationId xmlns:a16="http://schemas.microsoft.com/office/drawing/2014/main" id="{4DF0AD1A-67BD-4DA3-AAC0-B72F96168253}"/>
+                <a16:creationId xmlns:a16="http://schemas.microsoft.com/office/drawing/2014/main" id="{133C3D34-04B0-4E01-9AC6-77675EDD4C82}"/>
               </a:ext>
             </a:extLst>
           </p:cNvPr>
@@ -7694,7 +7692,7 @@
           <p:cNvPr id="48" name="">
             <a:extLst xmlns:a="http://schemas.openxmlformats.org/drawingml/2006/main">
               <a:ext uri="{FF2B5EF4-FFF2-40B4-BE49-F238E27FC236}">
-                <a16:creationId xmlns:a16="http://schemas.microsoft.com/office/drawing/2014/main" id="{ACEBDE8D-3EA0-42A9-B942-4A1118C049E9}"/>
+                <a16:creationId xmlns:a16="http://schemas.microsoft.com/office/drawing/2014/main" id="{51F3C14A-EC20-4D3C-AC40-9507868AE04B}"/>
               </a:ext>
             </a:extLst>
           </p:cNvPr>
@@ -7758,7 +7756,7 @@
           <p:cNvPr id="49" name="">
             <a:extLst xmlns:a="http://schemas.openxmlformats.org/drawingml/2006/main">
               <a:ext uri="{FF2B5EF4-FFF2-40B4-BE49-F238E27FC236}">
-                <a16:creationId xmlns:a16="http://schemas.microsoft.com/office/drawing/2014/main" id="{68939BF3-487A-4527-80D4-93B2EFA24EF2}"/>
+                <a16:creationId xmlns:a16="http://schemas.microsoft.com/office/drawing/2014/main" id="{990F002F-36E1-4A9F-BE99-C712644C92B4}"/>
               </a:ext>
             </a:extLst>
           </p:cNvPr>
@@ -7822,7 +7820,7 @@
           <p:cNvPr id="50" name="">
             <a:extLst xmlns:a="http://schemas.openxmlformats.org/drawingml/2006/main">
               <a:ext uri="{FF2B5EF4-FFF2-40B4-BE49-F238E27FC236}">
-                <a16:creationId xmlns:a16="http://schemas.microsoft.com/office/drawing/2014/main" id="{CD1331F0-EF6D-4846-8639-32E1EAC9E9A0}"/>
+                <a16:creationId xmlns:a16="http://schemas.microsoft.com/office/drawing/2014/main" id="{08287D52-B207-44E9-A230-79E9CA257912}"/>
               </a:ext>
             </a:extLst>
           </p:cNvPr>
@@ -7884,7 +7882,7 @@
     </p:spTree>
     <p:extLst>
       <p:ext uri="{BB962C8B-B14F-4D97-AF65-F5344CB8AC3E}">
-        <p14:creationId xmlns:p14="http://schemas.microsoft.com/office/powerpoint/2010/main" val="1711966211"/>
+        <p14:creationId xmlns:p14="http://schemas.microsoft.com/office/powerpoint/2010/main" val="1214840286"/>
       </p:ext>
     </p:extLst>
   </p:cSld>
@@ -7908,7 +7906,7 @@
           <p:cNvPr id="1" name="">
             <a:extLst xmlns:a="http://schemas.openxmlformats.org/drawingml/2006/main">
               <a:ext uri="{FF2B5EF4-FFF2-40B4-BE49-F238E27FC236}">
-                <a16:creationId xmlns:a16="http://schemas.microsoft.com/office/drawing/2014/main" id="{51765841-2120-4086-B88A-18CDE4780550}"/>
+                <a16:creationId xmlns:a16="http://schemas.microsoft.com/office/drawing/2014/main" id="{A5475E0C-B8F7-4BEB-A6C0-8147B3BE1D5F}"/>
               </a:ext>
             </a:extLst>
           </p:cNvPr>
@@ -7943,7 +7941,7 @@
           <p:cNvPr id="2" name="">
             <a:extLst xmlns:a="http://schemas.openxmlformats.org/drawingml/2006/main">
               <a:ext uri="{FF2B5EF4-FFF2-40B4-BE49-F238E27FC236}">
-                <a16:creationId xmlns:a16="http://schemas.microsoft.com/office/drawing/2014/main" id="{0D47FA71-65BE-4A84-97AE-6C1D0D7FAA66}"/>
+                <a16:creationId xmlns:a16="http://schemas.microsoft.com/office/drawing/2014/main" id="{B6268307-F254-43A3-82DE-57E515094301}"/>
               </a:ext>
             </a:extLst>
           </p:cNvPr>
@@ -7978,7 +7976,7 @@
           <p:cNvPr id="3" name="">
             <a:extLst xmlns:a="http://schemas.openxmlformats.org/drawingml/2006/main">
               <a:ext uri="{FF2B5EF4-FFF2-40B4-BE49-F238E27FC236}">
-                <a16:creationId xmlns:a16="http://schemas.microsoft.com/office/drawing/2014/main" id="{F993CB5D-D117-4B46-A4B9-DDE65CAEB9EE}"/>
+                <a16:creationId xmlns:a16="http://schemas.microsoft.com/office/drawing/2014/main" id="{DE065E3C-B3B8-406F-A24C-7129ED778664}"/>
               </a:ext>
             </a:extLst>
           </p:cNvPr>
@@ -8013,7 +8011,7 @@
           <p:cNvPr id="4" name="kicker-03-marker">
             <a:extLst xmlns:a="http://schemas.openxmlformats.org/drawingml/2006/main">
               <a:ext uri="{FF2B5EF4-FFF2-40B4-BE49-F238E27FC236}">
-                <a16:creationId xmlns:a16="http://schemas.microsoft.com/office/drawing/2014/main" id="{F04BF174-C4F9-4625-BDBB-BE0A32C6B511}"/>
+                <a16:creationId xmlns:a16="http://schemas.microsoft.com/office/drawing/2014/main" id="{74EB8BAD-E176-406E-891E-40538D01AD0F}"/>
               </a:ext>
             </a:extLst>
           </p:cNvPr>
@@ -8048,7 +8046,7 @@
           <p:cNvPr id="5" name="kicker-03-label">
             <a:extLst xmlns:a="http://schemas.openxmlformats.org/drawingml/2006/main">
               <a:ext uri="{FF2B5EF4-FFF2-40B4-BE49-F238E27FC236}">
-                <a16:creationId xmlns:a16="http://schemas.microsoft.com/office/drawing/2014/main" id="{5FBD51EC-BAFC-4B3E-BAF3-2549711955ED}"/>
+                <a16:creationId xmlns:a16="http://schemas.microsoft.com/office/drawing/2014/main" id="{1882D974-772C-45BA-BFD2-B148DC1601E0}"/>
               </a:ext>
             </a:extLst>
           </p:cNvPr>
@@ -8112,7 +8110,7 @@
           <p:cNvPr id="6" name="">
             <a:extLst xmlns:a="http://schemas.openxmlformats.org/drawingml/2006/main">
               <a:ext uri="{FF2B5EF4-FFF2-40B4-BE49-F238E27FC236}">
-                <a16:creationId xmlns:a16="http://schemas.microsoft.com/office/drawing/2014/main" id="{263556AE-122C-4AF3-B873-6F7E1DAB8B5E}"/>
+                <a16:creationId xmlns:a16="http://schemas.microsoft.com/office/drawing/2014/main" id="{8D7D875B-554C-415E-A504-20D8BD550CD4}"/>
               </a:ext>
             </a:extLst>
           </p:cNvPr>
@@ -8176,7 +8174,7 @@
           <p:cNvPr id="7" name="">
             <a:extLst xmlns:a="http://schemas.openxmlformats.org/drawingml/2006/main">
               <a:ext uri="{FF2B5EF4-FFF2-40B4-BE49-F238E27FC236}">
-                <a16:creationId xmlns:a16="http://schemas.microsoft.com/office/drawing/2014/main" id="{22A8551A-8E8A-49D5-9E31-DD7BB9CC633E}"/>
+                <a16:creationId xmlns:a16="http://schemas.microsoft.com/office/drawing/2014/main" id="{FE761047-EB31-4D33-A7B1-EB3C3C353C67}"/>
               </a:ext>
             </a:extLst>
           </p:cNvPr>
@@ -8240,7 +8238,7 @@
           <p:cNvPr id="8" name="">
             <a:extLst xmlns:a="http://schemas.openxmlformats.org/drawingml/2006/main">
               <a:ext uri="{FF2B5EF4-FFF2-40B4-BE49-F238E27FC236}">
-                <a16:creationId xmlns:a16="http://schemas.microsoft.com/office/drawing/2014/main" id="{E1BEF71D-85CB-4B08-AAD8-FE1ACED777B7}"/>
+                <a16:creationId xmlns:a16="http://schemas.microsoft.com/office/drawing/2014/main" id="{9CFADA7B-E24C-42A3-B747-771455133B9D}"/>
               </a:ext>
             </a:extLst>
           </p:cNvPr>
@@ -8275,7 +8273,7 @@
           <p:cNvPr id="9" name="">
             <a:extLst xmlns:a="http://schemas.openxmlformats.org/drawingml/2006/main">
               <a:ext uri="{FF2B5EF4-FFF2-40B4-BE49-F238E27FC236}">
-                <a16:creationId xmlns:a16="http://schemas.microsoft.com/office/drawing/2014/main" id="{96BA16F0-5E64-4025-A98B-EBE8202C2AE7}"/>
+                <a16:creationId xmlns:a16="http://schemas.microsoft.com/office/drawing/2014/main" id="{8FA8D680-994A-403F-BAEF-18B2AB70C05E}"/>
               </a:ext>
             </a:extLst>
           </p:cNvPr>
@@ -8339,7 +8337,7 @@
           <p:cNvPr id="10" name="">
             <a:extLst xmlns:a="http://schemas.openxmlformats.org/drawingml/2006/main">
               <a:ext uri="{FF2B5EF4-FFF2-40B4-BE49-F238E27FC236}">
-                <a16:creationId xmlns:a16="http://schemas.microsoft.com/office/drawing/2014/main" id="{1860370D-1B4B-4DE8-9AEA-3677741C1DC8}"/>
+                <a16:creationId xmlns:a16="http://schemas.microsoft.com/office/drawing/2014/main" id="{2D9180A9-5171-4A33-AC23-D82B04DC6176}"/>
               </a:ext>
             </a:extLst>
           </p:cNvPr>
@@ -8403,7 +8401,7 @@
           <p:cNvPr id="11" name="">
             <a:extLst xmlns:a="http://schemas.openxmlformats.org/drawingml/2006/main">
               <a:ext uri="{FF2B5EF4-FFF2-40B4-BE49-F238E27FC236}">
-                <a16:creationId xmlns:a16="http://schemas.microsoft.com/office/drawing/2014/main" id="{9092B5E5-5ECB-417F-88FC-4CD8B04D6477}"/>
+                <a16:creationId xmlns:a16="http://schemas.microsoft.com/office/drawing/2014/main" id="{E1676026-F5FF-4E74-A592-958382D1963F}"/>
               </a:ext>
             </a:extLst>
           </p:cNvPr>
@@ -8467,7 +8465,7 @@
           <p:cNvPr id="12" name="">
             <a:extLst xmlns:a="http://schemas.openxmlformats.org/drawingml/2006/main">
               <a:ext uri="{FF2B5EF4-FFF2-40B4-BE49-F238E27FC236}">
-                <a16:creationId xmlns:a16="http://schemas.microsoft.com/office/drawing/2014/main" id="{7FA4C786-C497-4557-8A5C-6062CE473E8C}"/>
+                <a16:creationId xmlns:a16="http://schemas.microsoft.com/office/drawing/2014/main" id="{246D16A5-A706-47B6-912D-BD6369363417}"/>
               </a:ext>
             </a:extLst>
           </p:cNvPr>
@@ -8500,7 +8498,7 @@
           <p:cNvPr id="13" name="">
             <a:extLst xmlns:a="http://schemas.openxmlformats.org/drawingml/2006/main">
               <a:ext uri="{FF2B5EF4-FFF2-40B4-BE49-F238E27FC236}">
-                <a16:creationId xmlns:a16="http://schemas.microsoft.com/office/drawing/2014/main" id="{09E6552A-3307-4F23-96B1-69CFFF16F9A9}"/>
+                <a16:creationId xmlns:a16="http://schemas.microsoft.com/office/drawing/2014/main" id="{C9447789-82F7-4EEC-A3D0-0F68E97EF6CA}"/>
               </a:ext>
             </a:extLst>
           </p:cNvPr>
@@ -8535,7 +8533,7 @@
           <p:cNvPr id="14" name="">
             <a:extLst xmlns:a="http://schemas.openxmlformats.org/drawingml/2006/main">
               <a:ext uri="{FF2B5EF4-FFF2-40B4-BE49-F238E27FC236}">
-                <a16:creationId xmlns:a16="http://schemas.microsoft.com/office/drawing/2014/main" id="{A3C8ED65-245B-43F2-A4F8-12BA62CB8001}"/>
+                <a16:creationId xmlns:a16="http://schemas.microsoft.com/office/drawing/2014/main" id="{B6742480-99A8-42F6-9959-197044EC6A8A}"/>
               </a:ext>
             </a:extLst>
           </p:cNvPr>
@@ -8599,7 +8597,7 @@
           <p:cNvPr id="15" name="">
             <a:extLst xmlns:a="http://schemas.openxmlformats.org/drawingml/2006/main">
               <a:ext uri="{FF2B5EF4-FFF2-40B4-BE49-F238E27FC236}">
-                <a16:creationId xmlns:a16="http://schemas.microsoft.com/office/drawing/2014/main" id="{6595EC3A-D17C-4DC6-A520-68B877A65BB5}"/>
+                <a16:creationId xmlns:a16="http://schemas.microsoft.com/office/drawing/2014/main" id="{E5C89A77-476D-40EA-8B89-9EE592D79006}"/>
               </a:ext>
             </a:extLst>
           </p:cNvPr>
@@ -8632,7 +8630,7 @@
           <p:cNvPr id="16" name="">
             <a:extLst xmlns:a="http://schemas.openxmlformats.org/drawingml/2006/main">
               <a:ext uri="{FF2B5EF4-FFF2-40B4-BE49-F238E27FC236}">
-                <a16:creationId xmlns:a16="http://schemas.microsoft.com/office/drawing/2014/main" id="{4D3F2E3D-AB75-4096-822B-5E16578A079A}"/>
+                <a16:creationId xmlns:a16="http://schemas.microsoft.com/office/drawing/2014/main" id="{A7D38362-7E05-4890-A0E2-D4F7FB86CB94}"/>
               </a:ext>
             </a:extLst>
           </p:cNvPr>
@@ -8667,7 +8665,7 @@
           <p:cNvPr id="17" name="">
             <a:extLst xmlns:a="http://schemas.openxmlformats.org/drawingml/2006/main">
               <a:ext uri="{FF2B5EF4-FFF2-40B4-BE49-F238E27FC236}">
-                <a16:creationId xmlns:a16="http://schemas.microsoft.com/office/drawing/2014/main" id="{15B1DEED-D7AF-469B-9ECE-53BD88F557D8}"/>
+                <a16:creationId xmlns:a16="http://schemas.microsoft.com/office/drawing/2014/main" id="{F43E2963-030F-490A-BE66-442FD64867F3}"/>
               </a:ext>
             </a:extLst>
           </p:cNvPr>
@@ -8731,7 +8729,7 @@
           <p:cNvPr id="18" name="">
             <a:extLst xmlns:a="http://schemas.openxmlformats.org/drawingml/2006/main">
               <a:ext uri="{FF2B5EF4-FFF2-40B4-BE49-F238E27FC236}">
-                <a16:creationId xmlns:a16="http://schemas.microsoft.com/office/drawing/2014/main" id="{81F587F3-C57A-4960-A609-EE0D01AB6AB2}"/>
+                <a16:creationId xmlns:a16="http://schemas.microsoft.com/office/drawing/2014/main" id="{E4D13BE1-5623-4930-B0E3-CE516E67A11B}"/>
               </a:ext>
             </a:extLst>
           </p:cNvPr>
@@ -8764,7 +8762,7 @@
           <p:cNvPr id="19" name="">
             <a:extLst xmlns:a="http://schemas.openxmlformats.org/drawingml/2006/main">
               <a:ext uri="{FF2B5EF4-FFF2-40B4-BE49-F238E27FC236}">
-                <a16:creationId xmlns:a16="http://schemas.microsoft.com/office/drawing/2014/main" id="{DF0FC6E3-56D3-435D-8E23-AAC15A3DC230}"/>
+                <a16:creationId xmlns:a16="http://schemas.microsoft.com/office/drawing/2014/main" id="{3444C026-810A-4DAE-B7DF-6031A64967F7}"/>
               </a:ext>
             </a:extLst>
           </p:cNvPr>
@@ -8799,7 +8797,7 @@
           <p:cNvPr id="20" name="">
             <a:extLst xmlns:a="http://schemas.openxmlformats.org/drawingml/2006/main">
               <a:ext uri="{FF2B5EF4-FFF2-40B4-BE49-F238E27FC236}">
-                <a16:creationId xmlns:a16="http://schemas.microsoft.com/office/drawing/2014/main" id="{88F18CFC-8FBE-467C-B9F7-917D9301259F}"/>
+                <a16:creationId xmlns:a16="http://schemas.microsoft.com/office/drawing/2014/main" id="{941DBC74-8400-4A62-8A13-C9B9328C5985}"/>
               </a:ext>
             </a:extLst>
           </p:cNvPr>
@@ -8863,7 +8861,7 @@
           <p:cNvPr id="21" name="">
             <a:extLst xmlns:a="http://schemas.openxmlformats.org/drawingml/2006/main">
               <a:ext uri="{FF2B5EF4-FFF2-40B4-BE49-F238E27FC236}">
-                <a16:creationId xmlns:a16="http://schemas.microsoft.com/office/drawing/2014/main" id="{DAE66A5A-1CBD-4031-BC5A-D28D75FC6EE0}"/>
+                <a16:creationId xmlns:a16="http://schemas.microsoft.com/office/drawing/2014/main" id="{F1CA615B-1386-4337-A516-B1C47E210D6F}"/>
               </a:ext>
             </a:extLst>
           </p:cNvPr>
@@ -8896,7 +8894,7 @@
           <p:cNvPr id="22" name="">
             <a:extLst xmlns:a="http://schemas.openxmlformats.org/drawingml/2006/main">
               <a:ext uri="{FF2B5EF4-FFF2-40B4-BE49-F238E27FC236}">
-                <a16:creationId xmlns:a16="http://schemas.microsoft.com/office/drawing/2014/main" id="{7BF7D87A-E916-43D0-AAC0-238B0864634A}"/>
+                <a16:creationId xmlns:a16="http://schemas.microsoft.com/office/drawing/2014/main" id="{0E4FE991-B290-4982-A0C9-C34F7BB6BD66}"/>
               </a:ext>
             </a:extLst>
           </p:cNvPr>
@@ -8931,7 +8929,7 @@
           <p:cNvPr id="23" name="">
             <a:extLst xmlns:a="http://schemas.openxmlformats.org/drawingml/2006/main">
               <a:ext uri="{FF2B5EF4-FFF2-40B4-BE49-F238E27FC236}">
-                <a16:creationId xmlns:a16="http://schemas.microsoft.com/office/drawing/2014/main" id="{036FE3A1-2A35-409A-9923-F46DC74F7A71}"/>
+                <a16:creationId xmlns:a16="http://schemas.microsoft.com/office/drawing/2014/main" id="{4B621746-81A2-47C1-9CAA-E7F60CA5A06A}"/>
               </a:ext>
             </a:extLst>
           </p:cNvPr>
@@ -8995,7 +8993,7 @@
           <p:cNvPr id="24" name="">
             <a:extLst xmlns:a="http://schemas.openxmlformats.org/drawingml/2006/main">
               <a:ext uri="{FF2B5EF4-FFF2-40B4-BE49-F238E27FC236}">
-                <a16:creationId xmlns:a16="http://schemas.microsoft.com/office/drawing/2014/main" id="{35C09425-5D5B-4F6E-8164-96A214A085C8}"/>
+                <a16:creationId xmlns:a16="http://schemas.microsoft.com/office/drawing/2014/main" id="{BFAACC17-A378-4B81-9B95-14BEF0744DA6}"/>
               </a:ext>
             </a:extLst>
           </p:cNvPr>
@@ -9028,7 +9026,7 @@
           <p:cNvPr id="25" name="">
             <a:extLst xmlns:a="http://schemas.openxmlformats.org/drawingml/2006/main">
               <a:ext uri="{FF2B5EF4-FFF2-40B4-BE49-F238E27FC236}">
-                <a16:creationId xmlns:a16="http://schemas.microsoft.com/office/drawing/2014/main" id="{E9B238A6-F366-4344-8D79-A9893E126E43}"/>
+                <a16:creationId xmlns:a16="http://schemas.microsoft.com/office/drawing/2014/main" id="{0A7830C1-DFEF-48C5-ACEF-A679E820C38E}"/>
               </a:ext>
             </a:extLst>
           </p:cNvPr>
@@ -9063,7 +9061,7 @@
           <p:cNvPr id="26" name="">
             <a:extLst xmlns:a="http://schemas.openxmlformats.org/drawingml/2006/main">
               <a:ext uri="{FF2B5EF4-FFF2-40B4-BE49-F238E27FC236}">
-                <a16:creationId xmlns:a16="http://schemas.microsoft.com/office/drawing/2014/main" id="{4FFB71C7-F230-4576-A5FA-474D6890BE97}"/>
+                <a16:creationId xmlns:a16="http://schemas.microsoft.com/office/drawing/2014/main" id="{D3F697DF-CF90-42C4-AB96-022536ADD152}"/>
               </a:ext>
             </a:extLst>
           </p:cNvPr>
@@ -9127,7 +9125,7 @@
           <p:cNvPr id="27" name="">
             <a:extLst xmlns:a="http://schemas.openxmlformats.org/drawingml/2006/main">
               <a:ext uri="{FF2B5EF4-FFF2-40B4-BE49-F238E27FC236}">
-                <a16:creationId xmlns:a16="http://schemas.microsoft.com/office/drawing/2014/main" id="{7FE51BF9-AF20-4F17-B0EA-9E9FB3415ACB}"/>
+                <a16:creationId xmlns:a16="http://schemas.microsoft.com/office/drawing/2014/main" id="{402DE580-023B-4C95-87F5-C9872A8EB8B5}"/>
               </a:ext>
             </a:extLst>
           </p:cNvPr>
@@ -9160,7 +9158,7 @@
           <p:cNvPr id="28" name="">
             <a:extLst xmlns:a="http://schemas.openxmlformats.org/drawingml/2006/main">
               <a:ext uri="{FF2B5EF4-FFF2-40B4-BE49-F238E27FC236}">
-                <a16:creationId xmlns:a16="http://schemas.microsoft.com/office/drawing/2014/main" id="{FF1DCE06-722D-4D58-BAB9-8CFEDC655AA8}"/>
+                <a16:creationId xmlns:a16="http://schemas.microsoft.com/office/drawing/2014/main" id="{3C8CB539-E90D-4D0C-B3AB-5A5A0E5A233D}"/>
               </a:ext>
             </a:extLst>
           </p:cNvPr>
@@ -9195,7 +9193,7 @@
           <p:cNvPr id="29" name="">
             <a:extLst xmlns:a="http://schemas.openxmlformats.org/drawingml/2006/main">
               <a:ext uri="{FF2B5EF4-FFF2-40B4-BE49-F238E27FC236}">
-                <a16:creationId xmlns:a16="http://schemas.microsoft.com/office/drawing/2014/main" id="{504A8F99-43CA-4934-800B-A978988B4885}"/>
+                <a16:creationId xmlns:a16="http://schemas.microsoft.com/office/drawing/2014/main" id="{3A987CD1-12F7-4340-9E3A-EF1BE11F6EF8}"/>
               </a:ext>
             </a:extLst>
           </p:cNvPr>
@@ -9259,7 +9257,7 @@
           <p:cNvPr id="30" name="">
             <a:extLst xmlns:a="http://schemas.openxmlformats.org/drawingml/2006/main">
               <a:ext uri="{FF2B5EF4-FFF2-40B4-BE49-F238E27FC236}">
-                <a16:creationId xmlns:a16="http://schemas.microsoft.com/office/drawing/2014/main" id="{3D006B0C-5B79-4F5F-933E-D158BCF416A0}"/>
+                <a16:creationId xmlns:a16="http://schemas.microsoft.com/office/drawing/2014/main" id="{6CC69628-69AF-4D72-9969-487847A59DB8}"/>
               </a:ext>
             </a:extLst>
           </p:cNvPr>
@@ -9292,7 +9290,7 @@
           <p:cNvPr id="31" name="">
             <a:extLst xmlns:a="http://schemas.openxmlformats.org/drawingml/2006/main">
               <a:ext uri="{FF2B5EF4-FFF2-40B4-BE49-F238E27FC236}">
-                <a16:creationId xmlns:a16="http://schemas.microsoft.com/office/drawing/2014/main" id="{0AC52414-BA58-4333-B603-397F17A8DAE0}"/>
+                <a16:creationId xmlns:a16="http://schemas.microsoft.com/office/drawing/2014/main" id="{2D790B8C-98CF-40AA-A1D7-6EFFA79A84BB}"/>
               </a:ext>
             </a:extLst>
           </p:cNvPr>
@@ -9327,7 +9325,7 @@
           <p:cNvPr id="32" name="">
             <a:extLst xmlns:a="http://schemas.openxmlformats.org/drawingml/2006/main">
               <a:ext uri="{FF2B5EF4-FFF2-40B4-BE49-F238E27FC236}">
-                <a16:creationId xmlns:a16="http://schemas.microsoft.com/office/drawing/2014/main" id="{B2D24C24-9FB8-468A-9459-803199201167}"/>
+                <a16:creationId xmlns:a16="http://schemas.microsoft.com/office/drawing/2014/main" id="{E327B869-A05D-4800-8862-DB4DDCAD5A43}"/>
               </a:ext>
             </a:extLst>
           </p:cNvPr>
@@ -9391,7 +9389,7 @@
           <p:cNvPr id="33" name="">
             <a:extLst xmlns:a="http://schemas.openxmlformats.org/drawingml/2006/main">
               <a:ext uri="{FF2B5EF4-FFF2-40B4-BE49-F238E27FC236}">
-                <a16:creationId xmlns:a16="http://schemas.microsoft.com/office/drawing/2014/main" id="{3F18B8EF-0B81-471C-A1C3-B12C2C6CD23B}"/>
+                <a16:creationId xmlns:a16="http://schemas.microsoft.com/office/drawing/2014/main" id="{582A4F47-33E7-45FF-AE95-381925B0448B}"/>
               </a:ext>
             </a:extLst>
           </p:cNvPr>
@@ -9424,7 +9422,7 @@
           <p:cNvPr id="34" name="">
             <a:extLst xmlns:a="http://schemas.openxmlformats.org/drawingml/2006/main">
               <a:ext uri="{FF2B5EF4-FFF2-40B4-BE49-F238E27FC236}">
-                <a16:creationId xmlns:a16="http://schemas.microsoft.com/office/drawing/2014/main" id="{F1782D25-70DE-41A1-853B-D26120E1DBD6}"/>
+                <a16:creationId xmlns:a16="http://schemas.microsoft.com/office/drawing/2014/main" id="{70E1CE97-3802-4B62-A3EA-927CCB93CDA1}"/>
               </a:ext>
             </a:extLst>
           </p:cNvPr>
@@ -9459,7 +9457,7 @@
           <p:cNvPr id="35" name="">
             <a:extLst xmlns:a="http://schemas.openxmlformats.org/drawingml/2006/main">
               <a:ext uri="{FF2B5EF4-FFF2-40B4-BE49-F238E27FC236}">
-                <a16:creationId xmlns:a16="http://schemas.microsoft.com/office/drawing/2014/main" id="{7D0C9C21-37FF-4B6A-94A5-B83EB6508F65}"/>
+                <a16:creationId xmlns:a16="http://schemas.microsoft.com/office/drawing/2014/main" id="{E3990192-687E-49D4-AA9D-46C8118F2054}"/>
               </a:ext>
             </a:extLst>
           </p:cNvPr>
@@ -9523,7 +9521,7 @@
           <p:cNvPr id="36" name="">
             <a:extLst xmlns:a="http://schemas.openxmlformats.org/drawingml/2006/main">
               <a:ext uri="{FF2B5EF4-FFF2-40B4-BE49-F238E27FC236}">
-                <a16:creationId xmlns:a16="http://schemas.microsoft.com/office/drawing/2014/main" id="{FE6625AF-6026-43A0-B622-4FD69ECD01B6}"/>
+                <a16:creationId xmlns:a16="http://schemas.microsoft.com/office/drawing/2014/main" id="{41DC14C0-DC20-402F-9D14-9D034C2B90EB}"/>
               </a:ext>
             </a:extLst>
           </p:cNvPr>
@@ -9556,7 +9554,7 @@
           <p:cNvPr id="37" name="">
             <a:extLst xmlns:a="http://schemas.openxmlformats.org/drawingml/2006/main">
               <a:ext uri="{FF2B5EF4-FFF2-40B4-BE49-F238E27FC236}">
-                <a16:creationId xmlns:a16="http://schemas.microsoft.com/office/drawing/2014/main" id="{5C23A0E5-F88F-454A-9D24-1D62C66DF0A9}"/>
+                <a16:creationId xmlns:a16="http://schemas.microsoft.com/office/drawing/2014/main" id="{3663A740-CAB7-4A3A-B150-F861856D6E4C}"/>
               </a:ext>
             </a:extLst>
           </p:cNvPr>
@@ -9620,7 +9618,7 @@
           <p:cNvPr id="38" name="">
             <a:extLst xmlns:a="http://schemas.openxmlformats.org/drawingml/2006/main">
               <a:ext uri="{FF2B5EF4-FFF2-40B4-BE49-F238E27FC236}">
-                <a16:creationId xmlns:a16="http://schemas.microsoft.com/office/drawing/2014/main" id="{00AB0973-240C-4262-AFFA-BAD46336D0CD}"/>
+                <a16:creationId xmlns:a16="http://schemas.microsoft.com/office/drawing/2014/main" id="{E91285E5-77D8-45FF-8E5A-4786F5A30833}"/>
               </a:ext>
             </a:extLst>
           </p:cNvPr>
@@ -9684,7 +9682,7 @@
           <p:cNvPr id="39" name="">
             <a:extLst xmlns:a="http://schemas.openxmlformats.org/drawingml/2006/main">
               <a:ext uri="{FF2B5EF4-FFF2-40B4-BE49-F238E27FC236}">
-                <a16:creationId xmlns:a16="http://schemas.microsoft.com/office/drawing/2014/main" id="{6668E4A4-ED83-4E9F-A4B5-4F17636D69CB}"/>
+                <a16:creationId xmlns:a16="http://schemas.microsoft.com/office/drawing/2014/main" id="{CFEB0EE0-A922-4C36-A8B7-4B3D987FF816}"/>
               </a:ext>
             </a:extLst>
           </p:cNvPr>
@@ -9719,7 +9717,7 @@
           <p:cNvPr id="40" name="">
             <a:extLst xmlns:a="http://schemas.openxmlformats.org/drawingml/2006/main">
               <a:ext uri="{FF2B5EF4-FFF2-40B4-BE49-F238E27FC236}">
-                <a16:creationId xmlns:a16="http://schemas.microsoft.com/office/drawing/2014/main" id="{6FF17689-4610-42B6-87EF-50DC5EFEBD14}"/>
+                <a16:creationId xmlns:a16="http://schemas.microsoft.com/office/drawing/2014/main" id="{54D14482-6CB2-45C5-9DD6-6F65A684D88F}"/>
               </a:ext>
             </a:extLst>
           </p:cNvPr>
@@ -9783,7 +9781,7 @@
           <p:cNvPr id="41" name="">
             <a:extLst xmlns:a="http://schemas.openxmlformats.org/drawingml/2006/main">
               <a:ext uri="{FF2B5EF4-FFF2-40B4-BE49-F238E27FC236}">
-                <a16:creationId xmlns:a16="http://schemas.microsoft.com/office/drawing/2014/main" id="{394A5E6F-6A65-43BB-A463-910C375AC89A}"/>
+                <a16:creationId xmlns:a16="http://schemas.microsoft.com/office/drawing/2014/main" id="{AC0C151B-DF25-40D5-B0AF-B6C3305361EE}"/>
               </a:ext>
             </a:extLst>
           </p:cNvPr>
@@ -9847,7 +9845,7 @@
           <p:cNvPr id="42" name="">
             <a:extLst xmlns:a="http://schemas.openxmlformats.org/drawingml/2006/main">
               <a:ext uri="{FF2B5EF4-FFF2-40B4-BE49-F238E27FC236}">
-                <a16:creationId xmlns:a16="http://schemas.microsoft.com/office/drawing/2014/main" id="{D55E6671-8A21-45DD-A9EB-532443A28123}"/>
+                <a16:creationId xmlns:a16="http://schemas.microsoft.com/office/drawing/2014/main" id="{1B22E498-1C5D-41C1-B128-75E869930AE5}"/>
               </a:ext>
             </a:extLst>
           </p:cNvPr>
@@ -9909,7 +9907,7 @@
     </p:spTree>
     <p:extLst>
       <p:ext uri="{BB962C8B-B14F-4D97-AF65-F5344CB8AC3E}">
-        <p14:creationId xmlns:p14="http://schemas.microsoft.com/office/powerpoint/2010/main" val="914138484"/>
+        <p14:creationId xmlns:p14="http://schemas.microsoft.com/office/powerpoint/2010/main" val="1323033702"/>
       </p:ext>
     </p:extLst>
   </p:cSld>
@@ -9933,7 +9931,7 @@
           <p:cNvPr id="1" name="">
             <a:extLst xmlns:a="http://schemas.openxmlformats.org/drawingml/2006/main">
               <a:ext uri="{FF2B5EF4-FFF2-40B4-BE49-F238E27FC236}">
-                <a16:creationId xmlns:a16="http://schemas.microsoft.com/office/drawing/2014/main" id="{7D205CCE-C31D-4385-94A2-0D40AFD3D17E}"/>
+                <a16:creationId xmlns:a16="http://schemas.microsoft.com/office/drawing/2014/main" id="{7F5725DA-9560-4CAF-B17C-454E219925E4}"/>
               </a:ext>
             </a:extLst>
           </p:cNvPr>
@@ -9968,7 +9966,7 @@
           <p:cNvPr id="2" name="">
             <a:extLst xmlns:a="http://schemas.openxmlformats.org/drawingml/2006/main">
               <a:ext uri="{FF2B5EF4-FFF2-40B4-BE49-F238E27FC236}">
-                <a16:creationId xmlns:a16="http://schemas.microsoft.com/office/drawing/2014/main" id="{8DB40CB1-E99D-46EA-886C-61541556C256}"/>
+                <a16:creationId xmlns:a16="http://schemas.microsoft.com/office/drawing/2014/main" id="{8A65338C-D9B8-47BD-ABFB-8613DEC34B10}"/>
               </a:ext>
             </a:extLst>
           </p:cNvPr>
@@ -10003,7 +10001,7 @@
           <p:cNvPr id="3" name="">
             <a:extLst xmlns:a="http://schemas.openxmlformats.org/drawingml/2006/main">
               <a:ext uri="{FF2B5EF4-FFF2-40B4-BE49-F238E27FC236}">
-                <a16:creationId xmlns:a16="http://schemas.microsoft.com/office/drawing/2014/main" id="{10FED20B-0A7B-45A4-9041-6BB307BCB11B}"/>
+                <a16:creationId xmlns:a16="http://schemas.microsoft.com/office/drawing/2014/main" id="{A13B6F4C-E5D4-437B-BC52-26CBE7322023}"/>
               </a:ext>
             </a:extLst>
           </p:cNvPr>
@@ -10038,7 +10036,7 @@
           <p:cNvPr id="4" name="kicker-03-marker">
             <a:extLst xmlns:a="http://schemas.openxmlformats.org/drawingml/2006/main">
               <a:ext uri="{FF2B5EF4-FFF2-40B4-BE49-F238E27FC236}">
-                <a16:creationId xmlns:a16="http://schemas.microsoft.com/office/drawing/2014/main" id="{373B089D-AAA9-4D64-9415-738548726C8A}"/>
+                <a16:creationId xmlns:a16="http://schemas.microsoft.com/office/drawing/2014/main" id="{9CCA3CD9-0A06-4026-AEF9-F9278BB6384A}"/>
               </a:ext>
             </a:extLst>
           </p:cNvPr>
@@ -10073,7 +10071,7 @@
           <p:cNvPr id="5" name="kicker-03-label">
             <a:extLst xmlns:a="http://schemas.openxmlformats.org/drawingml/2006/main">
               <a:ext uri="{FF2B5EF4-FFF2-40B4-BE49-F238E27FC236}">
-                <a16:creationId xmlns:a16="http://schemas.microsoft.com/office/drawing/2014/main" id="{9BF54969-46D1-4B1D-B26E-430A6A4AEBA3}"/>
+                <a16:creationId xmlns:a16="http://schemas.microsoft.com/office/drawing/2014/main" id="{7007ABE8-D62D-4BC1-AF41-C7AC058010B2}"/>
               </a:ext>
             </a:extLst>
           </p:cNvPr>
@@ -10137,7 +10135,7 @@
           <p:cNvPr id="6" name="">
             <a:extLst xmlns:a="http://schemas.openxmlformats.org/drawingml/2006/main">
               <a:ext uri="{FF2B5EF4-FFF2-40B4-BE49-F238E27FC236}">
-                <a16:creationId xmlns:a16="http://schemas.microsoft.com/office/drawing/2014/main" id="{8EB738C9-1227-4A61-AECF-E3EB21B250A9}"/>
+                <a16:creationId xmlns:a16="http://schemas.microsoft.com/office/drawing/2014/main" id="{602115B9-C304-4274-8C1B-860EDA661D26}"/>
               </a:ext>
             </a:extLst>
           </p:cNvPr>
@@ -10201,7 +10199,7 @@
           <p:cNvPr id="7" name="">
             <a:extLst xmlns:a="http://schemas.openxmlformats.org/drawingml/2006/main">
               <a:ext uri="{FF2B5EF4-FFF2-40B4-BE49-F238E27FC236}">
-                <a16:creationId xmlns:a16="http://schemas.microsoft.com/office/drawing/2014/main" id="{8AF5C7F2-C029-448E-B3F6-D9B4AA3F0FE8}"/>
+                <a16:creationId xmlns:a16="http://schemas.microsoft.com/office/drawing/2014/main" id="{3D61BFA6-0FE1-4160-A575-FBC828861DDF}"/>
               </a:ext>
             </a:extLst>
           </p:cNvPr>
@@ -10265,7 +10263,7 @@
           <p:cNvPr id="8" name="">
             <a:extLst xmlns:a="http://schemas.openxmlformats.org/drawingml/2006/main">
               <a:ext uri="{FF2B5EF4-FFF2-40B4-BE49-F238E27FC236}">
-                <a16:creationId xmlns:a16="http://schemas.microsoft.com/office/drawing/2014/main" id="{38045C71-A401-4354-AA40-07330ADC17DE}"/>
+                <a16:creationId xmlns:a16="http://schemas.microsoft.com/office/drawing/2014/main" id="{82CE2695-41D3-415D-8168-2F9B878440A3}"/>
               </a:ext>
             </a:extLst>
           </p:cNvPr>
@@ -10300,7 +10298,7 @@
           <p:cNvPr id="9" name="">
             <a:extLst xmlns:a="http://schemas.openxmlformats.org/drawingml/2006/main">
               <a:ext uri="{FF2B5EF4-FFF2-40B4-BE49-F238E27FC236}">
-                <a16:creationId xmlns:a16="http://schemas.microsoft.com/office/drawing/2014/main" id="{B4749D39-361F-4E8B-ABAB-D9FA9F988CFE}"/>
+                <a16:creationId xmlns:a16="http://schemas.microsoft.com/office/drawing/2014/main" id="{A5FB63A5-6F61-435C-B758-6C68628D0170}"/>
               </a:ext>
             </a:extLst>
           </p:cNvPr>
@@ -10364,7 +10362,7 @@
           <p:cNvPr id="10" name="">
             <a:extLst xmlns:a="http://schemas.openxmlformats.org/drawingml/2006/main">
               <a:ext uri="{FF2B5EF4-FFF2-40B4-BE49-F238E27FC236}">
-                <a16:creationId xmlns:a16="http://schemas.microsoft.com/office/drawing/2014/main" id="{87CF2E5A-EBE8-431C-97EA-1953FFF24B3A}"/>
+                <a16:creationId xmlns:a16="http://schemas.microsoft.com/office/drawing/2014/main" id="{732D4542-7069-4E09-BF95-255144DD1FD9}"/>
               </a:ext>
             </a:extLst>
           </p:cNvPr>
@@ -10428,7 +10426,7 @@
           <p:cNvPr id="11" name="">
             <a:extLst xmlns:a="http://schemas.openxmlformats.org/drawingml/2006/main">
               <a:ext uri="{FF2B5EF4-FFF2-40B4-BE49-F238E27FC236}">
-                <a16:creationId xmlns:a16="http://schemas.microsoft.com/office/drawing/2014/main" id="{4008569E-0AC5-4DCA-9E66-EA9FC1B4509C}"/>
+                <a16:creationId xmlns:a16="http://schemas.microsoft.com/office/drawing/2014/main" id="{BF4B8C9A-A624-491A-B0E4-067052DC261A}"/>
               </a:ext>
             </a:extLst>
           </p:cNvPr>
@@ -10492,7 +10490,7 @@
           <p:cNvPr id="12" name="">
             <a:extLst xmlns:a="http://schemas.openxmlformats.org/drawingml/2006/main">
               <a:ext uri="{FF2B5EF4-FFF2-40B4-BE49-F238E27FC236}">
-                <a16:creationId xmlns:a16="http://schemas.microsoft.com/office/drawing/2014/main" id="{FD56B061-655F-45DC-AF0B-F2E8CC6E911E}"/>
+                <a16:creationId xmlns:a16="http://schemas.microsoft.com/office/drawing/2014/main" id="{DC7FE2CF-B529-4488-BFF3-EDA9D7E93300}"/>
               </a:ext>
             </a:extLst>
           </p:cNvPr>
@@ -10527,7 +10525,7 @@
           <p:cNvPr id="13" name="">
             <a:extLst xmlns:a="http://schemas.openxmlformats.org/drawingml/2006/main">
               <a:ext uri="{FF2B5EF4-FFF2-40B4-BE49-F238E27FC236}">
-                <a16:creationId xmlns:a16="http://schemas.microsoft.com/office/drawing/2014/main" id="{F4464752-1D8F-411C-A1F8-2B625CC396A0}"/>
+                <a16:creationId xmlns:a16="http://schemas.microsoft.com/office/drawing/2014/main" id="{8700DB64-E485-47D7-BC04-5A82BD15DFC0}"/>
               </a:ext>
             </a:extLst>
           </p:cNvPr>
@@ -10560,7 +10558,7 @@
           <p:cNvPr id="14" name="">
             <a:extLst xmlns:a="http://schemas.openxmlformats.org/drawingml/2006/main">
               <a:ext uri="{FF2B5EF4-FFF2-40B4-BE49-F238E27FC236}">
-                <a16:creationId xmlns:a16="http://schemas.microsoft.com/office/drawing/2014/main" id="{53357556-1237-4052-B43B-21DF5CBC6E1E}"/>
+                <a16:creationId xmlns:a16="http://schemas.microsoft.com/office/drawing/2014/main" id="{C8DFE985-1C80-4857-AFCE-584E489FA0EB}"/>
               </a:ext>
             </a:extLst>
           </p:cNvPr>
@@ -10593,7 +10591,7 @@
           <p:cNvPr id="15" name="">
             <a:extLst xmlns:a="http://schemas.openxmlformats.org/drawingml/2006/main">
               <a:ext uri="{FF2B5EF4-FFF2-40B4-BE49-F238E27FC236}">
-                <a16:creationId xmlns:a16="http://schemas.microsoft.com/office/drawing/2014/main" id="{A12538B9-D163-49D4-97F4-4FAC8995A409}"/>
+                <a16:creationId xmlns:a16="http://schemas.microsoft.com/office/drawing/2014/main" id="{F07D6D49-6D2D-4520-B37A-6865CF5973F4}"/>
               </a:ext>
             </a:extLst>
           </p:cNvPr>
@@ -10657,7 +10655,7 @@
           <p:cNvPr id="16" name="">
             <a:extLst xmlns:a="http://schemas.openxmlformats.org/drawingml/2006/main">
               <a:ext uri="{FF2B5EF4-FFF2-40B4-BE49-F238E27FC236}">
-                <a16:creationId xmlns:a16="http://schemas.microsoft.com/office/drawing/2014/main" id="{41513234-9C29-40C8-AD92-89D6E1009E92}"/>
+                <a16:creationId xmlns:a16="http://schemas.microsoft.com/office/drawing/2014/main" id="{BE53AB08-A439-45E8-B267-367599E91A90}"/>
               </a:ext>
             </a:extLst>
           </p:cNvPr>
@@ -10721,7 +10719,7 @@
           <p:cNvPr id="17" name="">
             <a:extLst xmlns:a="http://schemas.openxmlformats.org/drawingml/2006/main">
               <a:ext uri="{FF2B5EF4-FFF2-40B4-BE49-F238E27FC236}">
-                <a16:creationId xmlns:a16="http://schemas.microsoft.com/office/drawing/2014/main" id="{E2BB46AD-42C9-42FC-A7AA-EB55DC69271E}"/>
+                <a16:creationId xmlns:a16="http://schemas.microsoft.com/office/drawing/2014/main" id="{AD64CE2D-D62F-41D0-B676-1D91464B63DB}"/>
               </a:ext>
             </a:extLst>
           </p:cNvPr>
@@ -10785,7 +10783,7 @@
           <p:cNvPr id="18" name="">
             <a:extLst xmlns:a="http://schemas.openxmlformats.org/drawingml/2006/main">
               <a:ext uri="{FF2B5EF4-FFF2-40B4-BE49-F238E27FC236}">
-                <a16:creationId xmlns:a16="http://schemas.microsoft.com/office/drawing/2014/main" id="{B3BE496C-DB4E-41DD-98B9-FFA3881EB16C}"/>
+                <a16:creationId xmlns:a16="http://schemas.microsoft.com/office/drawing/2014/main" id="{C5C7C678-7A12-4074-B298-3AC1548B6BB2}"/>
               </a:ext>
             </a:extLst>
           </p:cNvPr>
@@ -10820,7 +10818,7 @@
           <p:cNvPr id="19" name="">
             <a:extLst xmlns:a="http://schemas.openxmlformats.org/drawingml/2006/main">
               <a:ext uri="{FF2B5EF4-FFF2-40B4-BE49-F238E27FC236}">
-                <a16:creationId xmlns:a16="http://schemas.microsoft.com/office/drawing/2014/main" id="{BA4FF430-EAB6-4DA3-86FE-61185FABF160}"/>
+                <a16:creationId xmlns:a16="http://schemas.microsoft.com/office/drawing/2014/main" id="{632BDDC2-0E41-4ED2-A8FF-46FDF983F4A9}"/>
               </a:ext>
             </a:extLst>
           </p:cNvPr>
@@ -10884,7 +10882,7 @@
           <p:cNvPr id="20" name="">
             <a:extLst xmlns:a="http://schemas.openxmlformats.org/drawingml/2006/main">
               <a:ext uri="{FF2B5EF4-FFF2-40B4-BE49-F238E27FC236}">
-                <a16:creationId xmlns:a16="http://schemas.microsoft.com/office/drawing/2014/main" id="{8DFF44D5-3DB8-48F5-B621-AF9F4D46A88D}"/>
+                <a16:creationId xmlns:a16="http://schemas.microsoft.com/office/drawing/2014/main" id="{0BC4E254-A690-46D7-8484-B34F766D09AE}"/>
               </a:ext>
             </a:extLst>
           </p:cNvPr>
@@ -10948,7 +10946,7 @@
           <p:cNvPr id="21" name="">
             <a:extLst xmlns:a="http://schemas.openxmlformats.org/drawingml/2006/main">
               <a:ext uri="{FF2B5EF4-FFF2-40B4-BE49-F238E27FC236}">
-                <a16:creationId xmlns:a16="http://schemas.microsoft.com/office/drawing/2014/main" id="{428C1504-8359-41DA-92A5-C21E839FFD0F}"/>
+                <a16:creationId xmlns:a16="http://schemas.microsoft.com/office/drawing/2014/main" id="{F8FDCE91-7DEC-4F26-9EB2-01E48F8009DA}"/>
               </a:ext>
             </a:extLst>
           </p:cNvPr>
@@ -11012,7 +11010,7 @@
           <p:cNvPr id="22" name="">
             <a:extLst xmlns:a="http://schemas.openxmlformats.org/drawingml/2006/main">
               <a:ext uri="{FF2B5EF4-FFF2-40B4-BE49-F238E27FC236}">
-                <a16:creationId xmlns:a16="http://schemas.microsoft.com/office/drawing/2014/main" id="{C07D6977-1AFF-40B6-AF1F-6F69360140A9}"/>
+                <a16:creationId xmlns:a16="http://schemas.microsoft.com/office/drawing/2014/main" id="{35C7974B-F295-4C6A-8F25-EE13E8AA784E}"/>
               </a:ext>
             </a:extLst>
           </p:cNvPr>
@@ -11047,7 +11045,7 @@
           <p:cNvPr id="23" name="">
             <a:extLst xmlns:a="http://schemas.openxmlformats.org/drawingml/2006/main">
               <a:ext uri="{FF2B5EF4-FFF2-40B4-BE49-F238E27FC236}">
-                <a16:creationId xmlns:a16="http://schemas.microsoft.com/office/drawing/2014/main" id="{E3F977AE-4A79-4D26-B2E3-FBFFD5BC492F}"/>
+                <a16:creationId xmlns:a16="http://schemas.microsoft.com/office/drawing/2014/main" id="{F095C077-C2AB-4A04-865E-EA2026F5BE17}"/>
               </a:ext>
             </a:extLst>
           </p:cNvPr>
@@ -11082,7 +11080,7 @@
           <p:cNvPr id="24" name="">
             <a:extLst xmlns:a="http://schemas.openxmlformats.org/drawingml/2006/main">
               <a:ext uri="{FF2B5EF4-FFF2-40B4-BE49-F238E27FC236}">
-                <a16:creationId xmlns:a16="http://schemas.microsoft.com/office/drawing/2014/main" id="{613671CE-85CA-47FB-85A6-7038095CBB79}"/>
+                <a16:creationId xmlns:a16="http://schemas.microsoft.com/office/drawing/2014/main" id="{370A736F-CF28-4669-B0F0-23A2353099C4}"/>
               </a:ext>
             </a:extLst>
           </p:cNvPr>
@@ -11146,7 +11144,7 @@
           <p:cNvPr id="25" name="">
             <a:extLst xmlns:a="http://schemas.openxmlformats.org/drawingml/2006/main">
               <a:ext uri="{FF2B5EF4-FFF2-40B4-BE49-F238E27FC236}">
-                <a16:creationId xmlns:a16="http://schemas.microsoft.com/office/drawing/2014/main" id="{B644702E-4EB6-4DE3-BF70-3918F8E8FA32}"/>
+                <a16:creationId xmlns:a16="http://schemas.microsoft.com/office/drawing/2014/main" id="{98D7F194-B3A4-41AB-B0CA-8F7070D390CE}"/>
               </a:ext>
             </a:extLst>
           </p:cNvPr>
@@ -11210,7 +11208,7 @@
           <p:cNvPr id="26" name="">
             <a:extLst xmlns:a="http://schemas.openxmlformats.org/drawingml/2006/main">
               <a:ext uri="{FF2B5EF4-FFF2-40B4-BE49-F238E27FC236}">
-                <a16:creationId xmlns:a16="http://schemas.microsoft.com/office/drawing/2014/main" id="{93B38B69-70E3-4B1E-8FCC-2B8D5DDFC43A}"/>
+                <a16:creationId xmlns:a16="http://schemas.microsoft.com/office/drawing/2014/main" id="{13F141C3-67EB-4ED2-8676-08D90BF25A65}"/>
               </a:ext>
             </a:extLst>
           </p:cNvPr>
@@ -11274,7 +11272,7 @@
           <p:cNvPr id="27" name="">
             <a:extLst xmlns:a="http://schemas.openxmlformats.org/drawingml/2006/main">
               <a:ext uri="{FF2B5EF4-FFF2-40B4-BE49-F238E27FC236}">
-                <a16:creationId xmlns:a16="http://schemas.microsoft.com/office/drawing/2014/main" id="{D4119F99-08E5-4F65-8AF0-B3A8114F50E7}"/>
+                <a16:creationId xmlns:a16="http://schemas.microsoft.com/office/drawing/2014/main" id="{35D548FD-A2C6-4E41-8162-3040F72DFE72}"/>
               </a:ext>
             </a:extLst>
           </p:cNvPr>
@@ -11309,7 +11307,7 @@
           <p:cNvPr id="28" name="">
             <a:extLst xmlns:a="http://schemas.openxmlformats.org/drawingml/2006/main">
               <a:ext uri="{FF2B5EF4-FFF2-40B4-BE49-F238E27FC236}">
-                <a16:creationId xmlns:a16="http://schemas.microsoft.com/office/drawing/2014/main" id="{7500C804-5348-492F-A50C-22C4F121CB50}"/>
+                <a16:creationId xmlns:a16="http://schemas.microsoft.com/office/drawing/2014/main" id="{0C96DEAE-F3DF-4233-8A6B-2EE79B06A537}"/>
               </a:ext>
             </a:extLst>
           </p:cNvPr>
@@ -11373,7 +11371,7 @@
           <p:cNvPr id="29" name="">
             <a:extLst xmlns:a="http://schemas.openxmlformats.org/drawingml/2006/main">
               <a:ext uri="{FF2B5EF4-FFF2-40B4-BE49-F238E27FC236}">
-                <a16:creationId xmlns:a16="http://schemas.microsoft.com/office/drawing/2014/main" id="{82B20D96-1A21-4B02-A86C-5120BC1BC52B}"/>
+                <a16:creationId xmlns:a16="http://schemas.microsoft.com/office/drawing/2014/main" id="{0B799E38-0666-473E-BB87-A3398253795B}"/>
               </a:ext>
             </a:extLst>
           </p:cNvPr>
@@ -11437,7 +11435,7 @@
           <p:cNvPr id="30" name="">
             <a:extLst xmlns:a="http://schemas.openxmlformats.org/drawingml/2006/main">
               <a:ext uri="{FF2B5EF4-FFF2-40B4-BE49-F238E27FC236}">
-                <a16:creationId xmlns:a16="http://schemas.microsoft.com/office/drawing/2014/main" id="{2FD461E6-CD69-4A50-A912-7CF4C3E1ABD0}"/>
+                <a16:creationId xmlns:a16="http://schemas.microsoft.com/office/drawing/2014/main" id="{59AB0E1D-9915-4B69-9F0F-B1924BD5EABE}"/>
               </a:ext>
             </a:extLst>
           </p:cNvPr>
@@ -11501,7 +11499,7 @@
           <p:cNvPr id="31" name="">
             <a:extLst xmlns:a="http://schemas.openxmlformats.org/drawingml/2006/main">
               <a:ext uri="{FF2B5EF4-FFF2-40B4-BE49-F238E27FC236}">
-                <a16:creationId xmlns:a16="http://schemas.microsoft.com/office/drawing/2014/main" id="{C0ACD82A-4E33-4D40-B1CF-28543A0F542B}"/>
+                <a16:creationId xmlns:a16="http://schemas.microsoft.com/office/drawing/2014/main" id="{5DA5C903-570B-441E-98FF-387782268395}"/>
               </a:ext>
             </a:extLst>
           </p:cNvPr>
@@ -11536,7 +11534,7 @@
           <p:cNvPr id="32" name="">
             <a:extLst xmlns:a="http://schemas.openxmlformats.org/drawingml/2006/main">
               <a:ext uri="{FF2B5EF4-FFF2-40B4-BE49-F238E27FC236}">
-                <a16:creationId xmlns:a16="http://schemas.microsoft.com/office/drawing/2014/main" id="{61E085B8-B83D-437E-8491-D9690CAE9C14}"/>
+                <a16:creationId xmlns:a16="http://schemas.microsoft.com/office/drawing/2014/main" id="{8AD3152C-67CF-42B5-9D32-1A0C1CC020E2}"/>
               </a:ext>
             </a:extLst>
           </p:cNvPr>
@@ -11571,7 +11569,7 @@
           <p:cNvPr id="33" name="">
             <a:extLst xmlns:a="http://schemas.openxmlformats.org/drawingml/2006/main">
               <a:ext uri="{FF2B5EF4-FFF2-40B4-BE49-F238E27FC236}">
-                <a16:creationId xmlns:a16="http://schemas.microsoft.com/office/drawing/2014/main" id="{534B6148-BB5C-44F9-B040-1C59F2F7FA8A}"/>
+                <a16:creationId xmlns:a16="http://schemas.microsoft.com/office/drawing/2014/main" id="{4A29AE02-378A-44C4-AE7C-2C90C7E8BFBA}"/>
               </a:ext>
             </a:extLst>
           </p:cNvPr>
@@ -11635,7 +11633,7 @@
           <p:cNvPr id="34" name="">
             <a:extLst xmlns:a="http://schemas.openxmlformats.org/drawingml/2006/main">
               <a:ext uri="{FF2B5EF4-FFF2-40B4-BE49-F238E27FC236}">
-                <a16:creationId xmlns:a16="http://schemas.microsoft.com/office/drawing/2014/main" id="{2DE3ADE5-0C63-44D0-A03F-FD0FE131E204}"/>
+                <a16:creationId xmlns:a16="http://schemas.microsoft.com/office/drawing/2014/main" id="{28CF6552-3D3D-4A8E-9CBB-3F3891F50456}"/>
               </a:ext>
             </a:extLst>
           </p:cNvPr>
@@ -11699,7 +11697,7 @@
           <p:cNvPr id="35" name="">
             <a:extLst xmlns:a="http://schemas.openxmlformats.org/drawingml/2006/main">
               <a:ext uri="{FF2B5EF4-FFF2-40B4-BE49-F238E27FC236}">
-                <a16:creationId xmlns:a16="http://schemas.microsoft.com/office/drawing/2014/main" id="{E79D4002-6487-41FA-9D5B-DCDF7936EE70}"/>
+                <a16:creationId xmlns:a16="http://schemas.microsoft.com/office/drawing/2014/main" id="{E3E9DB6F-9F49-400B-BFCA-DD7DEEAF7821}"/>
               </a:ext>
             </a:extLst>
           </p:cNvPr>
@@ -11763,7 +11761,7 @@
           <p:cNvPr id="36" name="">
             <a:extLst xmlns:a="http://schemas.openxmlformats.org/drawingml/2006/main">
               <a:ext uri="{FF2B5EF4-FFF2-40B4-BE49-F238E27FC236}">
-                <a16:creationId xmlns:a16="http://schemas.microsoft.com/office/drawing/2014/main" id="{89837445-92A9-410B-8E34-7B57602EC6B8}"/>
+                <a16:creationId xmlns:a16="http://schemas.microsoft.com/office/drawing/2014/main" id="{BAD6037F-3085-440D-904A-6D2E63032FBD}"/>
               </a:ext>
             </a:extLst>
           </p:cNvPr>
@@ -11798,7 +11796,7 @@
           <p:cNvPr id="37" name="">
             <a:extLst xmlns:a="http://schemas.openxmlformats.org/drawingml/2006/main">
               <a:ext uri="{FF2B5EF4-FFF2-40B4-BE49-F238E27FC236}">
-                <a16:creationId xmlns:a16="http://schemas.microsoft.com/office/drawing/2014/main" id="{943A8DFF-BC62-47AC-964B-A1607B6C28E7}"/>
+                <a16:creationId xmlns:a16="http://schemas.microsoft.com/office/drawing/2014/main" id="{A0A4EE7E-06F4-4822-A4EB-C9C122A04B89}"/>
               </a:ext>
             </a:extLst>
           </p:cNvPr>
@@ -11862,7 +11860,7 @@
           <p:cNvPr id="38" name="">
             <a:extLst xmlns:a="http://schemas.openxmlformats.org/drawingml/2006/main">
               <a:ext uri="{FF2B5EF4-FFF2-40B4-BE49-F238E27FC236}">
-                <a16:creationId xmlns:a16="http://schemas.microsoft.com/office/drawing/2014/main" id="{574E230D-4B91-47E3-86D0-9D850EB85CCB}"/>
+                <a16:creationId xmlns:a16="http://schemas.microsoft.com/office/drawing/2014/main" id="{BC725018-C2F0-4820-826E-C24B3BAB15E4}"/>
               </a:ext>
             </a:extLst>
           </p:cNvPr>
@@ -11926,7 +11924,7 @@
           <p:cNvPr id="39" name="">
             <a:extLst xmlns:a="http://schemas.openxmlformats.org/drawingml/2006/main">
               <a:ext uri="{FF2B5EF4-FFF2-40B4-BE49-F238E27FC236}">
-                <a16:creationId xmlns:a16="http://schemas.microsoft.com/office/drawing/2014/main" id="{113DEAC8-0313-4A5C-ACE1-3C203D79BD2F}"/>
+                <a16:creationId xmlns:a16="http://schemas.microsoft.com/office/drawing/2014/main" id="{9B5EBC73-02FB-4407-9016-5205B3B623CA}"/>
               </a:ext>
             </a:extLst>
           </p:cNvPr>
@@ -11990,7 +11988,7 @@
           <p:cNvPr id="40" name="">
             <a:extLst xmlns:a="http://schemas.openxmlformats.org/drawingml/2006/main">
               <a:ext uri="{FF2B5EF4-FFF2-40B4-BE49-F238E27FC236}">
-                <a16:creationId xmlns:a16="http://schemas.microsoft.com/office/drawing/2014/main" id="{B2A7DCA1-1791-4DB8-8140-D8F6D467047B}"/>
+                <a16:creationId xmlns:a16="http://schemas.microsoft.com/office/drawing/2014/main" id="{26440EDC-C848-47A1-B19E-DEAC1833009B}"/>
               </a:ext>
             </a:extLst>
           </p:cNvPr>
@@ -12025,7 +12023,7 @@
           <p:cNvPr id="41" name="">
             <a:extLst xmlns:a="http://schemas.openxmlformats.org/drawingml/2006/main">
               <a:ext uri="{FF2B5EF4-FFF2-40B4-BE49-F238E27FC236}">
-                <a16:creationId xmlns:a16="http://schemas.microsoft.com/office/drawing/2014/main" id="{426EF80D-EF62-40B4-A0E8-9D371F3C96E2}"/>
+                <a16:creationId xmlns:a16="http://schemas.microsoft.com/office/drawing/2014/main" id="{26746D5C-B7FC-4E08-A365-3D1FB87010D0}"/>
               </a:ext>
             </a:extLst>
           </p:cNvPr>
@@ -12060,7 +12058,7 @@
           <p:cNvPr id="42" name="">
             <a:extLst xmlns:a="http://schemas.openxmlformats.org/drawingml/2006/main">
               <a:ext uri="{FF2B5EF4-FFF2-40B4-BE49-F238E27FC236}">
-                <a16:creationId xmlns:a16="http://schemas.microsoft.com/office/drawing/2014/main" id="{D7C19EC6-7485-483B-BBF4-FEB8A8517147}"/>
+                <a16:creationId xmlns:a16="http://schemas.microsoft.com/office/drawing/2014/main" id="{A0EE8FDF-B23B-481F-BD26-59E1619A90DB}"/>
               </a:ext>
             </a:extLst>
           </p:cNvPr>
@@ -12095,7 +12093,7 @@
           <p:cNvPr id="43" name="kicker-03-marker">
             <a:extLst xmlns:a="http://schemas.openxmlformats.org/drawingml/2006/main">
               <a:ext uri="{FF2B5EF4-FFF2-40B4-BE49-F238E27FC236}">
-                <a16:creationId xmlns:a16="http://schemas.microsoft.com/office/drawing/2014/main" id="{4260F63C-000F-4AA8-87DD-66EAB2F3A375}"/>
+                <a16:creationId xmlns:a16="http://schemas.microsoft.com/office/drawing/2014/main" id="{12F61815-E45B-46BC-99EC-8E2D9C3E83D2}"/>
               </a:ext>
             </a:extLst>
           </p:cNvPr>
@@ -12130,7 +12128,7 @@
           <p:cNvPr id="44" name="kicker-03-label">
             <a:extLst xmlns:a="http://schemas.openxmlformats.org/drawingml/2006/main">
               <a:ext uri="{FF2B5EF4-FFF2-40B4-BE49-F238E27FC236}">
-                <a16:creationId xmlns:a16="http://schemas.microsoft.com/office/drawing/2014/main" id="{1B6737B9-4155-48CD-8A8F-C6BFD381D073}"/>
+                <a16:creationId xmlns:a16="http://schemas.microsoft.com/office/drawing/2014/main" id="{06D71804-FB36-49B5-902F-A3CB8A3873AD}"/>
               </a:ext>
             </a:extLst>
           </p:cNvPr>
@@ -12194,7 +12192,7 @@
           <p:cNvPr id="45" name="">
             <a:extLst xmlns:a="http://schemas.openxmlformats.org/drawingml/2006/main">
               <a:ext uri="{FF2B5EF4-FFF2-40B4-BE49-F238E27FC236}">
-                <a16:creationId xmlns:a16="http://schemas.microsoft.com/office/drawing/2014/main" id="{3747913F-028B-4799-931C-79A4A621DB28}"/>
+                <a16:creationId xmlns:a16="http://schemas.microsoft.com/office/drawing/2014/main" id="{7CB33782-48C4-4308-A942-781E9433BBB6}"/>
               </a:ext>
             </a:extLst>
           </p:cNvPr>
@@ -12258,7 +12256,7 @@
           <p:cNvPr id="46" name="">
             <a:extLst xmlns:a="http://schemas.openxmlformats.org/drawingml/2006/main">
               <a:ext uri="{FF2B5EF4-FFF2-40B4-BE49-F238E27FC236}">
-                <a16:creationId xmlns:a16="http://schemas.microsoft.com/office/drawing/2014/main" id="{DB094391-4D5B-4640-A474-2DC15B6ADE89}"/>
+                <a16:creationId xmlns:a16="http://schemas.microsoft.com/office/drawing/2014/main" id="{249734D0-E65D-47EC-90F4-6D52C36A6674}"/>
               </a:ext>
             </a:extLst>
           </p:cNvPr>
@@ -12322,7 +12320,7 @@
           <p:cNvPr id="47" name="">
             <a:extLst xmlns:a="http://schemas.openxmlformats.org/drawingml/2006/main">
               <a:ext uri="{FF2B5EF4-FFF2-40B4-BE49-F238E27FC236}">
-                <a16:creationId xmlns:a16="http://schemas.microsoft.com/office/drawing/2014/main" id="{00542CA7-7FF5-4ADB-89E2-F21BE0F7DEE9}"/>
+                <a16:creationId xmlns:a16="http://schemas.microsoft.com/office/drawing/2014/main" id="{5A5AA687-22D4-403D-8160-16C3F31E7D80}"/>
               </a:ext>
             </a:extLst>
           </p:cNvPr>
@@ -12357,7 +12355,7 @@
           <p:cNvPr id="48" name="">
             <a:extLst xmlns:a="http://schemas.openxmlformats.org/drawingml/2006/main">
               <a:ext uri="{FF2B5EF4-FFF2-40B4-BE49-F238E27FC236}">
-                <a16:creationId xmlns:a16="http://schemas.microsoft.com/office/drawing/2014/main" id="{1433503B-CE33-453A-AB1C-7D176E199A00}"/>
+                <a16:creationId xmlns:a16="http://schemas.microsoft.com/office/drawing/2014/main" id="{698D319C-5130-48C6-B712-0B5F7E930EFB}"/>
               </a:ext>
             </a:extLst>
           </p:cNvPr>
@@ -12392,7 +12390,7 @@
           <p:cNvPr id="49" name="">
             <a:extLst xmlns:a="http://schemas.openxmlformats.org/drawingml/2006/main">
               <a:ext uri="{FF2B5EF4-FFF2-40B4-BE49-F238E27FC236}">
-                <a16:creationId xmlns:a16="http://schemas.microsoft.com/office/drawing/2014/main" id="{7E5C04FD-E9CF-4FF9-9063-FCBDB43D3C3B}"/>
+                <a16:creationId xmlns:a16="http://schemas.microsoft.com/office/drawing/2014/main" id="{225E20C4-C409-4D59-8336-3F046E9BD221}"/>
               </a:ext>
             </a:extLst>
           </p:cNvPr>
@@ -12427,7 +12425,7 @@
           <p:cNvPr id="50" name="">
             <a:extLst xmlns:a="http://schemas.openxmlformats.org/drawingml/2006/main">
               <a:ext uri="{FF2B5EF4-FFF2-40B4-BE49-F238E27FC236}">
-                <a16:creationId xmlns:a16="http://schemas.microsoft.com/office/drawing/2014/main" id="{933343C1-573D-4D9E-8760-00380820A1BC}"/>
+                <a16:creationId xmlns:a16="http://schemas.microsoft.com/office/drawing/2014/main" id="{2462CD54-2FD5-45B5-A281-44095EEE58DF}"/>
               </a:ext>
             </a:extLst>
           </p:cNvPr>
@@ -12462,7 +12460,7 @@
           <p:cNvPr id="51" name="">
             <a:extLst xmlns:a="http://schemas.openxmlformats.org/drawingml/2006/main">
               <a:ext uri="{FF2B5EF4-FFF2-40B4-BE49-F238E27FC236}">
-                <a16:creationId xmlns:a16="http://schemas.microsoft.com/office/drawing/2014/main" id="{3D007227-0442-4FFB-836D-EFB5B424AEBA}"/>
+                <a16:creationId xmlns:a16="http://schemas.microsoft.com/office/drawing/2014/main" id="{878CDA73-9389-42FF-89AC-1FA772DD8F5F}"/>
               </a:ext>
             </a:extLst>
           </p:cNvPr>
@@ -12526,7 +12524,7 @@
           <p:cNvPr id="52" name="">
             <a:extLst xmlns:a="http://schemas.openxmlformats.org/drawingml/2006/main">
               <a:ext uri="{FF2B5EF4-FFF2-40B4-BE49-F238E27FC236}">
-                <a16:creationId xmlns:a16="http://schemas.microsoft.com/office/drawing/2014/main" id="{CE98B570-0235-4E95-8DA0-0A6C40525309}"/>
+                <a16:creationId xmlns:a16="http://schemas.microsoft.com/office/drawing/2014/main" id="{93426BFF-B5DD-4128-B634-539C434CD05B}"/>
               </a:ext>
             </a:extLst>
           </p:cNvPr>
@@ -12590,7 +12588,7 @@
           <p:cNvPr id="53" name="">
             <a:extLst xmlns:a="http://schemas.openxmlformats.org/drawingml/2006/main">
               <a:ext uri="{FF2B5EF4-FFF2-40B4-BE49-F238E27FC236}">
-                <a16:creationId xmlns:a16="http://schemas.microsoft.com/office/drawing/2014/main" id="{19CCDD2C-139D-471F-86ED-D3E8630702A0}"/>
+                <a16:creationId xmlns:a16="http://schemas.microsoft.com/office/drawing/2014/main" id="{3E12C82A-FF6B-4D34-BECD-352032AAD740}"/>
               </a:ext>
             </a:extLst>
           </p:cNvPr>
@@ -12652,7 +12650,7 @@
     </p:spTree>
     <p:extLst>
       <p:ext uri="{BB962C8B-B14F-4D97-AF65-F5344CB8AC3E}">
-        <p14:creationId xmlns:p14="http://schemas.microsoft.com/office/powerpoint/2010/main" val="910322635"/>
+        <p14:creationId xmlns:p14="http://schemas.microsoft.com/office/powerpoint/2010/main" val="771359062"/>
       </p:ext>
     </p:extLst>
   </p:cSld>
@@ -12676,7 +12674,7 @@
           <p:cNvPr id="1" name="">
             <a:extLst xmlns:a="http://schemas.openxmlformats.org/drawingml/2006/main">
               <a:ext uri="{FF2B5EF4-FFF2-40B4-BE49-F238E27FC236}">
-                <a16:creationId xmlns:a16="http://schemas.microsoft.com/office/drawing/2014/main" id="{E0D0180D-30C2-4BA3-8CE3-8FA557904A1D}"/>
+                <a16:creationId xmlns:a16="http://schemas.microsoft.com/office/drawing/2014/main" id="{FDD58604-49B6-4ADD-BD9E-702B12FF3D02}"/>
               </a:ext>
             </a:extLst>
           </p:cNvPr>
@@ -12711,7 +12709,7 @@
           <p:cNvPr id="2" name="">
             <a:extLst xmlns:a="http://schemas.openxmlformats.org/drawingml/2006/main">
               <a:ext uri="{FF2B5EF4-FFF2-40B4-BE49-F238E27FC236}">
-                <a16:creationId xmlns:a16="http://schemas.microsoft.com/office/drawing/2014/main" id="{01B92CC6-B875-431F-97DB-CEA335E2BBFC}"/>
+                <a16:creationId xmlns:a16="http://schemas.microsoft.com/office/drawing/2014/main" id="{07F18B84-B9EF-4065-BDE4-B5AAA57A3CD2}"/>
               </a:ext>
             </a:extLst>
           </p:cNvPr>
@@ -12746,7 +12744,7 @@
           <p:cNvPr id="3" name="">
             <a:extLst xmlns:a="http://schemas.openxmlformats.org/drawingml/2006/main">
               <a:ext uri="{FF2B5EF4-FFF2-40B4-BE49-F238E27FC236}">
-                <a16:creationId xmlns:a16="http://schemas.microsoft.com/office/drawing/2014/main" id="{0F8A2988-1D5B-49C5-8BCC-F77CABEB99B4}"/>
+                <a16:creationId xmlns:a16="http://schemas.microsoft.com/office/drawing/2014/main" id="{CD8E7F47-6203-4E2A-AF75-B8E43843CD44}"/>
               </a:ext>
             </a:extLst>
           </p:cNvPr>
@@ -12781,7 +12779,7 @@
           <p:cNvPr id="4" name="kicker-03-marker">
             <a:extLst xmlns:a="http://schemas.openxmlformats.org/drawingml/2006/main">
               <a:ext uri="{FF2B5EF4-FFF2-40B4-BE49-F238E27FC236}">
-                <a16:creationId xmlns:a16="http://schemas.microsoft.com/office/drawing/2014/main" id="{B2148947-5DD6-46E3-900A-D7B69138B882}"/>
+                <a16:creationId xmlns:a16="http://schemas.microsoft.com/office/drawing/2014/main" id="{96AE32A9-A4E4-4DFF-9EFC-3EEADB4D80FE}"/>
               </a:ext>
             </a:extLst>
           </p:cNvPr>
@@ -12816,7 +12814,7 @@
           <p:cNvPr id="5" name="kicker-03-label">
             <a:extLst xmlns:a="http://schemas.openxmlformats.org/drawingml/2006/main">
               <a:ext uri="{FF2B5EF4-FFF2-40B4-BE49-F238E27FC236}">
-                <a16:creationId xmlns:a16="http://schemas.microsoft.com/office/drawing/2014/main" id="{90A3FB36-5CE2-402F-A340-53B5155573D8}"/>
+                <a16:creationId xmlns:a16="http://schemas.microsoft.com/office/drawing/2014/main" id="{802FB110-69B2-4714-B055-C15B3D4058A2}"/>
               </a:ext>
             </a:extLst>
           </p:cNvPr>
@@ -12880,7 +12878,7 @@
           <p:cNvPr id="6" name="">
             <a:extLst xmlns:a="http://schemas.openxmlformats.org/drawingml/2006/main">
               <a:ext uri="{FF2B5EF4-FFF2-40B4-BE49-F238E27FC236}">
-                <a16:creationId xmlns:a16="http://schemas.microsoft.com/office/drawing/2014/main" id="{32403487-A90F-4B9B-AFBD-AC6C839DF9F2}"/>
+                <a16:creationId xmlns:a16="http://schemas.microsoft.com/office/drawing/2014/main" id="{4D8C2DA7-0305-4CC1-B1A1-97A8CC486620}"/>
               </a:ext>
             </a:extLst>
           </p:cNvPr>
@@ -12944,7 +12942,7 @@
           <p:cNvPr id="7" name="">
             <a:extLst xmlns:a="http://schemas.openxmlformats.org/drawingml/2006/main">
               <a:ext uri="{FF2B5EF4-FFF2-40B4-BE49-F238E27FC236}">
-                <a16:creationId xmlns:a16="http://schemas.microsoft.com/office/drawing/2014/main" id="{D853E9C7-B264-41DC-BF49-5912E5FFBB5D}"/>
+                <a16:creationId xmlns:a16="http://schemas.microsoft.com/office/drawing/2014/main" id="{546B9581-7523-45FB-A5A8-3223E4F8334D}"/>
               </a:ext>
             </a:extLst>
           </p:cNvPr>
@@ -13008,7 +13006,7 @@
           <p:cNvPr id="8" name="">
             <a:extLst xmlns:a="http://schemas.openxmlformats.org/drawingml/2006/main">
               <a:ext uri="{FF2B5EF4-FFF2-40B4-BE49-F238E27FC236}">
-                <a16:creationId xmlns:a16="http://schemas.microsoft.com/office/drawing/2014/main" id="{6AA63F51-9593-4F0C-AF19-FABFF0A5C200}"/>
+                <a16:creationId xmlns:a16="http://schemas.microsoft.com/office/drawing/2014/main" id="{E2A7D4AA-2111-4B9F-B9B3-0C95034087D4}"/>
               </a:ext>
             </a:extLst>
           </p:cNvPr>
@@ -13043,7 +13041,7 @@
           <p:cNvPr id="9" name="">
             <a:extLst xmlns:a="http://schemas.openxmlformats.org/drawingml/2006/main">
               <a:ext uri="{FF2B5EF4-FFF2-40B4-BE49-F238E27FC236}">
-                <a16:creationId xmlns:a16="http://schemas.microsoft.com/office/drawing/2014/main" id="{47CBB687-FC7C-4C54-AA71-78F10A4EC52E}"/>
+                <a16:creationId xmlns:a16="http://schemas.microsoft.com/office/drawing/2014/main" id="{16BE3C9E-C328-4730-B6E0-CA928719F628}"/>
               </a:ext>
             </a:extLst>
           </p:cNvPr>
@@ -13107,7 +13105,7 @@
           <p:cNvPr id="10" name="">
             <a:extLst xmlns:a="http://schemas.openxmlformats.org/drawingml/2006/main">
               <a:ext uri="{FF2B5EF4-FFF2-40B4-BE49-F238E27FC236}">
-                <a16:creationId xmlns:a16="http://schemas.microsoft.com/office/drawing/2014/main" id="{FB12C6D7-5BE7-424F-87ED-895797C7F2E0}"/>
+                <a16:creationId xmlns:a16="http://schemas.microsoft.com/office/drawing/2014/main" id="{7305434D-2AC7-4AE7-9063-9BD3BA0FEAA1}"/>
               </a:ext>
             </a:extLst>
           </p:cNvPr>
@@ -13171,7 +13169,7 @@
           <p:cNvPr id="11" name="">
             <a:extLst xmlns:a="http://schemas.openxmlformats.org/drawingml/2006/main">
               <a:ext uri="{FF2B5EF4-FFF2-40B4-BE49-F238E27FC236}">
-                <a16:creationId xmlns:a16="http://schemas.microsoft.com/office/drawing/2014/main" id="{EE64EDCD-BD1B-4B7B-B733-1130AABACDAB}"/>
+                <a16:creationId xmlns:a16="http://schemas.microsoft.com/office/drawing/2014/main" id="{E5779C5F-8FF6-4801-BC6D-20F7B9F07F93}"/>
               </a:ext>
             </a:extLst>
           </p:cNvPr>
@@ -13235,7 +13233,7 @@
           <p:cNvPr id="12" name="">
             <a:extLst xmlns:a="http://schemas.openxmlformats.org/drawingml/2006/main">
               <a:ext uri="{FF2B5EF4-FFF2-40B4-BE49-F238E27FC236}">
-                <a16:creationId xmlns:a16="http://schemas.microsoft.com/office/drawing/2014/main" id="{7007754B-790D-4716-8C27-3B4E0CF74FF1}"/>
+                <a16:creationId xmlns:a16="http://schemas.microsoft.com/office/drawing/2014/main" id="{F6436D4C-62B9-45E7-8F23-3DC7B3F1212A}"/>
               </a:ext>
             </a:extLst>
           </p:cNvPr>
@@ -13270,7 +13268,7 @@
           <p:cNvPr id="13" name="">
             <a:extLst xmlns:a="http://schemas.openxmlformats.org/drawingml/2006/main">
               <a:ext uri="{FF2B5EF4-FFF2-40B4-BE49-F238E27FC236}">
-                <a16:creationId xmlns:a16="http://schemas.microsoft.com/office/drawing/2014/main" id="{DCB9EA55-6684-48BB-B3D2-9B927D9D7949}"/>
+                <a16:creationId xmlns:a16="http://schemas.microsoft.com/office/drawing/2014/main" id="{AD0892D3-786A-43E7-89D7-66B4EF748399}"/>
               </a:ext>
             </a:extLst>
           </p:cNvPr>
@@ -13303,7 +13301,7 @@
           <p:cNvPr id="14" name="">
             <a:extLst xmlns:a="http://schemas.openxmlformats.org/drawingml/2006/main">
               <a:ext uri="{FF2B5EF4-FFF2-40B4-BE49-F238E27FC236}">
-                <a16:creationId xmlns:a16="http://schemas.microsoft.com/office/drawing/2014/main" id="{D9A8093F-49F7-4479-BAD9-AE50828BA9BF}"/>
+                <a16:creationId xmlns:a16="http://schemas.microsoft.com/office/drawing/2014/main" id="{44D44A23-8FC2-4997-AF96-A99BCF659F46}"/>
               </a:ext>
             </a:extLst>
           </p:cNvPr>
@@ -13338,7 +13336,7 @@
           <p:cNvPr id="15" name="">
             <a:extLst xmlns:a="http://schemas.openxmlformats.org/drawingml/2006/main">
               <a:ext uri="{FF2B5EF4-FFF2-40B4-BE49-F238E27FC236}">
-                <a16:creationId xmlns:a16="http://schemas.microsoft.com/office/drawing/2014/main" id="{E85DD15E-780F-4C79-872A-546E39BAA21E}"/>
+                <a16:creationId xmlns:a16="http://schemas.microsoft.com/office/drawing/2014/main" id="{435E7FB7-4F00-4AEE-9E96-27F15E0CB3E8}"/>
               </a:ext>
             </a:extLst>
           </p:cNvPr>
@@ -13402,7 +13400,7 @@
           <p:cNvPr id="16" name="">
             <a:extLst xmlns:a="http://schemas.openxmlformats.org/drawingml/2006/main">
               <a:ext uri="{FF2B5EF4-FFF2-40B4-BE49-F238E27FC236}">
-                <a16:creationId xmlns:a16="http://schemas.microsoft.com/office/drawing/2014/main" id="{EF45A21B-8406-4C51-80CA-CE4686CCDAC7}"/>
+                <a16:creationId xmlns:a16="http://schemas.microsoft.com/office/drawing/2014/main" id="{F390B420-EBA5-4112-8D39-FEFDD0C7B6B9}"/>
               </a:ext>
             </a:extLst>
           </p:cNvPr>
@@ -13437,7 +13435,7 @@
           <p:cNvPr id="17" name="">
             <a:extLst xmlns:a="http://schemas.openxmlformats.org/drawingml/2006/main">
               <a:ext uri="{FF2B5EF4-FFF2-40B4-BE49-F238E27FC236}">
-                <a16:creationId xmlns:a16="http://schemas.microsoft.com/office/drawing/2014/main" id="{C8970032-4B12-4DA8-A748-51A7D7385DF0}"/>
+                <a16:creationId xmlns:a16="http://schemas.microsoft.com/office/drawing/2014/main" id="{1515EB18-BA1E-43F0-942B-11C85C804C3F}"/>
               </a:ext>
             </a:extLst>
           </p:cNvPr>
@@ -13501,7 +13499,7 @@
           <p:cNvPr id="18" name="">
             <a:extLst xmlns:a="http://schemas.openxmlformats.org/drawingml/2006/main">
               <a:ext uri="{FF2B5EF4-FFF2-40B4-BE49-F238E27FC236}">
-                <a16:creationId xmlns:a16="http://schemas.microsoft.com/office/drawing/2014/main" id="{D2E51979-E7C1-461D-AEF1-0FD2380E1424}"/>
+                <a16:creationId xmlns:a16="http://schemas.microsoft.com/office/drawing/2014/main" id="{3A563B79-0C3D-47E8-9923-65CE5FEA6AB2}"/>
               </a:ext>
             </a:extLst>
           </p:cNvPr>
@@ -13536,7 +13534,7 @@
           <p:cNvPr id="19" name="">
             <a:extLst xmlns:a="http://schemas.openxmlformats.org/drawingml/2006/main">
               <a:ext uri="{FF2B5EF4-FFF2-40B4-BE49-F238E27FC236}">
-                <a16:creationId xmlns:a16="http://schemas.microsoft.com/office/drawing/2014/main" id="{4B5D5B15-9380-4617-BAC5-DF84A6AD391E}"/>
+                <a16:creationId xmlns:a16="http://schemas.microsoft.com/office/drawing/2014/main" id="{07BE7FFB-B1BE-4BA8-B6AB-F56F3877E62E}"/>
               </a:ext>
             </a:extLst>
           </p:cNvPr>
@@ -13600,7 +13598,7 @@
           <p:cNvPr id="20" name="">
             <a:extLst xmlns:a="http://schemas.openxmlformats.org/drawingml/2006/main">
               <a:ext uri="{FF2B5EF4-FFF2-40B4-BE49-F238E27FC236}">
-                <a16:creationId xmlns:a16="http://schemas.microsoft.com/office/drawing/2014/main" id="{F3371586-5F2A-41E8-BEAB-900A86C0E5AF}"/>
+                <a16:creationId xmlns:a16="http://schemas.microsoft.com/office/drawing/2014/main" id="{8A89E134-D458-4662-B2B8-1BBB9422A559}"/>
               </a:ext>
             </a:extLst>
           </p:cNvPr>
@@ -13635,7 +13633,7 @@
           <p:cNvPr id="21" name="">
             <a:extLst xmlns:a="http://schemas.openxmlformats.org/drawingml/2006/main">
               <a:ext uri="{FF2B5EF4-FFF2-40B4-BE49-F238E27FC236}">
-                <a16:creationId xmlns:a16="http://schemas.microsoft.com/office/drawing/2014/main" id="{DB741987-79D7-4AB6-ABC0-02D89D27F2C3}"/>
+                <a16:creationId xmlns:a16="http://schemas.microsoft.com/office/drawing/2014/main" id="{252326F3-BB2E-461D-98DE-1CF81AFC8411}"/>
               </a:ext>
             </a:extLst>
           </p:cNvPr>
@@ -13699,7 +13697,7 @@
           <p:cNvPr id="22" name="">
             <a:extLst xmlns:a="http://schemas.openxmlformats.org/drawingml/2006/main">
               <a:ext uri="{FF2B5EF4-FFF2-40B4-BE49-F238E27FC236}">
-                <a16:creationId xmlns:a16="http://schemas.microsoft.com/office/drawing/2014/main" id="{CC1BF7D0-E6D5-4791-BD30-455B2EC7F0DA}"/>
+                <a16:creationId xmlns:a16="http://schemas.microsoft.com/office/drawing/2014/main" id="{C7073846-9030-43EF-A9E4-41ABF88CD422}"/>
               </a:ext>
             </a:extLst>
           </p:cNvPr>
@@ -13734,7 +13732,7 @@
           <p:cNvPr id="23" name="">
             <a:extLst xmlns:a="http://schemas.openxmlformats.org/drawingml/2006/main">
               <a:ext uri="{FF2B5EF4-FFF2-40B4-BE49-F238E27FC236}">
-                <a16:creationId xmlns:a16="http://schemas.microsoft.com/office/drawing/2014/main" id="{F050A013-7C01-498C-888D-F2FD52836804}"/>
+                <a16:creationId xmlns:a16="http://schemas.microsoft.com/office/drawing/2014/main" id="{0EC2BDB3-48EB-4FD7-9A72-8CED74DD0642}"/>
               </a:ext>
             </a:extLst>
           </p:cNvPr>
@@ -13798,7 +13796,7 @@
           <p:cNvPr id="24" name="">
             <a:extLst xmlns:a="http://schemas.openxmlformats.org/drawingml/2006/main">
               <a:ext uri="{FF2B5EF4-FFF2-40B4-BE49-F238E27FC236}">
-                <a16:creationId xmlns:a16="http://schemas.microsoft.com/office/drawing/2014/main" id="{F6F0C79A-C40F-49AE-8C92-B68D8AAB330B}"/>
+                <a16:creationId xmlns:a16="http://schemas.microsoft.com/office/drawing/2014/main" id="{81543CEB-CEE3-4E03-B83D-3F20D1C44E5C}"/>
               </a:ext>
             </a:extLst>
           </p:cNvPr>
@@ -13833,7 +13831,7 @@
           <p:cNvPr id="25" name="">
             <a:extLst xmlns:a="http://schemas.openxmlformats.org/drawingml/2006/main">
               <a:ext uri="{FF2B5EF4-FFF2-40B4-BE49-F238E27FC236}">
-                <a16:creationId xmlns:a16="http://schemas.microsoft.com/office/drawing/2014/main" id="{7E298580-A765-4026-96AF-20F0895AB427}"/>
+                <a16:creationId xmlns:a16="http://schemas.microsoft.com/office/drawing/2014/main" id="{1DC11B7A-DB27-42B7-BEC0-A90BA7904B0D}"/>
               </a:ext>
             </a:extLst>
           </p:cNvPr>
@@ -13897,7 +13895,7 @@
           <p:cNvPr id="26" name="">
             <a:extLst xmlns:a="http://schemas.openxmlformats.org/drawingml/2006/main">
               <a:ext uri="{FF2B5EF4-FFF2-40B4-BE49-F238E27FC236}">
-                <a16:creationId xmlns:a16="http://schemas.microsoft.com/office/drawing/2014/main" id="{96EA6AD0-5BCD-4429-ABBC-89F33A0D0067}"/>
+                <a16:creationId xmlns:a16="http://schemas.microsoft.com/office/drawing/2014/main" id="{1C89E240-1A64-4234-997C-F4A1CE269D70}"/>
               </a:ext>
             </a:extLst>
           </p:cNvPr>
@@ -13932,7 +13930,7 @@
           <p:cNvPr id="27" name="">
             <a:extLst xmlns:a="http://schemas.openxmlformats.org/drawingml/2006/main">
               <a:ext uri="{FF2B5EF4-FFF2-40B4-BE49-F238E27FC236}">
-                <a16:creationId xmlns:a16="http://schemas.microsoft.com/office/drawing/2014/main" id="{957EA642-10B7-4BC2-90C7-F2E74717F266}"/>
+                <a16:creationId xmlns:a16="http://schemas.microsoft.com/office/drawing/2014/main" id="{7CA7D4D5-6A36-4C8A-8BC6-D6B188507425}"/>
               </a:ext>
             </a:extLst>
           </p:cNvPr>
@@ -13996,7 +13994,7 @@
           <p:cNvPr id="28" name="">
             <a:extLst xmlns:a="http://schemas.openxmlformats.org/drawingml/2006/main">
               <a:ext uri="{FF2B5EF4-FFF2-40B4-BE49-F238E27FC236}">
-                <a16:creationId xmlns:a16="http://schemas.microsoft.com/office/drawing/2014/main" id="{5D5A6568-92EB-4EF0-A389-57EEF165EE57}"/>
+                <a16:creationId xmlns:a16="http://schemas.microsoft.com/office/drawing/2014/main" id="{10E88B72-AC5C-4F41-B5FB-B2ED7CE6E6BC}"/>
               </a:ext>
             </a:extLst>
           </p:cNvPr>
@@ -14029,7 +14027,7 @@
           <p:cNvPr id="29" name="">
             <a:extLst xmlns:a="http://schemas.openxmlformats.org/drawingml/2006/main">
               <a:ext uri="{FF2B5EF4-FFF2-40B4-BE49-F238E27FC236}">
-                <a16:creationId xmlns:a16="http://schemas.microsoft.com/office/drawing/2014/main" id="{2D4663CA-E6A5-4F09-86CB-640B6BCEEDEA}"/>
+                <a16:creationId xmlns:a16="http://schemas.microsoft.com/office/drawing/2014/main" id="{7D91AE55-A46E-43F8-946C-40DF531C25AB}"/>
               </a:ext>
             </a:extLst>
           </p:cNvPr>
@@ -14064,7 +14062,7 @@
           <p:cNvPr id="30" name="">
             <a:extLst xmlns:a="http://schemas.openxmlformats.org/drawingml/2006/main">
               <a:ext uri="{FF2B5EF4-FFF2-40B4-BE49-F238E27FC236}">
-                <a16:creationId xmlns:a16="http://schemas.microsoft.com/office/drawing/2014/main" id="{9390A074-CE28-44A9-8A28-893D86270D4B}"/>
+                <a16:creationId xmlns:a16="http://schemas.microsoft.com/office/drawing/2014/main" id="{868741B7-300C-4D60-9652-5B2C654F8481}"/>
               </a:ext>
             </a:extLst>
           </p:cNvPr>
@@ -14128,7 +14126,7 @@
           <p:cNvPr id="31" name="">
             <a:extLst xmlns:a="http://schemas.openxmlformats.org/drawingml/2006/main">
               <a:ext uri="{FF2B5EF4-FFF2-40B4-BE49-F238E27FC236}">
-                <a16:creationId xmlns:a16="http://schemas.microsoft.com/office/drawing/2014/main" id="{482E277A-6ADB-4605-B24C-1511DD36CBC7}"/>
+                <a16:creationId xmlns:a16="http://schemas.microsoft.com/office/drawing/2014/main" id="{C7A64D80-621B-4D27-9FEE-A638FF9A33A2}"/>
               </a:ext>
             </a:extLst>
           </p:cNvPr>
@@ -14182,7 +14180,7 @@
                 <a:ea typeface="Aptos Display"/>
                 <a:cs typeface="Aptos Display"/>
               </a:rPr>
-              <a:t>The artifact passes only if sales, marketing, RevOps, leadership, and an AI agent could inspect it and know what to do next.</a:t>
+              <a:t>The artifact passes only if sales, marketing, RevOps, and leadership can inspect it and know what to do next.</a:t>
             </a:r>
           </a:p>
         </p:txBody>
@@ -14192,7 +14190,7 @@
           <p:cNvPr id="32" name="">
             <a:extLst xmlns:a="http://schemas.openxmlformats.org/drawingml/2006/main">
               <a:ext uri="{FF2B5EF4-FFF2-40B4-BE49-F238E27FC236}">
-                <a16:creationId xmlns:a16="http://schemas.microsoft.com/office/drawing/2014/main" id="{578F1D66-CE19-4742-87D9-3A5C329A5F8F}"/>
+                <a16:creationId xmlns:a16="http://schemas.microsoft.com/office/drawing/2014/main" id="{CA0E6F5B-A204-4D35-9384-5A7422C70501}"/>
               </a:ext>
             </a:extLst>
           </p:cNvPr>
@@ -14256,7 +14254,7 @@
           <p:cNvPr id="33" name="">
             <a:extLst xmlns:a="http://schemas.openxmlformats.org/drawingml/2006/main">
               <a:ext uri="{FF2B5EF4-FFF2-40B4-BE49-F238E27FC236}">
-                <a16:creationId xmlns:a16="http://schemas.microsoft.com/office/drawing/2014/main" id="{838A5756-B433-4A40-A7C0-E09D83456028}"/>
+                <a16:creationId xmlns:a16="http://schemas.microsoft.com/office/drawing/2014/main" id="{96562B04-93B6-4DD6-9D64-4C2C7A7E5E1F}"/>
               </a:ext>
             </a:extLst>
           </p:cNvPr>
@@ -14291,7 +14289,7 @@
           <p:cNvPr id="34" name="">
             <a:extLst xmlns:a="http://schemas.openxmlformats.org/drawingml/2006/main">
               <a:ext uri="{FF2B5EF4-FFF2-40B4-BE49-F238E27FC236}">
-                <a16:creationId xmlns:a16="http://schemas.microsoft.com/office/drawing/2014/main" id="{DFC4D553-BE9A-46CE-994A-DC9FD5D96906}"/>
+                <a16:creationId xmlns:a16="http://schemas.microsoft.com/office/drawing/2014/main" id="{36B99416-EF99-481D-AFF7-CCDD4268E7C1}"/>
               </a:ext>
             </a:extLst>
           </p:cNvPr>
@@ -14355,7 +14353,7 @@
           <p:cNvPr id="35" name="">
             <a:extLst xmlns:a="http://schemas.openxmlformats.org/drawingml/2006/main">
               <a:ext uri="{FF2B5EF4-FFF2-40B4-BE49-F238E27FC236}">
-                <a16:creationId xmlns:a16="http://schemas.microsoft.com/office/drawing/2014/main" id="{73340959-6609-4F1B-A14F-C000DBE45277}"/>
+                <a16:creationId xmlns:a16="http://schemas.microsoft.com/office/drawing/2014/main" id="{23973080-74D1-44CC-9D7D-792816C98C0A}"/>
               </a:ext>
             </a:extLst>
           </p:cNvPr>
@@ -14419,7 +14417,7 @@
           <p:cNvPr id="36" name="">
             <a:extLst xmlns:a="http://schemas.openxmlformats.org/drawingml/2006/main">
               <a:ext uri="{FF2B5EF4-FFF2-40B4-BE49-F238E27FC236}">
-                <a16:creationId xmlns:a16="http://schemas.microsoft.com/office/drawing/2014/main" id="{D7B03A22-6602-4368-846E-8D8B2CB54219}"/>
+                <a16:creationId xmlns:a16="http://schemas.microsoft.com/office/drawing/2014/main" id="{AFF2606C-A3EE-45F9-B001-71584EE0821F}"/>
               </a:ext>
             </a:extLst>
           </p:cNvPr>
@@ -14483,7 +14481,7 @@
           <p:cNvPr id="37" name="">
             <a:extLst xmlns:a="http://schemas.openxmlformats.org/drawingml/2006/main">
               <a:ext uri="{FF2B5EF4-FFF2-40B4-BE49-F238E27FC236}">
-                <a16:creationId xmlns:a16="http://schemas.microsoft.com/office/drawing/2014/main" id="{4C5A6CEC-9AF3-47CE-AEA4-0CB328064FCD}"/>
+                <a16:creationId xmlns:a16="http://schemas.microsoft.com/office/drawing/2014/main" id="{20A0C6A8-2A73-4717-BEC2-2265E099BE7B}"/>
               </a:ext>
             </a:extLst>
           </p:cNvPr>
@@ -14518,7 +14516,7 @@
           <p:cNvPr id="38" name="">
             <a:extLst xmlns:a="http://schemas.openxmlformats.org/drawingml/2006/main">
               <a:ext uri="{FF2B5EF4-FFF2-40B4-BE49-F238E27FC236}">
-                <a16:creationId xmlns:a16="http://schemas.microsoft.com/office/drawing/2014/main" id="{3AE4DE4D-1526-471D-BBEC-A1DEEFB930E1}"/>
+                <a16:creationId xmlns:a16="http://schemas.microsoft.com/office/drawing/2014/main" id="{5686AD0A-866A-46E9-AA03-262500442684}"/>
               </a:ext>
             </a:extLst>
           </p:cNvPr>
@@ -14553,7 +14551,7 @@
           <p:cNvPr id="39" name="">
             <a:extLst xmlns:a="http://schemas.openxmlformats.org/drawingml/2006/main">
               <a:ext uri="{FF2B5EF4-FFF2-40B4-BE49-F238E27FC236}">
-                <a16:creationId xmlns:a16="http://schemas.microsoft.com/office/drawing/2014/main" id="{8F7C27CE-0CDB-46F2-917F-ECCE4E014A40}"/>
+                <a16:creationId xmlns:a16="http://schemas.microsoft.com/office/drawing/2014/main" id="{D011D925-A57A-43BB-8358-650ECB1C503D}"/>
               </a:ext>
             </a:extLst>
           </p:cNvPr>
@@ -14588,7 +14586,7 @@
           <p:cNvPr id="40" name="kicker-03-marker">
             <a:extLst xmlns:a="http://schemas.openxmlformats.org/drawingml/2006/main">
               <a:ext uri="{FF2B5EF4-FFF2-40B4-BE49-F238E27FC236}">
-                <a16:creationId xmlns:a16="http://schemas.microsoft.com/office/drawing/2014/main" id="{0B84E3E1-CCBA-4338-9C01-9FCCFE83EE8F}"/>
+                <a16:creationId xmlns:a16="http://schemas.microsoft.com/office/drawing/2014/main" id="{3E9CE3E1-35C3-40FB-BAA7-452276C30814}"/>
               </a:ext>
             </a:extLst>
           </p:cNvPr>
@@ -14623,7 +14621,7 @@
           <p:cNvPr id="41" name="kicker-03-label">
             <a:extLst xmlns:a="http://schemas.openxmlformats.org/drawingml/2006/main">
               <a:ext uri="{FF2B5EF4-FFF2-40B4-BE49-F238E27FC236}">
-                <a16:creationId xmlns:a16="http://schemas.microsoft.com/office/drawing/2014/main" id="{D99F9F90-358D-46F5-B96D-4A00F83C3F99}"/>
+                <a16:creationId xmlns:a16="http://schemas.microsoft.com/office/drawing/2014/main" id="{5EB078F4-70F8-4350-BE45-0B551BEE7AC3}"/>
               </a:ext>
             </a:extLst>
           </p:cNvPr>
@@ -14687,7 +14685,7 @@
           <p:cNvPr id="42" name="">
             <a:extLst xmlns:a="http://schemas.openxmlformats.org/drawingml/2006/main">
               <a:ext uri="{FF2B5EF4-FFF2-40B4-BE49-F238E27FC236}">
-                <a16:creationId xmlns:a16="http://schemas.microsoft.com/office/drawing/2014/main" id="{606F68BE-A55D-4C8C-BB1E-35BF971C9059}"/>
+                <a16:creationId xmlns:a16="http://schemas.microsoft.com/office/drawing/2014/main" id="{9E07A908-C8C5-4A87-BDDF-16DB819183C8}"/>
               </a:ext>
             </a:extLst>
           </p:cNvPr>
@@ -14751,7 +14749,7 @@
           <p:cNvPr id="43" name="">
             <a:extLst xmlns:a="http://schemas.openxmlformats.org/drawingml/2006/main">
               <a:ext uri="{FF2B5EF4-FFF2-40B4-BE49-F238E27FC236}">
-                <a16:creationId xmlns:a16="http://schemas.microsoft.com/office/drawing/2014/main" id="{74F40358-723B-4EF9-9A54-2C984EA3C523}"/>
+                <a16:creationId xmlns:a16="http://schemas.microsoft.com/office/drawing/2014/main" id="{3751AF06-AE63-4390-80FA-BFE687FA3A20}"/>
               </a:ext>
             </a:extLst>
           </p:cNvPr>
@@ -14815,7 +14813,7 @@
           <p:cNvPr id="44" name="">
             <a:extLst xmlns:a="http://schemas.openxmlformats.org/drawingml/2006/main">
               <a:ext uri="{FF2B5EF4-FFF2-40B4-BE49-F238E27FC236}">
-                <a16:creationId xmlns:a16="http://schemas.microsoft.com/office/drawing/2014/main" id="{4BC13BDB-8B30-4811-B988-6AD79F42BC94}"/>
+                <a16:creationId xmlns:a16="http://schemas.microsoft.com/office/drawing/2014/main" id="{4FD0BE06-D587-49C0-B321-FD61ECA87D59}"/>
               </a:ext>
             </a:extLst>
           </p:cNvPr>
@@ -14850,7 +14848,7 @@
           <p:cNvPr id="45" name="">
             <a:extLst xmlns:a="http://schemas.openxmlformats.org/drawingml/2006/main">
               <a:ext uri="{FF2B5EF4-FFF2-40B4-BE49-F238E27FC236}">
-                <a16:creationId xmlns:a16="http://schemas.microsoft.com/office/drawing/2014/main" id="{4BDBA096-B8DA-44A0-9412-5AB4E9D1207A}"/>
+                <a16:creationId xmlns:a16="http://schemas.microsoft.com/office/drawing/2014/main" id="{6943A754-BF72-44D5-8B9B-076259137C73}"/>
               </a:ext>
             </a:extLst>
           </p:cNvPr>
@@ -14885,7 +14883,7 @@
           <p:cNvPr id="46" name="">
             <a:extLst xmlns:a="http://schemas.openxmlformats.org/drawingml/2006/main">
               <a:ext uri="{FF2B5EF4-FFF2-40B4-BE49-F238E27FC236}">
-                <a16:creationId xmlns:a16="http://schemas.microsoft.com/office/drawing/2014/main" id="{03DDC5B6-2812-431A-9CCE-BEF704360FF5}"/>
+                <a16:creationId xmlns:a16="http://schemas.microsoft.com/office/drawing/2014/main" id="{98E3B47E-D228-49C6-A3D3-B4DD5C32B506}"/>
               </a:ext>
             </a:extLst>
           </p:cNvPr>
@@ -14920,7 +14918,7 @@
           <p:cNvPr id="47" name="">
             <a:extLst xmlns:a="http://schemas.openxmlformats.org/drawingml/2006/main">
               <a:ext uri="{FF2B5EF4-FFF2-40B4-BE49-F238E27FC236}">
-                <a16:creationId xmlns:a16="http://schemas.microsoft.com/office/drawing/2014/main" id="{E5C8A5F9-E917-4B70-828F-067920EF83FB}"/>
+                <a16:creationId xmlns:a16="http://schemas.microsoft.com/office/drawing/2014/main" id="{41624B9F-EAC9-4724-AFF2-CBD1F3277231}"/>
               </a:ext>
             </a:extLst>
           </p:cNvPr>
@@ -14955,7 +14953,7 @@
           <p:cNvPr id="48" name="">
             <a:extLst xmlns:a="http://schemas.openxmlformats.org/drawingml/2006/main">
               <a:ext uri="{FF2B5EF4-FFF2-40B4-BE49-F238E27FC236}">
-                <a16:creationId xmlns:a16="http://schemas.microsoft.com/office/drawing/2014/main" id="{EB6851AC-C57F-43CB-8585-68EC0669414B}"/>
+                <a16:creationId xmlns:a16="http://schemas.microsoft.com/office/drawing/2014/main" id="{5CCA6659-02F2-4DD2-9513-43C006292FC4}"/>
               </a:ext>
             </a:extLst>
           </p:cNvPr>
@@ -15019,7 +15017,7 @@
           <p:cNvPr id="49" name="">
             <a:extLst xmlns:a="http://schemas.openxmlformats.org/drawingml/2006/main">
               <a:ext uri="{FF2B5EF4-FFF2-40B4-BE49-F238E27FC236}">
-                <a16:creationId xmlns:a16="http://schemas.microsoft.com/office/drawing/2014/main" id="{11D39863-E718-4534-B2D1-56FF9A88E1C4}"/>
+                <a16:creationId xmlns:a16="http://schemas.microsoft.com/office/drawing/2014/main" id="{3E4AE14D-8DF8-476D-97F0-1023B8540F0A}"/>
               </a:ext>
             </a:extLst>
           </p:cNvPr>
@@ -15083,7 +15081,7 @@
           <p:cNvPr id="50" name="">
             <a:extLst xmlns:a="http://schemas.openxmlformats.org/drawingml/2006/main">
               <a:ext uri="{FF2B5EF4-FFF2-40B4-BE49-F238E27FC236}">
-                <a16:creationId xmlns:a16="http://schemas.microsoft.com/office/drawing/2014/main" id="{B59DEECB-1A0D-4019-96A0-1B5A0140AB60}"/>
+                <a16:creationId xmlns:a16="http://schemas.microsoft.com/office/drawing/2014/main" id="{B0BB46A5-FF88-419D-9960-DB5B8D598FDD}"/>
               </a:ext>
             </a:extLst>
           </p:cNvPr>
@@ -15145,7 +15143,7 @@
     </p:spTree>
     <p:extLst>
       <p:ext uri="{BB962C8B-B14F-4D97-AF65-F5344CB8AC3E}">
-        <p14:creationId xmlns:p14="http://schemas.microsoft.com/office/powerpoint/2010/main" val="1034767226"/>
+        <p14:creationId xmlns:p14="http://schemas.microsoft.com/office/powerpoint/2010/main" val="2095528254"/>
       </p:ext>
     </p:extLst>
   </p:cSld>
@@ -15169,7 +15167,7 @@
           <p:cNvPr id="1" name="">
             <a:extLst xmlns:a="http://schemas.openxmlformats.org/drawingml/2006/main">
               <a:ext uri="{FF2B5EF4-FFF2-40B4-BE49-F238E27FC236}">
-                <a16:creationId xmlns:a16="http://schemas.microsoft.com/office/drawing/2014/main" id="{F9AA6332-D682-473E-8FF7-E39054802A35}"/>
+                <a16:creationId xmlns:a16="http://schemas.microsoft.com/office/drawing/2014/main" id="{388DFB8D-6437-4885-8405-531057B889CE}"/>
               </a:ext>
             </a:extLst>
           </p:cNvPr>
@@ -15204,7 +15202,7 @@
           <p:cNvPr id="2" name="">
             <a:extLst xmlns:a="http://schemas.openxmlformats.org/drawingml/2006/main">
               <a:ext uri="{FF2B5EF4-FFF2-40B4-BE49-F238E27FC236}">
-                <a16:creationId xmlns:a16="http://schemas.microsoft.com/office/drawing/2014/main" id="{B24BF8D0-9D4F-4126-BF57-7DF8C90A0B6A}"/>
+                <a16:creationId xmlns:a16="http://schemas.microsoft.com/office/drawing/2014/main" id="{8CC80FE0-D5BC-4B5E-BEC1-CB999151BC1F}"/>
               </a:ext>
             </a:extLst>
           </p:cNvPr>
@@ -15239,7 +15237,7 @@
           <p:cNvPr id="3" name="">
             <a:extLst xmlns:a="http://schemas.openxmlformats.org/drawingml/2006/main">
               <a:ext uri="{FF2B5EF4-FFF2-40B4-BE49-F238E27FC236}">
-                <a16:creationId xmlns:a16="http://schemas.microsoft.com/office/drawing/2014/main" id="{62214CC0-1BDB-414C-BECF-55787686F8ED}"/>
+                <a16:creationId xmlns:a16="http://schemas.microsoft.com/office/drawing/2014/main" id="{34DB45EB-FFAE-41FE-A515-E35602D86090}"/>
               </a:ext>
             </a:extLst>
           </p:cNvPr>
@@ -15274,7 +15272,7 @@
           <p:cNvPr id="4" name="kicker-03-marker">
             <a:extLst xmlns:a="http://schemas.openxmlformats.org/drawingml/2006/main">
               <a:ext uri="{FF2B5EF4-FFF2-40B4-BE49-F238E27FC236}">
-                <a16:creationId xmlns:a16="http://schemas.microsoft.com/office/drawing/2014/main" id="{AD942754-5BBE-44FE-840B-CBD70B7C3C54}"/>
+                <a16:creationId xmlns:a16="http://schemas.microsoft.com/office/drawing/2014/main" id="{F4BE3CF4-7A9A-4F8A-A66F-DB64E7EC73E8}"/>
               </a:ext>
             </a:extLst>
           </p:cNvPr>
@@ -15309,7 +15307,7 @@
           <p:cNvPr id="5" name="kicker-03-label">
             <a:extLst xmlns:a="http://schemas.openxmlformats.org/drawingml/2006/main">
               <a:ext uri="{FF2B5EF4-FFF2-40B4-BE49-F238E27FC236}">
-                <a16:creationId xmlns:a16="http://schemas.microsoft.com/office/drawing/2014/main" id="{2CBD17A5-C958-47CA-B64E-C391CA43D8C7}"/>
+                <a16:creationId xmlns:a16="http://schemas.microsoft.com/office/drawing/2014/main" id="{0DBF0F2C-43BA-4164-A366-A5FC40EE2315}"/>
               </a:ext>
             </a:extLst>
           </p:cNvPr>
@@ -15373,7 +15371,7 @@
           <p:cNvPr id="6" name="">
             <a:extLst xmlns:a="http://schemas.openxmlformats.org/drawingml/2006/main">
               <a:ext uri="{FF2B5EF4-FFF2-40B4-BE49-F238E27FC236}">
-                <a16:creationId xmlns:a16="http://schemas.microsoft.com/office/drawing/2014/main" id="{5CFF0AB4-143B-4125-81E1-8F94372BF4CB}"/>
+                <a16:creationId xmlns:a16="http://schemas.microsoft.com/office/drawing/2014/main" id="{3117AD8F-A9CA-499E-9BE3-F898EB75A36B}"/>
               </a:ext>
             </a:extLst>
           </p:cNvPr>
@@ -15437,7 +15435,7 @@
           <p:cNvPr id="7" name="">
             <a:extLst xmlns:a="http://schemas.openxmlformats.org/drawingml/2006/main">
               <a:ext uri="{FF2B5EF4-FFF2-40B4-BE49-F238E27FC236}">
-                <a16:creationId xmlns:a16="http://schemas.microsoft.com/office/drawing/2014/main" id="{CE3602CD-C093-4714-8763-FD929181441C}"/>
+                <a16:creationId xmlns:a16="http://schemas.microsoft.com/office/drawing/2014/main" id="{FDD58342-4CA9-4D26-AA4A-49A2CED6AD4A}"/>
               </a:ext>
             </a:extLst>
           </p:cNvPr>
@@ -15470,7 +15468,7 @@
           <p:cNvPr id="8" name="">
             <a:extLst xmlns:a="http://schemas.openxmlformats.org/drawingml/2006/main">
               <a:ext uri="{FF2B5EF4-FFF2-40B4-BE49-F238E27FC236}">
-                <a16:creationId xmlns:a16="http://schemas.microsoft.com/office/drawing/2014/main" id="{E8D79352-D5BE-4B2A-98E4-61907771C632}"/>
+                <a16:creationId xmlns:a16="http://schemas.microsoft.com/office/drawing/2014/main" id="{19464CC9-585B-48D7-9978-9123D3C67D59}"/>
               </a:ext>
             </a:extLst>
           </p:cNvPr>
@@ -15505,7 +15503,7 @@
           <p:cNvPr id="9" name="">
             <a:extLst xmlns:a="http://schemas.openxmlformats.org/drawingml/2006/main">
               <a:ext uri="{FF2B5EF4-FFF2-40B4-BE49-F238E27FC236}">
-                <a16:creationId xmlns:a16="http://schemas.microsoft.com/office/drawing/2014/main" id="{3E6FF328-1700-42E2-A7E1-7EEFC68E67F8}"/>
+                <a16:creationId xmlns:a16="http://schemas.microsoft.com/office/drawing/2014/main" id="{903B2AEB-0D9A-4283-9273-8CFB9DF4FFFC}"/>
               </a:ext>
             </a:extLst>
           </p:cNvPr>
@@ -15569,7 +15567,7 @@
           <p:cNvPr id="10" name="">
             <a:extLst xmlns:a="http://schemas.openxmlformats.org/drawingml/2006/main">
               <a:ext uri="{FF2B5EF4-FFF2-40B4-BE49-F238E27FC236}">
-                <a16:creationId xmlns:a16="http://schemas.microsoft.com/office/drawing/2014/main" id="{B925F910-13ED-47F4-B19D-E078BE8706DB}"/>
+                <a16:creationId xmlns:a16="http://schemas.microsoft.com/office/drawing/2014/main" id="{EA8D8F74-8072-4A3C-92DF-2D6313374731}"/>
               </a:ext>
             </a:extLst>
           </p:cNvPr>
@@ -15633,7 +15631,7 @@
           <p:cNvPr id="11" name="">
             <a:extLst xmlns:a="http://schemas.openxmlformats.org/drawingml/2006/main">
               <a:ext uri="{FF2B5EF4-FFF2-40B4-BE49-F238E27FC236}">
-                <a16:creationId xmlns:a16="http://schemas.microsoft.com/office/drawing/2014/main" id="{9172B439-C471-4359-AB96-C99F84E0CC52}"/>
+                <a16:creationId xmlns:a16="http://schemas.microsoft.com/office/drawing/2014/main" id="{A789FD0C-AB88-442F-BD2A-DB075C8EA232}"/>
               </a:ext>
             </a:extLst>
           </p:cNvPr>
@@ -15666,7 +15664,7 @@
           <p:cNvPr id="12" name="">
             <a:extLst xmlns:a="http://schemas.openxmlformats.org/drawingml/2006/main">
               <a:ext uri="{FF2B5EF4-FFF2-40B4-BE49-F238E27FC236}">
-                <a16:creationId xmlns:a16="http://schemas.microsoft.com/office/drawing/2014/main" id="{8417E039-86AF-449F-B81C-AE9C42E73CE6}"/>
+                <a16:creationId xmlns:a16="http://schemas.microsoft.com/office/drawing/2014/main" id="{FE8A6F7E-0A6C-458B-9E26-2CBAA40A9D3B}"/>
               </a:ext>
             </a:extLst>
           </p:cNvPr>
@@ -15701,7 +15699,7 @@
           <p:cNvPr id="13" name="">
             <a:extLst xmlns:a="http://schemas.openxmlformats.org/drawingml/2006/main">
               <a:ext uri="{FF2B5EF4-FFF2-40B4-BE49-F238E27FC236}">
-                <a16:creationId xmlns:a16="http://schemas.microsoft.com/office/drawing/2014/main" id="{E0B12AB9-2E33-4F11-A3CE-AFD3E5988B3C}"/>
+                <a16:creationId xmlns:a16="http://schemas.microsoft.com/office/drawing/2014/main" id="{C6442EBE-49FC-4D8E-96F9-BDDFACBAB837}"/>
               </a:ext>
             </a:extLst>
           </p:cNvPr>
@@ -15765,7 +15763,7 @@
           <p:cNvPr id="14" name="">
             <a:extLst xmlns:a="http://schemas.openxmlformats.org/drawingml/2006/main">
               <a:ext uri="{FF2B5EF4-FFF2-40B4-BE49-F238E27FC236}">
-                <a16:creationId xmlns:a16="http://schemas.microsoft.com/office/drawing/2014/main" id="{896C44C4-243B-4110-B779-5689D57BA644}"/>
+                <a16:creationId xmlns:a16="http://schemas.microsoft.com/office/drawing/2014/main" id="{F480FD7B-A3B5-4090-8107-C37CED5B1FAD}"/>
               </a:ext>
             </a:extLst>
           </p:cNvPr>
@@ -15829,7 +15827,7 @@
           <p:cNvPr id="15" name="">
             <a:extLst xmlns:a="http://schemas.openxmlformats.org/drawingml/2006/main">
               <a:ext uri="{FF2B5EF4-FFF2-40B4-BE49-F238E27FC236}">
-                <a16:creationId xmlns:a16="http://schemas.microsoft.com/office/drawing/2014/main" id="{4FFB2282-2956-4EBC-A882-D46FB2AFF075}"/>
+                <a16:creationId xmlns:a16="http://schemas.microsoft.com/office/drawing/2014/main" id="{4DEDFAF5-7F24-408F-B95F-EE1249516526}"/>
               </a:ext>
             </a:extLst>
           </p:cNvPr>
@@ -15862,7 +15860,7 @@
           <p:cNvPr id="16" name="">
             <a:extLst xmlns:a="http://schemas.openxmlformats.org/drawingml/2006/main">
               <a:ext uri="{FF2B5EF4-FFF2-40B4-BE49-F238E27FC236}">
-                <a16:creationId xmlns:a16="http://schemas.microsoft.com/office/drawing/2014/main" id="{BF6EB1C3-6DDB-4638-9931-ECBC11F7F1FB}"/>
+                <a16:creationId xmlns:a16="http://schemas.microsoft.com/office/drawing/2014/main" id="{FFA0456A-73DD-4445-B57D-809949E895A5}"/>
               </a:ext>
             </a:extLst>
           </p:cNvPr>
@@ -15916,7 +15914,7 @@
                 <a:ea typeface="Aptos"/>
                 <a:cs typeface="Aptos"/>
               </a:rPr>
-              <a:t>Recurring instructor check: sales impact / signal / RevOps field / buyer content / AI risk / industrial failure mode</a:t>
+              <a:t>Recurring instructor check: sales impact / signal / RevOps field / buyer content / review risk / industrial failure mode</a:t>
             </a:r>
           </a:p>
         </p:txBody>
@@ -15926,7 +15924,7 @@
           <p:cNvPr id="17" name="">
             <a:extLst xmlns:a="http://schemas.openxmlformats.org/drawingml/2006/main">
               <a:ext uri="{FF2B5EF4-FFF2-40B4-BE49-F238E27FC236}">
-                <a16:creationId xmlns:a16="http://schemas.microsoft.com/office/drawing/2014/main" id="{B25B58BD-3670-4B08-B454-00CFD047C887}"/>
+                <a16:creationId xmlns:a16="http://schemas.microsoft.com/office/drawing/2014/main" id="{A33A24DA-C053-4820-98A9-CDFD64B43B95}"/>
               </a:ext>
             </a:extLst>
           </p:cNvPr>
@@ -15961,7 +15959,7 @@
           <p:cNvPr id="18" name="">
             <a:extLst xmlns:a="http://schemas.openxmlformats.org/drawingml/2006/main">
               <a:ext uri="{FF2B5EF4-FFF2-40B4-BE49-F238E27FC236}">
-                <a16:creationId xmlns:a16="http://schemas.microsoft.com/office/drawing/2014/main" id="{86E29824-D2D9-4F1B-A923-5E46F01200BA}"/>
+                <a16:creationId xmlns:a16="http://schemas.microsoft.com/office/drawing/2014/main" id="{A7B86962-4EB6-4C99-8E6B-27783BC1CC9F}"/>
               </a:ext>
             </a:extLst>
           </p:cNvPr>
@@ -16025,7 +16023,7 @@
           <p:cNvPr id="19" name="">
             <a:extLst xmlns:a="http://schemas.openxmlformats.org/drawingml/2006/main">
               <a:ext uri="{FF2B5EF4-FFF2-40B4-BE49-F238E27FC236}">
-                <a16:creationId xmlns:a16="http://schemas.microsoft.com/office/drawing/2014/main" id="{778363F7-D951-4A30-8734-B0738DDF165C}"/>
+                <a16:creationId xmlns:a16="http://schemas.microsoft.com/office/drawing/2014/main" id="{00206DF0-1C1C-4D04-BEF9-5F330A3F191A}"/>
               </a:ext>
             </a:extLst>
           </p:cNvPr>
@@ -16089,7 +16087,7 @@
           <p:cNvPr id="20" name="">
             <a:extLst xmlns:a="http://schemas.openxmlformats.org/drawingml/2006/main">
               <a:ext uri="{FF2B5EF4-FFF2-40B4-BE49-F238E27FC236}">
-                <a16:creationId xmlns:a16="http://schemas.microsoft.com/office/drawing/2014/main" id="{211A8C5A-3A73-48AE-ABF4-63596CAB7BA7}"/>
+                <a16:creationId xmlns:a16="http://schemas.microsoft.com/office/drawing/2014/main" id="{52E68BE3-7AAC-41BE-998A-8D6A376D5CC0}"/>
               </a:ext>
             </a:extLst>
           </p:cNvPr>
@@ -16151,7 +16149,7 @@
     </p:spTree>
     <p:extLst>
       <p:ext uri="{BB962C8B-B14F-4D97-AF65-F5344CB8AC3E}">
-        <p14:creationId xmlns:p14="http://schemas.microsoft.com/office/powerpoint/2010/main" val="1088443541"/>
+        <p14:creationId xmlns:p14="http://schemas.microsoft.com/office/powerpoint/2010/main" val="870481861"/>
       </p:ext>
     </p:extLst>
   </p:cSld>
@@ -16175,7 +16173,7 @@
           <p:cNvPr id="1" name="">
             <a:extLst xmlns:a="http://schemas.openxmlformats.org/drawingml/2006/main">
               <a:ext uri="{FF2B5EF4-FFF2-40B4-BE49-F238E27FC236}">
-                <a16:creationId xmlns:a16="http://schemas.microsoft.com/office/drawing/2014/main" id="{2B935425-65D4-4ED2-A75B-02E8233ADBBD}"/>
+                <a16:creationId xmlns:a16="http://schemas.microsoft.com/office/drawing/2014/main" id="{52698E41-C0BC-4C80-9901-EEB55CE1EF02}"/>
               </a:ext>
             </a:extLst>
           </p:cNvPr>
@@ -16210,7 +16208,7 @@
           <p:cNvPr id="2" name="">
             <a:extLst xmlns:a="http://schemas.openxmlformats.org/drawingml/2006/main">
               <a:ext uri="{FF2B5EF4-FFF2-40B4-BE49-F238E27FC236}">
-                <a16:creationId xmlns:a16="http://schemas.microsoft.com/office/drawing/2014/main" id="{3A12D9D8-2366-4F12-949A-4EA933014607}"/>
+                <a16:creationId xmlns:a16="http://schemas.microsoft.com/office/drawing/2014/main" id="{E310A0DF-B862-4B01-BA39-E97B5BF38750}"/>
               </a:ext>
             </a:extLst>
           </p:cNvPr>
@@ -16245,7 +16243,7 @@
           <p:cNvPr id="3" name="">
             <a:extLst xmlns:a="http://schemas.openxmlformats.org/drawingml/2006/main">
               <a:ext uri="{FF2B5EF4-FFF2-40B4-BE49-F238E27FC236}">
-                <a16:creationId xmlns:a16="http://schemas.microsoft.com/office/drawing/2014/main" id="{8FD3DF52-56CE-4335-B0F8-C58F56C60D4C}"/>
+                <a16:creationId xmlns:a16="http://schemas.microsoft.com/office/drawing/2014/main" id="{C7A179B7-8C43-4794-9943-1AAE4634E5A1}"/>
               </a:ext>
             </a:extLst>
           </p:cNvPr>
@@ -16280,7 +16278,7 @@
           <p:cNvPr id="4" name="kicker-03-marker">
             <a:extLst xmlns:a="http://schemas.openxmlformats.org/drawingml/2006/main">
               <a:ext uri="{FF2B5EF4-FFF2-40B4-BE49-F238E27FC236}">
-                <a16:creationId xmlns:a16="http://schemas.microsoft.com/office/drawing/2014/main" id="{AB166F95-B6A0-4790-805B-DAE2812E673E}"/>
+                <a16:creationId xmlns:a16="http://schemas.microsoft.com/office/drawing/2014/main" id="{6419549E-6382-4ABD-8B89-8DD506A23785}"/>
               </a:ext>
             </a:extLst>
           </p:cNvPr>
@@ -16315,7 +16313,7 @@
           <p:cNvPr id="5" name="kicker-03-label">
             <a:extLst xmlns:a="http://schemas.openxmlformats.org/drawingml/2006/main">
               <a:ext uri="{FF2B5EF4-FFF2-40B4-BE49-F238E27FC236}">
-                <a16:creationId xmlns:a16="http://schemas.microsoft.com/office/drawing/2014/main" id="{C82A79F5-B608-450B-B961-4F512D9A75F2}"/>
+                <a16:creationId xmlns:a16="http://schemas.microsoft.com/office/drawing/2014/main" id="{26E70F70-EA3A-45B4-B519-0282C6593443}"/>
               </a:ext>
             </a:extLst>
           </p:cNvPr>
@@ -16379,7 +16377,7 @@
           <p:cNvPr id="6" name="">
             <a:extLst xmlns:a="http://schemas.openxmlformats.org/drawingml/2006/main">
               <a:ext uri="{FF2B5EF4-FFF2-40B4-BE49-F238E27FC236}">
-                <a16:creationId xmlns:a16="http://schemas.microsoft.com/office/drawing/2014/main" id="{9093E84B-DC6B-485E-836D-055915B48034}"/>
+                <a16:creationId xmlns:a16="http://schemas.microsoft.com/office/drawing/2014/main" id="{DAE29A6D-4AEB-4153-9748-8512CF72D6A9}"/>
               </a:ext>
             </a:extLst>
           </p:cNvPr>
@@ -16443,7 +16441,7 @@
           <p:cNvPr id="7" name="">
             <a:extLst xmlns:a="http://schemas.openxmlformats.org/drawingml/2006/main">
               <a:ext uri="{FF2B5EF4-FFF2-40B4-BE49-F238E27FC236}">
-                <a16:creationId xmlns:a16="http://schemas.microsoft.com/office/drawing/2014/main" id="{D9E4030B-48AB-4784-B107-ED9815A7D59E}"/>
+                <a16:creationId xmlns:a16="http://schemas.microsoft.com/office/drawing/2014/main" id="{ADCE550B-D805-48A4-AF7E-7EF2A5D2D00E}"/>
               </a:ext>
             </a:extLst>
           </p:cNvPr>
@@ -16507,7 +16505,7 @@
           <p:cNvPr id="8" name="">
             <a:extLst xmlns:a="http://schemas.openxmlformats.org/drawingml/2006/main">
               <a:ext uri="{FF2B5EF4-FFF2-40B4-BE49-F238E27FC236}">
-                <a16:creationId xmlns:a16="http://schemas.microsoft.com/office/drawing/2014/main" id="{E59FECBA-7FD7-46DD-880B-4ED2C162D299}"/>
+                <a16:creationId xmlns:a16="http://schemas.microsoft.com/office/drawing/2014/main" id="{05481479-2491-432F-827C-EE5DC7923518}"/>
               </a:ext>
             </a:extLst>
           </p:cNvPr>
@@ -16542,7 +16540,7 @@
           <p:cNvPr id="9" name="">
             <a:extLst xmlns:a="http://schemas.openxmlformats.org/drawingml/2006/main">
               <a:ext uri="{FF2B5EF4-FFF2-40B4-BE49-F238E27FC236}">
-                <a16:creationId xmlns:a16="http://schemas.microsoft.com/office/drawing/2014/main" id="{FBB4FBF0-DEA5-4332-9243-0B61B6084AF0}"/>
+                <a16:creationId xmlns:a16="http://schemas.microsoft.com/office/drawing/2014/main" id="{C8A74FF6-FE31-40EA-B185-0CBBB160E13D}"/>
               </a:ext>
             </a:extLst>
           </p:cNvPr>
@@ -16606,7 +16604,7 @@
           <p:cNvPr id="10" name="">
             <a:extLst xmlns:a="http://schemas.openxmlformats.org/drawingml/2006/main">
               <a:ext uri="{FF2B5EF4-FFF2-40B4-BE49-F238E27FC236}">
-                <a16:creationId xmlns:a16="http://schemas.microsoft.com/office/drawing/2014/main" id="{5B66F882-E5E4-413D-A05A-C4703F3C537C}"/>
+                <a16:creationId xmlns:a16="http://schemas.microsoft.com/office/drawing/2014/main" id="{02DA1E80-DC9F-4AF9-941E-AE4B2077D12E}"/>
               </a:ext>
             </a:extLst>
           </p:cNvPr>
@@ -16670,7 +16668,7 @@
           <p:cNvPr id="11" name="">
             <a:extLst xmlns:a="http://schemas.openxmlformats.org/drawingml/2006/main">
               <a:ext uri="{FF2B5EF4-FFF2-40B4-BE49-F238E27FC236}">
-                <a16:creationId xmlns:a16="http://schemas.microsoft.com/office/drawing/2014/main" id="{8A2E9170-9FA7-4641-9A65-1612EE8C8326}"/>
+                <a16:creationId xmlns:a16="http://schemas.microsoft.com/office/drawing/2014/main" id="{BF57A449-A1EC-46AA-91FC-88AA56A66880}"/>
               </a:ext>
             </a:extLst>
           </p:cNvPr>
@@ -16734,7 +16732,7 @@
           <p:cNvPr id="12" name="">
             <a:extLst xmlns:a="http://schemas.openxmlformats.org/drawingml/2006/main">
               <a:ext uri="{FF2B5EF4-FFF2-40B4-BE49-F238E27FC236}">
-                <a16:creationId xmlns:a16="http://schemas.microsoft.com/office/drawing/2014/main" id="{A03B86C2-6C35-4019-A787-83E3F8952E73}"/>
+                <a16:creationId xmlns:a16="http://schemas.microsoft.com/office/drawing/2014/main" id="{BEABB05B-8897-4DCF-871A-1F168C56D54F}"/>
               </a:ext>
             </a:extLst>
           </p:cNvPr>
@@ -16767,7 +16765,7 @@
           <p:cNvPr id="13" name="">
             <a:extLst xmlns:a="http://schemas.openxmlformats.org/drawingml/2006/main">
               <a:ext uri="{FF2B5EF4-FFF2-40B4-BE49-F238E27FC236}">
-                <a16:creationId xmlns:a16="http://schemas.microsoft.com/office/drawing/2014/main" id="{F5B5A368-CE5C-4524-AC8F-3039CA581DE8}"/>
+                <a16:creationId xmlns:a16="http://schemas.microsoft.com/office/drawing/2014/main" id="{908A0515-0469-499C-9E24-2946D84BF1C9}"/>
               </a:ext>
             </a:extLst>
           </p:cNvPr>
@@ -16831,7 +16829,7 @@
           <p:cNvPr id="14" name="">
             <a:extLst xmlns:a="http://schemas.openxmlformats.org/drawingml/2006/main">
               <a:ext uri="{FF2B5EF4-FFF2-40B4-BE49-F238E27FC236}">
-                <a16:creationId xmlns:a16="http://schemas.microsoft.com/office/drawing/2014/main" id="{A93C6E0B-8C20-40F4-AA39-AF40E98B1599}"/>
+                <a16:creationId xmlns:a16="http://schemas.microsoft.com/office/drawing/2014/main" id="{0B33ED09-280B-4B75-8432-5A5CE55982BC}"/>
               </a:ext>
             </a:extLst>
           </p:cNvPr>
@@ -16866,7 +16864,7 @@
           <p:cNvPr id="15" name="">
             <a:extLst xmlns:a="http://schemas.openxmlformats.org/drawingml/2006/main">
               <a:ext uri="{FF2B5EF4-FFF2-40B4-BE49-F238E27FC236}">
-                <a16:creationId xmlns:a16="http://schemas.microsoft.com/office/drawing/2014/main" id="{3C08B35A-C60A-4139-90E2-A964EF90A1EA}"/>
+                <a16:creationId xmlns:a16="http://schemas.microsoft.com/office/drawing/2014/main" id="{853CD59E-203A-4A7A-8CAB-272C31E6C120}"/>
               </a:ext>
             </a:extLst>
           </p:cNvPr>
@@ -16930,7 +16928,7 @@
           <p:cNvPr id="16" name="">
             <a:extLst xmlns:a="http://schemas.openxmlformats.org/drawingml/2006/main">
               <a:ext uri="{FF2B5EF4-FFF2-40B4-BE49-F238E27FC236}">
-                <a16:creationId xmlns:a16="http://schemas.microsoft.com/office/drawing/2014/main" id="{617E14E0-65E0-4E61-AFD6-61BF4AE78925}"/>
+                <a16:creationId xmlns:a16="http://schemas.microsoft.com/office/drawing/2014/main" id="{7E08FE86-FCE3-4D26-8373-48F047BA4228}"/>
               </a:ext>
             </a:extLst>
           </p:cNvPr>
@@ -16963,7 +16961,7 @@
           <p:cNvPr id="17" name="">
             <a:extLst xmlns:a="http://schemas.openxmlformats.org/drawingml/2006/main">
               <a:ext uri="{FF2B5EF4-FFF2-40B4-BE49-F238E27FC236}">
-                <a16:creationId xmlns:a16="http://schemas.microsoft.com/office/drawing/2014/main" id="{B46C80F1-201E-4440-BE8F-EBE7BA02A76D}"/>
+                <a16:creationId xmlns:a16="http://schemas.microsoft.com/office/drawing/2014/main" id="{5AC322AE-1B94-46BD-99CC-0468AD95EBAF}"/>
               </a:ext>
             </a:extLst>
           </p:cNvPr>
@@ -16998,7 +16996,7 @@
           <p:cNvPr id="18" name="">
             <a:extLst xmlns:a="http://schemas.openxmlformats.org/drawingml/2006/main">
               <a:ext uri="{FF2B5EF4-FFF2-40B4-BE49-F238E27FC236}">
-                <a16:creationId xmlns:a16="http://schemas.microsoft.com/office/drawing/2014/main" id="{865F756F-8158-450D-81C2-8BDC91A17AFE}"/>
+                <a16:creationId xmlns:a16="http://schemas.microsoft.com/office/drawing/2014/main" id="{A340047F-668A-4329-90E5-C59DA58E77DF}"/>
               </a:ext>
             </a:extLst>
           </p:cNvPr>
@@ -17062,7 +17060,7 @@
           <p:cNvPr id="19" name="">
             <a:extLst xmlns:a="http://schemas.openxmlformats.org/drawingml/2006/main">
               <a:ext uri="{FF2B5EF4-FFF2-40B4-BE49-F238E27FC236}">
-                <a16:creationId xmlns:a16="http://schemas.microsoft.com/office/drawing/2014/main" id="{F1C728FA-5566-4B9E-B708-3CE7793B576F}"/>
+                <a16:creationId xmlns:a16="http://schemas.microsoft.com/office/drawing/2014/main" id="{3F4B7C08-B1D3-43CA-B46A-0DA334FD6BF6}"/>
               </a:ext>
             </a:extLst>
           </p:cNvPr>
@@ -17097,7 +17095,7 @@
           <p:cNvPr id="20" name="">
             <a:extLst xmlns:a="http://schemas.openxmlformats.org/drawingml/2006/main">
               <a:ext uri="{FF2B5EF4-FFF2-40B4-BE49-F238E27FC236}">
-                <a16:creationId xmlns:a16="http://schemas.microsoft.com/office/drawing/2014/main" id="{960CB696-F1A8-45E1-897C-3EB102A2804F}"/>
+                <a16:creationId xmlns:a16="http://schemas.microsoft.com/office/drawing/2014/main" id="{FB019CA7-6040-47ED-8B81-38B84E2B01C5}"/>
               </a:ext>
             </a:extLst>
           </p:cNvPr>
@@ -17161,7 +17159,7 @@
           <p:cNvPr id="21" name="">
             <a:extLst xmlns:a="http://schemas.openxmlformats.org/drawingml/2006/main">
               <a:ext uri="{FF2B5EF4-FFF2-40B4-BE49-F238E27FC236}">
-                <a16:creationId xmlns:a16="http://schemas.microsoft.com/office/drawing/2014/main" id="{8135967C-9F49-4B71-9968-A11FC1E3D212}"/>
+                <a16:creationId xmlns:a16="http://schemas.microsoft.com/office/drawing/2014/main" id="{7ECE883B-670D-403A-AC82-09B37AAFD1C1}"/>
               </a:ext>
             </a:extLst>
           </p:cNvPr>
@@ -17196,7 +17194,7 @@
           <p:cNvPr id="22" name="">
             <a:extLst xmlns:a="http://schemas.openxmlformats.org/drawingml/2006/main">
               <a:ext uri="{FF2B5EF4-FFF2-40B4-BE49-F238E27FC236}">
-                <a16:creationId xmlns:a16="http://schemas.microsoft.com/office/drawing/2014/main" id="{3415824D-D991-46D1-97E2-E1E00754BC82}"/>
+                <a16:creationId xmlns:a16="http://schemas.microsoft.com/office/drawing/2014/main" id="{DAC916D4-425C-42A6-B781-ABBAAEA26EFA}"/>
               </a:ext>
             </a:extLst>
           </p:cNvPr>
@@ -17260,7 +17258,7 @@
           <p:cNvPr id="23" name="">
             <a:extLst xmlns:a="http://schemas.openxmlformats.org/drawingml/2006/main">
               <a:ext uri="{FF2B5EF4-FFF2-40B4-BE49-F238E27FC236}">
-                <a16:creationId xmlns:a16="http://schemas.microsoft.com/office/drawing/2014/main" id="{47DFB24A-3685-476A-BA55-E638B8B0D5F7}"/>
+                <a16:creationId xmlns:a16="http://schemas.microsoft.com/office/drawing/2014/main" id="{D9E48FB0-0094-493C-9D9D-1AB02B30BD08}"/>
               </a:ext>
             </a:extLst>
           </p:cNvPr>
@@ -17295,7 +17293,7 @@
           <p:cNvPr id="24" name="">
             <a:extLst xmlns:a="http://schemas.openxmlformats.org/drawingml/2006/main">
               <a:ext uri="{FF2B5EF4-FFF2-40B4-BE49-F238E27FC236}">
-                <a16:creationId xmlns:a16="http://schemas.microsoft.com/office/drawing/2014/main" id="{0BFD545F-A843-4006-A9C8-A82E1DA41C70}"/>
+                <a16:creationId xmlns:a16="http://schemas.microsoft.com/office/drawing/2014/main" id="{569F5FC5-C3F9-4E88-BB87-A47368F88553}"/>
               </a:ext>
             </a:extLst>
           </p:cNvPr>
@@ -17349,7 +17347,7 @@
                 <a:ea typeface="Aptos"/>
                 <a:cs typeface="Aptos"/>
               </a:rPr>
-              <a:t>Keep AI useful but subordinate to human correction.</a:t>
+              <a:t>Keep first drafts subordinate to human correction.</a:t>
             </a:r>
           </a:p>
         </p:txBody>
@@ -17359,7 +17357,7 @@
           <p:cNvPr id="25" name="">
             <a:extLst xmlns:a="http://schemas.openxmlformats.org/drawingml/2006/main">
               <a:ext uri="{FF2B5EF4-FFF2-40B4-BE49-F238E27FC236}">
-                <a16:creationId xmlns:a16="http://schemas.microsoft.com/office/drawing/2014/main" id="{6538BE3F-B4E1-4F42-8524-F80D9AE3425A}"/>
+                <a16:creationId xmlns:a16="http://schemas.microsoft.com/office/drawing/2014/main" id="{2C068EC5-73B7-47FB-BD9E-7D70EE64E0DE}"/>
               </a:ext>
             </a:extLst>
           </p:cNvPr>
@@ -17394,7 +17392,7 @@
           <p:cNvPr id="26" name="">
             <a:extLst xmlns:a="http://schemas.openxmlformats.org/drawingml/2006/main">
               <a:ext uri="{FF2B5EF4-FFF2-40B4-BE49-F238E27FC236}">
-                <a16:creationId xmlns:a16="http://schemas.microsoft.com/office/drawing/2014/main" id="{02D0CE74-01AA-482C-9CA6-5BCA339C66CD}"/>
+                <a16:creationId xmlns:a16="http://schemas.microsoft.com/office/drawing/2014/main" id="{BEFAA573-0071-4DCC-947F-9BCE1A1EE08B}"/>
               </a:ext>
             </a:extLst>
           </p:cNvPr>
@@ -17458,7 +17456,7 @@
           <p:cNvPr id="27" name="">
             <a:extLst xmlns:a="http://schemas.openxmlformats.org/drawingml/2006/main">
               <a:ext uri="{FF2B5EF4-FFF2-40B4-BE49-F238E27FC236}">
-                <a16:creationId xmlns:a16="http://schemas.microsoft.com/office/drawing/2014/main" id="{70E9E583-2314-4F6B-9C13-9C8B905CA7E4}"/>
+                <a16:creationId xmlns:a16="http://schemas.microsoft.com/office/drawing/2014/main" id="{6D17F5F0-0A2D-4936-B6AA-589C7E25F63C}"/>
               </a:ext>
             </a:extLst>
           </p:cNvPr>
@@ -17493,7 +17491,7 @@
           <p:cNvPr id="28" name="">
             <a:extLst xmlns:a="http://schemas.openxmlformats.org/drawingml/2006/main">
               <a:ext uri="{FF2B5EF4-FFF2-40B4-BE49-F238E27FC236}">
-                <a16:creationId xmlns:a16="http://schemas.microsoft.com/office/drawing/2014/main" id="{D2B26606-DB3D-4CA5-A48D-170624F4E4DF}"/>
+                <a16:creationId xmlns:a16="http://schemas.microsoft.com/office/drawing/2014/main" id="{3140649D-FCDF-4FB1-96DD-84EECECB4187}"/>
               </a:ext>
             </a:extLst>
           </p:cNvPr>
@@ -17557,7 +17555,7 @@
           <p:cNvPr id="29" name="">
             <a:extLst xmlns:a="http://schemas.openxmlformats.org/drawingml/2006/main">
               <a:ext uri="{FF2B5EF4-FFF2-40B4-BE49-F238E27FC236}">
-                <a16:creationId xmlns:a16="http://schemas.microsoft.com/office/drawing/2014/main" id="{EC5A37FB-61F8-42E4-81F2-126512A6D96A}"/>
+                <a16:creationId xmlns:a16="http://schemas.microsoft.com/office/drawing/2014/main" id="{CF2648AB-8D40-4FEB-8587-D41E387E5839}"/>
               </a:ext>
             </a:extLst>
           </p:cNvPr>
@@ -17621,7 +17619,7 @@
           <p:cNvPr id="30" name="">
             <a:extLst xmlns:a="http://schemas.openxmlformats.org/drawingml/2006/main">
               <a:ext uri="{FF2B5EF4-FFF2-40B4-BE49-F238E27FC236}">
-                <a16:creationId xmlns:a16="http://schemas.microsoft.com/office/drawing/2014/main" id="{280E4CAD-0D0E-4644-92C4-2A283C04C191}"/>
+                <a16:creationId xmlns:a16="http://schemas.microsoft.com/office/drawing/2014/main" id="{8B1E5DAE-0025-47C1-A7F4-1BFC52464298}"/>
               </a:ext>
             </a:extLst>
           </p:cNvPr>
@@ -17683,7 +17681,7 @@
     </p:spTree>
     <p:extLst>
       <p:ext uri="{BB962C8B-B14F-4D97-AF65-F5344CB8AC3E}">
-        <p14:creationId xmlns:p14="http://schemas.microsoft.com/office/powerpoint/2010/main" val="230717626"/>
+        <p14:creationId xmlns:p14="http://schemas.microsoft.com/office/powerpoint/2010/main" val="807474012"/>
       </p:ext>
     </p:extLst>
   </p:cSld>
@@ -17707,7 +17705,7 @@
           <p:cNvPr id="1" name="">
             <a:extLst xmlns:a="http://schemas.openxmlformats.org/drawingml/2006/main">
               <a:ext uri="{FF2B5EF4-FFF2-40B4-BE49-F238E27FC236}">
-                <a16:creationId xmlns:a16="http://schemas.microsoft.com/office/drawing/2014/main" id="{1352021C-5FFA-4B89-A4F0-AB49F0140F06}"/>
+                <a16:creationId xmlns:a16="http://schemas.microsoft.com/office/drawing/2014/main" id="{45FC06F8-4FE7-4D4E-BE01-DB626F47A026}"/>
               </a:ext>
             </a:extLst>
           </p:cNvPr>
@@ -17742,7 +17740,7 @@
           <p:cNvPr id="2" name="">
             <a:extLst xmlns:a="http://schemas.openxmlformats.org/drawingml/2006/main">
               <a:ext uri="{FF2B5EF4-FFF2-40B4-BE49-F238E27FC236}">
-                <a16:creationId xmlns:a16="http://schemas.microsoft.com/office/drawing/2014/main" id="{3418E7BD-9C53-4E17-9EDB-58E61CCEEAF1}"/>
+                <a16:creationId xmlns:a16="http://schemas.microsoft.com/office/drawing/2014/main" id="{49719FDC-FA94-4EF4-934E-1B29F5549A25}"/>
               </a:ext>
             </a:extLst>
           </p:cNvPr>
@@ -17777,7 +17775,7 @@
           <p:cNvPr id="3" name="">
             <a:extLst xmlns:a="http://schemas.openxmlformats.org/drawingml/2006/main">
               <a:ext uri="{FF2B5EF4-FFF2-40B4-BE49-F238E27FC236}">
-                <a16:creationId xmlns:a16="http://schemas.microsoft.com/office/drawing/2014/main" id="{9BBD882C-D7CD-42CE-B2DF-4DBA9A4E33B1}"/>
+                <a16:creationId xmlns:a16="http://schemas.microsoft.com/office/drawing/2014/main" id="{2651129B-48F7-430B-9CD1-BBE50F51697D}"/>
               </a:ext>
             </a:extLst>
           </p:cNvPr>
@@ -17812,7 +17810,7 @@
           <p:cNvPr id="4" name="kicker-03-marker">
             <a:extLst xmlns:a="http://schemas.openxmlformats.org/drawingml/2006/main">
               <a:ext uri="{FF2B5EF4-FFF2-40B4-BE49-F238E27FC236}">
-                <a16:creationId xmlns:a16="http://schemas.microsoft.com/office/drawing/2014/main" id="{399B27D1-A16E-488F-864F-FCAAD8C86E7A}"/>
+                <a16:creationId xmlns:a16="http://schemas.microsoft.com/office/drawing/2014/main" id="{86006950-7E87-402A-A042-C9B1DCBC113A}"/>
               </a:ext>
             </a:extLst>
           </p:cNvPr>
@@ -17847,7 +17845,7 @@
           <p:cNvPr id="5" name="kicker-03-label">
             <a:extLst xmlns:a="http://schemas.openxmlformats.org/drawingml/2006/main">
               <a:ext uri="{FF2B5EF4-FFF2-40B4-BE49-F238E27FC236}">
-                <a16:creationId xmlns:a16="http://schemas.microsoft.com/office/drawing/2014/main" id="{4E1FD1E4-42F4-41B9-BFD8-2BED7D10EF48}"/>
+                <a16:creationId xmlns:a16="http://schemas.microsoft.com/office/drawing/2014/main" id="{51362F9C-1CF9-411C-8C1F-06158F66CD48}"/>
               </a:ext>
             </a:extLst>
           </p:cNvPr>
@@ -17911,7 +17909,7 @@
           <p:cNvPr id="6" name="">
             <a:extLst xmlns:a="http://schemas.openxmlformats.org/drawingml/2006/main">
               <a:ext uri="{FF2B5EF4-FFF2-40B4-BE49-F238E27FC236}">
-                <a16:creationId xmlns:a16="http://schemas.microsoft.com/office/drawing/2014/main" id="{4D75A53D-2491-4BB4-B4C2-3666A7DC0949}"/>
+                <a16:creationId xmlns:a16="http://schemas.microsoft.com/office/drawing/2014/main" id="{0368259E-AE25-419C-9913-20AB813C9ED2}"/>
               </a:ext>
             </a:extLst>
           </p:cNvPr>
@@ -17975,7 +17973,7 @@
           <p:cNvPr id="7" name="">
             <a:extLst xmlns:a="http://schemas.openxmlformats.org/drawingml/2006/main">
               <a:ext uri="{FF2B5EF4-FFF2-40B4-BE49-F238E27FC236}">
-                <a16:creationId xmlns:a16="http://schemas.microsoft.com/office/drawing/2014/main" id="{8302AFC5-B727-4431-928D-D534E63A9C1E}"/>
+                <a16:creationId xmlns:a16="http://schemas.microsoft.com/office/drawing/2014/main" id="{73F0C6B5-83C4-4C01-987C-E679E6824333}"/>
               </a:ext>
             </a:extLst>
           </p:cNvPr>
@@ -18039,7 +18037,7 @@
           <p:cNvPr id="8" name="">
             <a:extLst xmlns:a="http://schemas.openxmlformats.org/drawingml/2006/main">
               <a:ext uri="{FF2B5EF4-FFF2-40B4-BE49-F238E27FC236}">
-                <a16:creationId xmlns:a16="http://schemas.microsoft.com/office/drawing/2014/main" id="{0E41ACA4-16A6-401F-A0BA-AB71867A349A}"/>
+                <a16:creationId xmlns:a16="http://schemas.microsoft.com/office/drawing/2014/main" id="{D91F7308-7484-4FC2-9944-0D2AA5929BB5}"/>
               </a:ext>
             </a:extLst>
           </p:cNvPr>
@@ -18074,7 +18072,7 @@
           <p:cNvPr id="9" name="">
             <a:extLst xmlns:a="http://schemas.openxmlformats.org/drawingml/2006/main">
               <a:ext uri="{FF2B5EF4-FFF2-40B4-BE49-F238E27FC236}">
-                <a16:creationId xmlns:a16="http://schemas.microsoft.com/office/drawing/2014/main" id="{3E8B17CF-B106-45AB-B420-0D7DB995EDBB}"/>
+                <a16:creationId xmlns:a16="http://schemas.microsoft.com/office/drawing/2014/main" id="{C034221C-71BA-47F0-8B59-927CDDCBC8E2}"/>
               </a:ext>
             </a:extLst>
           </p:cNvPr>
@@ -18138,7 +18136,7 @@
           <p:cNvPr id="10" name="">
             <a:extLst xmlns:a="http://schemas.openxmlformats.org/drawingml/2006/main">
               <a:ext uri="{FF2B5EF4-FFF2-40B4-BE49-F238E27FC236}">
-                <a16:creationId xmlns:a16="http://schemas.microsoft.com/office/drawing/2014/main" id="{C9F40A95-DB67-421F-ABF9-DC1552ECC8CA}"/>
+                <a16:creationId xmlns:a16="http://schemas.microsoft.com/office/drawing/2014/main" id="{3C1037A9-2EC0-4721-A15A-06691BC0AB0E}"/>
               </a:ext>
             </a:extLst>
           </p:cNvPr>
@@ -18202,7 +18200,7 @@
           <p:cNvPr id="11" name="">
             <a:extLst xmlns:a="http://schemas.openxmlformats.org/drawingml/2006/main">
               <a:ext uri="{FF2B5EF4-FFF2-40B4-BE49-F238E27FC236}">
-                <a16:creationId xmlns:a16="http://schemas.microsoft.com/office/drawing/2014/main" id="{D174119A-7948-46EA-98A2-E994DAC26195}"/>
+                <a16:creationId xmlns:a16="http://schemas.microsoft.com/office/drawing/2014/main" id="{36445AD5-A169-41C7-A3A3-07CF2A105F5C}"/>
               </a:ext>
             </a:extLst>
           </p:cNvPr>
@@ -18266,7 +18264,7 @@
           <p:cNvPr id="12" name="">
             <a:extLst xmlns:a="http://schemas.openxmlformats.org/drawingml/2006/main">
               <a:ext uri="{FF2B5EF4-FFF2-40B4-BE49-F238E27FC236}">
-                <a16:creationId xmlns:a16="http://schemas.microsoft.com/office/drawing/2014/main" id="{8F72E307-857A-4086-BC50-3AB8095EA0B6}"/>
+                <a16:creationId xmlns:a16="http://schemas.microsoft.com/office/drawing/2014/main" id="{5A673FFB-F9CF-4A6E-98A2-A8622216C4FD}"/>
               </a:ext>
             </a:extLst>
           </p:cNvPr>
@@ -18299,7 +18297,7 @@
           <p:cNvPr id="13" name="">
             <a:extLst xmlns:a="http://schemas.openxmlformats.org/drawingml/2006/main">
               <a:ext uri="{FF2B5EF4-FFF2-40B4-BE49-F238E27FC236}">
-                <a16:creationId xmlns:a16="http://schemas.microsoft.com/office/drawing/2014/main" id="{709F3D11-60BD-4FF8-849E-B05831B7A098}"/>
+                <a16:creationId xmlns:a16="http://schemas.microsoft.com/office/drawing/2014/main" id="{37232ADA-3B26-4EBB-BE84-5FFF3EDF314E}"/>
               </a:ext>
             </a:extLst>
           </p:cNvPr>
@@ -18334,7 +18332,7 @@
           <p:cNvPr id="14" name="">
             <a:extLst xmlns:a="http://schemas.openxmlformats.org/drawingml/2006/main">
               <a:ext uri="{FF2B5EF4-FFF2-40B4-BE49-F238E27FC236}">
-                <a16:creationId xmlns:a16="http://schemas.microsoft.com/office/drawing/2014/main" id="{6ED05EC7-2DB8-4E8E-B2A3-095BB928CB41}"/>
+                <a16:creationId xmlns:a16="http://schemas.microsoft.com/office/drawing/2014/main" id="{44C36677-783B-43A9-B48D-B209921A6123}"/>
               </a:ext>
             </a:extLst>
           </p:cNvPr>
@@ -18398,7 +18396,7 @@
           <p:cNvPr id="15" name="">
             <a:extLst xmlns:a="http://schemas.openxmlformats.org/drawingml/2006/main">
               <a:ext uri="{FF2B5EF4-FFF2-40B4-BE49-F238E27FC236}">
-                <a16:creationId xmlns:a16="http://schemas.microsoft.com/office/drawing/2014/main" id="{50EE1903-1CC5-408B-B1E5-BE3100619F34}"/>
+                <a16:creationId xmlns:a16="http://schemas.microsoft.com/office/drawing/2014/main" id="{1FDB1BFB-20B1-4A7C-869C-E4AAC7B1CBDA}"/>
               </a:ext>
             </a:extLst>
           </p:cNvPr>
@@ -18433,7 +18431,7 @@
           <p:cNvPr id="16" name="">
             <a:extLst xmlns:a="http://schemas.openxmlformats.org/drawingml/2006/main">
               <a:ext uri="{FF2B5EF4-FFF2-40B4-BE49-F238E27FC236}">
-                <a16:creationId xmlns:a16="http://schemas.microsoft.com/office/drawing/2014/main" id="{E444B47B-1560-4231-9E6F-85F3665496F5}"/>
+                <a16:creationId xmlns:a16="http://schemas.microsoft.com/office/drawing/2014/main" id="{82EFDA3A-550E-4B39-81DD-A5735A9973C6}"/>
               </a:ext>
             </a:extLst>
           </p:cNvPr>
@@ -18497,7 +18495,7 @@
           <p:cNvPr id="17" name="">
             <a:extLst xmlns:a="http://schemas.openxmlformats.org/drawingml/2006/main">
               <a:ext uri="{FF2B5EF4-FFF2-40B4-BE49-F238E27FC236}">
-                <a16:creationId xmlns:a16="http://schemas.microsoft.com/office/drawing/2014/main" id="{B00CFD18-F19A-4622-A26F-3CBD7A9D03DB}"/>
+                <a16:creationId xmlns:a16="http://schemas.microsoft.com/office/drawing/2014/main" id="{271FC134-53C8-4C3C-BA3D-34DAFC9F6821}"/>
               </a:ext>
             </a:extLst>
           </p:cNvPr>
@@ -18532,7 +18530,7 @@
           <p:cNvPr id="18" name="">
             <a:extLst xmlns:a="http://schemas.openxmlformats.org/drawingml/2006/main">
               <a:ext uri="{FF2B5EF4-FFF2-40B4-BE49-F238E27FC236}">
-                <a16:creationId xmlns:a16="http://schemas.microsoft.com/office/drawing/2014/main" id="{13F6719D-01DF-43E2-82CA-DF347C6228C2}"/>
+                <a16:creationId xmlns:a16="http://schemas.microsoft.com/office/drawing/2014/main" id="{35AF898B-2C2A-48E9-8FE8-BF88C99019C8}"/>
               </a:ext>
             </a:extLst>
           </p:cNvPr>
@@ -18596,7 +18594,7 @@
           <p:cNvPr id="19" name="">
             <a:extLst xmlns:a="http://schemas.openxmlformats.org/drawingml/2006/main">
               <a:ext uri="{FF2B5EF4-FFF2-40B4-BE49-F238E27FC236}">
-                <a16:creationId xmlns:a16="http://schemas.microsoft.com/office/drawing/2014/main" id="{9A0212BC-92DF-4587-A9C3-806F0BA37E06}"/>
+                <a16:creationId xmlns:a16="http://schemas.microsoft.com/office/drawing/2014/main" id="{0E2A988F-C340-4834-9764-3C5A410F0725}"/>
               </a:ext>
             </a:extLst>
           </p:cNvPr>
@@ -18631,7 +18629,7 @@
           <p:cNvPr id="20" name="">
             <a:extLst xmlns:a="http://schemas.openxmlformats.org/drawingml/2006/main">
               <a:ext uri="{FF2B5EF4-FFF2-40B4-BE49-F238E27FC236}">
-                <a16:creationId xmlns:a16="http://schemas.microsoft.com/office/drawing/2014/main" id="{0281B72A-C2F8-4039-8F4F-BF7BDC55E5B8}"/>
+                <a16:creationId xmlns:a16="http://schemas.microsoft.com/office/drawing/2014/main" id="{A96F41B9-D248-42FF-86A9-010E0B4C4EF5}"/>
               </a:ext>
             </a:extLst>
           </p:cNvPr>
@@ -18695,7 +18693,7 @@
           <p:cNvPr id="21" name="">
             <a:extLst xmlns:a="http://schemas.openxmlformats.org/drawingml/2006/main">
               <a:ext uri="{FF2B5EF4-FFF2-40B4-BE49-F238E27FC236}">
-                <a16:creationId xmlns:a16="http://schemas.microsoft.com/office/drawing/2014/main" id="{D69809CD-A942-4074-8A13-889C259AED61}"/>
+                <a16:creationId xmlns:a16="http://schemas.microsoft.com/office/drawing/2014/main" id="{A0C801B8-8C8A-4A51-B44B-50E818BC746E}"/>
               </a:ext>
             </a:extLst>
           </p:cNvPr>
@@ -18730,7 +18728,7 @@
           <p:cNvPr id="22" name="">
             <a:extLst xmlns:a="http://schemas.openxmlformats.org/drawingml/2006/main">
               <a:ext uri="{FF2B5EF4-FFF2-40B4-BE49-F238E27FC236}">
-                <a16:creationId xmlns:a16="http://schemas.microsoft.com/office/drawing/2014/main" id="{5568557A-1A88-4699-AF53-ACB8DF9541EF}"/>
+                <a16:creationId xmlns:a16="http://schemas.microsoft.com/office/drawing/2014/main" id="{77E8C4DE-7C1E-4D7F-B73A-1A5AC7AFD2AB}"/>
               </a:ext>
             </a:extLst>
           </p:cNvPr>
@@ -18794,7 +18792,7 @@
           <p:cNvPr id="23" name="">
             <a:extLst xmlns:a="http://schemas.openxmlformats.org/drawingml/2006/main">
               <a:ext uri="{FF2B5EF4-FFF2-40B4-BE49-F238E27FC236}">
-                <a16:creationId xmlns:a16="http://schemas.microsoft.com/office/drawing/2014/main" id="{522A1667-1FE3-45F2-B8F1-A8A6F5AF08B9}"/>
+                <a16:creationId xmlns:a16="http://schemas.microsoft.com/office/drawing/2014/main" id="{9C67BE67-5928-4B15-908B-9EBEAEC7ADB5}"/>
               </a:ext>
             </a:extLst>
           </p:cNvPr>
@@ -18827,7 +18825,7 @@
           <p:cNvPr id="24" name="">
             <a:extLst xmlns:a="http://schemas.openxmlformats.org/drawingml/2006/main">
               <a:ext uri="{FF2B5EF4-FFF2-40B4-BE49-F238E27FC236}">
-                <a16:creationId xmlns:a16="http://schemas.microsoft.com/office/drawing/2014/main" id="{5AF3ABC3-DA0A-4764-A6E2-B7331DE2E271}"/>
+                <a16:creationId xmlns:a16="http://schemas.microsoft.com/office/drawing/2014/main" id="{19258919-14D9-4B17-8882-21A49BD1F259}"/>
               </a:ext>
             </a:extLst>
           </p:cNvPr>
@@ -18862,7 +18860,7 @@
           <p:cNvPr id="25" name="">
             <a:extLst xmlns:a="http://schemas.openxmlformats.org/drawingml/2006/main">
               <a:ext uri="{FF2B5EF4-FFF2-40B4-BE49-F238E27FC236}">
-                <a16:creationId xmlns:a16="http://schemas.microsoft.com/office/drawing/2014/main" id="{DFD297A5-3A6C-4554-959B-C806E024A215}"/>
+                <a16:creationId xmlns:a16="http://schemas.microsoft.com/office/drawing/2014/main" id="{0C441671-EE18-484E-A90A-821EE04C7515}"/>
               </a:ext>
             </a:extLst>
           </p:cNvPr>
@@ -18926,7 +18924,7 @@
           <p:cNvPr id="26" name="">
             <a:extLst xmlns:a="http://schemas.openxmlformats.org/drawingml/2006/main">
               <a:ext uri="{FF2B5EF4-FFF2-40B4-BE49-F238E27FC236}">
-                <a16:creationId xmlns:a16="http://schemas.microsoft.com/office/drawing/2014/main" id="{395F92D2-33C8-4A8C-B310-F54C885E43FD}"/>
+                <a16:creationId xmlns:a16="http://schemas.microsoft.com/office/drawing/2014/main" id="{A34C1AAD-0F10-452E-B72F-88E710A57522}"/>
               </a:ext>
             </a:extLst>
           </p:cNvPr>
@@ -18959,7 +18957,7 @@
           <p:cNvPr id="27" name="">
             <a:extLst xmlns:a="http://schemas.openxmlformats.org/drawingml/2006/main">
               <a:ext uri="{FF2B5EF4-FFF2-40B4-BE49-F238E27FC236}">
-                <a16:creationId xmlns:a16="http://schemas.microsoft.com/office/drawing/2014/main" id="{DDCD3A39-3C91-454B-856D-01D5959B8E69}"/>
+                <a16:creationId xmlns:a16="http://schemas.microsoft.com/office/drawing/2014/main" id="{11E8E26A-87F9-4178-9525-28E410AD2E6A}"/>
               </a:ext>
             </a:extLst>
           </p:cNvPr>
@@ -19023,7 +19021,7 @@
           <p:cNvPr id="28" name="">
             <a:extLst xmlns:a="http://schemas.openxmlformats.org/drawingml/2006/main">
               <a:ext uri="{FF2B5EF4-FFF2-40B4-BE49-F238E27FC236}">
-                <a16:creationId xmlns:a16="http://schemas.microsoft.com/office/drawing/2014/main" id="{AC26DC97-2E0E-41DD-AAFC-A2327FC1B431}"/>
+                <a16:creationId xmlns:a16="http://schemas.microsoft.com/office/drawing/2014/main" id="{7E33ABD1-633B-4572-9851-6972A20AFE10}"/>
               </a:ext>
             </a:extLst>
           </p:cNvPr>
@@ -19087,7 +19085,7 @@
           <p:cNvPr id="29" name="">
             <a:extLst xmlns:a="http://schemas.openxmlformats.org/drawingml/2006/main">
               <a:ext uri="{FF2B5EF4-FFF2-40B4-BE49-F238E27FC236}">
-                <a16:creationId xmlns:a16="http://schemas.microsoft.com/office/drawing/2014/main" id="{F9145EDD-9670-4E73-B734-6D848DE84FE8}"/>
+                <a16:creationId xmlns:a16="http://schemas.microsoft.com/office/drawing/2014/main" id="{B705FC7E-2B7D-4CB4-817A-FDC546567925}"/>
               </a:ext>
             </a:extLst>
           </p:cNvPr>
@@ -19120,7 +19118,7 @@
           <p:cNvPr id="30" name="">
             <a:extLst xmlns:a="http://schemas.openxmlformats.org/drawingml/2006/main">
               <a:ext uri="{FF2B5EF4-FFF2-40B4-BE49-F238E27FC236}">
-                <a16:creationId xmlns:a16="http://schemas.microsoft.com/office/drawing/2014/main" id="{56761FE6-CE47-4E4A-B85C-DA039C65DA8F}"/>
+                <a16:creationId xmlns:a16="http://schemas.microsoft.com/office/drawing/2014/main" id="{17F4C2E7-9723-425B-8081-E70663805332}"/>
               </a:ext>
             </a:extLst>
           </p:cNvPr>
@@ -19184,7 +19182,7 @@
           <p:cNvPr id="31" name="">
             <a:extLst xmlns:a="http://schemas.openxmlformats.org/drawingml/2006/main">
               <a:ext uri="{FF2B5EF4-FFF2-40B4-BE49-F238E27FC236}">
-                <a16:creationId xmlns:a16="http://schemas.microsoft.com/office/drawing/2014/main" id="{FDFF10A4-5D98-4417-8581-689AA68A81EC}"/>
+                <a16:creationId xmlns:a16="http://schemas.microsoft.com/office/drawing/2014/main" id="{92D402CE-2AA7-4BD6-80EA-94D1C9A84DD7}"/>
               </a:ext>
             </a:extLst>
           </p:cNvPr>
@@ -19248,7 +19246,7 @@
           <p:cNvPr id="32" name="">
             <a:extLst xmlns:a="http://schemas.openxmlformats.org/drawingml/2006/main">
               <a:ext uri="{FF2B5EF4-FFF2-40B4-BE49-F238E27FC236}">
-                <a16:creationId xmlns:a16="http://schemas.microsoft.com/office/drawing/2014/main" id="{5767F8F5-A3A7-4389-BD3B-B76C34FBC022}"/>
+                <a16:creationId xmlns:a16="http://schemas.microsoft.com/office/drawing/2014/main" id="{E07806BA-013A-4EF8-9BB3-964D64B09C5A}"/>
               </a:ext>
             </a:extLst>
           </p:cNvPr>
@@ -19281,7 +19279,7 @@
           <p:cNvPr id="33" name="">
             <a:extLst xmlns:a="http://schemas.openxmlformats.org/drawingml/2006/main">
               <a:ext uri="{FF2B5EF4-FFF2-40B4-BE49-F238E27FC236}">
-                <a16:creationId xmlns:a16="http://schemas.microsoft.com/office/drawing/2014/main" id="{014250DC-7FE2-405A-B0CF-981B435FC649}"/>
+                <a16:creationId xmlns:a16="http://schemas.microsoft.com/office/drawing/2014/main" id="{3F0F4923-8815-4721-8BA5-20B9F7DE25BE}"/>
               </a:ext>
             </a:extLst>
           </p:cNvPr>
@@ -19345,7 +19343,7 @@
           <p:cNvPr id="34" name="">
             <a:extLst xmlns:a="http://schemas.openxmlformats.org/drawingml/2006/main">
               <a:ext uri="{FF2B5EF4-FFF2-40B4-BE49-F238E27FC236}">
-                <a16:creationId xmlns:a16="http://schemas.microsoft.com/office/drawing/2014/main" id="{953F4DDD-7148-46B4-A32D-78A0C8DB2C6C}"/>
+                <a16:creationId xmlns:a16="http://schemas.microsoft.com/office/drawing/2014/main" id="{87404A4E-A89D-4DB6-AF16-48ED319E3ACC}"/>
               </a:ext>
             </a:extLst>
           </p:cNvPr>
@@ -19409,7 +19407,7 @@
           <p:cNvPr id="35" name="">
             <a:extLst xmlns:a="http://schemas.openxmlformats.org/drawingml/2006/main">
               <a:ext uri="{FF2B5EF4-FFF2-40B4-BE49-F238E27FC236}">
-                <a16:creationId xmlns:a16="http://schemas.microsoft.com/office/drawing/2014/main" id="{23C283D7-7CEC-4664-A440-5B9A1650BA4A}"/>
+                <a16:creationId xmlns:a16="http://schemas.microsoft.com/office/drawing/2014/main" id="{FAD059E7-3CFE-42D4-9A39-BCE9DE180590}"/>
               </a:ext>
             </a:extLst>
           </p:cNvPr>
@@ -19442,7 +19440,7 @@
           <p:cNvPr id="36" name="">
             <a:extLst xmlns:a="http://schemas.openxmlformats.org/drawingml/2006/main">
               <a:ext uri="{FF2B5EF4-FFF2-40B4-BE49-F238E27FC236}">
-                <a16:creationId xmlns:a16="http://schemas.microsoft.com/office/drawing/2014/main" id="{949C07D0-1BFB-48C9-8ED7-D7C17DA6D191}"/>
+                <a16:creationId xmlns:a16="http://schemas.microsoft.com/office/drawing/2014/main" id="{F72EEC7E-8CC5-42D5-9889-89824D91541F}"/>
               </a:ext>
             </a:extLst>
           </p:cNvPr>
@@ -19506,7 +19504,7 @@
           <p:cNvPr id="37" name="">
             <a:extLst xmlns:a="http://schemas.openxmlformats.org/drawingml/2006/main">
               <a:ext uri="{FF2B5EF4-FFF2-40B4-BE49-F238E27FC236}">
-                <a16:creationId xmlns:a16="http://schemas.microsoft.com/office/drawing/2014/main" id="{64884774-6CC6-41FA-BAD2-229E4A405C88}"/>
+                <a16:creationId xmlns:a16="http://schemas.microsoft.com/office/drawing/2014/main" id="{F4CA38A6-2EF4-4237-A377-C7146BDB4982}"/>
               </a:ext>
             </a:extLst>
           </p:cNvPr>
@@ -19570,7 +19568,7 @@
           <p:cNvPr id="38" name="">
             <a:extLst xmlns:a="http://schemas.openxmlformats.org/drawingml/2006/main">
               <a:ext uri="{FF2B5EF4-FFF2-40B4-BE49-F238E27FC236}">
-                <a16:creationId xmlns:a16="http://schemas.microsoft.com/office/drawing/2014/main" id="{D670617B-9EDA-449F-A96E-16A679C927F6}"/>
+                <a16:creationId xmlns:a16="http://schemas.microsoft.com/office/drawing/2014/main" id="{1C76B990-F12A-4533-BA22-1BC6B6BD6696}"/>
               </a:ext>
             </a:extLst>
           </p:cNvPr>
@@ -19603,7 +19601,7 @@
           <p:cNvPr id="39" name="">
             <a:extLst xmlns:a="http://schemas.openxmlformats.org/drawingml/2006/main">
               <a:ext uri="{FF2B5EF4-FFF2-40B4-BE49-F238E27FC236}">
-                <a16:creationId xmlns:a16="http://schemas.microsoft.com/office/drawing/2014/main" id="{5B4333C7-A06F-4DE6-B60D-CDA5CDF11174}"/>
+                <a16:creationId xmlns:a16="http://schemas.microsoft.com/office/drawing/2014/main" id="{BAD530ED-06D8-407E-92F2-84D2548B0B4B}"/>
               </a:ext>
             </a:extLst>
           </p:cNvPr>
@@ -19667,7 +19665,7 @@
           <p:cNvPr id="40" name="">
             <a:extLst xmlns:a="http://schemas.openxmlformats.org/drawingml/2006/main">
               <a:ext uri="{FF2B5EF4-FFF2-40B4-BE49-F238E27FC236}">
-                <a16:creationId xmlns:a16="http://schemas.microsoft.com/office/drawing/2014/main" id="{71983459-15FD-4924-B2D9-AF276CA4D008}"/>
+                <a16:creationId xmlns:a16="http://schemas.microsoft.com/office/drawing/2014/main" id="{06353343-B9A8-48D7-9C44-720477D0E9CD}"/>
               </a:ext>
             </a:extLst>
           </p:cNvPr>
@@ -19731,7 +19729,7 @@
           <p:cNvPr id="41" name="">
             <a:extLst xmlns:a="http://schemas.openxmlformats.org/drawingml/2006/main">
               <a:ext uri="{FF2B5EF4-FFF2-40B4-BE49-F238E27FC236}">
-                <a16:creationId xmlns:a16="http://schemas.microsoft.com/office/drawing/2014/main" id="{3771CECE-5313-4C7F-B76B-7A88A38763B4}"/>
+                <a16:creationId xmlns:a16="http://schemas.microsoft.com/office/drawing/2014/main" id="{FEC9717D-BCE1-41C1-BB65-4E269B0A920A}"/>
               </a:ext>
             </a:extLst>
           </p:cNvPr>
@@ -19766,7 +19764,7 @@
           <p:cNvPr id="42" name="">
             <a:extLst xmlns:a="http://schemas.openxmlformats.org/drawingml/2006/main">
               <a:ext uri="{FF2B5EF4-FFF2-40B4-BE49-F238E27FC236}">
-                <a16:creationId xmlns:a16="http://schemas.microsoft.com/office/drawing/2014/main" id="{34695913-3E60-458F-9EC5-9FDADAC89586}"/>
+                <a16:creationId xmlns:a16="http://schemas.microsoft.com/office/drawing/2014/main" id="{48C0F1F0-BAA9-4F12-A75A-F1ED7167514E}"/>
               </a:ext>
             </a:extLst>
           </p:cNvPr>
@@ -19830,7 +19828,7 @@
           <p:cNvPr id="43" name="">
             <a:extLst xmlns:a="http://schemas.openxmlformats.org/drawingml/2006/main">
               <a:ext uri="{FF2B5EF4-FFF2-40B4-BE49-F238E27FC236}">
-                <a16:creationId xmlns:a16="http://schemas.microsoft.com/office/drawing/2014/main" id="{BC581AD7-4BFF-4E06-BB2D-B86AC797D069}"/>
+                <a16:creationId xmlns:a16="http://schemas.microsoft.com/office/drawing/2014/main" id="{FBB8A0D9-8587-489F-867E-0DEB251F0420}"/>
               </a:ext>
             </a:extLst>
           </p:cNvPr>
@@ -19894,7 +19892,7 @@
           <p:cNvPr id="44" name="">
             <a:extLst xmlns:a="http://schemas.openxmlformats.org/drawingml/2006/main">
               <a:ext uri="{FF2B5EF4-FFF2-40B4-BE49-F238E27FC236}">
-                <a16:creationId xmlns:a16="http://schemas.microsoft.com/office/drawing/2014/main" id="{CEA1F589-7736-4364-9896-5CF342798A3F}"/>
+                <a16:creationId xmlns:a16="http://schemas.microsoft.com/office/drawing/2014/main" id="{DF44BE79-2E58-4A5C-A69F-8A281BEBC221}"/>
               </a:ext>
             </a:extLst>
           </p:cNvPr>
@@ -19956,7 +19954,7 @@
     </p:spTree>
     <p:extLst>
       <p:ext uri="{BB962C8B-B14F-4D97-AF65-F5344CB8AC3E}">
-        <p14:creationId xmlns:p14="http://schemas.microsoft.com/office/powerpoint/2010/main" val="1446304937"/>
+        <p14:creationId xmlns:p14="http://schemas.microsoft.com/office/powerpoint/2010/main" val="969997235"/>
       </p:ext>
     </p:extLst>
   </p:cSld>
@@ -19980,7 +19978,7 @@
           <p:cNvPr id="1" name="">
             <a:extLst xmlns:a="http://schemas.openxmlformats.org/drawingml/2006/main">
               <a:ext uri="{FF2B5EF4-FFF2-40B4-BE49-F238E27FC236}">
-                <a16:creationId xmlns:a16="http://schemas.microsoft.com/office/drawing/2014/main" id="{70F320F3-14A1-44FC-A373-38B1330296B9}"/>
+                <a16:creationId xmlns:a16="http://schemas.microsoft.com/office/drawing/2014/main" id="{3B5EBF75-E3F2-4341-9A40-8B502C95CC47}"/>
               </a:ext>
             </a:extLst>
           </p:cNvPr>
@@ -20015,7 +20013,7 @@
           <p:cNvPr id="2" name="">
             <a:extLst xmlns:a="http://schemas.openxmlformats.org/drawingml/2006/main">
               <a:ext uri="{FF2B5EF4-FFF2-40B4-BE49-F238E27FC236}">
-                <a16:creationId xmlns:a16="http://schemas.microsoft.com/office/drawing/2014/main" id="{B302FCCF-779D-46E8-83AD-C0F9BE0D2AA0}"/>
+                <a16:creationId xmlns:a16="http://schemas.microsoft.com/office/drawing/2014/main" id="{F04F9EEA-F744-4AA9-B319-B2B32429BD84}"/>
               </a:ext>
             </a:extLst>
           </p:cNvPr>
@@ -20050,7 +20048,7 @@
           <p:cNvPr id="3" name="">
             <a:extLst xmlns:a="http://schemas.openxmlformats.org/drawingml/2006/main">
               <a:ext uri="{FF2B5EF4-FFF2-40B4-BE49-F238E27FC236}">
-                <a16:creationId xmlns:a16="http://schemas.microsoft.com/office/drawing/2014/main" id="{6C25B413-1613-478E-9EB4-498D0EEF8776}"/>
+                <a16:creationId xmlns:a16="http://schemas.microsoft.com/office/drawing/2014/main" id="{1D6F9097-B438-4817-9755-2F3B5041833E}"/>
               </a:ext>
             </a:extLst>
           </p:cNvPr>
@@ -20085,7 +20083,7 @@
           <p:cNvPr id="4" name="kicker-03-marker">
             <a:extLst xmlns:a="http://schemas.openxmlformats.org/drawingml/2006/main">
               <a:ext uri="{FF2B5EF4-FFF2-40B4-BE49-F238E27FC236}">
-                <a16:creationId xmlns:a16="http://schemas.microsoft.com/office/drawing/2014/main" id="{5E7C1ADA-800B-4F25-9A2F-3ABCE5FF0D30}"/>
+                <a16:creationId xmlns:a16="http://schemas.microsoft.com/office/drawing/2014/main" id="{8C19EC2D-A35D-439B-B15E-2E6EC6FF23B7}"/>
               </a:ext>
             </a:extLst>
           </p:cNvPr>
@@ -20120,7 +20118,7 @@
           <p:cNvPr id="5" name="kicker-03-label">
             <a:extLst xmlns:a="http://schemas.openxmlformats.org/drawingml/2006/main">
               <a:ext uri="{FF2B5EF4-FFF2-40B4-BE49-F238E27FC236}">
-                <a16:creationId xmlns:a16="http://schemas.microsoft.com/office/drawing/2014/main" id="{BBAB5D3C-0BB8-4492-98A5-2BD99850166E}"/>
+                <a16:creationId xmlns:a16="http://schemas.microsoft.com/office/drawing/2014/main" id="{FE64A4DA-4F83-4D75-8D4D-16C2D8EB5E8D}"/>
               </a:ext>
             </a:extLst>
           </p:cNvPr>
@@ -20184,7 +20182,7 @@
           <p:cNvPr id="6" name="">
             <a:extLst xmlns:a="http://schemas.openxmlformats.org/drawingml/2006/main">
               <a:ext uri="{FF2B5EF4-FFF2-40B4-BE49-F238E27FC236}">
-                <a16:creationId xmlns:a16="http://schemas.microsoft.com/office/drawing/2014/main" id="{CC4E02ED-4BE1-40AC-BA84-4B1FD18B5F9F}"/>
+                <a16:creationId xmlns:a16="http://schemas.microsoft.com/office/drawing/2014/main" id="{D01D0A16-C54F-4F58-89F0-0F61C17B3338}"/>
               </a:ext>
             </a:extLst>
           </p:cNvPr>
@@ -20248,7 +20246,7 @@
           <p:cNvPr id="7" name="">
             <a:extLst xmlns:a="http://schemas.openxmlformats.org/drawingml/2006/main">
               <a:ext uri="{FF2B5EF4-FFF2-40B4-BE49-F238E27FC236}">
-                <a16:creationId xmlns:a16="http://schemas.microsoft.com/office/drawing/2014/main" id="{99BC29E0-3D6A-487B-8364-F24D6768D2A2}"/>
+                <a16:creationId xmlns:a16="http://schemas.microsoft.com/office/drawing/2014/main" id="{DD018643-2A12-4187-875C-4BAB95759347}"/>
               </a:ext>
             </a:extLst>
           </p:cNvPr>
@@ -20312,7 +20310,7 @@
           <p:cNvPr id="8" name="">
             <a:extLst xmlns:a="http://schemas.openxmlformats.org/drawingml/2006/main">
               <a:ext uri="{FF2B5EF4-FFF2-40B4-BE49-F238E27FC236}">
-                <a16:creationId xmlns:a16="http://schemas.microsoft.com/office/drawing/2014/main" id="{4FBC109C-F2E7-4ACC-9664-304F70C8141B}"/>
+                <a16:creationId xmlns:a16="http://schemas.microsoft.com/office/drawing/2014/main" id="{67685A21-262C-432C-9C23-24FC2D6CCEB5}"/>
               </a:ext>
             </a:extLst>
           </p:cNvPr>
@@ -20347,7 +20345,7 @@
           <p:cNvPr id="9" name="">
             <a:extLst xmlns:a="http://schemas.openxmlformats.org/drawingml/2006/main">
               <a:ext uri="{FF2B5EF4-FFF2-40B4-BE49-F238E27FC236}">
-                <a16:creationId xmlns:a16="http://schemas.microsoft.com/office/drawing/2014/main" id="{4FB84973-D083-4771-A844-C5F33F1DB32C}"/>
+                <a16:creationId xmlns:a16="http://schemas.microsoft.com/office/drawing/2014/main" id="{A1BA024F-AF39-43F3-9563-54FBEFFBC2FA}"/>
               </a:ext>
             </a:extLst>
           </p:cNvPr>
@@ -20411,7 +20409,7 @@
           <p:cNvPr id="10" name="">
             <a:extLst xmlns:a="http://schemas.openxmlformats.org/drawingml/2006/main">
               <a:ext uri="{FF2B5EF4-FFF2-40B4-BE49-F238E27FC236}">
-                <a16:creationId xmlns:a16="http://schemas.microsoft.com/office/drawing/2014/main" id="{935FC6A0-0F84-41F8-AC2F-AEAB52EA093B}"/>
+                <a16:creationId xmlns:a16="http://schemas.microsoft.com/office/drawing/2014/main" id="{E6574C02-FB81-4795-B92B-5941A9049058}"/>
               </a:ext>
             </a:extLst>
           </p:cNvPr>
@@ -20475,7 +20473,7 @@
           <p:cNvPr id="11" name="">
             <a:extLst xmlns:a="http://schemas.openxmlformats.org/drawingml/2006/main">
               <a:ext uri="{FF2B5EF4-FFF2-40B4-BE49-F238E27FC236}">
-                <a16:creationId xmlns:a16="http://schemas.microsoft.com/office/drawing/2014/main" id="{FDB661BF-7CA9-46CB-B7B2-57153A83DB25}"/>
+                <a16:creationId xmlns:a16="http://schemas.microsoft.com/office/drawing/2014/main" id="{2FB18454-1A71-4F41-BD45-B4B31C82A36F}"/>
               </a:ext>
             </a:extLst>
           </p:cNvPr>
@@ -20539,7 +20537,7 @@
           <p:cNvPr id="12" name="">
             <a:extLst xmlns:a="http://schemas.openxmlformats.org/drawingml/2006/main">
               <a:ext uri="{FF2B5EF4-FFF2-40B4-BE49-F238E27FC236}">
-                <a16:creationId xmlns:a16="http://schemas.microsoft.com/office/drawing/2014/main" id="{63C1DE72-EFB3-4334-A14E-7596D2AE0268}"/>
+                <a16:creationId xmlns:a16="http://schemas.microsoft.com/office/drawing/2014/main" id="{B805748A-0E46-4ECB-8C83-2C15BA34D98C}"/>
               </a:ext>
             </a:extLst>
           </p:cNvPr>
@@ -20574,7 +20572,7 @@
           <p:cNvPr id="13" name="">
             <a:extLst xmlns:a="http://schemas.openxmlformats.org/drawingml/2006/main">
               <a:ext uri="{FF2B5EF4-FFF2-40B4-BE49-F238E27FC236}">
-                <a16:creationId xmlns:a16="http://schemas.microsoft.com/office/drawing/2014/main" id="{C9CAB2FD-916B-4AE1-B106-E422AA28D710}"/>
+                <a16:creationId xmlns:a16="http://schemas.microsoft.com/office/drawing/2014/main" id="{D8432DAC-10E5-460F-A529-44BD0C8DF9E2}"/>
               </a:ext>
             </a:extLst>
           </p:cNvPr>
@@ -20607,7 +20605,7 @@
           <p:cNvPr id="14" name="">
             <a:extLst xmlns:a="http://schemas.openxmlformats.org/drawingml/2006/main">
               <a:ext uri="{FF2B5EF4-FFF2-40B4-BE49-F238E27FC236}">
-                <a16:creationId xmlns:a16="http://schemas.microsoft.com/office/drawing/2014/main" id="{34762363-572D-454D-BE78-1D93BBB18616}"/>
+                <a16:creationId xmlns:a16="http://schemas.microsoft.com/office/drawing/2014/main" id="{66D92448-272D-48C9-B9E5-14EDD92B15D4}"/>
               </a:ext>
             </a:extLst>
           </p:cNvPr>
@@ -20642,7 +20640,7 @@
           <p:cNvPr id="15" name="">
             <a:extLst xmlns:a="http://schemas.openxmlformats.org/drawingml/2006/main">
               <a:ext uri="{FF2B5EF4-FFF2-40B4-BE49-F238E27FC236}">
-                <a16:creationId xmlns:a16="http://schemas.microsoft.com/office/drawing/2014/main" id="{FE6A5336-22F4-4A06-B8F1-177A1CCD0BA1}"/>
+                <a16:creationId xmlns:a16="http://schemas.microsoft.com/office/drawing/2014/main" id="{EA4FDC7A-2FBF-4B30-9347-AC9F221BEA43}"/>
               </a:ext>
             </a:extLst>
           </p:cNvPr>
@@ -20706,7 +20704,7 @@
           <p:cNvPr id="16" name="">
             <a:extLst xmlns:a="http://schemas.openxmlformats.org/drawingml/2006/main">
               <a:ext uri="{FF2B5EF4-FFF2-40B4-BE49-F238E27FC236}">
-                <a16:creationId xmlns:a16="http://schemas.microsoft.com/office/drawing/2014/main" id="{D8B902AC-17F4-46DB-AD6B-D96C89028856}"/>
+                <a16:creationId xmlns:a16="http://schemas.microsoft.com/office/drawing/2014/main" id="{E8AA7EF7-CC5F-4D97-9AC0-78022CFFFCE7}"/>
               </a:ext>
             </a:extLst>
           </p:cNvPr>
@@ -20739,7 +20737,7 @@
           <p:cNvPr id="17" name="">
             <a:extLst xmlns:a="http://schemas.openxmlformats.org/drawingml/2006/main">
               <a:ext uri="{FF2B5EF4-FFF2-40B4-BE49-F238E27FC236}">
-                <a16:creationId xmlns:a16="http://schemas.microsoft.com/office/drawing/2014/main" id="{49D7797D-5BD4-47FD-9479-02A8E281A815}"/>
+                <a16:creationId xmlns:a16="http://schemas.microsoft.com/office/drawing/2014/main" id="{B276F52D-D6D0-4518-9708-16EC8993910B}"/>
               </a:ext>
             </a:extLst>
           </p:cNvPr>
@@ -20774,7 +20772,7 @@
           <p:cNvPr id="18" name="">
             <a:extLst xmlns:a="http://schemas.openxmlformats.org/drawingml/2006/main">
               <a:ext uri="{FF2B5EF4-FFF2-40B4-BE49-F238E27FC236}">
-                <a16:creationId xmlns:a16="http://schemas.microsoft.com/office/drawing/2014/main" id="{9D153719-7AD3-41F0-9E56-48F28914CDB9}"/>
+                <a16:creationId xmlns:a16="http://schemas.microsoft.com/office/drawing/2014/main" id="{C0807F03-3F06-4F8E-88E5-E806574DE5C8}"/>
               </a:ext>
             </a:extLst>
           </p:cNvPr>
@@ -20838,7 +20836,7 @@
           <p:cNvPr id="19" name="">
             <a:extLst xmlns:a="http://schemas.openxmlformats.org/drawingml/2006/main">
               <a:ext uri="{FF2B5EF4-FFF2-40B4-BE49-F238E27FC236}">
-                <a16:creationId xmlns:a16="http://schemas.microsoft.com/office/drawing/2014/main" id="{909405DB-8A0B-42C4-AAC4-3F4E905B8758}"/>
+                <a16:creationId xmlns:a16="http://schemas.microsoft.com/office/drawing/2014/main" id="{271AAFD9-48B2-4C53-83E3-6D821D717A1C}"/>
               </a:ext>
             </a:extLst>
           </p:cNvPr>
@@ -20902,7 +20900,7 @@
           <p:cNvPr id="20" name="">
             <a:extLst xmlns:a="http://schemas.openxmlformats.org/drawingml/2006/main">
               <a:ext uri="{FF2B5EF4-FFF2-40B4-BE49-F238E27FC236}">
-                <a16:creationId xmlns:a16="http://schemas.microsoft.com/office/drawing/2014/main" id="{1EB05613-C408-4284-BB4F-C2F449EE527E}"/>
+                <a16:creationId xmlns:a16="http://schemas.microsoft.com/office/drawing/2014/main" id="{EB46B9CB-6439-4CFF-AFEE-E23AB40D14DD}"/>
               </a:ext>
             </a:extLst>
           </p:cNvPr>
@@ -20937,7 +20935,7 @@
           <p:cNvPr id="21" name="">
             <a:extLst xmlns:a="http://schemas.openxmlformats.org/drawingml/2006/main">
               <a:ext uri="{FF2B5EF4-FFF2-40B4-BE49-F238E27FC236}">
-                <a16:creationId xmlns:a16="http://schemas.microsoft.com/office/drawing/2014/main" id="{B653794B-3813-4C9D-9B04-B6DF56C5BF40}"/>
+                <a16:creationId xmlns:a16="http://schemas.microsoft.com/office/drawing/2014/main" id="{45F4F357-7AA2-42D5-AA04-6D7F479A4CBC}"/>
               </a:ext>
             </a:extLst>
           </p:cNvPr>
@@ -20970,7 +20968,7 @@
           <p:cNvPr id="22" name="">
             <a:extLst xmlns:a="http://schemas.openxmlformats.org/drawingml/2006/main">
               <a:ext uri="{FF2B5EF4-FFF2-40B4-BE49-F238E27FC236}">
-                <a16:creationId xmlns:a16="http://schemas.microsoft.com/office/drawing/2014/main" id="{06E158D0-F57C-49AB-AD9A-25AF775EC4DA}"/>
+                <a16:creationId xmlns:a16="http://schemas.microsoft.com/office/drawing/2014/main" id="{DEE32F23-F2EB-49D1-B505-94DA49AAA53E}"/>
               </a:ext>
             </a:extLst>
           </p:cNvPr>
@@ -21005,7 +21003,7 @@
           <p:cNvPr id="23" name="">
             <a:extLst xmlns:a="http://schemas.openxmlformats.org/drawingml/2006/main">
               <a:ext uri="{FF2B5EF4-FFF2-40B4-BE49-F238E27FC236}">
-                <a16:creationId xmlns:a16="http://schemas.microsoft.com/office/drawing/2014/main" id="{B093B7A3-A2F4-4A33-8148-59F50E8456EC}"/>
+                <a16:creationId xmlns:a16="http://schemas.microsoft.com/office/drawing/2014/main" id="{8CA1406D-4D13-44D4-BCD5-1F3040196AC3}"/>
               </a:ext>
             </a:extLst>
           </p:cNvPr>
@@ -21069,7 +21067,7 @@
           <p:cNvPr id="24" name="">
             <a:extLst xmlns:a="http://schemas.openxmlformats.org/drawingml/2006/main">
               <a:ext uri="{FF2B5EF4-FFF2-40B4-BE49-F238E27FC236}">
-                <a16:creationId xmlns:a16="http://schemas.microsoft.com/office/drawing/2014/main" id="{7D703013-BDCA-4A60-991D-235F9D130E1A}"/>
+                <a16:creationId xmlns:a16="http://schemas.microsoft.com/office/drawing/2014/main" id="{3763EC8E-7A14-417C-AE9B-4E5AAA0DAF27}"/>
               </a:ext>
             </a:extLst>
           </p:cNvPr>
@@ -21133,7 +21131,7 @@
           <p:cNvPr id="25" name="">
             <a:extLst xmlns:a="http://schemas.openxmlformats.org/drawingml/2006/main">
               <a:ext uri="{FF2B5EF4-FFF2-40B4-BE49-F238E27FC236}">
-                <a16:creationId xmlns:a16="http://schemas.microsoft.com/office/drawing/2014/main" id="{9984A34B-C8C5-4BEE-94F7-1CF99BCBDD8A}"/>
+                <a16:creationId xmlns:a16="http://schemas.microsoft.com/office/drawing/2014/main" id="{49B1D3F0-1089-42FF-A38F-8C8F8CD3E667}"/>
               </a:ext>
             </a:extLst>
           </p:cNvPr>
@@ -21168,7 +21166,7 @@
           <p:cNvPr id="26" name="">
             <a:extLst xmlns:a="http://schemas.openxmlformats.org/drawingml/2006/main">
               <a:ext uri="{FF2B5EF4-FFF2-40B4-BE49-F238E27FC236}">
-                <a16:creationId xmlns:a16="http://schemas.microsoft.com/office/drawing/2014/main" id="{4465391B-C1AB-4B1C-95A4-E998BB5CAAB6}"/>
+                <a16:creationId xmlns:a16="http://schemas.microsoft.com/office/drawing/2014/main" id="{6787E936-A563-40E6-BF11-5078A7845384}"/>
               </a:ext>
             </a:extLst>
           </p:cNvPr>
@@ -21201,7 +21199,7 @@
           <p:cNvPr id="27" name="">
             <a:extLst xmlns:a="http://schemas.openxmlformats.org/drawingml/2006/main">
               <a:ext uri="{FF2B5EF4-FFF2-40B4-BE49-F238E27FC236}">
-                <a16:creationId xmlns:a16="http://schemas.microsoft.com/office/drawing/2014/main" id="{2DCA75A7-691E-4BE8-831D-4DEB283E60D5}"/>
+                <a16:creationId xmlns:a16="http://schemas.microsoft.com/office/drawing/2014/main" id="{C6A2136F-E3B1-4383-8CCF-1420E34C735C}"/>
               </a:ext>
             </a:extLst>
           </p:cNvPr>
@@ -21236,7 +21234,7 @@
           <p:cNvPr id="28" name="">
             <a:extLst xmlns:a="http://schemas.openxmlformats.org/drawingml/2006/main">
               <a:ext uri="{FF2B5EF4-FFF2-40B4-BE49-F238E27FC236}">
-                <a16:creationId xmlns:a16="http://schemas.microsoft.com/office/drawing/2014/main" id="{21F599BF-C320-4E5B-AD29-87BCEC196111}"/>
+                <a16:creationId xmlns:a16="http://schemas.microsoft.com/office/drawing/2014/main" id="{B014B791-C994-48FD-B1A1-8C40B2C40863}"/>
               </a:ext>
             </a:extLst>
           </p:cNvPr>
@@ -21300,7 +21298,7 @@
           <p:cNvPr id="29" name="">
             <a:extLst xmlns:a="http://schemas.openxmlformats.org/drawingml/2006/main">
               <a:ext uri="{FF2B5EF4-FFF2-40B4-BE49-F238E27FC236}">
-                <a16:creationId xmlns:a16="http://schemas.microsoft.com/office/drawing/2014/main" id="{E55E950E-2A0A-4869-8FD9-F02E00BF49A3}"/>
+                <a16:creationId xmlns:a16="http://schemas.microsoft.com/office/drawing/2014/main" id="{7C59E782-F5E8-46F1-99C2-B7517906B23E}"/>
               </a:ext>
             </a:extLst>
           </p:cNvPr>
@@ -21364,7 +21362,7 @@
           <p:cNvPr id="30" name="">
             <a:extLst xmlns:a="http://schemas.openxmlformats.org/drawingml/2006/main">
               <a:ext uri="{FF2B5EF4-FFF2-40B4-BE49-F238E27FC236}">
-                <a16:creationId xmlns:a16="http://schemas.microsoft.com/office/drawing/2014/main" id="{A58372CB-0932-4CA7-B9E5-DE4FB14A7631}"/>
+                <a16:creationId xmlns:a16="http://schemas.microsoft.com/office/drawing/2014/main" id="{EA822759-8004-4EEA-8AD6-54725BD9EA4F}"/>
               </a:ext>
             </a:extLst>
           </p:cNvPr>
@@ -21399,7 +21397,7 @@
           <p:cNvPr id="31" name="">
             <a:extLst xmlns:a="http://schemas.openxmlformats.org/drawingml/2006/main">
               <a:ext uri="{FF2B5EF4-FFF2-40B4-BE49-F238E27FC236}">
-                <a16:creationId xmlns:a16="http://schemas.microsoft.com/office/drawing/2014/main" id="{CA7A6574-094C-44FE-8434-0B9D9C57EFD7}"/>
+                <a16:creationId xmlns:a16="http://schemas.microsoft.com/office/drawing/2014/main" id="{44B51629-C4CF-4143-B2E4-C30BD417CB9B}"/>
               </a:ext>
             </a:extLst>
           </p:cNvPr>
@@ -21432,7 +21430,7 @@
           <p:cNvPr id="32" name="">
             <a:extLst xmlns:a="http://schemas.openxmlformats.org/drawingml/2006/main">
               <a:ext uri="{FF2B5EF4-FFF2-40B4-BE49-F238E27FC236}">
-                <a16:creationId xmlns:a16="http://schemas.microsoft.com/office/drawing/2014/main" id="{9CFCFC9C-108E-44BB-88E4-6F9BCD9E822E}"/>
+                <a16:creationId xmlns:a16="http://schemas.microsoft.com/office/drawing/2014/main" id="{20FBF2BE-6DCA-4CBB-8374-93FAD63E4194}"/>
               </a:ext>
             </a:extLst>
           </p:cNvPr>
@@ -21467,7 +21465,7 @@
           <p:cNvPr id="33" name="">
             <a:extLst xmlns:a="http://schemas.openxmlformats.org/drawingml/2006/main">
               <a:ext uri="{FF2B5EF4-FFF2-40B4-BE49-F238E27FC236}">
-                <a16:creationId xmlns:a16="http://schemas.microsoft.com/office/drawing/2014/main" id="{4302D0CB-AB98-426C-BF36-24E84E187C25}"/>
+                <a16:creationId xmlns:a16="http://schemas.microsoft.com/office/drawing/2014/main" id="{D9E1BD85-7DAD-4FD6-BBC7-28ED7FC00D69}"/>
               </a:ext>
             </a:extLst>
           </p:cNvPr>
@@ -21531,7 +21529,7 @@
           <p:cNvPr id="34" name="">
             <a:extLst xmlns:a="http://schemas.openxmlformats.org/drawingml/2006/main">
               <a:ext uri="{FF2B5EF4-FFF2-40B4-BE49-F238E27FC236}">
-                <a16:creationId xmlns:a16="http://schemas.microsoft.com/office/drawing/2014/main" id="{EF52C631-AC4E-4323-8BBB-D39BB4C1EE13}"/>
+                <a16:creationId xmlns:a16="http://schemas.microsoft.com/office/drawing/2014/main" id="{5F742BF3-CD19-41BB-A89F-ECC2B4902DBC}"/>
               </a:ext>
             </a:extLst>
           </p:cNvPr>
@@ -21595,7 +21593,7 @@
           <p:cNvPr id="35" name="">
             <a:extLst xmlns:a="http://schemas.openxmlformats.org/drawingml/2006/main">
               <a:ext uri="{FF2B5EF4-FFF2-40B4-BE49-F238E27FC236}">
-                <a16:creationId xmlns:a16="http://schemas.microsoft.com/office/drawing/2014/main" id="{E458673F-EC6C-4D4B-A81E-012078C7E76B}"/>
+                <a16:creationId xmlns:a16="http://schemas.microsoft.com/office/drawing/2014/main" id="{2C44A388-F8DB-408F-95E8-507E6C640A58}"/>
               </a:ext>
             </a:extLst>
           </p:cNvPr>
@@ -21628,7 +21626,7 @@
           <p:cNvPr id="36" name="">
             <a:extLst xmlns:a="http://schemas.openxmlformats.org/drawingml/2006/main">
               <a:ext uri="{FF2B5EF4-FFF2-40B4-BE49-F238E27FC236}">
-                <a16:creationId xmlns:a16="http://schemas.microsoft.com/office/drawing/2014/main" id="{3165165B-B61A-45B1-9F97-931E68F7D516}"/>
+                <a16:creationId xmlns:a16="http://schemas.microsoft.com/office/drawing/2014/main" id="{01445DF2-83E8-4D6A-BE59-3B4A021997DA}"/>
               </a:ext>
             </a:extLst>
           </p:cNvPr>
@@ -21663,7 +21661,7 @@
           <p:cNvPr id="37" name="">
             <a:extLst xmlns:a="http://schemas.openxmlformats.org/drawingml/2006/main">
               <a:ext uri="{FF2B5EF4-FFF2-40B4-BE49-F238E27FC236}">
-                <a16:creationId xmlns:a16="http://schemas.microsoft.com/office/drawing/2014/main" id="{6A1957C7-F801-4457-AC9E-E5846696C9F7}"/>
+                <a16:creationId xmlns:a16="http://schemas.microsoft.com/office/drawing/2014/main" id="{6A47573E-79B0-4B4C-BF4E-E2AA46A6F6D0}"/>
               </a:ext>
             </a:extLst>
           </p:cNvPr>
@@ -21727,7 +21725,7 @@
           <p:cNvPr id="38" name="">
             <a:extLst xmlns:a="http://schemas.openxmlformats.org/drawingml/2006/main">
               <a:ext uri="{FF2B5EF4-FFF2-40B4-BE49-F238E27FC236}">
-                <a16:creationId xmlns:a16="http://schemas.microsoft.com/office/drawing/2014/main" id="{8061C7F8-CB20-454E-A680-548AC8413FB9}"/>
+                <a16:creationId xmlns:a16="http://schemas.microsoft.com/office/drawing/2014/main" id="{ADC150B4-5CD3-4164-AF78-6F09FC5E34D3}"/>
               </a:ext>
             </a:extLst>
           </p:cNvPr>
@@ -21791,7 +21789,7 @@
           <p:cNvPr id="39" name="">
             <a:extLst xmlns:a="http://schemas.openxmlformats.org/drawingml/2006/main">
               <a:ext uri="{FF2B5EF4-FFF2-40B4-BE49-F238E27FC236}">
-                <a16:creationId xmlns:a16="http://schemas.microsoft.com/office/drawing/2014/main" id="{FB463E0F-F511-4D09-92B9-2A64584612D7}"/>
+                <a16:creationId xmlns:a16="http://schemas.microsoft.com/office/drawing/2014/main" id="{E706969D-44ED-452A-95BB-FB0DD8E12DD3}"/>
               </a:ext>
             </a:extLst>
           </p:cNvPr>
@@ -21826,7 +21824,7 @@
           <p:cNvPr id="40" name="">
             <a:extLst xmlns:a="http://schemas.openxmlformats.org/drawingml/2006/main">
               <a:ext uri="{FF2B5EF4-FFF2-40B4-BE49-F238E27FC236}">
-                <a16:creationId xmlns:a16="http://schemas.microsoft.com/office/drawing/2014/main" id="{DE6797FD-29E5-41C4-B87B-4F0601485D26}"/>
+                <a16:creationId xmlns:a16="http://schemas.microsoft.com/office/drawing/2014/main" id="{6FB42037-8830-44F2-AE74-10D130E20EA9}"/>
               </a:ext>
             </a:extLst>
           </p:cNvPr>
@@ -21859,7 +21857,7 @@
           <p:cNvPr id="41" name="">
             <a:extLst xmlns:a="http://schemas.openxmlformats.org/drawingml/2006/main">
               <a:ext uri="{FF2B5EF4-FFF2-40B4-BE49-F238E27FC236}">
-                <a16:creationId xmlns:a16="http://schemas.microsoft.com/office/drawing/2014/main" id="{949025AA-7ED4-4B25-AF1F-9BF510F7A68C}"/>
+                <a16:creationId xmlns:a16="http://schemas.microsoft.com/office/drawing/2014/main" id="{149FEC7E-4825-4CB5-978C-5765DDF785A5}"/>
               </a:ext>
             </a:extLst>
           </p:cNvPr>
@@ -21894,7 +21892,7 @@
           <p:cNvPr id="42" name="">
             <a:extLst xmlns:a="http://schemas.openxmlformats.org/drawingml/2006/main">
               <a:ext uri="{FF2B5EF4-FFF2-40B4-BE49-F238E27FC236}">
-                <a16:creationId xmlns:a16="http://schemas.microsoft.com/office/drawing/2014/main" id="{F5E0E11B-ED03-41F4-BEA9-F5A4263050CA}"/>
+                <a16:creationId xmlns:a16="http://schemas.microsoft.com/office/drawing/2014/main" id="{20F79C67-89A2-44F0-A445-ECE2F69E27C4}"/>
               </a:ext>
             </a:extLst>
           </p:cNvPr>
@@ -21958,7 +21956,7 @@
           <p:cNvPr id="43" name="">
             <a:extLst xmlns:a="http://schemas.openxmlformats.org/drawingml/2006/main">
               <a:ext uri="{FF2B5EF4-FFF2-40B4-BE49-F238E27FC236}">
-                <a16:creationId xmlns:a16="http://schemas.microsoft.com/office/drawing/2014/main" id="{E1C8D6D0-0A60-457D-875B-0A5422F5A6A5}"/>
+                <a16:creationId xmlns:a16="http://schemas.microsoft.com/office/drawing/2014/main" id="{E7ACC66E-0BCD-4E33-BC89-F8A9F5CC0C0F}"/>
               </a:ext>
             </a:extLst>
           </p:cNvPr>
@@ -22022,7 +22020,7 @@
           <p:cNvPr id="44" name="">
             <a:extLst xmlns:a="http://schemas.openxmlformats.org/drawingml/2006/main">
               <a:ext uri="{FF2B5EF4-FFF2-40B4-BE49-F238E27FC236}">
-                <a16:creationId xmlns:a16="http://schemas.microsoft.com/office/drawing/2014/main" id="{53BC84D3-0078-4D7B-BD1C-00DC8E26B687}"/>
+                <a16:creationId xmlns:a16="http://schemas.microsoft.com/office/drawing/2014/main" id="{16FDDD13-1999-4E58-BC5D-54DEA776A571}"/>
               </a:ext>
             </a:extLst>
           </p:cNvPr>
@@ -22057,7 +22055,7 @@
           <p:cNvPr id="45" name="">
             <a:extLst xmlns:a="http://schemas.openxmlformats.org/drawingml/2006/main">
               <a:ext uri="{FF2B5EF4-FFF2-40B4-BE49-F238E27FC236}">
-                <a16:creationId xmlns:a16="http://schemas.microsoft.com/office/drawing/2014/main" id="{4C5C1939-F24D-42DE-840F-4DC45D244081}"/>
+                <a16:creationId xmlns:a16="http://schemas.microsoft.com/office/drawing/2014/main" id="{1FEDF620-918C-4B56-B82D-4DEB5BE51269}"/>
               </a:ext>
             </a:extLst>
           </p:cNvPr>
@@ -22090,7 +22088,7 @@
           <p:cNvPr id="46" name="">
             <a:extLst xmlns:a="http://schemas.openxmlformats.org/drawingml/2006/main">
               <a:ext uri="{FF2B5EF4-FFF2-40B4-BE49-F238E27FC236}">
-                <a16:creationId xmlns:a16="http://schemas.microsoft.com/office/drawing/2014/main" id="{7C1E8522-8F20-4220-B0F8-268F32D66841}"/>
+                <a16:creationId xmlns:a16="http://schemas.microsoft.com/office/drawing/2014/main" id="{055B2013-4C00-4F78-9501-364052871DC3}"/>
               </a:ext>
             </a:extLst>
           </p:cNvPr>
@@ -22125,7 +22123,7 @@
           <p:cNvPr id="47" name="">
             <a:extLst xmlns:a="http://schemas.openxmlformats.org/drawingml/2006/main">
               <a:ext uri="{FF2B5EF4-FFF2-40B4-BE49-F238E27FC236}">
-                <a16:creationId xmlns:a16="http://schemas.microsoft.com/office/drawing/2014/main" id="{3E92EE00-8A52-4E8D-9559-B83A2EA4CABE}"/>
+                <a16:creationId xmlns:a16="http://schemas.microsoft.com/office/drawing/2014/main" id="{F8067438-F974-4DB3-917E-F7896A8EB7B3}"/>
               </a:ext>
             </a:extLst>
           </p:cNvPr>
@@ -22189,7 +22187,7 @@
           <p:cNvPr id="48" name="">
             <a:extLst xmlns:a="http://schemas.openxmlformats.org/drawingml/2006/main">
               <a:ext uri="{FF2B5EF4-FFF2-40B4-BE49-F238E27FC236}">
-                <a16:creationId xmlns:a16="http://schemas.microsoft.com/office/drawing/2014/main" id="{90457E7B-4DBC-4423-B206-C874E72CBDF4}"/>
+                <a16:creationId xmlns:a16="http://schemas.microsoft.com/office/drawing/2014/main" id="{CF223D65-C2F4-4654-8F6D-777508E9F4EE}"/>
               </a:ext>
             </a:extLst>
           </p:cNvPr>
@@ -22253,7 +22251,7 @@
           <p:cNvPr id="49" name="">
             <a:extLst xmlns:a="http://schemas.openxmlformats.org/drawingml/2006/main">
               <a:ext uri="{FF2B5EF4-FFF2-40B4-BE49-F238E27FC236}">
-                <a16:creationId xmlns:a16="http://schemas.microsoft.com/office/drawing/2014/main" id="{EFC4F9A6-D22F-4713-8DF1-87FEE5440294}"/>
+                <a16:creationId xmlns:a16="http://schemas.microsoft.com/office/drawing/2014/main" id="{0D32047E-0F31-4F58-B082-CD0D5359041C}"/>
               </a:ext>
             </a:extLst>
           </p:cNvPr>
@@ -22286,7 +22284,7 @@
           <p:cNvPr id="50" name="">
             <a:extLst xmlns:a="http://schemas.openxmlformats.org/drawingml/2006/main">
               <a:ext uri="{FF2B5EF4-FFF2-40B4-BE49-F238E27FC236}">
-                <a16:creationId xmlns:a16="http://schemas.microsoft.com/office/drawing/2014/main" id="{61CCA340-CB45-4C48-AFB3-9B536C0C7543}"/>
+                <a16:creationId xmlns:a16="http://schemas.microsoft.com/office/drawing/2014/main" id="{BD53DA8D-2962-4D4D-84F0-D5AA8C228448}"/>
               </a:ext>
             </a:extLst>
           </p:cNvPr>
@@ -22350,7 +22348,7 @@
           <p:cNvPr id="51" name="">
             <a:extLst xmlns:a="http://schemas.openxmlformats.org/drawingml/2006/main">
               <a:ext uri="{FF2B5EF4-FFF2-40B4-BE49-F238E27FC236}">
-                <a16:creationId xmlns:a16="http://schemas.microsoft.com/office/drawing/2014/main" id="{57173AF2-DB4B-4243-BDBD-FEA0DA9EE533}"/>
+                <a16:creationId xmlns:a16="http://schemas.microsoft.com/office/drawing/2014/main" id="{9FFF7EDD-C1D8-4509-BFA0-BFA83E7CAF06}"/>
               </a:ext>
             </a:extLst>
           </p:cNvPr>
@@ -22385,7 +22383,7 @@
           <p:cNvPr id="52" name="">
             <a:extLst xmlns:a="http://schemas.openxmlformats.org/drawingml/2006/main">
               <a:ext uri="{FF2B5EF4-FFF2-40B4-BE49-F238E27FC236}">
-                <a16:creationId xmlns:a16="http://schemas.microsoft.com/office/drawing/2014/main" id="{59C34342-718A-41D2-A4CA-4C7CE240A0DC}"/>
+                <a16:creationId xmlns:a16="http://schemas.microsoft.com/office/drawing/2014/main" id="{FF1C08F9-DAFB-4BED-94A2-593299875F8B}"/>
               </a:ext>
             </a:extLst>
           </p:cNvPr>
@@ -22449,7 +22447,7 @@
           <p:cNvPr id="53" name="">
             <a:extLst xmlns:a="http://schemas.openxmlformats.org/drawingml/2006/main">
               <a:ext uri="{FF2B5EF4-FFF2-40B4-BE49-F238E27FC236}">
-                <a16:creationId xmlns:a16="http://schemas.microsoft.com/office/drawing/2014/main" id="{F88C6B19-01A9-4182-BB13-1E3D7B4D535C}"/>
+                <a16:creationId xmlns:a16="http://schemas.microsoft.com/office/drawing/2014/main" id="{9D56A88A-B3F6-45E6-8148-70F056E7C5EF}"/>
               </a:ext>
             </a:extLst>
           </p:cNvPr>
@@ -22513,7 +22511,7 @@
           <p:cNvPr id="54" name="">
             <a:extLst xmlns:a="http://schemas.openxmlformats.org/drawingml/2006/main">
               <a:ext uri="{FF2B5EF4-FFF2-40B4-BE49-F238E27FC236}">
-                <a16:creationId xmlns:a16="http://schemas.microsoft.com/office/drawing/2014/main" id="{40A0C3A4-4571-424E-99E3-CFBDAD7420A7}"/>
+                <a16:creationId xmlns:a16="http://schemas.microsoft.com/office/drawing/2014/main" id="{225FF996-C09A-45DC-B971-DBB9F2E0530E}"/>
               </a:ext>
             </a:extLst>
           </p:cNvPr>
@@ -22577,7 +22575,7 @@
           <p:cNvPr id="55" name="">
             <a:extLst xmlns:a="http://schemas.openxmlformats.org/drawingml/2006/main">
               <a:ext uri="{FF2B5EF4-FFF2-40B4-BE49-F238E27FC236}">
-                <a16:creationId xmlns:a16="http://schemas.microsoft.com/office/drawing/2014/main" id="{23DD7647-4896-4BD3-B1F3-00CCC5274EE6}"/>
+                <a16:creationId xmlns:a16="http://schemas.microsoft.com/office/drawing/2014/main" id="{B230F314-22D5-40EE-83AA-26B57DFAEEFF}"/>
               </a:ext>
             </a:extLst>
           </p:cNvPr>
@@ -22612,7 +22610,7 @@
           <p:cNvPr id="56" name="">
             <a:extLst xmlns:a="http://schemas.openxmlformats.org/drawingml/2006/main">
               <a:ext uri="{FF2B5EF4-FFF2-40B4-BE49-F238E27FC236}">
-                <a16:creationId xmlns:a16="http://schemas.microsoft.com/office/drawing/2014/main" id="{83EC6D8B-627E-4F03-970D-BEE79C0D978B}"/>
+                <a16:creationId xmlns:a16="http://schemas.microsoft.com/office/drawing/2014/main" id="{FB33168A-1B92-4491-871B-9F1C03EAF829}"/>
               </a:ext>
             </a:extLst>
           </p:cNvPr>
@@ -22647,7 +22645,7 @@
           <p:cNvPr id="57" name="">
             <a:extLst xmlns:a="http://schemas.openxmlformats.org/drawingml/2006/main">
               <a:ext uri="{FF2B5EF4-FFF2-40B4-BE49-F238E27FC236}">
-                <a16:creationId xmlns:a16="http://schemas.microsoft.com/office/drawing/2014/main" id="{7EC6B786-96A0-4AAD-B741-4789612D9936}"/>
+                <a16:creationId xmlns:a16="http://schemas.microsoft.com/office/drawing/2014/main" id="{596E90B8-3321-45A4-9080-715C24D2C68B}"/>
               </a:ext>
             </a:extLst>
           </p:cNvPr>
@@ -22682,7 +22680,7 @@
           <p:cNvPr id="58" name="kicker-03-marker">
             <a:extLst xmlns:a="http://schemas.openxmlformats.org/drawingml/2006/main">
               <a:ext uri="{FF2B5EF4-FFF2-40B4-BE49-F238E27FC236}">
-                <a16:creationId xmlns:a16="http://schemas.microsoft.com/office/drawing/2014/main" id="{44126D61-20DF-42C5-87E3-389E92AB9180}"/>
+                <a16:creationId xmlns:a16="http://schemas.microsoft.com/office/drawing/2014/main" id="{81A58B68-7204-4EAE-A023-76B58F6A167D}"/>
               </a:ext>
             </a:extLst>
           </p:cNvPr>
@@ -22717,7 +22715,7 @@
           <p:cNvPr id="59" name="kicker-03-label">
             <a:extLst xmlns:a="http://schemas.openxmlformats.org/drawingml/2006/main">
               <a:ext uri="{FF2B5EF4-FFF2-40B4-BE49-F238E27FC236}">
-                <a16:creationId xmlns:a16="http://schemas.microsoft.com/office/drawing/2014/main" id="{1AA424C3-E3D7-4CA7-8D9C-3E29A0C2F298}"/>
+                <a16:creationId xmlns:a16="http://schemas.microsoft.com/office/drawing/2014/main" id="{21CE8617-F06F-49E7-BAB2-DE22A01DEF70}"/>
               </a:ext>
             </a:extLst>
           </p:cNvPr>
@@ -22781,7 +22779,7 @@
           <p:cNvPr id="60" name="">
             <a:extLst xmlns:a="http://schemas.openxmlformats.org/drawingml/2006/main">
               <a:ext uri="{FF2B5EF4-FFF2-40B4-BE49-F238E27FC236}">
-                <a16:creationId xmlns:a16="http://schemas.microsoft.com/office/drawing/2014/main" id="{B9A3A70D-F80D-4037-A1B3-B23061828D53}"/>
+                <a16:creationId xmlns:a16="http://schemas.microsoft.com/office/drawing/2014/main" id="{7A4246C7-593A-468E-A1A7-902AE063581A}"/>
               </a:ext>
             </a:extLst>
           </p:cNvPr>
@@ -22845,7 +22843,7 @@
           <p:cNvPr id="61" name="">
             <a:extLst xmlns:a="http://schemas.openxmlformats.org/drawingml/2006/main">
               <a:ext uri="{FF2B5EF4-FFF2-40B4-BE49-F238E27FC236}">
-                <a16:creationId xmlns:a16="http://schemas.microsoft.com/office/drawing/2014/main" id="{435C5023-274B-443F-829E-656894343CBA}"/>
+                <a16:creationId xmlns:a16="http://schemas.microsoft.com/office/drawing/2014/main" id="{9D55C379-E29A-455B-A46D-B18257ECF120}"/>
               </a:ext>
             </a:extLst>
           </p:cNvPr>
@@ -22909,7 +22907,7 @@
           <p:cNvPr id="62" name="">
             <a:extLst xmlns:a="http://schemas.openxmlformats.org/drawingml/2006/main">
               <a:ext uri="{FF2B5EF4-FFF2-40B4-BE49-F238E27FC236}">
-                <a16:creationId xmlns:a16="http://schemas.microsoft.com/office/drawing/2014/main" id="{45406274-68F2-488B-9E3D-DC63B6EE3BE1}"/>
+                <a16:creationId xmlns:a16="http://schemas.microsoft.com/office/drawing/2014/main" id="{3047E70E-5990-4A4B-BE2E-70CD330EA60C}"/>
               </a:ext>
             </a:extLst>
           </p:cNvPr>
@@ -22944,7 +22942,7 @@
           <p:cNvPr id="63" name="">
             <a:extLst xmlns:a="http://schemas.openxmlformats.org/drawingml/2006/main">
               <a:ext uri="{FF2B5EF4-FFF2-40B4-BE49-F238E27FC236}">
-                <a16:creationId xmlns:a16="http://schemas.microsoft.com/office/drawing/2014/main" id="{BBED8BC7-A67D-40D6-A2F0-9D4FC118C12D}"/>
+                <a16:creationId xmlns:a16="http://schemas.microsoft.com/office/drawing/2014/main" id="{FFFAD366-AB26-4A0C-BBCF-C7420589D244}"/>
               </a:ext>
             </a:extLst>
           </p:cNvPr>
@@ -22979,7 +22977,7 @@
           <p:cNvPr id="64" name="">
             <a:extLst xmlns:a="http://schemas.openxmlformats.org/drawingml/2006/main">
               <a:ext uri="{FF2B5EF4-FFF2-40B4-BE49-F238E27FC236}">
-                <a16:creationId xmlns:a16="http://schemas.microsoft.com/office/drawing/2014/main" id="{EEC96073-DDAB-4E7E-8BB4-CDBDC85F4D44}"/>
+                <a16:creationId xmlns:a16="http://schemas.microsoft.com/office/drawing/2014/main" id="{EEA71DAB-7742-462F-A1DF-5CCF22FAC6A1}"/>
               </a:ext>
             </a:extLst>
           </p:cNvPr>
@@ -23014,7 +23012,7 @@
           <p:cNvPr id="65" name="">
             <a:extLst xmlns:a="http://schemas.openxmlformats.org/drawingml/2006/main">
               <a:ext uri="{FF2B5EF4-FFF2-40B4-BE49-F238E27FC236}">
-                <a16:creationId xmlns:a16="http://schemas.microsoft.com/office/drawing/2014/main" id="{DCFE0528-3B73-4C76-9E04-ADAB70FB70AD}"/>
+                <a16:creationId xmlns:a16="http://schemas.microsoft.com/office/drawing/2014/main" id="{12651F77-3781-462D-9CD1-A1A36542F7CB}"/>
               </a:ext>
             </a:extLst>
           </p:cNvPr>
@@ -23049,7 +23047,7 @@
           <p:cNvPr id="66" name="">
             <a:extLst xmlns:a="http://schemas.openxmlformats.org/drawingml/2006/main">
               <a:ext uri="{FF2B5EF4-FFF2-40B4-BE49-F238E27FC236}">
-                <a16:creationId xmlns:a16="http://schemas.microsoft.com/office/drawing/2014/main" id="{21389B24-38C1-4AD3-8192-F6C7FD24DEE0}"/>
+                <a16:creationId xmlns:a16="http://schemas.microsoft.com/office/drawing/2014/main" id="{FD3385B0-926D-4B66-A0A8-FD711142AB85}"/>
               </a:ext>
             </a:extLst>
           </p:cNvPr>
@@ -23113,7 +23111,7 @@
           <p:cNvPr id="67" name="">
             <a:extLst xmlns:a="http://schemas.openxmlformats.org/drawingml/2006/main">
               <a:ext uri="{FF2B5EF4-FFF2-40B4-BE49-F238E27FC236}">
-                <a16:creationId xmlns:a16="http://schemas.microsoft.com/office/drawing/2014/main" id="{A373C241-0C4F-42C9-991E-2114964B8DB8}"/>
+                <a16:creationId xmlns:a16="http://schemas.microsoft.com/office/drawing/2014/main" id="{CC2175E3-1558-4F27-B6E8-36268C878C9F}"/>
               </a:ext>
             </a:extLst>
           </p:cNvPr>
@@ -23177,7 +23175,7 @@
           <p:cNvPr id="68" name="">
             <a:extLst xmlns:a="http://schemas.openxmlformats.org/drawingml/2006/main">
               <a:ext uri="{FF2B5EF4-FFF2-40B4-BE49-F238E27FC236}">
-                <a16:creationId xmlns:a16="http://schemas.microsoft.com/office/drawing/2014/main" id="{A11AD1A5-03EF-4BAB-B51B-2D43A9C27E40}"/>
+                <a16:creationId xmlns:a16="http://schemas.microsoft.com/office/drawing/2014/main" id="{8A875BEB-53ED-4027-A4FA-AF6AD3C44A67}"/>
               </a:ext>
             </a:extLst>
           </p:cNvPr>
@@ -23239,7 +23237,7 @@
     </p:spTree>
     <p:extLst>
       <p:ext uri="{BB962C8B-B14F-4D97-AF65-F5344CB8AC3E}">
-        <p14:creationId xmlns:p14="http://schemas.microsoft.com/office/powerpoint/2010/main" val="1357688853"/>
+        <p14:creationId xmlns:p14="http://schemas.microsoft.com/office/powerpoint/2010/main" val="735835715"/>
       </p:ext>
     </p:extLst>
   </p:cSld>
@@ -23263,7 +23261,7 @@
           <p:cNvPr id="1" name="">
             <a:extLst xmlns:a="http://schemas.openxmlformats.org/drawingml/2006/main">
               <a:ext uri="{FF2B5EF4-FFF2-40B4-BE49-F238E27FC236}">
-                <a16:creationId xmlns:a16="http://schemas.microsoft.com/office/drawing/2014/main" id="{086DF4A4-09F1-44D2-B6B5-5CA159EE6A11}"/>
+                <a16:creationId xmlns:a16="http://schemas.microsoft.com/office/drawing/2014/main" id="{1682BF46-0A89-489E-AEC8-D046FDD5388B}"/>
               </a:ext>
             </a:extLst>
           </p:cNvPr>
@@ -23298,7 +23296,7 @@
           <p:cNvPr id="2" name="">
             <a:extLst xmlns:a="http://schemas.openxmlformats.org/drawingml/2006/main">
               <a:ext uri="{FF2B5EF4-FFF2-40B4-BE49-F238E27FC236}">
-                <a16:creationId xmlns:a16="http://schemas.microsoft.com/office/drawing/2014/main" id="{DCEDF6F0-3C09-426A-9079-697515FE8F1A}"/>
+                <a16:creationId xmlns:a16="http://schemas.microsoft.com/office/drawing/2014/main" id="{EC49B1DD-5BAF-4DFF-BDE1-9F41F2A4B3A9}"/>
               </a:ext>
             </a:extLst>
           </p:cNvPr>
@@ -23333,7 +23331,7 @@
           <p:cNvPr id="3" name="">
             <a:extLst xmlns:a="http://schemas.openxmlformats.org/drawingml/2006/main">
               <a:ext uri="{FF2B5EF4-FFF2-40B4-BE49-F238E27FC236}">
-                <a16:creationId xmlns:a16="http://schemas.microsoft.com/office/drawing/2014/main" id="{43542FC0-DB0C-46E3-9D5C-1BFE2D1BA78A}"/>
+                <a16:creationId xmlns:a16="http://schemas.microsoft.com/office/drawing/2014/main" id="{462BD413-229C-4F42-A52E-521884ABF3C5}"/>
               </a:ext>
             </a:extLst>
           </p:cNvPr>
@@ -23368,7 +23366,7 @@
           <p:cNvPr id="4" name="kicker-03-marker">
             <a:extLst xmlns:a="http://schemas.openxmlformats.org/drawingml/2006/main">
               <a:ext uri="{FF2B5EF4-FFF2-40B4-BE49-F238E27FC236}">
-                <a16:creationId xmlns:a16="http://schemas.microsoft.com/office/drawing/2014/main" id="{94D55308-1965-47AA-B0AC-FE91B1978D94}"/>
+                <a16:creationId xmlns:a16="http://schemas.microsoft.com/office/drawing/2014/main" id="{40B4D35E-BF38-44AF-8015-784E97F01339}"/>
               </a:ext>
             </a:extLst>
           </p:cNvPr>
@@ -23403,7 +23401,7 @@
           <p:cNvPr id="5" name="kicker-03-label">
             <a:extLst xmlns:a="http://schemas.openxmlformats.org/drawingml/2006/main">
               <a:ext uri="{FF2B5EF4-FFF2-40B4-BE49-F238E27FC236}">
-                <a16:creationId xmlns:a16="http://schemas.microsoft.com/office/drawing/2014/main" id="{FDB447F4-0238-4826-9D29-90E43191A44E}"/>
+                <a16:creationId xmlns:a16="http://schemas.microsoft.com/office/drawing/2014/main" id="{113B8D95-7D28-447E-8817-C57AE8136593}"/>
               </a:ext>
             </a:extLst>
           </p:cNvPr>
@@ -23467,7 +23465,7 @@
           <p:cNvPr id="6" name="">
             <a:extLst xmlns:a="http://schemas.openxmlformats.org/drawingml/2006/main">
               <a:ext uri="{FF2B5EF4-FFF2-40B4-BE49-F238E27FC236}">
-                <a16:creationId xmlns:a16="http://schemas.microsoft.com/office/drawing/2014/main" id="{B9C301B0-47E7-418E-93DF-1F14F018F309}"/>
+                <a16:creationId xmlns:a16="http://schemas.microsoft.com/office/drawing/2014/main" id="{4C58BCA6-D68C-4EE6-953F-1B47C60CBBA3}"/>
               </a:ext>
             </a:extLst>
           </p:cNvPr>
@@ -23531,7 +23529,7 @@
           <p:cNvPr id="7" name="">
             <a:extLst xmlns:a="http://schemas.openxmlformats.org/drawingml/2006/main">
               <a:ext uri="{FF2B5EF4-FFF2-40B4-BE49-F238E27FC236}">
-                <a16:creationId xmlns:a16="http://schemas.microsoft.com/office/drawing/2014/main" id="{2FBC4256-B331-416F-B17B-260E2FBA64F4}"/>
+                <a16:creationId xmlns:a16="http://schemas.microsoft.com/office/drawing/2014/main" id="{F0DE13DA-7832-45B1-A103-AD1A24E552AC}"/>
               </a:ext>
             </a:extLst>
           </p:cNvPr>
@@ -23595,7 +23593,7 @@
           <p:cNvPr id="8" name="">
             <a:extLst xmlns:a="http://schemas.openxmlformats.org/drawingml/2006/main">
               <a:ext uri="{FF2B5EF4-FFF2-40B4-BE49-F238E27FC236}">
-                <a16:creationId xmlns:a16="http://schemas.microsoft.com/office/drawing/2014/main" id="{35360B36-B9DB-4191-873C-823B36C60435}"/>
+                <a16:creationId xmlns:a16="http://schemas.microsoft.com/office/drawing/2014/main" id="{A26A04ED-6099-4AA2-BE61-0FFF5446796D}"/>
               </a:ext>
             </a:extLst>
           </p:cNvPr>
@@ -23630,7 +23628,7 @@
           <p:cNvPr id="9" name="">
             <a:extLst xmlns:a="http://schemas.openxmlformats.org/drawingml/2006/main">
               <a:ext uri="{FF2B5EF4-FFF2-40B4-BE49-F238E27FC236}">
-                <a16:creationId xmlns:a16="http://schemas.microsoft.com/office/drawing/2014/main" id="{6970FE71-66F7-4CEC-AF70-3FA3EED275C1}"/>
+                <a16:creationId xmlns:a16="http://schemas.microsoft.com/office/drawing/2014/main" id="{08D9942D-E435-4166-99D3-AA16CEF38625}"/>
               </a:ext>
             </a:extLst>
           </p:cNvPr>
@@ -23694,7 +23692,7 @@
           <p:cNvPr id="10" name="">
             <a:extLst xmlns:a="http://schemas.openxmlformats.org/drawingml/2006/main">
               <a:ext uri="{FF2B5EF4-FFF2-40B4-BE49-F238E27FC236}">
-                <a16:creationId xmlns:a16="http://schemas.microsoft.com/office/drawing/2014/main" id="{A982AD30-1718-49F1-AFF0-DF0CF51DFF87}"/>
+                <a16:creationId xmlns:a16="http://schemas.microsoft.com/office/drawing/2014/main" id="{DC90F3E2-7873-49E2-9B95-A0DDD7515193}"/>
               </a:ext>
             </a:extLst>
           </p:cNvPr>
@@ -23758,7 +23756,7 @@
           <p:cNvPr id="11" name="">
             <a:extLst xmlns:a="http://schemas.openxmlformats.org/drawingml/2006/main">
               <a:ext uri="{FF2B5EF4-FFF2-40B4-BE49-F238E27FC236}">
-                <a16:creationId xmlns:a16="http://schemas.microsoft.com/office/drawing/2014/main" id="{65E1D47E-86B6-48DE-84BA-BEB19D307E1F}"/>
+                <a16:creationId xmlns:a16="http://schemas.microsoft.com/office/drawing/2014/main" id="{4BDCBB51-314B-4F24-BDBB-7732F3379B36}"/>
               </a:ext>
             </a:extLst>
           </p:cNvPr>
@@ -23822,7 +23820,7 @@
           <p:cNvPr id="12" name="">
             <a:extLst xmlns:a="http://schemas.openxmlformats.org/drawingml/2006/main">
               <a:ext uri="{FF2B5EF4-FFF2-40B4-BE49-F238E27FC236}">
-                <a16:creationId xmlns:a16="http://schemas.microsoft.com/office/drawing/2014/main" id="{379BB4CD-1686-4FAF-92AB-3FBB210694E1}"/>
+                <a16:creationId xmlns:a16="http://schemas.microsoft.com/office/drawing/2014/main" id="{200AB9D0-553E-4A0F-A450-477BF46B8145}"/>
               </a:ext>
             </a:extLst>
           </p:cNvPr>
@@ -23855,7 +23853,7 @@
           <p:cNvPr id="13" name="">
             <a:extLst xmlns:a="http://schemas.openxmlformats.org/drawingml/2006/main">
               <a:ext uri="{FF2B5EF4-FFF2-40B4-BE49-F238E27FC236}">
-                <a16:creationId xmlns:a16="http://schemas.microsoft.com/office/drawing/2014/main" id="{5FF0147B-AA63-4684-876D-53B901966C99}"/>
+                <a16:creationId xmlns:a16="http://schemas.microsoft.com/office/drawing/2014/main" id="{2F45EC1E-2D3E-4C7B-91B1-2AFB394C26BD}"/>
               </a:ext>
             </a:extLst>
           </p:cNvPr>
@@ -23890,7 +23888,7 @@
           <p:cNvPr id="14" name="">
             <a:extLst xmlns:a="http://schemas.openxmlformats.org/drawingml/2006/main">
               <a:ext uri="{FF2B5EF4-FFF2-40B4-BE49-F238E27FC236}">
-                <a16:creationId xmlns:a16="http://schemas.microsoft.com/office/drawing/2014/main" id="{F076A3B0-5625-42E9-9B97-D405C74A1B3F}"/>
+                <a16:creationId xmlns:a16="http://schemas.microsoft.com/office/drawing/2014/main" id="{49FF32B7-80C9-45CC-94B1-A62809481878}"/>
               </a:ext>
             </a:extLst>
           </p:cNvPr>
@@ -23954,7 +23952,7 @@
           <p:cNvPr id="15" name="">
             <a:extLst xmlns:a="http://schemas.openxmlformats.org/drawingml/2006/main">
               <a:ext uri="{FF2B5EF4-FFF2-40B4-BE49-F238E27FC236}">
-                <a16:creationId xmlns:a16="http://schemas.microsoft.com/office/drawing/2014/main" id="{D5F61A3A-354F-402B-8652-FA94A12E7941}"/>
+                <a16:creationId xmlns:a16="http://schemas.microsoft.com/office/drawing/2014/main" id="{B975E82F-5A4D-441F-91F6-251357F12B33}"/>
               </a:ext>
             </a:extLst>
           </p:cNvPr>
@@ -24018,7 +24016,7 @@
           <p:cNvPr id="16" name="">
             <a:extLst xmlns:a="http://schemas.openxmlformats.org/drawingml/2006/main">
               <a:ext uri="{FF2B5EF4-FFF2-40B4-BE49-F238E27FC236}">
-                <a16:creationId xmlns:a16="http://schemas.microsoft.com/office/drawing/2014/main" id="{34CD7690-37CE-4D85-8DDF-4689FA6FFD33}"/>
+                <a16:creationId xmlns:a16="http://schemas.microsoft.com/office/drawing/2014/main" id="{72166D3E-E246-4356-A2C4-5C17526DF50E}"/>
               </a:ext>
             </a:extLst>
           </p:cNvPr>
@@ -24051,7 +24049,7 @@
           <p:cNvPr id="17" name="">
             <a:extLst xmlns:a="http://schemas.openxmlformats.org/drawingml/2006/main">
               <a:ext uri="{FF2B5EF4-FFF2-40B4-BE49-F238E27FC236}">
-                <a16:creationId xmlns:a16="http://schemas.microsoft.com/office/drawing/2014/main" id="{23987D5A-6409-4E74-969D-EF0F7A5CC612}"/>
+                <a16:creationId xmlns:a16="http://schemas.microsoft.com/office/drawing/2014/main" id="{CFDF30C7-5818-4057-A1B0-2AA06548F755}"/>
               </a:ext>
             </a:extLst>
           </p:cNvPr>
@@ -24086,7 +24084,7 @@
           <p:cNvPr id="18" name="">
             <a:extLst xmlns:a="http://schemas.openxmlformats.org/drawingml/2006/main">
               <a:ext uri="{FF2B5EF4-FFF2-40B4-BE49-F238E27FC236}">
-                <a16:creationId xmlns:a16="http://schemas.microsoft.com/office/drawing/2014/main" id="{82A8CCBB-965A-4D5B-B291-7F9D220BE0C6}"/>
+                <a16:creationId xmlns:a16="http://schemas.microsoft.com/office/drawing/2014/main" id="{F5221F3E-402D-429E-8391-4971FC1B6C9C}"/>
               </a:ext>
             </a:extLst>
           </p:cNvPr>
@@ -24150,7 +24148,7 @@
           <p:cNvPr id="19" name="">
             <a:extLst xmlns:a="http://schemas.openxmlformats.org/drawingml/2006/main">
               <a:ext uri="{FF2B5EF4-FFF2-40B4-BE49-F238E27FC236}">
-                <a16:creationId xmlns:a16="http://schemas.microsoft.com/office/drawing/2014/main" id="{839A1BB5-F662-46C2-8E80-A882A05C299E}"/>
+                <a16:creationId xmlns:a16="http://schemas.microsoft.com/office/drawing/2014/main" id="{9991F6C9-FE4D-4BFA-AE5A-B852BD424FD9}"/>
               </a:ext>
             </a:extLst>
           </p:cNvPr>
@@ -24214,7 +24212,7 @@
           <p:cNvPr id="20" name="">
             <a:extLst xmlns:a="http://schemas.openxmlformats.org/drawingml/2006/main">
               <a:ext uri="{FF2B5EF4-FFF2-40B4-BE49-F238E27FC236}">
-                <a16:creationId xmlns:a16="http://schemas.microsoft.com/office/drawing/2014/main" id="{4ACA4C9C-3017-4E94-A98F-0699D88D67DC}"/>
+                <a16:creationId xmlns:a16="http://schemas.microsoft.com/office/drawing/2014/main" id="{A7A7D27A-47C5-4675-A9A7-5F5BAC10EF78}"/>
               </a:ext>
             </a:extLst>
           </p:cNvPr>
@@ -24247,7 +24245,7 @@
           <p:cNvPr id="21" name="">
             <a:extLst xmlns:a="http://schemas.openxmlformats.org/drawingml/2006/main">
               <a:ext uri="{FF2B5EF4-FFF2-40B4-BE49-F238E27FC236}">
-                <a16:creationId xmlns:a16="http://schemas.microsoft.com/office/drawing/2014/main" id="{B3E07A41-1D45-4DA3-A980-E4CB10D592C5}"/>
+                <a16:creationId xmlns:a16="http://schemas.microsoft.com/office/drawing/2014/main" id="{DE1123D2-DFAF-48CA-B36C-50749B36FA9C}"/>
               </a:ext>
             </a:extLst>
           </p:cNvPr>
@@ -24282,7 +24280,7 @@
           <p:cNvPr id="22" name="">
             <a:extLst xmlns:a="http://schemas.openxmlformats.org/drawingml/2006/main">
               <a:ext uri="{FF2B5EF4-FFF2-40B4-BE49-F238E27FC236}">
-                <a16:creationId xmlns:a16="http://schemas.microsoft.com/office/drawing/2014/main" id="{FBCA1B36-5FCE-4EA4-B833-7F6EACAAC304}"/>
+                <a16:creationId xmlns:a16="http://schemas.microsoft.com/office/drawing/2014/main" id="{8AA63E20-D982-47CA-B812-16FAFB47F8A7}"/>
               </a:ext>
             </a:extLst>
           </p:cNvPr>
@@ -24346,7 +24344,7 @@
           <p:cNvPr id="23" name="">
             <a:extLst xmlns:a="http://schemas.openxmlformats.org/drawingml/2006/main">
               <a:ext uri="{FF2B5EF4-FFF2-40B4-BE49-F238E27FC236}">
-                <a16:creationId xmlns:a16="http://schemas.microsoft.com/office/drawing/2014/main" id="{720C39CB-A0FA-446C-ABA3-2A9D8C34B29B}"/>
+                <a16:creationId xmlns:a16="http://schemas.microsoft.com/office/drawing/2014/main" id="{A2F4A2E3-6C61-4EAF-B793-35A3EB11A0B9}"/>
               </a:ext>
             </a:extLst>
           </p:cNvPr>
@@ -24410,7 +24408,7 @@
           <p:cNvPr id="24" name="">
             <a:extLst xmlns:a="http://schemas.openxmlformats.org/drawingml/2006/main">
               <a:ext uri="{FF2B5EF4-FFF2-40B4-BE49-F238E27FC236}">
-                <a16:creationId xmlns:a16="http://schemas.microsoft.com/office/drawing/2014/main" id="{663FF847-6821-4A69-A938-4436F60B2A1B}"/>
+                <a16:creationId xmlns:a16="http://schemas.microsoft.com/office/drawing/2014/main" id="{25AB918B-C119-4B9E-952E-E25B9817D247}"/>
               </a:ext>
             </a:extLst>
           </p:cNvPr>
@@ -24443,7 +24441,7 @@
           <p:cNvPr id="25" name="">
             <a:extLst xmlns:a="http://schemas.openxmlformats.org/drawingml/2006/main">
               <a:ext uri="{FF2B5EF4-FFF2-40B4-BE49-F238E27FC236}">
-                <a16:creationId xmlns:a16="http://schemas.microsoft.com/office/drawing/2014/main" id="{270FB065-22A4-4ADB-A109-432DD82DE448}"/>
+                <a16:creationId xmlns:a16="http://schemas.microsoft.com/office/drawing/2014/main" id="{4794E659-09B4-4343-9D9C-E009470A2058}"/>
               </a:ext>
             </a:extLst>
           </p:cNvPr>
@@ -24478,7 +24476,7 @@
           <p:cNvPr id="26" name="">
             <a:extLst xmlns:a="http://schemas.openxmlformats.org/drawingml/2006/main">
               <a:ext uri="{FF2B5EF4-FFF2-40B4-BE49-F238E27FC236}">
-                <a16:creationId xmlns:a16="http://schemas.microsoft.com/office/drawing/2014/main" id="{CFA23E17-9C0D-4ABC-8595-FCF55996EE40}"/>
+                <a16:creationId xmlns:a16="http://schemas.microsoft.com/office/drawing/2014/main" id="{8DDAE015-82F4-463D-92FA-B0388318BD43}"/>
               </a:ext>
             </a:extLst>
           </p:cNvPr>
@@ -24542,7 +24540,7 @@
           <p:cNvPr id="27" name="">
             <a:extLst xmlns:a="http://schemas.openxmlformats.org/drawingml/2006/main">
               <a:ext uri="{FF2B5EF4-FFF2-40B4-BE49-F238E27FC236}">
-                <a16:creationId xmlns:a16="http://schemas.microsoft.com/office/drawing/2014/main" id="{675CBB35-8B2B-4EF8-B58B-073683E1007A}"/>
+                <a16:creationId xmlns:a16="http://schemas.microsoft.com/office/drawing/2014/main" id="{B1CA9539-2727-424C-A2A9-A1D03336BC9E}"/>
               </a:ext>
             </a:extLst>
           </p:cNvPr>
@@ -24606,7 +24604,7 @@
           <p:cNvPr id="28" name="">
             <a:extLst xmlns:a="http://schemas.openxmlformats.org/drawingml/2006/main">
               <a:ext uri="{FF2B5EF4-FFF2-40B4-BE49-F238E27FC236}">
-                <a16:creationId xmlns:a16="http://schemas.microsoft.com/office/drawing/2014/main" id="{95660D3E-1955-4FBA-85EE-50AACEADBC2A}"/>
+                <a16:creationId xmlns:a16="http://schemas.microsoft.com/office/drawing/2014/main" id="{0A1956B8-33CC-4C53-8D17-B22ACCBB1F96}"/>
               </a:ext>
             </a:extLst>
           </p:cNvPr>
@@ -24639,7 +24637,7 @@
           <p:cNvPr id="29" name="">
             <a:extLst xmlns:a="http://schemas.openxmlformats.org/drawingml/2006/main">
               <a:ext uri="{FF2B5EF4-FFF2-40B4-BE49-F238E27FC236}">
-                <a16:creationId xmlns:a16="http://schemas.microsoft.com/office/drawing/2014/main" id="{E11A8B14-BCE3-42AC-BECB-F466B73B7A95}"/>
+                <a16:creationId xmlns:a16="http://schemas.microsoft.com/office/drawing/2014/main" id="{D378E5B4-128C-4926-B3CD-4CC8C2FC0034}"/>
               </a:ext>
             </a:extLst>
           </p:cNvPr>
@@ -24703,7 +24701,7 @@
           <p:cNvPr id="30" name="">
             <a:extLst xmlns:a="http://schemas.openxmlformats.org/drawingml/2006/main">
               <a:ext uri="{FF2B5EF4-FFF2-40B4-BE49-F238E27FC236}">
-                <a16:creationId xmlns:a16="http://schemas.microsoft.com/office/drawing/2014/main" id="{C53684D1-10D9-4448-8913-D1B7895B6E72}"/>
+                <a16:creationId xmlns:a16="http://schemas.microsoft.com/office/drawing/2014/main" id="{9431B545-83AB-4BA0-A25E-C9EDF4A9A7FA}"/>
               </a:ext>
             </a:extLst>
           </p:cNvPr>
@@ -24767,7 +24765,7 @@
           <p:cNvPr id="31" name="">
             <a:extLst xmlns:a="http://schemas.openxmlformats.org/drawingml/2006/main">
               <a:ext uri="{FF2B5EF4-FFF2-40B4-BE49-F238E27FC236}">
-                <a16:creationId xmlns:a16="http://schemas.microsoft.com/office/drawing/2014/main" id="{260D2399-A99E-4CA1-A502-CBA131BE886B}"/>
+                <a16:creationId xmlns:a16="http://schemas.microsoft.com/office/drawing/2014/main" id="{FA487D52-9CF0-48F9-AB42-CE557E431E23}"/>
               </a:ext>
             </a:extLst>
           </p:cNvPr>
@@ -24802,7 +24800,7 @@
           <p:cNvPr id="32" name="">
             <a:extLst xmlns:a="http://schemas.openxmlformats.org/drawingml/2006/main">
               <a:ext uri="{FF2B5EF4-FFF2-40B4-BE49-F238E27FC236}">
-                <a16:creationId xmlns:a16="http://schemas.microsoft.com/office/drawing/2014/main" id="{1FD1E0B4-1329-40AE-ADCC-17C46D1E580F}"/>
+                <a16:creationId xmlns:a16="http://schemas.microsoft.com/office/drawing/2014/main" id="{A5B90BEF-2355-4034-933F-8B8B67ED649C}"/>
               </a:ext>
             </a:extLst>
           </p:cNvPr>
@@ -24866,7 +24864,7 @@
           <p:cNvPr id="33" name="">
             <a:extLst xmlns:a="http://schemas.openxmlformats.org/drawingml/2006/main">
               <a:ext uri="{FF2B5EF4-FFF2-40B4-BE49-F238E27FC236}">
-                <a16:creationId xmlns:a16="http://schemas.microsoft.com/office/drawing/2014/main" id="{C305C7C0-D8FB-4497-AF3B-7F2DFF4362F2}"/>
+                <a16:creationId xmlns:a16="http://schemas.microsoft.com/office/drawing/2014/main" id="{CE3C47B7-D0DB-4F17-8A90-732DF694BAAC}"/>
               </a:ext>
             </a:extLst>
           </p:cNvPr>
@@ -24930,7 +24928,7 @@
           <p:cNvPr id="34" name="">
             <a:extLst xmlns:a="http://schemas.openxmlformats.org/drawingml/2006/main">
               <a:ext uri="{FF2B5EF4-FFF2-40B4-BE49-F238E27FC236}">
-                <a16:creationId xmlns:a16="http://schemas.microsoft.com/office/drawing/2014/main" id="{009A43EE-63AF-4A94-A48F-A412FAA78BCD}"/>
+                <a16:creationId xmlns:a16="http://schemas.microsoft.com/office/drawing/2014/main" id="{94273711-7727-4E21-9E88-ECFCEF72D18D}"/>
               </a:ext>
             </a:extLst>
           </p:cNvPr>
@@ -24992,7 +24990,7 @@
     </p:spTree>
     <p:extLst>
       <p:ext uri="{BB962C8B-B14F-4D97-AF65-F5344CB8AC3E}">
-        <p14:creationId xmlns:p14="http://schemas.microsoft.com/office/powerpoint/2010/main" val="1115604872"/>
+        <p14:creationId xmlns:p14="http://schemas.microsoft.com/office/powerpoint/2010/main" val="861869378"/>
       </p:ext>
     </p:extLst>
   </p:cSld>
@@ -25016,7 +25014,7 @@
           <p:cNvPr id="1" name="">
             <a:extLst xmlns:a="http://schemas.openxmlformats.org/drawingml/2006/main">
               <a:ext uri="{FF2B5EF4-FFF2-40B4-BE49-F238E27FC236}">
-                <a16:creationId xmlns:a16="http://schemas.microsoft.com/office/drawing/2014/main" id="{DA9C70F7-1424-4CB6-A056-2CB183AA5006}"/>
+                <a16:creationId xmlns:a16="http://schemas.microsoft.com/office/drawing/2014/main" id="{8757287D-681E-4338-936F-3AF2A1D46F0F}"/>
               </a:ext>
             </a:extLst>
           </p:cNvPr>
@@ -25051,7 +25049,7 @@
           <p:cNvPr id="2" name="">
             <a:extLst xmlns:a="http://schemas.openxmlformats.org/drawingml/2006/main">
               <a:ext uri="{FF2B5EF4-FFF2-40B4-BE49-F238E27FC236}">
-                <a16:creationId xmlns:a16="http://schemas.microsoft.com/office/drawing/2014/main" id="{F81783D3-5DBB-4C9D-931B-D7F4CD75FA3F}"/>
+                <a16:creationId xmlns:a16="http://schemas.microsoft.com/office/drawing/2014/main" id="{8A5C5AD8-C1C9-4AF6-A2EF-7AFA319897E0}"/>
               </a:ext>
             </a:extLst>
           </p:cNvPr>
@@ -25086,7 +25084,7 @@
           <p:cNvPr id="3" name="">
             <a:extLst xmlns:a="http://schemas.openxmlformats.org/drawingml/2006/main">
               <a:ext uri="{FF2B5EF4-FFF2-40B4-BE49-F238E27FC236}">
-                <a16:creationId xmlns:a16="http://schemas.microsoft.com/office/drawing/2014/main" id="{F0738F5E-192B-4EBD-89CE-D0A4586280EA}"/>
+                <a16:creationId xmlns:a16="http://schemas.microsoft.com/office/drawing/2014/main" id="{98CF9348-2D5E-4846-AA84-8F04B0DC9C3F}"/>
               </a:ext>
             </a:extLst>
           </p:cNvPr>
@@ -25121,7 +25119,7 @@
           <p:cNvPr id="4" name="kicker-03-marker">
             <a:extLst xmlns:a="http://schemas.openxmlformats.org/drawingml/2006/main">
               <a:ext uri="{FF2B5EF4-FFF2-40B4-BE49-F238E27FC236}">
-                <a16:creationId xmlns:a16="http://schemas.microsoft.com/office/drawing/2014/main" id="{57048AF8-4559-4741-80DA-77119039E735}"/>
+                <a16:creationId xmlns:a16="http://schemas.microsoft.com/office/drawing/2014/main" id="{5848D0B8-2510-427C-BBC1-E40049464A6E}"/>
               </a:ext>
             </a:extLst>
           </p:cNvPr>
@@ -25156,7 +25154,7 @@
           <p:cNvPr id="5" name="kicker-03-label">
             <a:extLst xmlns:a="http://schemas.openxmlformats.org/drawingml/2006/main">
               <a:ext uri="{FF2B5EF4-FFF2-40B4-BE49-F238E27FC236}">
-                <a16:creationId xmlns:a16="http://schemas.microsoft.com/office/drawing/2014/main" id="{838B79A2-ED56-42B6-BF70-06FAA1056893}"/>
+                <a16:creationId xmlns:a16="http://schemas.microsoft.com/office/drawing/2014/main" id="{B7DE64D2-FD07-4E1B-BC24-939D01609C98}"/>
               </a:ext>
             </a:extLst>
           </p:cNvPr>
@@ -25220,7 +25218,7 @@
           <p:cNvPr id="6" name="">
             <a:extLst xmlns:a="http://schemas.openxmlformats.org/drawingml/2006/main">
               <a:ext uri="{FF2B5EF4-FFF2-40B4-BE49-F238E27FC236}">
-                <a16:creationId xmlns:a16="http://schemas.microsoft.com/office/drawing/2014/main" id="{70B24AEC-C3EF-43C3-9CAE-1B48EEDDF43C}"/>
+                <a16:creationId xmlns:a16="http://schemas.microsoft.com/office/drawing/2014/main" id="{F4C5C090-94E6-4F60-8B84-308D50864339}"/>
               </a:ext>
             </a:extLst>
           </p:cNvPr>
@@ -25284,7 +25282,7 @@
           <p:cNvPr id="7" name="">
             <a:extLst xmlns:a="http://schemas.openxmlformats.org/drawingml/2006/main">
               <a:ext uri="{FF2B5EF4-FFF2-40B4-BE49-F238E27FC236}">
-                <a16:creationId xmlns:a16="http://schemas.microsoft.com/office/drawing/2014/main" id="{C12FC982-56B6-415F-B61C-2CFC4059F18D}"/>
+                <a16:creationId xmlns:a16="http://schemas.microsoft.com/office/drawing/2014/main" id="{EDCA6D83-3D6A-40BB-A653-503530DC838D}"/>
               </a:ext>
             </a:extLst>
           </p:cNvPr>
@@ -25348,7 +25346,7 @@
           <p:cNvPr id="8" name="">
             <a:extLst xmlns:a="http://schemas.openxmlformats.org/drawingml/2006/main">
               <a:ext uri="{FF2B5EF4-FFF2-40B4-BE49-F238E27FC236}">
-                <a16:creationId xmlns:a16="http://schemas.microsoft.com/office/drawing/2014/main" id="{5143FD73-2F09-4410-946D-DE8CD2FE6740}"/>
+                <a16:creationId xmlns:a16="http://schemas.microsoft.com/office/drawing/2014/main" id="{BB1A587F-C7FD-494B-835A-1421BEDAC4A5}"/>
               </a:ext>
             </a:extLst>
           </p:cNvPr>
@@ -25383,7 +25381,7 @@
           <p:cNvPr id="9" name="">
             <a:extLst xmlns:a="http://schemas.openxmlformats.org/drawingml/2006/main">
               <a:ext uri="{FF2B5EF4-FFF2-40B4-BE49-F238E27FC236}">
-                <a16:creationId xmlns:a16="http://schemas.microsoft.com/office/drawing/2014/main" id="{7285238D-A432-4444-819E-32881AAA1F6D}"/>
+                <a16:creationId xmlns:a16="http://schemas.microsoft.com/office/drawing/2014/main" id="{08BA16B9-3691-4E65-A9F9-B109A5AF1272}"/>
               </a:ext>
             </a:extLst>
           </p:cNvPr>
@@ -25447,7 +25445,7 @@
           <p:cNvPr id="10" name="">
             <a:extLst xmlns:a="http://schemas.openxmlformats.org/drawingml/2006/main">
               <a:ext uri="{FF2B5EF4-FFF2-40B4-BE49-F238E27FC236}">
-                <a16:creationId xmlns:a16="http://schemas.microsoft.com/office/drawing/2014/main" id="{B15F6D4E-18C8-4E54-BEE8-10576493D0AD}"/>
+                <a16:creationId xmlns:a16="http://schemas.microsoft.com/office/drawing/2014/main" id="{AC171816-6F21-4611-9E3E-2860760DF4ED}"/>
               </a:ext>
             </a:extLst>
           </p:cNvPr>
@@ -25511,7 +25509,7 @@
           <p:cNvPr id="11" name="">
             <a:extLst xmlns:a="http://schemas.openxmlformats.org/drawingml/2006/main">
               <a:ext uri="{FF2B5EF4-FFF2-40B4-BE49-F238E27FC236}">
-                <a16:creationId xmlns:a16="http://schemas.microsoft.com/office/drawing/2014/main" id="{F845E6A3-F9ED-48D8-AAEC-F2B62F10BEB0}"/>
+                <a16:creationId xmlns:a16="http://schemas.microsoft.com/office/drawing/2014/main" id="{E6632D6D-0B67-46F7-B93B-1CD321D89AAA}"/>
               </a:ext>
             </a:extLst>
           </p:cNvPr>
@@ -25575,7 +25573,7 @@
           <p:cNvPr id="12" name="">
             <a:extLst xmlns:a="http://schemas.openxmlformats.org/drawingml/2006/main">
               <a:ext uri="{FF2B5EF4-FFF2-40B4-BE49-F238E27FC236}">
-                <a16:creationId xmlns:a16="http://schemas.microsoft.com/office/drawing/2014/main" id="{17309D1A-43A7-40C9-8769-879A795B5830}"/>
+                <a16:creationId xmlns:a16="http://schemas.microsoft.com/office/drawing/2014/main" id="{3A76ED6A-125F-4DD7-AF7D-AD29006A5F5C}"/>
               </a:ext>
             </a:extLst>
           </p:cNvPr>
@@ -25610,7 +25608,7 @@
           <p:cNvPr id="13" name="">
             <a:extLst xmlns:a="http://schemas.openxmlformats.org/drawingml/2006/main">
               <a:ext uri="{FF2B5EF4-FFF2-40B4-BE49-F238E27FC236}">
-                <a16:creationId xmlns:a16="http://schemas.microsoft.com/office/drawing/2014/main" id="{AFEE413D-3363-4BFA-95FC-CAF120C5B42C}"/>
+                <a16:creationId xmlns:a16="http://schemas.microsoft.com/office/drawing/2014/main" id="{0695AF9F-F818-40C5-9080-E2E4DA23DEE8}"/>
               </a:ext>
             </a:extLst>
           </p:cNvPr>
@@ -25643,7 +25641,7 @@
           <p:cNvPr id="14" name="">
             <a:extLst xmlns:a="http://schemas.openxmlformats.org/drawingml/2006/main">
               <a:ext uri="{FF2B5EF4-FFF2-40B4-BE49-F238E27FC236}">
-                <a16:creationId xmlns:a16="http://schemas.microsoft.com/office/drawing/2014/main" id="{739D6739-A2F2-4FEB-97C5-80246B8C24FB}"/>
+                <a16:creationId xmlns:a16="http://schemas.microsoft.com/office/drawing/2014/main" id="{BB1535B2-911A-46EC-812F-6895528B91C2}"/>
               </a:ext>
             </a:extLst>
           </p:cNvPr>
@@ -25678,7 +25676,7 @@
           <p:cNvPr id="15" name="">
             <a:extLst xmlns:a="http://schemas.openxmlformats.org/drawingml/2006/main">
               <a:ext uri="{FF2B5EF4-FFF2-40B4-BE49-F238E27FC236}">
-                <a16:creationId xmlns:a16="http://schemas.microsoft.com/office/drawing/2014/main" id="{D7ED2C48-88C0-4EEF-9674-6CBA202D899D}"/>
+                <a16:creationId xmlns:a16="http://schemas.microsoft.com/office/drawing/2014/main" id="{3C78D747-41FD-4C49-85E1-69FACFC85328}"/>
               </a:ext>
             </a:extLst>
           </p:cNvPr>
@@ -25742,7 +25740,7 @@
           <p:cNvPr id="16" name="">
             <a:extLst xmlns:a="http://schemas.openxmlformats.org/drawingml/2006/main">
               <a:ext uri="{FF2B5EF4-FFF2-40B4-BE49-F238E27FC236}">
-                <a16:creationId xmlns:a16="http://schemas.microsoft.com/office/drawing/2014/main" id="{45C70043-F0FA-4DE1-AACB-32469F9ACE3C}"/>
+                <a16:creationId xmlns:a16="http://schemas.microsoft.com/office/drawing/2014/main" id="{3F4D28EE-66E4-4FD1-807A-A1F854F3B61A}"/>
               </a:ext>
             </a:extLst>
           </p:cNvPr>
@@ -25777,7 +25775,7 @@
           <p:cNvPr id="17" name="">
             <a:extLst xmlns:a="http://schemas.openxmlformats.org/drawingml/2006/main">
               <a:ext uri="{FF2B5EF4-FFF2-40B4-BE49-F238E27FC236}">
-                <a16:creationId xmlns:a16="http://schemas.microsoft.com/office/drawing/2014/main" id="{70F5ED0F-8BB4-4B7F-9F14-1260B56CE20C}"/>
+                <a16:creationId xmlns:a16="http://schemas.microsoft.com/office/drawing/2014/main" id="{0F1A6C84-846B-4680-BD09-E4FA44775D3A}"/>
               </a:ext>
             </a:extLst>
           </p:cNvPr>
@@ -25841,7 +25839,7 @@
           <p:cNvPr id="18" name="">
             <a:extLst xmlns:a="http://schemas.openxmlformats.org/drawingml/2006/main">
               <a:ext uri="{FF2B5EF4-FFF2-40B4-BE49-F238E27FC236}">
-                <a16:creationId xmlns:a16="http://schemas.microsoft.com/office/drawing/2014/main" id="{C1FD2FBD-A56F-4678-90B1-C65FDCCE2D22}"/>
+                <a16:creationId xmlns:a16="http://schemas.microsoft.com/office/drawing/2014/main" id="{68723A79-DED4-49B8-87B2-2F67F8DD4A57}"/>
               </a:ext>
             </a:extLst>
           </p:cNvPr>
@@ -25876,7 +25874,7 @@
           <p:cNvPr id="19" name="">
             <a:extLst xmlns:a="http://schemas.openxmlformats.org/drawingml/2006/main">
               <a:ext uri="{FF2B5EF4-FFF2-40B4-BE49-F238E27FC236}">
-                <a16:creationId xmlns:a16="http://schemas.microsoft.com/office/drawing/2014/main" id="{AD653FB3-7853-4AF3-9778-B45F20EFBFC1}"/>
+                <a16:creationId xmlns:a16="http://schemas.microsoft.com/office/drawing/2014/main" id="{334B00E1-9A48-4FFB-A1FA-C05A898B676F}"/>
               </a:ext>
             </a:extLst>
           </p:cNvPr>
@@ -25940,7 +25938,7 @@
           <p:cNvPr id="20" name="">
             <a:extLst xmlns:a="http://schemas.openxmlformats.org/drawingml/2006/main">
               <a:ext uri="{FF2B5EF4-FFF2-40B4-BE49-F238E27FC236}">
-                <a16:creationId xmlns:a16="http://schemas.microsoft.com/office/drawing/2014/main" id="{DDA63101-4731-4DEA-AC1D-85983D6D29BC}"/>
+                <a16:creationId xmlns:a16="http://schemas.microsoft.com/office/drawing/2014/main" id="{CBF5F08C-4883-46A8-90DC-D4B6CAB339A6}"/>
               </a:ext>
             </a:extLst>
           </p:cNvPr>
@@ -25975,7 +25973,7 @@
           <p:cNvPr id="21" name="">
             <a:extLst xmlns:a="http://schemas.openxmlformats.org/drawingml/2006/main">
               <a:ext uri="{FF2B5EF4-FFF2-40B4-BE49-F238E27FC236}">
-                <a16:creationId xmlns:a16="http://schemas.microsoft.com/office/drawing/2014/main" id="{872515A0-000D-46B8-8BBB-8831FEA6488A}"/>
+                <a16:creationId xmlns:a16="http://schemas.microsoft.com/office/drawing/2014/main" id="{5444D7FA-DF55-4CF9-A880-D6C0362784F2}"/>
               </a:ext>
             </a:extLst>
           </p:cNvPr>
@@ -26039,7 +26037,7 @@
           <p:cNvPr id="22" name="">
             <a:extLst xmlns:a="http://schemas.openxmlformats.org/drawingml/2006/main">
               <a:ext uri="{FF2B5EF4-FFF2-40B4-BE49-F238E27FC236}">
-                <a16:creationId xmlns:a16="http://schemas.microsoft.com/office/drawing/2014/main" id="{5CA3CE2B-AADF-4B8E-87C1-C3680312D726}"/>
+                <a16:creationId xmlns:a16="http://schemas.microsoft.com/office/drawing/2014/main" id="{1BFA2932-6130-4FF5-8A2A-9D49462E32F1}"/>
               </a:ext>
             </a:extLst>
           </p:cNvPr>
@@ -26074,7 +26072,7 @@
           <p:cNvPr id="23" name="">
             <a:extLst xmlns:a="http://schemas.openxmlformats.org/drawingml/2006/main">
               <a:ext uri="{FF2B5EF4-FFF2-40B4-BE49-F238E27FC236}">
-                <a16:creationId xmlns:a16="http://schemas.microsoft.com/office/drawing/2014/main" id="{EC8CA36F-92E2-4B86-BDEC-FCE3609AD55C}"/>
+                <a16:creationId xmlns:a16="http://schemas.microsoft.com/office/drawing/2014/main" id="{41697927-DEFE-47E9-8BC8-77338EE1CAFC}"/>
               </a:ext>
             </a:extLst>
           </p:cNvPr>
@@ -26138,7 +26136,7 @@
           <p:cNvPr id="24" name="">
             <a:extLst xmlns:a="http://schemas.openxmlformats.org/drawingml/2006/main">
               <a:ext uri="{FF2B5EF4-FFF2-40B4-BE49-F238E27FC236}">
-                <a16:creationId xmlns:a16="http://schemas.microsoft.com/office/drawing/2014/main" id="{20110B09-786A-489A-A69F-59ECFC67059A}"/>
+                <a16:creationId xmlns:a16="http://schemas.microsoft.com/office/drawing/2014/main" id="{EEE6FE2B-FF2C-4E39-9161-88B0760E214C}"/>
               </a:ext>
             </a:extLst>
           </p:cNvPr>
@@ -26173,7 +26171,7 @@
           <p:cNvPr id="25" name="">
             <a:extLst xmlns:a="http://schemas.openxmlformats.org/drawingml/2006/main">
               <a:ext uri="{FF2B5EF4-FFF2-40B4-BE49-F238E27FC236}">
-                <a16:creationId xmlns:a16="http://schemas.microsoft.com/office/drawing/2014/main" id="{9A90D124-0DF3-47B8-A869-8E7EC66B4A28}"/>
+                <a16:creationId xmlns:a16="http://schemas.microsoft.com/office/drawing/2014/main" id="{E5E4434D-79F6-4F5B-81EC-3D1D58F3B5D3}"/>
               </a:ext>
             </a:extLst>
           </p:cNvPr>
@@ -26237,7 +26235,7 @@
           <p:cNvPr id="26" name="">
             <a:extLst xmlns:a="http://schemas.openxmlformats.org/drawingml/2006/main">
               <a:ext uri="{FF2B5EF4-FFF2-40B4-BE49-F238E27FC236}">
-                <a16:creationId xmlns:a16="http://schemas.microsoft.com/office/drawing/2014/main" id="{2B8A4ADB-709F-4A80-ADCB-8B9BBB16593B}"/>
+                <a16:creationId xmlns:a16="http://schemas.microsoft.com/office/drawing/2014/main" id="{C127E4FA-A545-4E5A-B02B-C5DE9AD7E0DE}"/>
               </a:ext>
             </a:extLst>
           </p:cNvPr>
@@ -26301,7 +26299,7 @@
           <p:cNvPr id="27" name="">
             <a:extLst xmlns:a="http://schemas.openxmlformats.org/drawingml/2006/main">
               <a:ext uri="{FF2B5EF4-FFF2-40B4-BE49-F238E27FC236}">
-                <a16:creationId xmlns:a16="http://schemas.microsoft.com/office/drawing/2014/main" id="{6499AFF5-23FE-4CF0-B558-010DFC193AFA}"/>
+                <a16:creationId xmlns:a16="http://schemas.microsoft.com/office/drawing/2014/main" id="{AF3848C5-A765-4D58-AF90-083770C18326}"/>
               </a:ext>
             </a:extLst>
           </p:cNvPr>
@@ -26365,7 +26363,7 @@
           <p:cNvPr id="28" name="">
             <a:extLst xmlns:a="http://schemas.openxmlformats.org/drawingml/2006/main">
               <a:ext uri="{FF2B5EF4-FFF2-40B4-BE49-F238E27FC236}">
-                <a16:creationId xmlns:a16="http://schemas.microsoft.com/office/drawing/2014/main" id="{B243CEDC-D174-4EB6-AE27-EFB05C2A18A7}"/>
+                <a16:creationId xmlns:a16="http://schemas.microsoft.com/office/drawing/2014/main" id="{88E67391-73EF-4B9E-97C3-2780431D1C55}"/>
               </a:ext>
             </a:extLst>
           </p:cNvPr>
@@ -26400,7 +26398,7 @@
           <p:cNvPr id="29" name="">
             <a:extLst xmlns:a="http://schemas.openxmlformats.org/drawingml/2006/main">
               <a:ext uri="{FF2B5EF4-FFF2-40B4-BE49-F238E27FC236}">
-                <a16:creationId xmlns:a16="http://schemas.microsoft.com/office/drawing/2014/main" id="{D561C4B5-89B6-4D09-B0CC-5A5C4FA964C9}"/>
+                <a16:creationId xmlns:a16="http://schemas.microsoft.com/office/drawing/2014/main" id="{1FF1E9D8-32C1-4D2A-B7A7-67D7A3A4A417}"/>
               </a:ext>
             </a:extLst>
           </p:cNvPr>
@@ -26435,7 +26433,7 @@
           <p:cNvPr id="30" name="">
             <a:extLst xmlns:a="http://schemas.openxmlformats.org/drawingml/2006/main">
               <a:ext uri="{FF2B5EF4-FFF2-40B4-BE49-F238E27FC236}">
-                <a16:creationId xmlns:a16="http://schemas.microsoft.com/office/drawing/2014/main" id="{3AC933B1-0FDB-4714-8269-A71BEC1C51F2}"/>
+                <a16:creationId xmlns:a16="http://schemas.microsoft.com/office/drawing/2014/main" id="{63428E1D-87F6-421C-AC88-5D699AD63E5F}"/>
               </a:ext>
             </a:extLst>
           </p:cNvPr>
@@ -26470,7 +26468,7 @@
           <p:cNvPr id="31" name="kicker-03-marker">
             <a:extLst xmlns:a="http://schemas.openxmlformats.org/drawingml/2006/main">
               <a:ext uri="{FF2B5EF4-FFF2-40B4-BE49-F238E27FC236}">
-                <a16:creationId xmlns:a16="http://schemas.microsoft.com/office/drawing/2014/main" id="{905A8839-6550-4F32-A590-4BCAC9844D04}"/>
+                <a16:creationId xmlns:a16="http://schemas.microsoft.com/office/drawing/2014/main" id="{5781A997-F337-4B36-B0A9-F7FB29BED2B2}"/>
               </a:ext>
             </a:extLst>
           </p:cNvPr>
@@ -26505,7 +26503,7 @@
           <p:cNvPr id="32" name="kicker-03-label">
             <a:extLst xmlns:a="http://schemas.openxmlformats.org/drawingml/2006/main">
               <a:ext uri="{FF2B5EF4-FFF2-40B4-BE49-F238E27FC236}">
-                <a16:creationId xmlns:a16="http://schemas.microsoft.com/office/drawing/2014/main" id="{702DBB54-BC05-40C4-9334-BF413B00934F}"/>
+                <a16:creationId xmlns:a16="http://schemas.microsoft.com/office/drawing/2014/main" id="{FD5B8F96-09A5-4A71-BCB9-5D5FA4E86BCA}"/>
               </a:ext>
             </a:extLst>
           </p:cNvPr>
@@ -26569,7 +26567,7 @@
           <p:cNvPr id="33" name="">
             <a:extLst xmlns:a="http://schemas.openxmlformats.org/drawingml/2006/main">
               <a:ext uri="{FF2B5EF4-FFF2-40B4-BE49-F238E27FC236}">
-                <a16:creationId xmlns:a16="http://schemas.microsoft.com/office/drawing/2014/main" id="{5EA320C8-F4BC-4BE6-AA27-F2F5028519E8}"/>
+                <a16:creationId xmlns:a16="http://schemas.microsoft.com/office/drawing/2014/main" id="{0B9BC934-F5AC-4D64-A7CE-B0F819C7A77B}"/>
               </a:ext>
             </a:extLst>
           </p:cNvPr>
@@ -26633,7 +26631,7 @@
           <p:cNvPr id="34" name="">
             <a:extLst xmlns:a="http://schemas.openxmlformats.org/drawingml/2006/main">
               <a:ext uri="{FF2B5EF4-FFF2-40B4-BE49-F238E27FC236}">
-                <a16:creationId xmlns:a16="http://schemas.microsoft.com/office/drawing/2014/main" id="{5A632E3B-7207-4058-B3D8-379D84625AEA}"/>
+                <a16:creationId xmlns:a16="http://schemas.microsoft.com/office/drawing/2014/main" id="{3E08EFAC-EB26-4FFE-BE0C-C627F9F1F277}"/>
               </a:ext>
             </a:extLst>
           </p:cNvPr>
@@ -26697,7 +26695,7 @@
           <p:cNvPr id="35" name="">
             <a:extLst xmlns:a="http://schemas.openxmlformats.org/drawingml/2006/main">
               <a:ext uri="{FF2B5EF4-FFF2-40B4-BE49-F238E27FC236}">
-                <a16:creationId xmlns:a16="http://schemas.microsoft.com/office/drawing/2014/main" id="{2DA33051-4426-4367-9B24-68FFACDF3B47}"/>
+                <a16:creationId xmlns:a16="http://schemas.microsoft.com/office/drawing/2014/main" id="{1DEDBDB3-5B7A-486E-A0A4-A1085E7582B8}"/>
               </a:ext>
             </a:extLst>
           </p:cNvPr>
@@ -26732,7 +26730,7 @@
           <p:cNvPr id="36" name="">
             <a:extLst xmlns:a="http://schemas.openxmlformats.org/drawingml/2006/main">
               <a:ext uri="{FF2B5EF4-FFF2-40B4-BE49-F238E27FC236}">
-                <a16:creationId xmlns:a16="http://schemas.microsoft.com/office/drawing/2014/main" id="{28E689F7-AFBA-4DC5-89F2-04353A230FBB}"/>
+                <a16:creationId xmlns:a16="http://schemas.microsoft.com/office/drawing/2014/main" id="{C6B7837E-89B3-40E2-AFEB-B9B3B932ED78}"/>
               </a:ext>
             </a:extLst>
           </p:cNvPr>
@@ -26767,7 +26765,7 @@
           <p:cNvPr id="37" name="">
             <a:extLst xmlns:a="http://schemas.openxmlformats.org/drawingml/2006/main">
               <a:ext uri="{FF2B5EF4-FFF2-40B4-BE49-F238E27FC236}">
-                <a16:creationId xmlns:a16="http://schemas.microsoft.com/office/drawing/2014/main" id="{EA335DBF-CC2D-4894-8572-1C319823BFFA}"/>
+                <a16:creationId xmlns:a16="http://schemas.microsoft.com/office/drawing/2014/main" id="{C5C24A54-2CA9-4A3A-B7CB-0A209881F77D}"/>
               </a:ext>
             </a:extLst>
           </p:cNvPr>
@@ -26802,7 +26800,7 @@
           <p:cNvPr id="38" name="">
             <a:extLst xmlns:a="http://schemas.openxmlformats.org/drawingml/2006/main">
               <a:ext uri="{FF2B5EF4-FFF2-40B4-BE49-F238E27FC236}">
-                <a16:creationId xmlns:a16="http://schemas.microsoft.com/office/drawing/2014/main" id="{8A952A8E-1795-40C5-BA77-BFFF10049A4C}"/>
+                <a16:creationId xmlns:a16="http://schemas.microsoft.com/office/drawing/2014/main" id="{622B6F22-6E9A-4AE8-8ED7-69126B21D817}"/>
               </a:ext>
             </a:extLst>
           </p:cNvPr>
@@ -26837,7 +26835,7 @@
           <p:cNvPr id="39" name="">
             <a:extLst xmlns:a="http://schemas.openxmlformats.org/drawingml/2006/main">
               <a:ext uri="{FF2B5EF4-FFF2-40B4-BE49-F238E27FC236}">
-                <a16:creationId xmlns:a16="http://schemas.microsoft.com/office/drawing/2014/main" id="{0E435E1E-1B54-4AAE-972B-5A34D56AE88D}"/>
+                <a16:creationId xmlns:a16="http://schemas.microsoft.com/office/drawing/2014/main" id="{4135B276-1B01-4915-A813-A78D845AD20E}"/>
               </a:ext>
             </a:extLst>
           </p:cNvPr>
@@ -26901,7 +26899,7 @@
           <p:cNvPr id="40" name="">
             <a:extLst xmlns:a="http://schemas.openxmlformats.org/drawingml/2006/main">
               <a:ext uri="{FF2B5EF4-FFF2-40B4-BE49-F238E27FC236}">
-                <a16:creationId xmlns:a16="http://schemas.microsoft.com/office/drawing/2014/main" id="{20A22A08-BF6C-47CE-96C3-17C53DD38C58}"/>
+                <a16:creationId xmlns:a16="http://schemas.microsoft.com/office/drawing/2014/main" id="{6D7D9E7D-FD32-4F18-9E3C-F7F7B0F9D042}"/>
               </a:ext>
             </a:extLst>
           </p:cNvPr>
@@ -26965,7 +26963,7 @@
           <p:cNvPr id="41" name="">
             <a:extLst xmlns:a="http://schemas.openxmlformats.org/drawingml/2006/main">
               <a:ext uri="{FF2B5EF4-FFF2-40B4-BE49-F238E27FC236}">
-                <a16:creationId xmlns:a16="http://schemas.microsoft.com/office/drawing/2014/main" id="{816818D7-57BA-4076-8A26-303A4FB9C28D}"/>
+                <a16:creationId xmlns:a16="http://schemas.microsoft.com/office/drawing/2014/main" id="{01FD0039-949B-4584-87BF-19EED918F69F}"/>
               </a:ext>
             </a:extLst>
           </p:cNvPr>
@@ -27027,7 +27025,7 @@
     </p:spTree>
     <p:extLst>
       <p:ext uri="{BB962C8B-B14F-4D97-AF65-F5344CB8AC3E}">
-        <p14:creationId xmlns:p14="http://schemas.microsoft.com/office/powerpoint/2010/main" val="13362724"/>
+        <p14:creationId xmlns:p14="http://schemas.microsoft.com/office/powerpoint/2010/main" val="281891856"/>
       </p:ext>
     </p:extLst>
   </p:cSld>
@@ -27051,7 +27049,7 @@
           <p:cNvPr id="1" name="">
             <a:extLst xmlns:a="http://schemas.openxmlformats.org/drawingml/2006/main">
               <a:ext uri="{FF2B5EF4-FFF2-40B4-BE49-F238E27FC236}">
-                <a16:creationId xmlns:a16="http://schemas.microsoft.com/office/drawing/2014/main" id="{32F2F9DF-506B-4586-B854-CC51B64E5E07}"/>
+                <a16:creationId xmlns:a16="http://schemas.microsoft.com/office/drawing/2014/main" id="{760F5C5C-513A-4891-8C75-E1419F7FDE1C}"/>
               </a:ext>
             </a:extLst>
           </p:cNvPr>
@@ -27086,7 +27084,7 @@
           <p:cNvPr id="2" name="">
             <a:extLst xmlns:a="http://schemas.openxmlformats.org/drawingml/2006/main">
               <a:ext uri="{FF2B5EF4-FFF2-40B4-BE49-F238E27FC236}">
-                <a16:creationId xmlns:a16="http://schemas.microsoft.com/office/drawing/2014/main" id="{B76606D3-C22B-4E27-8EA6-20B53A9756C9}"/>
+                <a16:creationId xmlns:a16="http://schemas.microsoft.com/office/drawing/2014/main" id="{748A8DB0-60A5-4756-8353-B519A1B220CE}"/>
               </a:ext>
             </a:extLst>
           </p:cNvPr>
@@ -27121,7 +27119,7 @@
           <p:cNvPr id="3" name="">
             <a:extLst xmlns:a="http://schemas.openxmlformats.org/drawingml/2006/main">
               <a:ext uri="{FF2B5EF4-FFF2-40B4-BE49-F238E27FC236}">
-                <a16:creationId xmlns:a16="http://schemas.microsoft.com/office/drawing/2014/main" id="{A01C7EA8-5F98-4984-BF11-190BC08D06B4}"/>
+                <a16:creationId xmlns:a16="http://schemas.microsoft.com/office/drawing/2014/main" id="{D4911467-D07D-4D00-8FB7-9D7524CFC69D}"/>
               </a:ext>
             </a:extLst>
           </p:cNvPr>
@@ -27156,7 +27154,7 @@
           <p:cNvPr id="4" name="kicker-03-marker">
             <a:extLst xmlns:a="http://schemas.openxmlformats.org/drawingml/2006/main">
               <a:ext uri="{FF2B5EF4-FFF2-40B4-BE49-F238E27FC236}">
-                <a16:creationId xmlns:a16="http://schemas.microsoft.com/office/drawing/2014/main" id="{B9854235-D486-4932-BA07-658741C152B4}"/>
+                <a16:creationId xmlns:a16="http://schemas.microsoft.com/office/drawing/2014/main" id="{9690DFA4-6826-44F8-80E0-C5144703C29F}"/>
               </a:ext>
             </a:extLst>
           </p:cNvPr>
@@ -27191,7 +27189,7 @@
           <p:cNvPr id="5" name="kicker-03-label">
             <a:extLst xmlns:a="http://schemas.openxmlformats.org/drawingml/2006/main">
               <a:ext uri="{FF2B5EF4-FFF2-40B4-BE49-F238E27FC236}">
-                <a16:creationId xmlns:a16="http://schemas.microsoft.com/office/drawing/2014/main" id="{0852FD8C-3DF9-475F-801C-2EA362E93CBE}"/>
+                <a16:creationId xmlns:a16="http://schemas.microsoft.com/office/drawing/2014/main" id="{ECF6B8C5-6E97-45B3-9EF0-99B096FB348B}"/>
               </a:ext>
             </a:extLst>
           </p:cNvPr>
@@ -27255,7 +27253,7 @@
           <p:cNvPr id="6" name="">
             <a:extLst xmlns:a="http://schemas.openxmlformats.org/drawingml/2006/main">
               <a:ext uri="{FF2B5EF4-FFF2-40B4-BE49-F238E27FC236}">
-                <a16:creationId xmlns:a16="http://schemas.microsoft.com/office/drawing/2014/main" id="{DD2B5EE0-77AC-46C8-9479-4ED7A6973EA3}"/>
+                <a16:creationId xmlns:a16="http://schemas.microsoft.com/office/drawing/2014/main" id="{5A3BA2CF-C64A-487B-A183-6A34357DA52D}"/>
               </a:ext>
             </a:extLst>
           </p:cNvPr>
@@ -27319,7 +27317,7 @@
           <p:cNvPr id="7" name="">
             <a:extLst xmlns:a="http://schemas.openxmlformats.org/drawingml/2006/main">
               <a:ext uri="{FF2B5EF4-FFF2-40B4-BE49-F238E27FC236}">
-                <a16:creationId xmlns:a16="http://schemas.microsoft.com/office/drawing/2014/main" id="{1E52C7D9-DE30-449E-A221-0B22E77531E4}"/>
+                <a16:creationId xmlns:a16="http://schemas.microsoft.com/office/drawing/2014/main" id="{2C3C471A-FEE4-406F-A7C1-B8F35002A503}"/>
               </a:ext>
             </a:extLst>
           </p:cNvPr>
@@ -27383,7 +27381,7 @@
           <p:cNvPr id="8" name="">
             <a:extLst xmlns:a="http://schemas.openxmlformats.org/drawingml/2006/main">
               <a:ext uri="{FF2B5EF4-FFF2-40B4-BE49-F238E27FC236}">
-                <a16:creationId xmlns:a16="http://schemas.microsoft.com/office/drawing/2014/main" id="{A3C5833B-9718-46F6-B534-92F5A0E09D90}"/>
+                <a16:creationId xmlns:a16="http://schemas.microsoft.com/office/drawing/2014/main" id="{1DBE9CC2-A0DB-4067-87FA-AB1B7B13B4D7}"/>
               </a:ext>
             </a:extLst>
           </p:cNvPr>
@@ -27418,7 +27416,7 @@
           <p:cNvPr id="9" name="">
             <a:extLst xmlns:a="http://schemas.openxmlformats.org/drawingml/2006/main">
               <a:ext uri="{FF2B5EF4-FFF2-40B4-BE49-F238E27FC236}">
-                <a16:creationId xmlns:a16="http://schemas.microsoft.com/office/drawing/2014/main" id="{D68E508F-33B5-40B7-8A25-004436580B0B}"/>
+                <a16:creationId xmlns:a16="http://schemas.microsoft.com/office/drawing/2014/main" id="{0693E71C-372E-42F9-B214-38EAAB828771}"/>
               </a:ext>
             </a:extLst>
           </p:cNvPr>
@@ -27482,7 +27480,7 @@
           <p:cNvPr id="10" name="">
             <a:extLst xmlns:a="http://schemas.openxmlformats.org/drawingml/2006/main">
               <a:ext uri="{FF2B5EF4-FFF2-40B4-BE49-F238E27FC236}">
-                <a16:creationId xmlns:a16="http://schemas.microsoft.com/office/drawing/2014/main" id="{8039F1FF-93C7-40C0-9D34-1E03A6CFBB54}"/>
+                <a16:creationId xmlns:a16="http://schemas.microsoft.com/office/drawing/2014/main" id="{8469A92D-3F9A-4B71-893A-BAAE4FC75EC1}"/>
               </a:ext>
             </a:extLst>
           </p:cNvPr>
@@ -27546,7 +27544,7 @@
           <p:cNvPr id="11" name="">
             <a:extLst xmlns:a="http://schemas.openxmlformats.org/drawingml/2006/main">
               <a:ext uri="{FF2B5EF4-FFF2-40B4-BE49-F238E27FC236}">
-                <a16:creationId xmlns:a16="http://schemas.microsoft.com/office/drawing/2014/main" id="{960FF8F9-C805-4FB0-B045-5721CDE8C164}"/>
+                <a16:creationId xmlns:a16="http://schemas.microsoft.com/office/drawing/2014/main" id="{EB220B83-F5C4-4956-8F0B-89BF2C0CFBA2}"/>
               </a:ext>
             </a:extLst>
           </p:cNvPr>
@@ -27610,7 +27608,7 @@
           <p:cNvPr id="12" name="">
             <a:extLst xmlns:a="http://schemas.openxmlformats.org/drawingml/2006/main">
               <a:ext uri="{FF2B5EF4-FFF2-40B4-BE49-F238E27FC236}">
-                <a16:creationId xmlns:a16="http://schemas.microsoft.com/office/drawing/2014/main" id="{9B5F9FD0-76B1-445E-9EAA-0598E4741972}"/>
+                <a16:creationId xmlns:a16="http://schemas.microsoft.com/office/drawing/2014/main" id="{9A55ED71-CE17-4236-8C35-A38CB1521536}"/>
               </a:ext>
             </a:extLst>
           </p:cNvPr>
@@ -27643,7 +27641,7 @@
           <p:cNvPr id="13" name="">
             <a:extLst xmlns:a="http://schemas.openxmlformats.org/drawingml/2006/main">
               <a:ext uri="{FF2B5EF4-FFF2-40B4-BE49-F238E27FC236}">
-                <a16:creationId xmlns:a16="http://schemas.microsoft.com/office/drawing/2014/main" id="{78B4816C-54DE-4C10-8834-10A42C7E3D14}"/>
+                <a16:creationId xmlns:a16="http://schemas.microsoft.com/office/drawing/2014/main" id="{EA4E1AC0-B168-4D4C-9EBB-D2173DC1D9C7}"/>
               </a:ext>
             </a:extLst>
           </p:cNvPr>
@@ -27707,7 +27705,7 @@
           <p:cNvPr id="14" name="">
             <a:extLst xmlns:a="http://schemas.openxmlformats.org/drawingml/2006/main">
               <a:ext uri="{FF2B5EF4-FFF2-40B4-BE49-F238E27FC236}">
-                <a16:creationId xmlns:a16="http://schemas.microsoft.com/office/drawing/2014/main" id="{9C95F05E-2EB9-4704-B9AB-CCB1CED21B6D}"/>
+                <a16:creationId xmlns:a16="http://schemas.microsoft.com/office/drawing/2014/main" id="{767B22D9-F9D0-44B9-AC96-77B79A55E2AF}"/>
               </a:ext>
             </a:extLst>
           </p:cNvPr>
@@ -27742,7 +27740,7 @@
           <p:cNvPr id="15" name="">
             <a:extLst xmlns:a="http://schemas.openxmlformats.org/drawingml/2006/main">
               <a:ext uri="{FF2B5EF4-FFF2-40B4-BE49-F238E27FC236}">
-                <a16:creationId xmlns:a16="http://schemas.microsoft.com/office/drawing/2014/main" id="{565AC96A-66C0-4AB3-BB88-0C008BE6B228}"/>
+                <a16:creationId xmlns:a16="http://schemas.microsoft.com/office/drawing/2014/main" id="{38B8B40B-37F6-4A8D-AA11-A6ADB351B8E3}"/>
               </a:ext>
             </a:extLst>
           </p:cNvPr>
@@ -27796,7 +27794,7 @@
                 <a:ea typeface="Aptos"/>
                 <a:cs typeface="Aptos"/>
               </a:rPr>
-              <a:t>PROMPT STACK</a:t>
+              <a:t>QUESTION STACK</a:t>
             </a:r>
           </a:p>
         </p:txBody>
@@ -27806,7 +27804,7 @@
           <p:cNvPr id="16" name="">
             <a:extLst xmlns:a="http://schemas.openxmlformats.org/drawingml/2006/main">
               <a:ext uri="{FF2B5EF4-FFF2-40B4-BE49-F238E27FC236}">
-                <a16:creationId xmlns:a16="http://schemas.microsoft.com/office/drawing/2014/main" id="{2F9D6C59-8B96-49ED-8966-E869575B7BDE}"/>
+                <a16:creationId xmlns:a16="http://schemas.microsoft.com/office/drawing/2014/main" id="{CD8AA720-2776-4127-A2A3-3D4F904F023B}"/>
               </a:ext>
             </a:extLst>
           </p:cNvPr>
@@ -27841,7 +27839,7 @@
           <p:cNvPr id="17" name="">
             <a:extLst xmlns:a="http://schemas.openxmlformats.org/drawingml/2006/main">
               <a:ext uri="{FF2B5EF4-FFF2-40B4-BE49-F238E27FC236}">
-                <a16:creationId xmlns:a16="http://schemas.microsoft.com/office/drawing/2014/main" id="{16BD6033-DD7F-422C-9FF1-7B63E3B2891B}"/>
+                <a16:creationId xmlns:a16="http://schemas.microsoft.com/office/drawing/2014/main" id="{F15DF0F5-DFB7-4F06-853C-3874AD1345EE}"/>
               </a:ext>
             </a:extLst>
           </p:cNvPr>
@@ -27905,7 +27903,7 @@
           <p:cNvPr id="18" name="">
             <a:extLst xmlns:a="http://schemas.openxmlformats.org/drawingml/2006/main">
               <a:ext uri="{FF2B5EF4-FFF2-40B4-BE49-F238E27FC236}">
-                <a16:creationId xmlns:a16="http://schemas.microsoft.com/office/drawing/2014/main" id="{7BCEE535-E810-4AA8-810F-0B42718A9AD1}"/>
+                <a16:creationId xmlns:a16="http://schemas.microsoft.com/office/drawing/2014/main" id="{4D5CDD7F-C6F3-4080-A93B-15DD1C421E27}"/>
               </a:ext>
             </a:extLst>
           </p:cNvPr>
@@ -27940,7 +27938,7 @@
           <p:cNvPr id="19" name="">
             <a:extLst xmlns:a="http://schemas.openxmlformats.org/drawingml/2006/main">
               <a:ext uri="{FF2B5EF4-FFF2-40B4-BE49-F238E27FC236}">
-                <a16:creationId xmlns:a16="http://schemas.microsoft.com/office/drawing/2014/main" id="{77005075-D065-4135-9882-670D583CCF65}"/>
+                <a16:creationId xmlns:a16="http://schemas.microsoft.com/office/drawing/2014/main" id="{D02E3F6B-9FBA-402F-9676-3D6B411668BC}"/>
               </a:ext>
             </a:extLst>
           </p:cNvPr>
@@ -28004,7 +28002,7 @@
           <p:cNvPr id="20" name="">
             <a:extLst xmlns:a="http://schemas.openxmlformats.org/drawingml/2006/main">
               <a:ext uri="{FF2B5EF4-FFF2-40B4-BE49-F238E27FC236}">
-                <a16:creationId xmlns:a16="http://schemas.microsoft.com/office/drawing/2014/main" id="{450DC863-2982-4827-9F0C-2A0515BEBC00}"/>
+                <a16:creationId xmlns:a16="http://schemas.microsoft.com/office/drawing/2014/main" id="{57A527DF-A7D9-4DDB-8449-C9B790702D6D}"/>
               </a:ext>
             </a:extLst>
           </p:cNvPr>
@@ -28039,7 +28037,7 @@
           <p:cNvPr id="21" name="">
             <a:extLst xmlns:a="http://schemas.openxmlformats.org/drawingml/2006/main">
               <a:ext uri="{FF2B5EF4-FFF2-40B4-BE49-F238E27FC236}">
-                <a16:creationId xmlns:a16="http://schemas.microsoft.com/office/drawing/2014/main" id="{F78BB1B9-8F21-46FE-A0F3-F0EEAB2B1E3D}"/>
+                <a16:creationId xmlns:a16="http://schemas.microsoft.com/office/drawing/2014/main" id="{6A3C8C5D-C5BE-47B1-BE95-D504F654FC76}"/>
               </a:ext>
             </a:extLst>
           </p:cNvPr>
@@ -28103,7 +28101,7 @@
           <p:cNvPr id="22" name="">
             <a:extLst xmlns:a="http://schemas.openxmlformats.org/drawingml/2006/main">
               <a:ext uri="{FF2B5EF4-FFF2-40B4-BE49-F238E27FC236}">
-                <a16:creationId xmlns:a16="http://schemas.microsoft.com/office/drawing/2014/main" id="{9D2590EA-CF8E-4B0F-8153-5D641EDA443C}"/>
+                <a16:creationId xmlns:a16="http://schemas.microsoft.com/office/drawing/2014/main" id="{A35CF2EF-2ED7-4DB4-8185-E990432304CC}"/>
               </a:ext>
             </a:extLst>
           </p:cNvPr>
@@ -28138,7 +28136,7 @@
           <p:cNvPr id="23" name="">
             <a:extLst xmlns:a="http://schemas.openxmlformats.org/drawingml/2006/main">
               <a:ext uri="{FF2B5EF4-FFF2-40B4-BE49-F238E27FC236}">
-                <a16:creationId xmlns:a16="http://schemas.microsoft.com/office/drawing/2014/main" id="{50D8662F-E062-4F20-A2E9-2DD67B8461F7}"/>
+                <a16:creationId xmlns:a16="http://schemas.microsoft.com/office/drawing/2014/main" id="{505C62B6-2691-4CE2-A36A-5F0F4421FE66}"/>
               </a:ext>
             </a:extLst>
           </p:cNvPr>
@@ -28202,7 +28200,7 @@
           <p:cNvPr id="24" name="">
             <a:extLst xmlns:a="http://schemas.openxmlformats.org/drawingml/2006/main">
               <a:ext uri="{FF2B5EF4-FFF2-40B4-BE49-F238E27FC236}">
-                <a16:creationId xmlns:a16="http://schemas.microsoft.com/office/drawing/2014/main" id="{A11607AD-EBA9-4564-B898-972AEE889919}"/>
+                <a16:creationId xmlns:a16="http://schemas.microsoft.com/office/drawing/2014/main" id="{2523542F-49E4-46A4-A2C9-821E7E8C308A}"/>
               </a:ext>
             </a:extLst>
           </p:cNvPr>
@@ -28237,7 +28235,7 @@
           <p:cNvPr id="25" name="">
             <a:extLst xmlns:a="http://schemas.openxmlformats.org/drawingml/2006/main">
               <a:ext uri="{FF2B5EF4-FFF2-40B4-BE49-F238E27FC236}">
-                <a16:creationId xmlns:a16="http://schemas.microsoft.com/office/drawing/2014/main" id="{3C88AED1-6B5C-46E4-AD61-9C1F9ED0A8FD}"/>
+                <a16:creationId xmlns:a16="http://schemas.microsoft.com/office/drawing/2014/main" id="{CCD0D6FD-84EA-4F0C-8DDE-18AE361E26E9}"/>
               </a:ext>
             </a:extLst>
           </p:cNvPr>
@@ -28301,7 +28299,7 @@
           <p:cNvPr id="26" name="">
             <a:extLst xmlns:a="http://schemas.openxmlformats.org/drawingml/2006/main">
               <a:ext uri="{FF2B5EF4-FFF2-40B4-BE49-F238E27FC236}">
-                <a16:creationId xmlns:a16="http://schemas.microsoft.com/office/drawing/2014/main" id="{784C2E2D-2B6F-43B5-AAA5-F8AE5BCF82FA}"/>
+                <a16:creationId xmlns:a16="http://schemas.microsoft.com/office/drawing/2014/main" id="{C712DD1B-237F-49D0-84FC-B02584BD82C5}"/>
               </a:ext>
             </a:extLst>
           </p:cNvPr>
@@ -28336,7 +28334,7 @@
           <p:cNvPr id="27" name="">
             <a:extLst xmlns:a="http://schemas.openxmlformats.org/drawingml/2006/main">
               <a:ext uri="{FF2B5EF4-FFF2-40B4-BE49-F238E27FC236}">
-                <a16:creationId xmlns:a16="http://schemas.microsoft.com/office/drawing/2014/main" id="{59268F00-9652-4A69-9076-75BAABF90701}"/>
+                <a16:creationId xmlns:a16="http://schemas.microsoft.com/office/drawing/2014/main" id="{9AC43C27-AFEE-4ACB-83F2-C769F683ED0C}"/>
               </a:ext>
             </a:extLst>
           </p:cNvPr>
@@ -28400,7 +28398,7 @@
           <p:cNvPr id="28" name="">
             <a:extLst xmlns:a="http://schemas.openxmlformats.org/drawingml/2006/main">
               <a:ext uri="{FF2B5EF4-FFF2-40B4-BE49-F238E27FC236}">
-                <a16:creationId xmlns:a16="http://schemas.microsoft.com/office/drawing/2014/main" id="{DE1BA156-797D-402E-AC30-226C428D12DA}"/>
+                <a16:creationId xmlns:a16="http://schemas.microsoft.com/office/drawing/2014/main" id="{1BDA3B00-7D47-461C-8A89-2964C7BF035C}"/>
               </a:ext>
             </a:extLst>
           </p:cNvPr>
@@ -28435,7 +28433,7 @@
           <p:cNvPr id="29" name="">
             <a:extLst xmlns:a="http://schemas.openxmlformats.org/drawingml/2006/main">
               <a:ext uri="{FF2B5EF4-FFF2-40B4-BE49-F238E27FC236}">
-                <a16:creationId xmlns:a16="http://schemas.microsoft.com/office/drawing/2014/main" id="{78CFEA5A-9113-4273-A842-5B509E7C9398}"/>
+                <a16:creationId xmlns:a16="http://schemas.microsoft.com/office/drawing/2014/main" id="{BB91327C-7B9E-4849-8C7E-17B9D42D9C40}"/>
               </a:ext>
             </a:extLst>
           </p:cNvPr>
@@ -28499,7 +28497,7 @@
           <p:cNvPr id="30" name="">
             <a:extLst xmlns:a="http://schemas.openxmlformats.org/drawingml/2006/main">
               <a:ext uri="{FF2B5EF4-FFF2-40B4-BE49-F238E27FC236}">
-                <a16:creationId xmlns:a16="http://schemas.microsoft.com/office/drawing/2014/main" id="{2C87A519-5E45-4AF4-924E-07A1CBA0715F}"/>
+                <a16:creationId xmlns:a16="http://schemas.microsoft.com/office/drawing/2014/main" id="{5BAA40E8-388B-4DF2-B45E-63FBC5B82235}"/>
               </a:ext>
             </a:extLst>
           </p:cNvPr>
@@ -28563,7 +28561,7 @@
           <p:cNvPr id="31" name="">
             <a:extLst xmlns:a="http://schemas.openxmlformats.org/drawingml/2006/main">
               <a:ext uri="{FF2B5EF4-FFF2-40B4-BE49-F238E27FC236}">
-                <a16:creationId xmlns:a16="http://schemas.microsoft.com/office/drawing/2014/main" id="{BEF6C138-0BEF-4368-A607-5054430A27E2}"/>
+                <a16:creationId xmlns:a16="http://schemas.microsoft.com/office/drawing/2014/main" id="{61BF00C8-B7CA-4985-9025-CF4332448D7B}"/>
               </a:ext>
             </a:extLst>
           </p:cNvPr>
@@ -28625,7 +28623,7 @@
     </p:spTree>
     <p:extLst>
       <p:ext uri="{BB962C8B-B14F-4D97-AF65-F5344CB8AC3E}">
-        <p14:creationId xmlns:p14="http://schemas.microsoft.com/office/powerpoint/2010/main" val="1687654731"/>
+        <p14:creationId xmlns:p14="http://schemas.microsoft.com/office/powerpoint/2010/main" val="944822071"/>
       </p:ext>
     </p:extLst>
   </p:cSld>
@@ -28649,7 +28647,7 @@
           <p:cNvPr id="1" name="">
             <a:extLst xmlns:a="http://schemas.openxmlformats.org/drawingml/2006/main">
               <a:ext uri="{FF2B5EF4-FFF2-40B4-BE49-F238E27FC236}">
-                <a16:creationId xmlns:a16="http://schemas.microsoft.com/office/drawing/2014/main" id="{6A0E0F0D-8917-4809-80C3-A525CF0D7249}"/>
+                <a16:creationId xmlns:a16="http://schemas.microsoft.com/office/drawing/2014/main" id="{014026EC-185C-4C64-A4C6-4BF62EF73BF7}"/>
               </a:ext>
             </a:extLst>
           </p:cNvPr>
@@ -28684,7 +28682,7 @@
           <p:cNvPr id="2" name="">
             <a:extLst xmlns:a="http://schemas.openxmlformats.org/drawingml/2006/main">
               <a:ext uri="{FF2B5EF4-FFF2-40B4-BE49-F238E27FC236}">
-                <a16:creationId xmlns:a16="http://schemas.microsoft.com/office/drawing/2014/main" id="{2AFBA1B3-15A2-4383-AD58-02153F4DC449}"/>
+                <a16:creationId xmlns:a16="http://schemas.microsoft.com/office/drawing/2014/main" id="{2447FF2E-5BF6-4CF2-9CFB-57ADC9BE1F44}"/>
               </a:ext>
             </a:extLst>
           </p:cNvPr>
@@ -28719,7 +28717,7 @@
           <p:cNvPr id="3" name="">
             <a:extLst xmlns:a="http://schemas.openxmlformats.org/drawingml/2006/main">
               <a:ext uri="{FF2B5EF4-FFF2-40B4-BE49-F238E27FC236}">
-                <a16:creationId xmlns:a16="http://schemas.microsoft.com/office/drawing/2014/main" id="{46846A1C-3C8F-46BD-A70D-013EBDF3C59D}"/>
+                <a16:creationId xmlns:a16="http://schemas.microsoft.com/office/drawing/2014/main" id="{CE9FFD3C-0C04-4333-8A9D-261E462E36F3}"/>
               </a:ext>
             </a:extLst>
           </p:cNvPr>
@@ -28754,7 +28752,7 @@
           <p:cNvPr id="4" name="kicker-03-marker">
             <a:extLst xmlns:a="http://schemas.openxmlformats.org/drawingml/2006/main">
               <a:ext uri="{FF2B5EF4-FFF2-40B4-BE49-F238E27FC236}">
-                <a16:creationId xmlns:a16="http://schemas.microsoft.com/office/drawing/2014/main" id="{4AE868DC-2E1B-4F08-BD1F-C5BF095BC625}"/>
+                <a16:creationId xmlns:a16="http://schemas.microsoft.com/office/drawing/2014/main" id="{02AE0318-D76C-40C3-ABC2-25C5E2F6C006}"/>
               </a:ext>
             </a:extLst>
           </p:cNvPr>
@@ -28789,7 +28787,7 @@
           <p:cNvPr id="5" name="kicker-03-label">
             <a:extLst xmlns:a="http://schemas.openxmlformats.org/drawingml/2006/main">
               <a:ext uri="{FF2B5EF4-FFF2-40B4-BE49-F238E27FC236}">
-                <a16:creationId xmlns:a16="http://schemas.microsoft.com/office/drawing/2014/main" id="{D0C689CE-1718-4483-BA43-896F4E5221C2}"/>
+                <a16:creationId xmlns:a16="http://schemas.microsoft.com/office/drawing/2014/main" id="{C3DC3BFD-D564-4957-A037-8F3DD9EFAF89}"/>
               </a:ext>
             </a:extLst>
           </p:cNvPr>
@@ -28853,7 +28851,7 @@
           <p:cNvPr id="6" name="">
             <a:extLst xmlns:a="http://schemas.openxmlformats.org/drawingml/2006/main">
               <a:ext uri="{FF2B5EF4-FFF2-40B4-BE49-F238E27FC236}">
-                <a16:creationId xmlns:a16="http://schemas.microsoft.com/office/drawing/2014/main" id="{660D05C4-39EC-4504-84D5-317A7301F863}"/>
+                <a16:creationId xmlns:a16="http://schemas.microsoft.com/office/drawing/2014/main" id="{6CB0563E-BE4A-41A8-859A-49BE2DC2CD72}"/>
               </a:ext>
             </a:extLst>
           </p:cNvPr>
@@ -28917,7 +28915,7 @@
           <p:cNvPr id="7" name="">
             <a:extLst xmlns:a="http://schemas.openxmlformats.org/drawingml/2006/main">
               <a:ext uri="{FF2B5EF4-FFF2-40B4-BE49-F238E27FC236}">
-                <a16:creationId xmlns:a16="http://schemas.microsoft.com/office/drawing/2014/main" id="{4476DB0E-6DA1-4E34-81A2-3310E86D3ECE}"/>
+                <a16:creationId xmlns:a16="http://schemas.microsoft.com/office/drawing/2014/main" id="{74D92130-4819-480D-82DA-630ABB380B62}"/>
               </a:ext>
             </a:extLst>
           </p:cNvPr>
@@ -28981,7 +28979,7 @@
           <p:cNvPr id="8" name="">
             <a:extLst xmlns:a="http://schemas.openxmlformats.org/drawingml/2006/main">
               <a:ext uri="{FF2B5EF4-FFF2-40B4-BE49-F238E27FC236}">
-                <a16:creationId xmlns:a16="http://schemas.microsoft.com/office/drawing/2014/main" id="{43F6AD05-0A71-49F1-B3E7-45F00063BA1D}"/>
+                <a16:creationId xmlns:a16="http://schemas.microsoft.com/office/drawing/2014/main" id="{80A39907-2656-4475-8280-3634114734A7}"/>
               </a:ext>
             </a:extLst>
           </p:cNvPr>
@@ -29016,7 +29014,7 @@
           <p:cNvPr id="9" name="">
             <a:extLst xmlns:a="http://schemas.openxmlformats.org/drawingml/2006/main">
               <a:ext uri="{FF2B5EF4-FFF2-40B4-BE49-F238E27FC236}">
-                <a16:creationId xmlns:a16="http://schemas.microsoft.com/office/drawing/2014/main" id="{DA3BE3D1-C21A-4C41-9B49-34058F83E309}"/>
+                <a16:creationId xmlns:a16="http://schemas.microsoft.com/office/drawing/2014/main" id="{982882BA-25C4-4526-8A69-4450465CAC53}"/>
               </a:ext>
             </a:extLst>
           </p:cNvPr>
@@ -29080,7 +29078,7 @@
           <p:cNvPr id="10" name="">
             <a:extLst xmlns:a="http://schemas.openxmlformats.org/drawingml/2006/main">
               <a:ext uri="{FF2B5EF4-FFF2-40B4-BE49-F238E27FC236}">
-                <a16:creationId xmlns:a16="http://schemas.microsoft.com/office/drawing/2014/main" id="{61729DC7-A0AE-4562-8C7B-24DC676D783F}"/>
+                <a16:creationId xmlns:a16="http://schemas.microsoft.com/office/drawing/2014/main" id="{99CFC447-18E6-4EC6-AE93-9D503DBBEC59}"/>
               </a:ext>
             </a:extLst>
           </p:cNvPr>
@@ -29144,7 +29142,7 @@
           <p:cNvPr id="11" name="">
             <a:extLst xmlns:a="http://schemas.openxmlformats.org/drawingml/2006/main">
               <a:ext uri="{FF2B5EF4-FFF2-40B4-BE49-F238E27FC236}">
-                <a16:creationId xmlns:a16="http://schemas.microsoft.com/office/drawing/2014/main" id="{B2095C7D-4362-4473-B566-B68446FA000A}"/>
+                <a16:creationId xmlns:a16="http://schemas.microsoft.com/office/drawing/2014/main" id="{79673F9C-5225-47F8-B6ED-112E1CA2C297}"/>
               </a:ext>
             </a:extLst>
           </p:cNvPr>
@@ -29208,7 +29206,7 @@
           <p:cNvPr id="12" name="">
             <a:extLst xmlns:a="http://schemas.openxmlformats.org/drawingml/2006/main">
               <a:ext uri="{FF2B5EF4-FFF2-40B4-BE49-F238E27FC236}">
-                <a16:creationId xmlns:a16="http://schemas.microsoft.com/office/drawing/2014/main" id="{8345FECA-638E-4615-8E8B-05DA6F4A14B0}"/>
+                <a16:creationId xmlns:a16="http://schemas.microsoft.com/office/drawing/2014/main" id="{FD484195-AAB1-4FA9-B766-4CBA898809BD}"/>
               </a:ext>
             </a:extLst>
           </p:cNvPr>
@@ -29241,7 +29239,7 @@
           <p:cNvPr id="13" name="">
             <a:extLst xmlns:a="http://schemas.openxmlformats.org/drawingml/2006/main">
               <a:ext uri="{FF2B5EF4-FFF2-40B4-BE49-F238E27FC236}">
-                <a16:creationId xmlns:a16="http://schemas.microsoft.com/office/drawing/2014/main" id="{2E29EEE0-9A40-4032-829A-B9BED437DF10}"/>
+                <a16:creationId xmlns:a16="http://schemas.microsoft.com/office/drawing/2014/main" id="{8D446ED6-AB39-4221-AE0B-7C3FE0F8F80B}"/>
               </a:ext>
             </a:extLst>
           </p:cNvPr>
@@ -29276,7 +29274,7 @@
           <p:cNvPr id="14" name="">
             <a:extLst xmlns:a="http://schemas.openxmlformats.org/drawingml/2006/main">
               <a:ext uri="{FF2B5EF4-FFF2-40B4-BE49-F238E27FC236}">
-                <a16:creationId xmlns:a16="http://schemas.microsoft.com/office/drawing/2014/main" id="{154895CA-1A09-4018-B3A0-1779E907010A}"/>
+                <a16:creationId xmlns:a16="http://schemas.microsoft.com/office/drawing/2014/main" id="{C1F33102-5DFB-44ED-9BAE-6BA4FF2878EE}"/>
               </a:ext>
             </a:extLst>
           </p:cNvPr>
@@ -29340,7 +29338,7 @@
           <p:cNvPr id="15" name="">
             <a:extLst xmlns:a="http://schemas.openxmlformats.org/drawingml/2006/main">
               <a:ext uri="{FF2B5EF4-FFF2-40B4-BE49-F238E27FC236}">
-                <a16:creationId xmlns:a16="http://schemas.microsoft.com/office/drawing/2014/main" id="{5F427953-CA2F-4316-B7B7-891B86938743}"/>
+                <a16:creationId xmlns:a16="http://schemas.microsoft.com/office/drawing/2014/main" id="{EC87DDA6-DCAA-4B47-8B10-080FB035F750}"/>
               </a:ext>
             </a:extLst>
           </p:cNvPr>
@@ -29404,7 +29402,7 @@
           <p:cNvPr id="16" name="">
             <a:extLst xmlns:a="http://schemas.openxmlformats.org/drawingml/2006/main">
               <a:ext uri="{FF2B5EF4-FFF2-40B4-BE49-F238E27FC236}">
-                <a16:creationId xmlns:a16="http://schemas.microsoft.com/office/drawing/2014/main" id="{64D6A4FE-2D6A-484C-9C98-E93D6598B81D}"/>
+                <a16:creationId xmlns:a16="http://schemas.microsoft.com/office/drawing/2014/main" id="{214BF8D7-47A2-46E2-8224-9702D0C0422C}"/>
               </a:ext>
             </a:extLst>
           </p:cNvPr>
@@ -29439,7 +29437,7 @@
           <p:cNvPr id="17" name="">
             <a:extLst xmlns:a="http://schemas.openxmlformats.org/drawingml/2006/main">
               <a:ext uri="{FF2B5EF4-FFF2-40B4-BE49-F238E27FC236}">
-                <a16:creationId xmlns:a16="http://schemas.microsoft.com/office/drawing/2014/main" id="{2A211BD6-B743-47D4-8F47-3548773E4B3A}"/>
+                <a16:creationId xmlns:a16="http://schemas.microsoft.com/office/drawing/2014/main" id="{C508F7D9-0882-4CC1-84F8-1F46655EBF7D}"/>
               </a:ext>
             </a:extLst>
           </p:cNvPr>
@@ -29503,7 +29501,7 @@
           <p:cNvPr id="18" name="">
             <a:extLst xmlns:a="http://schemas.openxmlformats.org/drawingml/2006/main">
               <a:ext uri="{FF2B5EF4-FFF2-40B4-BE49-F238E27FC236}">
-                <a16:creationId xmlns:a16="http://schemas.microsoft.com/office/drawing/2014/main" id="{88DD0C73-3EBE-45CB-8BDB-DA5706E17E2A}"/>
+                <a16:creationId xmlns:a16="http://schemas.microsoft.com/office/drawing/2014/main" id="{B009D95C-AA14-4FA4-8B67-7ABB3AAFFC63}"/>
               </a:ext>
             </a:extLst>
           </p:cNvPr>
@@ -29567,7 +29565,7 @@
           <p:cNvPr id="19" name="">
             <a:extLst xmlns:a="http://schemas.openxmlformats.org/drawingml/2006/main">
               <a:ext uri="{FF2B5EF4-FFF2-40B4-BE49-F238E27FC236}">
-                <a16:creationId xmlns:a16="http://schemas.microsoft.com/office/drawing/2014/main" id="{0FC371F9-F7BD-4E99-8EA7-ACDC131EF833}"/>
+                <a16:creationId xmlns:a16="http://schemas.microsoft.com/office/drawing/2014/main" id="{F0FD3514-0C92-41BB-BEF0-5152EBB156F9}"/>
               </a:ext>
             </a:extLst>
           </p:cNvPr>
@@ -29600,7 +29598,7 @@
           <p:cNvPr id="20" name="">
             <a:extLst xmlns:a="http://schemas.openxmlformats.org/drawingml/2006/main">
               <a:ext uri="{FF2B5EF4-FFF2-40B4-BE49-F238E27FC236}">
-                <a16:creationId xmlns:a16="http://schemas.microsoft.com/office/drawing/2014/main" id="{81AA5D2A-17CD-4640-8A35-1ABEF2E157F0}"/>
+                <a16:creationId xmlns:a16="http://schemas.microsoft.com/office/drawing/2014/main" id="{523051D7-4A21-4C92-8104-D9D10D2FCC04}"/>
               </a:ext>
             </a:extLst>
           </p:cNvPr>
@@ -29635,7 +29633,7 @@
           <p:cNvPr id="21" name="">
             <a:extLst xmlns:a="http://schemas.openxmlformats.org/drawingml/2006/main">
               <a:ext uri="{FF2B5EF4-FFF2-40B4-BE49-F238E27FC236}">
-                <a16:creationId xmlns:a16="http://schemas.microsoft.com/office/drawing/2014/main" id="{95E42BBE-94F6-4AD2-A30D-8829D1C9F618}"/>
+                <a16:creationId xmlns:a16="http://schemas.microsoft.com/office/drawing/2014/main" id="{DD8AED96-2E63-48CF-A093-284402D8B0C1}"/>
               </a:ext>
             </a:extLst>
           </p:cNvPr>
@@ -29699,7 +29697,7 @@
           <p:cNvPr id="22" name="">
             <a:extLst xmlns:a="http://schemas.openxmlformats.org/drawingml/2006/main">
               <a:ext uri="{FF2B5EF4-FFF2-40B4-BE49-F238E27FC236}">
-                <a16:creationId xmlns:a16="http://schemas.microsoft.com/office/drawing/2014/main" id="{0300EA10-5B68-47C0-8270-206A40E1C0CB}"/>
+                <a16:creationId xmlns:a16="http://schemas.microsoft.com/office/drawing/2014/main" id="{3F83E965-68B8-4AEC-9487-1125D134EFD2}"/>
               </a:ext>
             </a:extLst>
           </p:cNvPr>
@@ -29732,7 +29730,7 @@
           <p:cNvPr id="23" name="">
             <a:extLst xmlns:a="http://schemas.openxmlformats.org/drawingml/2006/main">
               <a:ext uri="{FF2B5EF4-FFF2-40B4-BE49-F238E27FC236}">
-                <a16:creationId xmlns:a16="http://schemas.microsoft.com/office/drawing/2014/main" id="{A8CD259E-7421-45FF-8A1B-2FD9D5157670}"/>
+                <a16:creationId xmlns:a16="http://schemas.microsoft.com/office/drawing/2014/main" id="{BC693BC3-BF5F-45ED-9783-7ED694944412}"/>
               </a:ext>
             </a:extLst>
           </p:cNvPr>
@@ -29796,7 +29794,7 @@
           <p:cNvPr id="24" name="">
             <a:extLst xmlns:a="http://schemas.openxmlformats.org/drawingml/2006/main">
               <a:ext uri="{FF2B5EF4-FFF2-40B4-BE49-F238E27FC236}">
-                <a16:creationId xmlns:a16="http://schemas.microsoft.com/office/drawing/2014/main" id="{30FE4949-42D2-4F40-B58C-833A36196464}"/>
+                <a16:creationId xmlns:a16="http://schemas.microsoft.com/office/drawing/2014/main" id="{5A91E1E1-4FCA-43DE-871A-33167A779905}"/>
               </a:ext>
             </a:extLst>
           </p:cNvPr>
@@ -29860,7 +29858,7 @@
           <p:cNvPr id="25" name="">
             <a:extLst xmlns:a="http://schemas.openxmlformats.org/drawingml/2006/main">
               <a:ext uri="{FF2B5EF4-FFF2-40B4-BE49-F238E27FC236}">
-                <a16:creationId xmlns:a16="http://schemas.microsoft.com/office/drawing/2014/main" id="{86A323AA-2C9A-45DA-83D8-6C6A8DA7B50E}"/>
+                <a16:creationId xmlns:a16="http://schemas.microsoft.com/office/drawing/2014/main" id="{F89513E7-6408-426F-99E2-2FEC96673655}"/>
               </a:ext>
             </a:extLst>
           </p:cNvPr>
@@ -29893,7 +29891,7 @@
           <p:cNvPr id="26" name="">
             <a:extLst xmlns:a="http://schemas.openxmlformats.org/drawingml/2006/main">
               <a:ext uri="{FF2B5EF4-FFF2-40B4-BE49-F238E27FC236}">
-                <a16:creationId xmlns:a16="http://schemas.microsoft.com/office/drawing/2014/main" id="{541DF104-344C-468B-B962-7776A6A2CE1F}"/>
+                <a16:creationId xmlns:a16="http://schemas.microsoft.com/office/drawing/2014/main" id="{1A50591D-65D8-451A-8387-D87125989636}"/>
               </a:ext>
             </a:extLst>
           </p:cNvPr>
@@ -29957,7 +29955,7 @@
           <p:cNvPr id="27" name="">
             <a:extLst xmlns:a="http://schemas.openxmlformats.org/drawingml/2006/main">
               <a:ext uri="{FF2B5EF4-FFF2-40B4-BE49-F238E27FC236}">
-                <a16:creationId xmlns:a16="http://schemas.microsoft.com/office/drawing/2014/main" id="{51B53E21-EB5A-461E-B08A-EE347AEDBB92}"/>
+                <a16:creationId xmlns:a16="http://schemas.microsoft.com/office/drawing/2014/main" id="{20B6F60C-3E65-47B9-A315-6DA40C52D577}"/>
               </a:ext>
             </a:extLst>
           </p:cNvPr>
@@ -30021,7 +30019,7 @@
           <p:cNvPr id="28" name="">
             <a:extLst xmlns:a="http://schemas.openxmlformats.org/drawingml/2006/main">
               <a:ext uri="{FF2B5EF4-FFF2-40B4-BE49-F238E27FC236}">
-                <a16:creationId xmlns:a16="http://schemas.microsoft.com/office/drawing/2014/main" id="{D4B9D181-B6CE-4A73-A57F-A6F06D4BEBE4}"/>
+                <a16:creationId xmlns:a16="http://schemas.microsoft.com/office/drawing/2014/main" id="{49FA1CB1-875C-42A8-874D-085B76532CC2}"/>
               </a:ext>
             </a:extLst>
           </p:cNvPr>
@@ -30054,7 +30052,7 @@
           <p:cNvPr id="29" name="">
             <a:extLst xmlns:a="http://schemas.openxmlformats.org/drawingml/2006/main">
               <a:ext uri="{FF2B5EF4-FFF2-40B4-BE49-F238E27FC236}">
-                <a16:creationId xmlns:a16="http://schemas.microsoft.com/office/drawing/2014/main" id="{675B127D-1CBB-457C-8777-21E5ACF1D880}"/>
+                <a16:creationId xmlns:a16="http://schemas.microsoft.com/office/drawing/2014/main" id="{97237B8A-4E78-407F-A39F-8428D9AB87AF}"/>
               </a:ext>
             </a:extLst>
           </p:cNvPr>
@@ -30118,7 +30116,7 @@
           <p:cNvPr id="30" name="">
             <a:extLst xmlns:a="http://schemas.openxmlformats.org/drawingml/2006/main">
               <a:ext uri="{FF2B5EF4-FFF2-40B4-BE49-F238E27FC236}">
-                <a16:creationId xmlns:a16="http://schemas.microsoft.com/office/drawing/2014/main" id="{23965C4D-FD2D-4E8A-903D-C3083ED8E9BE}"/>
+                <a16:creationId xmlns:a16="http://schemas.microsoft.com/office/drawing/2014/main" id="{3F90D3A2-CF40-41B3-8123-4630D282333C}"/>
               </a:ext>
             </a:extLst>
           </p:cNvPr>
@@ -30182,7 +30180,7 @@
           <p:cNvPr id="31" name="">
             <a:extLst xmlns:a="http://schemas.openxmlformats.org/drawingml/2006/main">
               <a:ext uri="{FF2B5EF4-FFF2-40B4-BE49-F238E27FC236}">
-                <a16:creationId xmlns:a16="http://schemas.microsoft.com/office/drawing/2014/main" id="{035D5C45-B7AE-48CC-A727-645C1BDAE294}"/>
+                <a16:creationId xmlns:a16="http://schemas.microsoft.com/office/drawing/2014/main" id="{D82BBB0C-F71F-4B7D-BC4A-57B0CA01683E}"/>
               </a:ext>
             </a:extLst>
           </p:cNvPr>
@@ -30217,7 +30215,7 @@
           <p:cNvPr id="32" name="">
             <a:extLst xmlns:a="http://schemas.openxmlformats.org/drawingml/2006/main">
               <a:ext uri="{FF2B5EF4-FFF2-40B4-BE49-F238E27FC236}">
-                <a16:creationId xmlns:a16="http://schemas.microsoft.com/office/drawing/2014/main" id="{76194B3A-EE33-4F15-B3C8-2389E172EB32}"/>
+                <a16:creationId xmlns:a16="http://schemas.microsoft.com/office/drawing/2014/main" id="{2D042C5F-D24D-4C67-B13E-B67B6FCDFB57}"/>
               </a:ext>
             </a:extLst>
           </p:cNvPr>
@@ -30281,7 +30279,7 @@
           <p:cNvPr id="33" name="">
             <a:extLst xmlns:a="http://schemas.openxmlformats.org/drawingml/2006/main">
               <a:ext uri="{FF2B5EF4-FFF2-40B4-BE49-F238E27FC236}">
-                <a16:creationId xmlns:a16="http://schemas.microsoft.com/office/drawing/2014/main" id="{C627170B-C67C-4799-869F-0B14F75A3889}"/>
+                <a16:creationId xmlns:a16="http://schemas.microsoft.com/office/drawing/2014/main" id="{30D2E6CC-F3D1-45C9-B220-D04754A2AECB}"/>
               </a:ext>
             </a:extLst>
           </p:cNvPr>
@@ -30345,7 +30343,7 @@
           <p:cNvPr id="34" name="">
             <a:extLst xmlns:a="http://schemas.openxmlformats.org/drawingml/2006/main">
               <a:ext uri="{FF2B5EF4-FFF2-40B4-BE49-F238E27FC236}">
-                <a16:creationId xmlns:a16="http://schemas.microsoft.com/office/drawing/2014/main" id="{79512905-89AE-475B-B34D-ACAEFD9F5533}"/>
+                <a16:creationId xmlns:a16="http://schemas.microsoft.com/office/drawing/2014/main" id="{340C7BD7-A4D7-44AF-A56E-25B1311294B6}"/>
               </a:ext>
             </a:extLst>
           </p:cNvPr>
@@ -30407,7 +30405,7 @@
     </p:spTree>
     <p:extLst>
       <p:ext uri="{BB962C8B-B14F-4D97-AF65-F5344CB8AC3E}">
-        <p14:creationId xmlns:p14="http://schemas.microsoft.com/office/powerpoint/2010/main" val="234359251"/>
+        <p14:creationId xmlns:p14="http://schemas.microsoft.com/office/powerpoint/2010/main" val="1762388098"/>
       </p:ext>
     </p:extLst>
   </p:cSld>
@@ -30431,7 +30429,7 @@
           <p:cNvPr id="1" name="">
             <a:extLst xmlns:a="http://schemas.openxmlformats.org/drawingml/2006/main">
               <a:ext uri="{FF2B5EF4-FFF2-40B4-BE49-F238E27FC236}">
-                <a16:creationId xmlns:a16="http://schemas.microsoft.com/office/drawing/2014/main" id="{28F9FA5B-C4EC-44C7-ACE0-3325A58BED6C}"/>
+                <a16:creationId xmlns:a16="http://schemas.microsoft.com/office/drawing/2014/main" id="{9540FDE6-0F8C-42D9-8C42-9F2A7BFCC537}"/>
               </a:ext>
             </a:extLst>
           </p:cNvPr>
@@ -30466,7 +30464,7 @@
           <p:cNvPr id="2" name="">
             <a:extLst xmlns:a="http://schemas.openxmlformats.org/drawingml/2006/main">
               <a:ext uri="{FF2B5EF4-FFF2-40B4-BE49-F238E27FC236}">
-                <a16:creationId xmlns:a16="http://schemas.microsoft.com/office/drawing/2014/main" id="{7122E54C-F64D-4F7E-B6D1-A3481DB3014C}"/>
+                <a16:creationId xmlns:a16="http://schemas.microsoft.com/office/drawing/2014/main" id="{B796C087-A7CC-4CFF-A7F1-96D36E3E53E2}"/>
               </a:ext>
             </a:extLst>
           </p:cNvPr>
@@ -30501,7 +30499,7 @@
           <p:cNvPr id="3" name="">
             <a:extLst xmlns:a="http://schemas.openxmlformats.org/drawingml/2006/main">
               <a:ext uri="{FF2B5EF4-FFF2-40B4-BE49-F238E27FC236}">
-                <a16:creationId xmlns:a16="http://schemas.microsoft.com/office/drawing/2014/main" id="{78AD0371-F10A-4FFE-A590-FEC71A43D585}"/>
+                <a16:creationId xmlns:a16="http://schemas.microsoft.com/office/drawing/2014/main" id="{137943C8-0043-40A9-B854-8DE76E986279}"/>
               </a:ext>
             </a:extLst>
           </p:cNvPr>
@@ -30536,7 +30534,7 @@
           <p:cNvPr id="4" name="kicker-03-marker">
             <a:extLst xmlns:a="http://schemas.openxmlformats.org/drawingml/2006/main">
               <a:ext uri="{FF2B5EF4-FFF2-40B4-BE49-F238E27FC236}">
-                <a16:creationId xmlns:a16="http://schemas.microsoft.com/office/drawing/2014/main" id="{E1B07691-D217-4054-BC2C-04BD5179050B}"/>
+                <a16:creationId xmlns:a16="http://schemas.microsoft.com/office/drawing/2014/main" id="{476CE17E-B599-42A3-919C-37D0C1A76FF1}"/>
               </a:ext>
             </a:extLst>
           </p:cNvPr>
@@ -30571,7 +30569,7 @@
           <p:cNvPr id="5" name="kicker-03-label">
             <a:extLst xmlns:a="http://schemas.openxmlformats.org/drawingml/2006/main">
               <a:ext uri="{FF2B5EF4-FFF2-40B4-BE49-F238E27FC236}">
-                <a16:creationId xmlns:a16="http://schemas.microsoft.com/office/drawing/2014/main" id="{96FB7E30-220B-4F93-85BD-2E03AD10C41B}"/>
+                <a16:creationId xmlns:a16="http://schemas.microsoft.com/office/drawing/2014/main" id="{5329E26F-746E-4F47-8D1A-93A69E2DF1FB}"/>
               </a:ext>
             </a:extLst>
           </p:cNvPr>
@@ -30635,7 +30633,7 @@
           <p:cNvPr id="6" name="">
             <a:extLst xmlns:a="http://schemas.openxmlformats.org/drawingml/2006/main">
               <a:ext uri="{FF2B5EF4-FFF2-40B4-BE49-F238E27FC236}">
-                <a16:creationId xmlns:a16="http://schemas.microsoft.com/office/drawing/2014/main" id="{F164A555-8B7D-4BE5-8548-536015D691BF}"/>
+                <a16:creationId xmlns:a16="http://schemas.microsoft.com/office/drawing/2014/main" id="{24E54832-3D83-4C9B-9429-D832450F7EEF}"/>
               </a:ext>
             </a:extLst>
           </p:cNvPr>
@@ -30699,7 +30697,7 @@
           <p:cNvPr id="7" name="">
             <a:extLst xmlns:a="http://schemas.openxmlformats.org/drawingml/2006/main">
               <a:ext uri="{FF2B5EF4-FFF2-40B4-BE49-F238E27FC236}">
-                <a16:creationId xmlns:a16="http://schemas.microsoft.com/office/drawing/2014/main" id="{6687A59D-87F8-4620-8A25-B5AB7274CECC}"/>
+                <a16:creationId xmlns:a16="http://schemas.microsoft.com/office/drawing/2014/main" id="{AAD49B7B-19EA-47BE-A7FD-C189AE832576}"/>
               </a:ext>
             </a:extLst>
           </p:cNvPr>
@@ -30763,7 +30761,7 @@
           <p:cNvPr id="8" name="">
             <a:extLst xmlns:a="http://schemas.openxmlformats.org/drawingml/2006/main">
               <a:ext uri="{FF2B5EF4-FFF2-40B4-BE49-F238E27FC236}">
-                <a16:creationId xmlns:a16="http://schemas.microsoft.com/office/drawing/2014/main" id="{CF7D7CB3-27B5-4A07-8404-7BD26BCD45DE}"/>
+                <a16:creationId xmlns:a16="http://schemas.microsoft.com/office/drawing/2014/main" id="{4849E453-DAD7-42FC-B468-753E43AD8CD4}"/>
               </a:ext>
             </a:extLst>
           </p:cNvPr>
@@ -30798,7 +30796,7 @@
           <p:cNvPr id="9" name="">
             <a:extLst xmlns:a="http://schemas.openxmlformats.org/drawingml/2006/main">
               <a:ext uri="{FF2B5EF4-FFF2-40B4-BE49-F238E27FC236}">
-                <a16:creationId xmlns:a16="http://schemas.microsoft.com/office/drawing/2014/main" id="{F598A22C-4168-4C14-B472-9A07AA86B5AA}"/>
+                <a16:creationId xmlns:a16="http://schemas.microsoft.com/office/drawing/2014/main" id="{D7FEAA85-A3AD-498D-BE2F-967C532900F9}"/>
               </a:ext>
             </a:extLst>
           </p:cNvPr>
@@ -30862,7 +30860,7 @@
           <p:cNvPr id="10" name="">
             <a:extLst xmlns:a="http://schemas.openxmlformats.org/drawingml/2006/main">
               <a:ext uri="{FF2B5EF4-FFF2-40B4-BE49-F238E27FC236}">
-                <a16:creationId xmlns:a16="http://schemas.microsoft.com/office/drawing/2014/main" id="{B573D623-4477-4C15-B551-732BAFE835F7}"/>
+                <a16:creationId xmlns:a16="http://schemas.microsoft.com/office/drawing/2014/main" id="{BE3400B0-0F8D-460E-8077-9E07DBD453C4}"/>
               </a:ext>
             </a:extLst>
           </p:cNvPr>
@@ -30926,7 +30924,7 @@
           <p:cNvPr id="11" name="">
             <a:extLst xmlns:a="http://schemas.openxmlformats.org/drawingml/2006/main">
               <a:ext uri="{FF2B5EF4-FFF2-40B4-BE49-F238E27FC236}">
-                <a16:creationId xmlns:a16="http://schemas.microsoft.com/office/drawing/2014/main" id="{C338E436-5AC1-4744-A6F9-8D4B4E641DE5}"/>
+                <a16:creationId xmlns:a16="http://schemas.microsoft.com/office/drawing/2014/main" id="{548064D4-D68D-452E-A1DB-C07F21333935}"/>
               </a:ext>
             </a:extLst>
           </p:cNvPr>
@@ -30990,7 +30988,7 @@
           <p:cNvPr id="12" name="">
             <a:extLst xmlns:a="http://schemas.openxmlformats.org/drawingml/2006/main">
               <a:ext uri="{FF2B5EF4-FFF2-40B4-BE49-F238E27FC236}">
-                <a16:creationId xmlns:a16="http://schemas.microsoft.com/office/drawing/2014/main" id="{E5AD6A77-32F9-4ED9-B918-6978D04D41F7}"/>
+                <a16:creationId xmlns:a16="http://schemas.microsoft.com/office/drawing/2014/main" id="{C9B0C4AF-58C2-4AD1-83DE-A2F23429C859}"/>
               </a:ext>
             </a:extLst>
           </p:cNvPr>
@@ -31025,7 +31023,7 @@
           <p:cNvPr id="13" name="">
             <a:extLst xmlns:a="http://schemas.openxmlformats.org/drawingml/2006/main">
               <a:ext uri="{FF2B5EF4-FFF2-40B4-BE49-F238E27FC236}">
-                <a16:creationId xmlns:a16="http://schemas.microsoft.com/office/drawing/2014/main" id="{6F1B5295-284C-45F2-B223-DC7B2CE888B2}"/>
+                <a16:creationId xmlns:a16="http://schemas.microsoft.com/office/drawing/2014/main" id="{099D2970-B9E5-46C1-B069-3A40E7563863}"/>
               </a:ext>
             </a:extLst>
           </p:cNvPr>
@@ -31058,7 +31056,7 @@
           <p:cNvPr id="14" name="">
             <a:extLst xmlns:a="http://schemas.openxmlformats.org/drawingml/2006/main">
               <a:ext uri="{FF2B5EF4-FFF2-40B4-BE49-F238E27FC236}">
-                <a16:creationId xmlns:a16="http://schemas.microsoft.com/office/drawing/2014/main" id="{E4D90C39-4F87-40A4-837A-BD8A2B499903}"/>
+                <a16:creationId xmlns:a16="http://schemas.microsoft.com/office/drawing/2014/main" id="{1224EB4B-3FA7-4F8F-BFDB-201058E9399D}"/>
               </a:ext>
             </a:extLst>
           </p:cNvPr>
@@ -31093,7 +31091,7 @@
           <p:cNvPr id="15" name="">
             <a:extLst xmlns:a="http://schemas.openxmlformats.org/drawingml/2006/main">
               <a:ext uri="{FF2B5EF4-FFF2-40B4-BE49-F238E27FC236}">
-                <a16:creationId xmlns:a16="http://schemas.microsoft.com/office/drawing/2014/main" id="{A87569BB-B1AF-4BED-BBCF-E17415A1E4FA}"/>
+                <a16:creationId xmlns:a16="http://schemas.microsoft.com/office/drawing/2014/main" id="{EFE20B36-B244-4490-812B-E77C8226D166}"/>
               </a:ext>
             </a:extLst>
           </p:cNvPr>
@@ -31157,7 +31155,7 @@
           <p:cNvPr id="16" name="">
             <a:extLst xmlns:a="http://schemas.openxmlformats.org/drawingml/2006/main">
               <a:ext uri="{FF2B5EF4-FFF2-40B4-BE49-F238E27FC236}">
-                <a16:creationId xmlns:a16="http://schemas.microsoft.com/office/drawing/2014/main" id="{975BBEEB-3B36-4ECB-AE67-4FA20F30100A}"/>
+                <a16:creationId xmlns:a16="http://schemas.microsoft.com/office/drawing/2014/main" id="{F2483C35-43CB-438A-A659-656EE80AECEE}"/>
               </a:ext>
             </a:extLst>
           </p:cNvPr>
@@ -31190,7 +31188,7 @@
           <p:cNvPr id="17" name="">
             <a:extLst xmlns:a="http://schemas.openxmlformats.org/drawingml/2006/main">
               <a:ext uri="{FF2B5EF4-FFF2-40B4-BE49-F238E27FC236}">
-                <a16:creationId xmlns:a16="http://schemas.microsoft.com/office/drawing/2014/main" id="{0981EA1F-C1F7-4DE3-8CF5-92D220C956A1}"/>
+                <a16:creationId xmlns:a16="http://schemas.microsoft.com/office/drawing/2014/main" id="{41BD6219-BC67-4B24-A96E-1DA7939D72F6}"/>
               </a:ext>
             </a:extLst>
           </p:cNvPr>
@@ -31254,7 +31252,7 @@
           <p:cNvPr id="18" name="">
             <a:extLst xmlns:a="http://schemas.openxmlformats.org/drawingml/2006/main">
               <a:ext uri="{FF2B5EF4-FFF2-40B4-BE49-F238E27FC236}">
-                <a16:creationId xmlns:a16="http://schemas.microsoft.com/office/drawing/2014/main" id="{87DAF28B-D849-4D26-AD86-0D6BED61B734}"/>
+                <a16:creationId xmlns:a16="http://schemas.microsoft.com/office/drawing/2014/main" id="{5F80FBDA-AD6B-411A-85A6-707EA442396B}"/>
               </a:ext>
             </a:extLst>
           </p:cNvPr>
@@ -31318,7 +31316,7 @@
           <p:cNvPr id="19" name="">
             <a:extLst xmlns:a="http://schemas.openxmlformats.org/drawingml/2006/main">
               <a:ext uri="{FF2B5EF4-FFF2-40B4-BE49-F238E27FC236}">
-                <a16:creationId xmlns:a16="http://schemas.microsoft.com/office/drawing/2014/main" id="{F712B0F5-235B-4F12-B6A3-17C18007130C}"/>
+                <a16:creationId xmlns:a16="http://schemas.microsoft.com/office/drawing/2014/main" id="{DAD2338E-AD03-40E7-953E-7540E7F8CC4C}"/>
               </a:ext>
             </a:extLst>
           </p:cNvPr>
@@ -31351,7 +31349,7 @@
           <p:cNvPr id="20" name="">
             <a:extLst xmlns:a="http://schemas.openxmlformats.org/drawingml/2006/main">
               <a:ext uri="{FF2B5EF4-FFF2-40B4-BE49-F238E27FC236}">
-                <a16:creationId xmlns:a16="http://schemas.microsoft.com/office/drawing/2014/main" id="{074012C4-8ED7-44BC-B4B1-FB59AC582CED}"/>
+                <a16:creationId xmlns:a16="http://schemas.microsoft.com/office/drawing/2014/main" id="{F87C0786-6C61-4969-BCC5-FF8F2AEE91BC}"/>
               </a:ext>
             </a:extLst>
           </p:cNvPr>
@@ -31415,7 +31413,7 @@
           <p:cNvPr id="21" name="">
             <a:extLst xmlns:a="http://schemas.openxmlformats.org/drawingml/2006/main">
               <a:ext uri="{FF2B5EF4-FFF2-40B4-BE49-F238E27FC236}">
-                <a16:creationId xmlns:a16="http://schemas.microsoft.com/office/drawing/2014/main" id="{42D42F47-4A5F-4907-87C2-994D5A8AA461}"/>
+                <a16:creationId xmlns:a16="http://schemas.microsoft.com/office/drawing/2014/main" id="{913BEF92-2286-48FA-BA01-A474F8EC81A4}"/>
               </a:ext>
             </a:extLst>
           </p:cNvPr>
@@ -31479,7 +31477,7 @@
           <p:cNvPr id="22" name="">
             <a:extLst xmlns:a="http://schemas.openxmlformats.org/drawingml/2006/main">
               <a:ext uri="{FF2B5EF4-FFF2-40B4-BE49-F238E27FC236}">
-                <a16:creationId xmlns:a16="http://schemas.microsoft.com/office/drawing/2014/main" id="{14437D30-80FF-424E-8B87-1B3C4718E420}"/>
+                <a16:creationId xmlns:a16="http://schemas.microsoft.com/office/drawing/2014/main" id="{B694F5AE-72DE-44CE-8424-A7630A6D1110}"/>
               </a:ext>
             </a:extLst>
           </p:cNvPr>
@@ -31512,7 +31510,7 @@
           <p:cNvPr id="23" name="">
             <a:extLst xmlns:a="http://schemas.openxmlformats.org/drawingml/2006/main">
               <a:ext uri="{FF2B5EF4-FFF2-40B4-BE49-F238E27FC236}">
-                <a16:creationId xmlns:a16="http://schemas.microsoft.com/office/drawing/2014/main" id="{0DD54663-309C-474D-B2BE-22BD238EB868}"/>
+                <a16:creationId xmlns:a16="http://schemas.microsoft.com/office/drawing/2014/main" id="{59744786-E9D6-4196-B369-F046288DF919}"/>
               </a:ext>
             </a:extLst>
           </p:cNvPr>
@@ -31576,7 +31574,7 @@
           <p:cNvPr id="24" name="">
             <a:extLst xmlns:a="http://schemas.openxmlformats.org/drawingml/2006/main">
               <a:ext uri="{FF2B5EF4-FFF2-40B4-BE49-F238E27FC236}">
-                <a16:creationId xmlns:a16="http://schemas.microsoft.com/office/drawing/2014/main" id="{86D1AE6C-3A6D-4222-906F-BD22071681B3}"/>
+                <a16:creationId xmlns:a16="http://schemas.microsoft.com/office/drawing/2014/main" id="{EE948958-4B96-4549-8F0C-0906A2CED1F4}"/>
               </a:ext>
             </a:extLst>
           </p:cNvPr>
@@ -31640,7 +31638,7 @@
           <p:cNvPr id="25" name="">
             <a:extLst xmlns:a="http://schemas.openxmlformats.org/drawingml/2006/main">
               <a:ext uri="{FF2B5EF4-FFF2-40B4-BE49-F238E27FC236}">
-                <a16:creationId xmlns:a16="http://schemas.microsoft.com/office/drawing/2014/main" id="{74A49F2C-CF5E-4089-9CF8-6B864BE4951C}"/>
+                <a16:creationId xmlns:a16="http://schemas.microsoft.com/office/drawing/2014/main" id="{32C9FFAD-BA26-4894-B680-5DD9B96D697B}"/>
               </a:ext>
             </a:extLst>
           </p:cNvPr>
@@ -31675,7 +31673,7 @@
           <p:cNvPr id="26" name="">
             <a:extLst xmlns:a="http://schemas.openxmlformats.org/drawingml/2006/main">
               <a:ext uri="{FF2B5EF4-FFF2-40B4-BE49-F238E27FC236}">
-                <a16:creationId xmlns:a16="http://schemas.microsoft.com/office/drawing/2014/main" id="{969577F3-466F-46A0-BCCA-9F9A76938CEA}"/>
+                <a16:creationId xmlns:a16="http://schemas.microsoft.com/office/drawing/2014/main" id="{BDADE0E7-198A-4CE1-BFDC-0D953204F8F1}"/>
               </a:ext>
             </a:extLst>
           </p:cNvPr>
@@ -31739,7 +31737,7 @@
           <p:cNvPr id="27" name="">
             <a:extLst xmlns:a="http://schemas.openxmlformats.org/drawingml/2006/main">
               <a:ext uri="{FF2B5EF4-FFF2-40B4-BE49-F238E27FC236}">
-                <a16:creationId xmlns:a16="http://schemas.microsoft.com/office/drawing/2014/main" id="{E8446BFE-A4D2-4ACC-B4DC-A7BCB24CBA9F}"/>
+                <a16:creationId xmlns:a16="http://schemas.microsoft.com/office/drawing/2014/main" id="{0582FD13-7742-4737-BA05-3BB0A48AD103}"/>
               </a:ext>
             </a:extLst>
           </p:cNvPr>
@@ -31772,7 +31770,7 @@
           <p:cNvPr id="28" name="">
             <a:extLst xmlns:a="http://schemas.openxmlformats.org/drawingml/2006/main">
               <a:ext uri="{FF2B5EF4-FFF2-40B4-BE49-F238E27FC236}">
-                <a16:creationId xmlns:a16="http://schemas.microsoft.com/office/drawing/2014/main" id="{74BB2729-EE4A-4F96-9B3B-F74AE60AF857}"/>
+                <a16:creationId xmlns:a16="http://schemas.microsoft.com/office/drawing/2014/main" id="{1EE48210-2252-4F57-BDE2-ADBA910FA871}"/>
               </a:ext>
             </a:extLst>
           </p:cNvPr>
@@ -31836,7 +31834,7 @@
           <p:cNvPr id="29" name="">
             <a:extLst xmlns:a="http://schemas.openxmlformats.org/drawingml/2006/main">
               <a:ext uri="{FF2B5EF4-FFF2-40B4-BE49-F238E27FC236}">
-                <a16:creationId xmlns:a16="http://schemas.microsoft.com/office/drawing/2014/main" id="{0F9D2CE8-DDE9-4CB0-BF22-8D1FCB0B2F01}"/>
+                <a16:creationId xmlns:a16="http://schemas.microsoft.com/office/drawing/2014/main" id="{DE600D44-1EFE-4735-99B8-21DB1E54520C}"/>
               </a:ext>
             </a:extLst>
           </p:cNvPr>
@@ -31900,7 +31898,7 @@
           <p:cNvPr id="30" name="">
             <a:extLst xmlns:a="http://schemas.openxmlformats.org/drawingml/2006/main">
               <a:ext uri="{FF2B5EF4-FFF2-40B4-BE49-F238E27FC236}">
-                <a16:creationId xmlns:a16="http://schemas.microsoft.com/office/drawing/2014/main" id="{4C69F42D-46B1-4CCC-984F-1E909830C595}"/>
+                <a16:creationId xmlns:a16="http://schemas.microsoft.com/office/drawing/2014/main" id="{51A73C94-ECD3-4029-A2B0-4A3E52425654}"/>
               </a:ext>
             </a:extLst>
           </p:cNvPr>
@@ -31933,7 +31931,7 @@
           <p:cNvPr id="31" name="">
             <a:extLst xmlns:a="http://schemas.openxmlformats.org/drawingml/2006/main">
               <a:ext uri="{FF2B5EF4-FFF2-40B4-BE49-F238E27FC236}">
-                <a16:creationId xmlns:a16="http://schemas.microsoft.com/office/drawing/2014/main" id="{1A3159F6-4849-43C2-9B9E-85DFD74BF8D5}"/>
+                <a16:creationId xmlns:a16="http://schemas.microsoft.com/office/drawing/2014/main" id="{DC5D6E2D-55E9-490D-AA13-9829FD3256A0}"/>
               </a:ext>
             </a:extLst>
           </p:cNvPr>
@@ -31997,7 +31995,7 @@
           <p:cNvPr id="32" name="">
             <a:extLst xmlns:a="http://schemas.openxmlformats.org/drawingml/2006/main">
               <a:ext uri="{FF2B5EF4-FFF2-40B4-BE49-F238E27FC236}">
-                <a16:creationId xmlns:a16="http://schemas.microsoft.com/office/drawing/2014/main" id="{F9F744DF-EC21-4366-AA9A-875B43A5A238}"/>
+                <a16:creationId xmlns:a16="http://schemas.microsoft.com/office/drawing/2014/main" id="{B41DBBB5-E9B3-47E6-9FE5-92156CDFB636}"/>
               </a:ext>
             </a:extLst>
           </p:cNvPr>
@@ -32061,7 +32059,7 @@
           <p:cNvPr id="33" name="">
             <a:extLst xmlns:a="http://schemas.openxmlformats.org/drawingml/2006/main">
               <a:ext uri="{FF2B5EF4-FFF2-40B4-BE49-F238E27FC236}">
-                <a16:creationId xmlns:a16="http://schemas.microsoft.com/office/drawing/2014/main" id="{ECB5C310-DBCE-479F-A2F8-01F2ADB9B0AF}"/>
+                <a16:creationId xmlns:a16="http://schemas.microsoft.com/office/drawing/2014/main" id="{B559D8F0-FE08-4FB2-9898-06C0A7C39599}"/>
               </a:ext>
             </a:extLst>
           </p:cNvPr>
@@ -32094,7 +32092,7 @@
           <p:cNvPr id="34" name="">
             <a:extLst xmlns:a="http://schemas.openxmlformats.org/drawingml/2006/main">
               <a:ext uri="{FF2B5EF4-FFF2-40B4-BE49-F238E27FC236}">
-                <a16:creationId xmlns:a16="http://schemas.microsoft.com/office/drawing/2014/main" id="{B49B19F7-05EF-41B0-9A32-7F1DBD528552}"/>
+                <a16:creationId xmlns:a16="http://schemas.microsoft.com/office/drawing/2014/main" id="{8DE4CA1B-992A-4D2D-A2E3-7B39C4C78225}"/>
               </a:ext>
             </a:extLst>
           </p:cNvPr>
@@ -32158,7 +32156,7 @@
           <p:cNvPr id="35" name="">
             <a:extLst xmlns:a="http://schemas.openxmlformats.org/drawingml/2006/main">
               <a:ext uri="{FF2B5EF4-FFF2-40B4-BE49-F238E27FC236}">
-                <a16:creationId xmlns:a16="http://schemas.microsoft.com/office/drawing/2014/main" id="{4D5F0AEA-5378-4356-9A4D-A93745D649C4}"/>
+                <a16:creationId xmlns:a16="http://schemas.microsoft.com/office/drawing/2014/main" id="{2BF40083-7E0C-4D61-931D-D9B6DC1AD2B9}"/>
               </a:ext>
             </a:extLst>
           </p:cNvPr>
@@ -32222,7 +32220,7 @@
           <p:cNvPr id="36" name="">
             <a:extLst xmlns:a="http://schemas.openxmlformats.org/drawingml/2006/main">
               <a:ext uri="{FF2B5EF4-FFF2-40B4-BE49-F238E27FC236}">
-                <a16:creationId xmlns:a16="http://schemas.microsoft.com/office/drawing/2014/main" id="{75AA34F9-9EAB-424A-9CFB-85F2D6D7ABD8}"/>
+                <a16:creationId xmlns:a16="http://schemas.microsoft.com/office/drawing/2014/main" id="{187631A8-6D37-403F-A311-427EE70B85FC}"/>
               </a:ext>
             </a:extLst>
           </p:cNvPr>
@@ -32257,7 +32255,7 @@
           <p:cNvPr id="37" name="">
             <a:extLst xmlns:a="http://schemas.openxmlformats.org/drawingml/2006/main">
               <a:ext uri="{FF2B5EF4-FFF2-40B4-BE49-F238E27FC236}">
-                <a16:creationId xmlns:a16="http://schemas.microsoft.com/office/drawing/2014/main" id="{49B579AC-EC10-4A71-9C46-44FBF66C564B}"/>
+                <a16:creationId xmlns:a16="http://schemas.microsoft.com/office/drawing/2014/main" id="{6F09A9AC-9C8E-48C7-9C69-CAB0AE896E97}"/>
               </a:ext>
             </a:extLst>
           </p:cNvPr>
@@ -32321,7 +32319,7 @@
           <p:cNvPr id="38" name="">
             <a:extLst xmlns:a="http://schemas.openxmlformats.org/drawingml/2006/main">
               <a:ext uri="{FF2B5EF4-FFF2-40B4-BE49-F238E27FC236}">
-                <a16:creationId xmlns:a16="http://schemas.microsoft.com/office/drawing/2014/main" id="{7EB16F9A-88E9-460F-A45F-311726687103}"/>
+                <a16:creationId xmlns:a16="http://schemas.microsoft.com/office/drawing/2014/main" id="{7828766C-C11F-4201-A09B-7A7B278696D7}"/>
               </a:ext>
             </a:extLst>
           </p:cNvPr>
@@ -32385,7 +32383,7 @@
           <p:cNvPr id="39" name="">
             <a:extLst xmlns:a="http://schemas.openxmlformats.org/drawingml/2006/main">
               <a:ext uri="{FF2B5EF4-FFF2-40B4-BE49-F238E27FC236}">
-                <a16:creationId xmlns:a16="http://schemas.microsoft.com/office/drawing/2014/main" id="{7C146A49-0ABF-4F35-A93B-F14E8F437293}"/>
+                <a16:creationId xmlns:a16="http://schemas.microsoft.com/office/drawing/2014/main" id="{E74908EF-A8E6-488C-9329-90E6E104DF47}"/>
               </a:ext>
             </a:extLst>
           </p:cNvPr>
@@ -32449,7 +32447,7 @@
           <p:cNvPr id="40" name="">
             <a:extLst xmlns:a="http://schemas.openxmlformats.org/drawingml/2006/main">
               <a:ext uri="{FF2B5EF4-FFF2-40B4-BE49-F238E27FC236}">
-                <a16:creationId xmlns:a16="http://schemas.microsoft.com/office/drawing/2014/main" id="{3BBB8894-E72C-49DA-AFAD-E346D14CCD42}"/>
+                <a16:creationId xmlns:a16="http://schemas.microsoft.com/office/drawing/2014/main" id="{291B270E-D81D-490D-AF00-BC5F205B1200}"/>
               </a:ext>
             </a:extLst>
           </p:cNvPr>
@@ -32484,7 +32482,7 @@
           <p:cNvPr id="41" name="">
             <a:extLst xmlns:a="http://schemas.openxmlformats.org/drawingml/2006/main">
               <a:ext uri="{FF2B5EF4-FFF2-40B4-BE49-F238E27FC236}">
-                <a16:creationId xmlns:a16="http://schemas.microsoft.com/office/drawing/2014/main" id="{78376738-3CBE-412E-9B3A-93CF2839A58F}"/>
+                <a16:creationId xmlns:a16="http://schemas.microsoft.com/office/drawing/2014/main" id="{6527AEAF-6EAC-40E8-93E1-78F282CC975C}"/>
               </a:ext>
             </a:extLst>
           </p:cNvPr>
@@ -32519,7 +32517,7 @@
           <p:cNvPr id="42" name="">
             <a:extLst xmlns:a="http://schemas.openxmlformats.org/drawingml/2006/main">
               <a:ext uri="{FF2B5EF4-FFF2-40B4-BE49-F238E27FC236}">
-                <a16:creationId xmlns:a16="http://schemas.microsoft.com/office/drawing/2014/main" id="{FB6C18BF-62A6-4161-86E1-CAA6B6620919}"/>
+                <a16:creationId xmlns:a16="http://schemas.microsoft.com/office/drawing/2014/main" id="{6D1D63B9-1757-4D38-9C41-C693DD9B77AD}"/>
               </a:ext>
             </a:extLst>
           </p:cNvPr>
@@ -32554,7 +32552,7 @@
           <p:cNvPr id="43" name="kicker-03-marker">
             <a:extLst xmlns:a="http://schemas.openxmlformats.org/drawingml/2006/main">
               <a:ext uri="{FF2B5EF4-FFF2-40B4-BE49-F238E27FC236}">
-                <a16:creationId xmlns:a16="http://schemas.microsoft.com/office/drawing/2014/main" id="{E0B3640D-EA66-429F-877A-028786C812C9}"/>
+                <a16:creationId xmlns:a16="http://schemas.microsoft.com/office/drawing/2014/main" id="{B8E0BBDD-75F5-46F1-9393-177D3334F684}"/>
               </a:ext>
             </a:extLst>
           </p:cNvPr>
@@ -32589,7 +32587,7 @@
           <p:cNvPr id="44" name="kicker-03-label">
             <a:extLst xmlns:a="http://schemas.openxmlformats.org/drawingml/2006/main">
               <a:ext uri="{FF2B5EF4-FFF2-40B4-BE49-F238E27FC236}">
-                <a16:creationId xmlns:a16="http://schemas.microsoft.com/office/drawing/2014/main" id="{A98974A7-1FD7-4CF5-9460-2201509F6475}"/>
+                <a16:creationId xmlns:a16="http://schemas.microsoft.com/office/drawing/2014/main" id="{FB8A5481-9971-42A6-8E1D-F8072265EFB3}"/>
               </a:ext>
             </a:extLst>
           </p:cNvPr>
@@ -32653,7 +32651,7 @@
           <p:cNvPr id="45" name="">
             <a:extLst xmlns:a="http://schemas.openxmlformats.org/drawingml/2006/main">
               <a:ext uri="{FF2B5EF4-FFF2-40B4-BE49-F238E27FC236}">
-                <a16:creationId xmlns:a16="http://schemas.microsoft.com/office/drawing/2014/main" id="{C0B53B6E-6987-4D52-8FC1-653CAAADF017}"/>
+                <a16:creationId xmlns:a16="http://schemas.microsoft.com/office/drawing/2014/main" id="{AE58CE14-3F63-40D3-8603-1BE1479E7F4B}"/>
               </a:ext>
             </a:extLst>
           </p:cNvPr>
@@ -32717,7 +32715,7 @@
           <p:cNvPr id="46" name="">
             <a:extLst xmlns:a="http://schemas.openxmlformats.org/drawingml/2006/main">
               <a:ext uri="{FF2B5EF4-FFF2-40B4-BE49-F238E27FC236}">
-                <a16:creationId xmlns:a16="http://schemas.microsoft.com/office/drawing/2014/main" id="{ED34D281-6ACD-4FE4-A41E-3F383A1D0010}"/>
+                <a16:creationId xmlns:a16="http://schemas.microsoft.com/office/drawing/2014/main" id="{F2C41E13-1ABE-4197-AADC-039CE59CCEEE}"/>
               </a:ext>
             </a:extLst>
           </p:cNvPr>
@@ -32781,7 +32779,7 @@
           <p:cNvPr id="47" name="">
             <a:extLst xmlns:a="http://schemas.openxmlformats.org/drawingml/2006/main">
               <a:ext uri="{FF2B5EF4-FFF2-40B4-BE49-F238E27FC236}">
-                <a16:creationId xmlns:a16="http://schemas.microsoft.com/office/drawing/2014/main" id="{6670DA10-60DD-4134-BE94-B60C8F1134D7}"/>
+                <a16:creationId xmlns:a16="http://schemas.microsoft.com/office/drawing/2014/main" id="{7E6035EA-8137-4398-8D2C-5F7C1C698C29}"/>
               </a:ext>
             </a:extLst>
           </p:cNvPr>
@@ -32816,7 +32814,7 @@
           <p:cNvPr id="48" name="">
             <a:extLst xmlns:a="http://schemas.openxmlformats.org/drawingml/2006/main">
               <a:ext uri="{FF2B5EF4-FFF2-40B4-BE49-F238E27FC236}">
-                <a16:creationId xmlns:a16="http://schemas.microsoft.com/office/drawing/2014/main" id="{3331E9FB-1E33-4990-8BC4-AD24B35FCC71}"/>
+                <a16:creationId xmlns:a16="http://schemas.microsoft.com/office/drawing/2014/main" id="{69523B20-723D-4261-9F7B-271A24320D6D}"/>
               </a:ext>
             </a:extLst>
           </p:cNvPr>
@@ -32851,7 +32849,7 @@
           <p:cNvPr id="49" name="">
             <a:extLst xmlns:a="http://schemas.openxmlformats.org/drawingml/2006/main">
               <a:ext uri="{FF2B5EF4-FFF2-40B4-BE49-F238E27FC236}">
-                <a16:creationId xmlns:a16="http://schemas.microsoft.com/office/drawing/2014/main" id="{3C3603D4-7E20-41F3-B7EE-6C46766B4A93}"/>
+                <a16:creationId xmlns:a16="http://schemas.microsoft.com/office/drawing/2014/main" id="{932776FD-157A-42D4-B578-574721A18264}"/>
               </a:ext>
             </a:extLst>
           </p:cNvPr>
@@ -32886,7 +32884,7 @@
           <p:cNvPr id="50" name="">
             <a:extLst xmlns:a="http://schemas.openxmlformats.org/drawingml/2006/main">
               <a:ext uri="{FF2B5EF4-FFF2-40B4-BE49-F238E27FC236}">
-                <a16:creationId xmlns:a16="http://schemas.microsoft.com/office/drawing/2014/main" id="{19292427-86A7-4C9D-9D11-36BFFD1A04F6}"/>
+                <a16:creationId xmlns:a16="http://schemas.microsoft.com/office/drawing/2014/main" id="{532CD093-AE26-4E77-886D-9906ABEABC77}"/>
               </a:ext>
             </a:extLst>
           </p:cNvPr>
@@ -32921,7 +32919,7 @@
           <p:cNvPr id="51" name="">
             <a:extLst xmlns:a="http://schemas.openxmlformats.org/drawingml/2006/main">
               <a:ext uri="{FF2B5EF4-FFF2-40B4-BE49-F238E27FC236}">
-                <a16:creationId xmlns:a16="http://schemas.microsoft.com/office/drawing/2014/main" id="{D53FB172-AD39-47B6-B3BA-1B4EBFB95797}"/>
+                <a16:creationId xmlns:a16="http://schemas.microsoft.com/office/drawing/2014/main" id="{0FA9835E-E214-4676-91C9-C0BE7D561B86}"/>
               </a:ext>
             </a:extLst>
           </p:cNvPr>
@@ -32985,7 +32983,7 @@
           <p:cNvPr id="52" name="">
             <a:extLst xmlns:a="http://schemas.openxmlformats.org/drawingml/2006/main">
               <a:ext uri="{FF2B5EF4-FFF2-40B4-BE49-F238E27FC236}">
-                <a16:creationId xmlns:a16="http://schemas.microsoft.com/office/drawing/2014/main" id="{30634441-ABC9-4512-8542-5936E5DE1D3A}"/>
+                <a16:creationId xmlns:a16="http://schemas.microsoft.com/office/drawing/2014/main" id="{69A4FFEB-C971-4593-8ECA-4224B4CD17D8}"/>
               </a:ext>
             </a:extLst>
           </p:cNvPr>
@@ -33049,7 +33047,7 @@
           <p:cNvPr id="53" name="">
             <a:extLst xmlns:a="http://schemas.openxmlformats.org/drawingml/2006/main">
               <a:ext uri="{FF2B5EF4-FFF2-40B4-BE49-F238E27FC236}">
-                <a16:creationId xmlns:a16="http://schemas.microsoft.com/office/drawing/2014/main" id="{AEDD3FE6-02CC-48A0-825D-8183DC6E0732}"/>
+                <a16:creationId xmlns:a16="http://schemas.microsoft.com/office/drawing/2014/main" id="{124A13FE-F864-4A3E-902A-C1658C8AFA81}"/>
               </a:ext>
             </a:extLst>
           </p:cNvPr>
@@ -33111,7 +33109,7 @@
     </p:spTree>
     <p:extLst>
       <p:ext uri="{BB962C8B-B14F-4D97-AF65-F5344CB8AC3E}">
-        <p14:creationId xmlns:p14="http://schemas.microsoft.com/office/powerpoint/2010/main" val="249846478"/>
+        <p14:creationId xmlns:p14="http://schemas.microsoft.com/office/powerpoint/2010/main" val="317248135"/>
       </p:ext>
     </p:extLst>
   </p:cSld>
